--- a/downloads/presentations/modules/lesson-51-ai-for-social-good.pptx
+++ b/downloads/presentations/modules/lesson-51-ai-for-social-good.pptx
@@ -25,9 +25,11 @@
     <p:sldId id="273" r:id="rId19"/>
     <p:sldId id="274" r:id="rId20"/>
     <p:sldId id="275" r:id="rId21"/>
+    <p:sldId id="276" r:id="rId22"/>
+    <p:sldId id="277" r:id="rId23"/>
   </p:sldIdLst>
   <p:notesMasterIdLst>
-    <p:notesMasterId r:id="rId22"/>
+    <p:notesMasterId r:id="rId24"/>
   </p:notesMasterIdLst>
   <p:sldSz cx="12192000" cy="6858000"/>
   <p:notesSz cx="6858000" cy="12192000"/>
@@ -610,10 +612,10 @@
           <a:p>
             <a:r>
               <a:rPr lang="en-US" dirty="0"/>
-              <a:t>Risks, Failure Modes, and Guardrails
-Technology-first design. A tool may be adopted because it is novel rather than because it solves a public health problem. Guardrails include problem-first planning, alternatives analysis, and public value criteria.
-Unequal benefit. AI may help people with strong digital access while excluding others. Guardrails include language access, accessibility, offline options, and human fallback.
-Stigma and surveillance burden. AI may label communities or increase monitoring without support. Guardrails include equity framing, community engagement, and supportive-use restrictions.</a:t>
+              <a:t>Topic Deep Dive
+AI for Social Good begins with problem definition. The problem should be a public health problem, not a technology opportunity. For example, “use a chatbot” is not a problem definition. “Reduce delays in connecting families to local nutrition, housing, transportation, and home visiting resources” is a stronger public health problem definition. Starting with the problem helps agencies avoid technology-driven solutions that do not address root needs.
+Equity by design requires agencies to identify who is included, who is excluded, and who bears risk. This includes reviewing data representativeness, digital access, language access, disability access, rural access, immigration-related concerns, privacy expectations, and historical mistrust. Equity review should shape the use case, data sources, interface, outreach strategy, and evaluation metrics.
+Community engagement should occur before deployment, not only after concerns arise. Affected communities can help identify priorities, unacceptable uses, preferred communication channels, needed safeguards, and measures of success. Engagement does not mean asking communities to approve a predetermined tool. It means allowing community input to change the design, scope, or decision to proceed.</a:t>
             </a:r>
             <a:endParaRPr lang="en-US" dirty="0"/>
           </a:p>
@@ -701,8 +703,9 @@
           <a:p>
             <a:r>
               <a:rPr lang="en-US" dirty="0"/>
-              <a:t>Risks, Failure Modes, and Guardrails
-Resource diversion. AI projects may consume resources that could be used for more effective interventions. Guardrails include impact measurement, cost-benefit review, and periodic reassessment.</a:t>
+              <a:t>Topic Deep Dive
+Measuring social good requires more than counting users or outputs. Agencies should measure whether the AI-supported workflow improves timeliness, access, quality, fairness, staff burden, community trust, and public health outcomes. They should also monitor unintended consequences, such as reduced service quality, increased complaints, inequitable uptake, or inaccurate referrals.
+Responsible innovation includes sunset and rollback planning. If an AI tool does not produce expected benefit, creates harm, or becomes outdated, the agency should be prepared to modify, pause, or retire it. Social good depends on ongoing accountability, not one-time approval.</a:t>
             </a:r>
             <a:endParaRPr lang="en-US" dirty="0"/>
           </a:p>
@@ -790,9 +793,10 @@
           <a:p>
             <a:r>
               <a:rPr lang="en-US" dirty="0"/>
-              <a:t>Application to AI-Supported Workflows
-AI for Social Good applies to every AI method. Generative AI may improve plain-language communication, but it must be accurate, accessible, and culturally appropriate. Predictive analytics may guide supportive outreach, but it should not become a tool for exclusion. RAG systems may improve staff access to guidance, but they must include current and authorized content. Agentic workflows may reduce burden, but they require boundaries and human accountability.
-The strongest public health AI projects define social good in operational terms. They identify the population benefit, the equity goal, the workflow change, the safeguards, and the measurement plan. They also acknowledge tradeoffs and document why AI is an appropriate tool compared with non-AI alternatives.</a:t>
+              <a:t>Risks, Failure Modes, and Guardrails
+Technology-first design. A tool may be adopted because it is novel rather than because it solves a public health problem. Guardrails include problem-first planning, alternatives analysis, and public value criteria.
+Unequal benefit. AI may help people with strong digital access while excluding others. Guardrails include language access, accessibility, offline options, and human fallback.
+Stigma and surveillance burden. AI may label communities or increase monitoring without support. Guardrails include equity framing, community engagement, and supportive-use restrictions.</a:t>
             </a:r>
             <a:endParaRPr lang="en-US" dirty="0"/>
           </a:p>
@@ -880,10 +884,8 @@
           <a:p>
             <a:r>
               <a:rPr lang="en-US" dirty="0"/>
-              <a:t>Reflection Questions
-What public health problem would this AI use address?
-Who would benefit, and who could be excluded or harmed?
-How were affected communities involved in defining the need and safeguards?</a:t>
+              <a:t>Risks, Failure Modes, and Guardrails
+Resource diversion. AI projects may consume resources that could be used for more effective interventions. Guardrails include impact measurement, cost-benefit review, and periodic reassessment.</a:t>
             </a:r>
             <a:endParaRPr lang="en-US" dirty="0"/>
           </a:p>
@@ -971,9 +973,9 @@
           <a:p>
             <a:r>
               <a:rPr lang="en-US" dirty="0"/>
-              <a:t>Reflection Questions
-What non-AI alternatives should be considered?
-How will the agency measure public value, equity, trust, and unintended consequences?</a:t>
+              <a:t>Application to AI-Supported Workflows
+AI for Social Good applies to every AI method. Generative AI may improve plain-language communication, but it must be accurate, accessible, and culturally appropriate. Predictive analytics may guide supportive outreach, but it should not become a tool for exclusion. RAG systems may improve staff access to guidance, but they must include current and authorized content. Agentic workflows may reduce burden, but they require boundaries and human accountability.
+The strongest public health AI projects define social good in operational terms. They identify the population benefit, the equity goal, the workflow change, the safeguards, and the measurement plan. They also acknowledge tradeoffs and document why AI is an appropriate tool compared with non-AI alternatives.</a:t>
             </a:r>
             <a:endParaRPr lang="en-US" dirty="0"/>
           </a:p>
@@ -1061,9 +1063,10 @@
           <a:p>
             <a:r>
               <a:rPr lang="en-US" dirty="0"/>
-              <a:t>Practical Exercise
-Create an AI for Social Good review brief for one public health use case. The brief should define the public health problem, intended public benefit, affected communities, equity considerations, non-AI alternatives, proposed AI role, safeguards, community engagement plan, evaluation measures, and sunset or rollback criteria.
-The exercise should result in a decision-support document that helps leaders and governance reviewers determine whether the proposed AI use advances public health values.</a:t>
+              <a:t>Reflection Questions
+What public health problem would this AI use address?
+Who would benefit, and who could be excluded or harmed?
+How were affected communities involved in defining the need and safeguards?</a:t>
             </a:r>
             <a:endParaRPr lang="en-US" dirty="0"/>
           </a:p>
@@ -1151,10 +1154,9 @@
           <a:p>
             <a:r>
               <a:rPr lang="en-US" dirty="0"/>
-              <a:t>Expected Artifact or Evidence
-AI for Social Good review brief
-Public value and equity assessment
-Community engagement and accessibility plan</a:t>
+              <a:t>Reflection Questions
+What non-AI alternatives should be considered?
+How will the agency measure public value, equity, trust, and unintended consequences?</a:t>
             </a:r>
             <a:endParaRPr lang="en-US" dirty="0"/>
           </a:p>
@@ -1242,8 +1244,9 @@
           <a:p>
             <a:r>
               <a:rPr lang="en-US" dirty="0"/>
-              <a:t>Expected Artifact or Evidence
-Impact and unintended-consequence measurement plan</a:t>
+              <a:t>Practical Exercise
+Create an AI for Social Good review brief for one public health use case. The brief should define the public health problem, intended public benefit, affected communities, equity considerations, non-AI alternatives, proposed AI role, safeguards, community engagement plan, evaluation measures, and sunset or rollback criteria.
+The exercise should result in a decision-support document that helps leaders and governance reviewers determine whether the proposed AI use advances public health values.</a:t>
             </a:r>
             <a:endParaRPr lang="en-US" dirty="0"/>
           </a:p>
@@ -1331,11 +1334,10 @@
           <a:p>
             <a:r>
               <a:rPr lang="en-US" dirty="0"/>
-              <a:t>Expected Assignment
+              <a:t>Expected Artifact or Evidence
 AI for Social Good review brief
 Public value and equity assessment
-Community engagement and accessibility plan
-Impact and unintended-consequence measurement plan</a:t>
+Community engagement and accessibility plan</a:t>
             </a:r>
             <a:endParaRPr lang="en-US" dirty="0"/>
           </a:p>
@@ -1423,12 +1425,8 @@
           <a:p>
             <a:r>
               <a:rPr lang="en-US" dirty="0"/>
-              <a:t>Knowledge Check
-1. What is the best definition of AI for Social Good in public health?
-2. Why is efficiency alone not enough to show social good?
-3. What does equity by design require?
-4. Which use best reflects AI for Social Good?
-5. What is strong completion evidence for this module?</a:t>
+              <a:t>Expected Artifact or Evidence
+Impact and unintended-consequence measurement plan</a:t>
             </a:r>
             <a:endParaRPr lang="en-US" dirty="0"/>
           </a:p>
@@ -1608,12 +1606,11 @@
           <a:p>
             <a:r>
               <a:rPr lang="en-US" dirty="0"/>
-              <a:t>References and Resources
-WHO Ethics and Governance of Artificial Intelligence for Health: https://www.who.int/publications/i/item/9789240029200
-WHO Guidance on Large Multi-Modal Models: https://www.who.int/publications/i/item/9789240084759
-NIST Artificial Intelligence Risk Management Framework: https://www.nist.gov/itl/ai-risk-management-framework
-CDC Public Health Data Strategy: https://www.cdc.gov/public-health-data-strategy/php/about/index.html
-Agency equity, community engagement, accessibility, and language access policies</a:t>
+              <a:t>Expected Assignment
+AI for Social Good review brief
+Public value and equity assessment
+Community engagement and accessibility plan
+Impact and unintended-consequence measurement plan</a:t>
             </a:r>
             <a:endParaRPr lang="en-US" dirty="0"/>
           </a:p>
@@ -1637,6 +1634,192 @@
             <a:fld id="{F7021451-1387-4CA6-816F-3879F97B5CBC}" type="slidenum">
               <a:rPr lang="en-US"/>
               <a:t>20</a:t>
+            </a:fld>
+            <a:endParaRPr lang="en-US"/>
+          </a:p>
+        </p:txBody>
+      </p:sp>
+    </p:spTree>
+    <p:extLst>
+      <p:ext uri="{BB962C8B-B14F-4D97-AF65-F5344CB8AC3E}">
+        <p14:creationId xmlns:p14="http://schemas.microsoft.com/office/powerpoint/2010/main" val="1024086991"/>
+      </p:ext>
+    </p:extLst>
+  </p:cSld>
+  <p:clrMapOvr>
+    <a:masterClrMapping/>
+  </p:clrMapOvr>
+</p:notes>
+</file>
+
+<file path=ppt/notesSlides/notesSlide21.xml><?xml version="1.0" encoding="utf-8"?>
+<p:notes xmlns:a="http://schemas.openxmlformats.org/drawingml/2006/main" xmlns:r="http://schemas.openxmlformats.org/officeDocument/2006/relationships" xmlns:p="http://schemas.openxmlformats.org/presentationml/2006/main">
+  <p:cSld>
+    <p:spTree>
+      <p:nvGrpSpPr>
+        <p:cNvPr id="1" name=""/>
+        <p:cNvGrpSpPr/>
+        <p:nvPr/>
+      </p:nvGrpSpPr>
+      <p:grpSpPr>
+        <a:xfrm>
+          <a:off x="0" y="0"/>
+          <a:ext cx="0" cy="0"/>
+          <a:chOff x="0" y="0"/>
+          <a:chExt cx="0" cy="0"/>
+        </a:xfrm>
+      </p:grpSpPr>
+      <p:sp>
+        <p:nvSpPr>
+          <p:cNvPr id="2" name="Slide Image Placeholder 1"/>
+          <p:cNvSpPr>
+            <a:spLocks noGrp="1" noRot="1" noChangeAspect="1"/>
+          </p:cNvSpPr>
+          <p:nvPr>
+            <p:ph type="sldImg"/>
+          </p:nvPr>
+        </p:nvSpPr>
+        <p:spPr/>
+      </p:sp>
+      <p:sp>
+        <p:nvSpPr>
+          <p:cNvPr id="3" name="Notes Placeholder 2"/>
+          <p:cNvSpPr>
+            <a:spLocks noGrp="1"/>
+          </p:cNvSpPr>
+          <p:nvPr>
+            <p:ph type="body" idx="1"/>
+          </p:nvPr>
+        </p:nvSpPr>
+        <p:spPr/>
+        <p:txBody>
+          <a:bodyPr/>
+          <a:lstStyle/>
+          <a:p>
+            <a:r>
+              <a:rPr lang="en-US" dirty="0"/>
+              <a:t>Knowledge Check
+1. What is the best definition of AI for Social Good in public health?
+2. Why is efficiency alone not enough to show social good?
+3. What does equity by design require?
+4. Which use best reflects AI for Social Good?
+5. What is strong completion evidence for this module?</a:t>
+            </a:r>
+            <a:endParaRPr lang="en-US" dirty="0"/>
+          </a:p>
+        </p:txBody>
+      </p:sp>
+      <p:sp>
+        <p:nvSpPr>
+          <p:cNvPr id="4" name="Slide Number Placeholder 3"/>
+          <p:cNvSpPr>
+            <a:spLocks noGrp="1"/>
+          </p:cNvSpPr>
+          <p:nvPr>
+            <p:ph type="sldNum" sz="quarter" idx="10"/>
+          </p:nvPr>
+        </p:nvSpPr>
+        <p:spPr/>
+        <p:txBody>
+          <a:bodyPr/>
+          <a:lstStyle/>
+          <a:p>
+            <a:fld id="{F7021451-1387-4CA6-816F-3879F97B5CBC}" type="slidenum">
+              <a:rPr lang="en-US"/>
+              <a:t>21</a:t>
+            </a:fld>
+            <a:endParaRPr lang="en-US"/>
+          </a:p>
+        </p:txBody>
+      </p:sp>
+    </p:spTree>
+    <p:extLst>
+      <p:ext uri="{BB962C8B-B14F-4D97-AF65-F5344CB8AC3E}">
+        <p14:creationId xmlns:p14="http://schemas.microsoft.com/office/powerpoint/2010/main" val="1024086991"/>
+      </p:ext>
+    </p:extLst>
+  </p:cSld>
+  <p:clrMapOvr>
+    <a:masterClrMapping/>
+  </p:clrMapOvr>
+</p:notes>
+</file>
+
+<file path=ppt/notesSlides/notesSlide22.xml><?xml version="1.0" encoding="utf-8"?>
+<p:notes xmlns:a="http://schemas.openxmlformats.org/drawingml/2006/main" xmlns:r="http://schemas.openxmlformats.org/officeDocument/2006/relationships" xmlns:p="http://schemas.openxmlformats.org/presentationml/2006/main">
+  <p:cSld>
+    <p:spTree>
+      <p:nvGrpSpPr>
+        <p:cNvPr id="1" name=""/>
+        <p:cNvGrpSpPr/>
+        <p:nvPr/>
+      </p:nvGrpSpPr>
+      <p:grpSpPr>
+        <a:xfrm>
+          <a:off x="0" y="0"/>
+          <a:ext cx="0" cy="0"/>
+          <a:chOff x="0" y="0"/>
+          <a:chExt cx="0" cy="0"/>
+        </a:xfrm>
+      </p:grpSpPr>
+      <p:sp>
+        <p:nvSpPr>
+          <p:cNvPr id="2" name="Slide Image Placeholder 1"/>
+          <p:cNvSpPr>
+            <a:spLocks noGrp="1" noRot="1" noChangeAspect="1"/>
+          </p:cNvSpPr>
+          <p:nvPr>
+            <p:ph type="sldImg"/>
+          </p:nvPr>
+        </p:nvSpPr>
+        <p:spPr/>
+      </p:sp>
+      <p:sp>
+        <p:nvSpPr>
+          <p:cNvPr id="3" name="Notes Placeholder 2"/>
+          <p:cNvSpPr>
+            <a:spLocks noGrp="1"/>
+          </p:cNvSpPr>
+          <p:nvPr>
+            <p:ph type="body" idx="1"/>
+          </p:nvPr>
+        </p:nvSpPr>
+        <p:spPr/>
+        <p:txBody>
+          <a:bodyPr/>
+          <a:lstStyle/>
+          <a:p>
+            <a:r>
+              <a:rPr lang="en-US" dirty="0"/>
+              <a:t>References and Resources
+WHO Ethics and Governance of Artificial Intelligence for Health: https://www.who.int/publications/i/item/9789240029200
+WHO Guidance on Large Multi-Modal Models: https://www.who.int/publications/i/item/9789240084759
+NIST Artificial Intelligence Risk Management Framework: https://www.nist.gov/itl/ai-risk-management-framework
+CDC Public Health Data Strategy: https://www.cdc.gov/public-health-data-strategy/php/about/index.html
+Agency equity, community engagement, accessibility, and language access policies</a:t>
+            </a:r>
+            <a:endParaRPr lang="en-US" dirty="0"/>
+          </a:p>
+        </p:txBody>
+      </p:sp>
+      <p:sp>
+        <p:nvSpPr>
+          <p:cNvPr id="4" name="Slide Number Placeholder 3"/>
+          <p:cNvSpPr>
+            <a:spLocks noGrp="1"/>
+          </p:cNvSpPr>
+          <p:nvPr>
+            <p:ph type="sldNum" sz="quarter" idx="10"/>
+          </p:nvPr>
+        </p:nvSpPr>
+        <p:spPr/>
+        <p:txBody>
+          <a:bodyPr/>
+          <a:lstStyle/>
+          <a:p>
+            <a:fld id="{F7021451-1387-4CA6-816F-3879F97B5CBC}" type="slidenum">
+              <a:rPr lang="en-US"/>
+              <a:t>22</a:t>
             </a:fld>
             <a:endParaRPr lang="en-US"/>
           </a:p>
@@ -1701,12 +1884,11 @@
           <a:p>
             <a:r>
               <a:rPr lang="en-US" dirty="0"/>
-              <a:t>Learning Objectives
-Define AI for Social Good in public health terms.
-Distinguish public benefit from novelty, efficiency, or automation alone.
-Identify how AI can support public health values, including equity, transparency, accessibility, accountability, and community trust.
-Assess potential harms, including exclusion, surveillance burden, stigma, resource diversion, and unequal benefit.
-Design community-centered safeguards for socially beneficial AI use.</a:t>
+              <a:t>Related Playbook Plays
+Play 4: Engage Stakeholders - This lesson informs Play 4 by helping learners connect the lesson topic to engage stakeholders work in the AI Playbook sequence.
+Play 7: Prioritize Use Cases - This lesson informs Play 7 by helping learners connect the lesson topic to prioritize use cases work in the AI Playbook sequence.
+Play 1: Vision &amp; Guardrails - This lesson informs Play 1 by helping learners connect the lesson topic to vision &amp; guardrails work in the AI Playbook sequence.
+Play 13: Monitor and Evaluate AI Systems - This lesson informs Play 13 by helping learners connect the lesson topic to monitor and evaluate ai systems work in the AI Playbook.</a:t>
             </a:r>
             <a:endParaRPr lang="en-US" dirty="0"/>
           </a:p>
@@ -1794,8 +1976,13 @@
           <a:p>
             <a:r>
               <a:rPr lang="en-US" dirty="0"/>
-              <a:t>Learning Objectives
-Produce an AI for Social Good review brief for a public health use case.</a:t>
+              <a:t>Related Toolkit Resources
+Tool 20: Community Engagement Planning (Planning) - Use this tool to complete or strengthen the practical exercise for the module using fictional, de-identified, or generalized.
+Tool 21: Stakeholder Mapping &amp; RACI (Template) - Use this tool to complete or strengthen the practical exercise for the module using fictional, de-identified, or generalized.
+Tool 22: Missing Voices Analysis (Checklist) - Use this tool to complete or strengthen the practical exercise for the module using fictional, de-identified, or generalized.
+Tool 4: AI Policy Landscape Scan (Worksheet) - Use AI Policy Landscape Scan to translate this lesson into a documented public health AI planning, governance, implementation,.
+Tool 5: AI Environmental and Resource Impact Review (Checklist) - Use AI Environmental and Resource Impact Review to translate this lesson into a documented public health AI planning,.
+Tool 6: Human-Centered AI Decision Rule Checklist (Checklist) - Use Human-Centered AI Decision Rule Checklist to translate this lesson into a documented public health AI planning, governance,.</a:t>
             </a:r>
             <a:endParaRPr lang="en-US" dirty="0"/>
           </a:p>
@@ -1883,10 +2070,12 @@
           <a:p>
             <a:r>
               <a:rPr lang="en-US" dirty="0"/>
-              <a:t>Module Overview
-AI for Social Good refers to the intentional use of artificial intelligence to improve public well-being, reduce inequities, strengthen institutions, and address complex social problems. For public health, this concept is not abstract. Public health agencies already work to prevent disease, protect communities, improve access, and reduce inequities. AI for Social Good should therefore be judged by whether it advances public health values in measurable, accountable, and community-centered ways.
-This training helps learners distinguish socially beneficial AI from AI that is merely innovative or efficient. A tool can be technically impressive and still fail to advance the public good if it increases surveillance burden, excludes communities, weakens transparency, or diverts resources from more effective interventions. Conversely, a modest AI tool may create meaningful public value if it reduces staff burden, improves language access, directs services to underserved communities, or helps agencies respond faster and more fairly.
-The module emphasizes public purpose, equity by design, community engagement, responsible innovation, transparency, measurement, and avoidance of unintended harm. Learners will develop an AI for Social Good review brief for a public health use case.</a:t>
+              <a:t>Learning Objectives
+Define AI for Social Good in public health terms.
+Distinguish public benefit from novelty, efficiency, or automation alone.
+Identify how AI can support public health values, including equity, transparency, accessibility, accountability, and community trust.
+Assess potential harms, including exclusion, surveillance burden, stigma, resource diversion, and unequal benefit.
+Design community-centered safeguards for socially beneficial AI use.</a:t>
             </a:r>
             <a:endParaRPr lang="en-US" dirty="0"/>
           </a:p>
@@ -1974,10 +2163,8 @@
           <a:p>
             <a:r>
               <a:rPr lang="en-US" dirty="0"/>
-              <a:t>Why This Topic Matters for Public Health AI
-Public health is uniquely positioned to use AI for social good because its mission is population well-being rather than private gain. AI can help agencies identify emerging needs, improve access to information, reduce administrative burden, support community outreach, and allocate resources more effectively. These benefits are especially important when agencies face workforce shortages, fragmented systems, and increasing demands.
-However, AI for Social Good is not guaranteed by good intentions. Tools built for efficiency may shift burden onto communities, reduce human contact, or make services harder to access for people with limited digital literacy. Predictive tools may label communities as risky without addressing structural causes. Chatbots may improve information access for some users while excluding people who need language, disability, or offline support.
-The public health standard for social good should be rigorous. Agencies should define the public problem, identify who benefits, identify who could be harmed, involve affected communities, measure outcomes, and document safeguards. The central question is not “Can AI do this?” but “Should AI be used for this purpose, and under what conditions would it create public value?”</a:t>
+              <a:t>Learning Objectives
+Produce an AI for Social Good review brief for a public health use case.</a:t>
             </a:r>
             <a:endParaRPr lang="en-US" dirty="0"/>
           </a:p>
@@ -2065,9 +2252,10 @@
           <a:p>
             <a:r>
               <a:rPr lang="en-US" dirty="0"/>
-              <a:t>Public Health Example
-A health department may use AI to improve access to maternal and child health resources. A tool could help staff identify service gaps, summarize eligibility rules, translate plain-language information, and route families to local support. If designed well, the tool could reduce administrative burden and improve timely access to services.
-The same tool could fail if it assumes internet access, uses only English content, provides outdated referral information, exposes sensitive information, or replaces trusted human navigators. An AI for Social Good review would examine community needs, access barriers, language and disability accommodations, privacy, human fallback options, and measurable outcomes.</a:t>
+              <a:t>Module Overview
+AI for Social Good refers to the intentional use of artificial intelligence to improve public well-being, reduce inequities, strengthen institutions, and address complex social problems. For public health, this concept is not abstract. Public health agencies already work to prevent disease, protect communities, improve access, and reduce inequities. AI for Social Good should therefore be judged by whether it advances public health values in measurable, accountable, and community-centered ways.
+This training helps learners distinguish socially beneficial AI from AI that is merely innovative or efficient. A tool can be technically impressive and still fail to advance the public good if it increases surveillance burden, excludes communities, weakens transparency, or diverts resources from more effective interventions. Conversely, a modest AI tool may create meaningful public value if it reduces staff burden, improves language access, directs services to underserved communities, or helps agencies respond faster and more fairly.
+The module emphasizes public purpose, equity by design, community engagement, responsible innovation, transparency, measurement, and avoidance of unintended harm. Learners will develop an AI for Social Good review brief for a public health use case.</a:t>
             </a:r>
             <a:endParaRPr lang="en-US" dirty="0"/>
           </a:p>
@@ -2155,10 +2343,10 @@
           <a:p>
             <a:r>
               <a:rPr lang="en-US" dirty="0"/>
-              <a:t>Topic Deep Dive
-AI for Social Good begins with problem definition. The problem should be a public health problem, not a technology opportunity. For example, “use a chatbot” is not a problem definition. “Reduce delays in connecting families to local nutrition, housing, transportation, and home visiting resources” is a stronger public health problem definition. Starting with the problem helps agencies avoid technology-driven solutions that do not address root needs.
-Equity by design requires agencies to identify who is included, who is excluded, and who bears risk. This includes reviewing data representativeness, digital access, language access, disability access, rural access, immigration-related concerns, privacy expectations, and historical mistrust. Equity review should shape the use case, data sources, interface, outreach strategy, and evaluation metrics.
-Community engagement should occur before deployment, not only after concerns arise. Affected communities can help identify priorities, unacceptable uses, preferred communication channels, needed safeguards, and measures of success. Engagement does not mean asking communities to approve a predetermined tool. It means allowing community input to change the design, scope, or decision to proceed.</a:t>
+              <a:t>Why This Topic Matters for Public Health AI
+Public health is uniquely positioned to use AI for social good because its mission is population well-being rather than private gain. AI can help agencies identify emerging needs, improve access to information, reduce administrative burden, support community outreach, and allocate resources more effectively. These benefits are especially important when agencies face workforce shortages, fragmented systems, and increasing demands.
+However, AI for Social Good is not guaranteed by good intentions. Tools built for efficiency may shift burden onto communities, reduce human contact, or make services harder to access for people with limited digital literacy. Predictive tools may label communities as risky without addressing structural causes. Chatbots may improve information access for some users while excluding people who need language, disability, or offline support.
+The public health standard for social good should be rigorous. Agencies should define the public problem, identify who benefits, identify who could be harmed, involve affected communities, measure outcomes, and document safeguards. The central question is not “Can AI do this?” but “Should AI be used for this purpose, and under what conditions would it create public value?”</a:t>
             </a:r>
             <a:endParaRPr lang="en-US" dirty="0"/>
           </a:p>
@@ -2246,9 +2434,9 @@
           <a:p>
             <a:r>
               <a:rPr lang="en-US" dirty="0"/>
-              <a:t>Topic Deep Dive
-Measuring social good requires more than counting users or outputs. Agencies should measure whether the AI-supported workflow improves timeliness, access, quality, fairness, staff burden, community trust, and public health outcomes. They should also monitor unintended consequences, such as reduced service quality, increased complaints, inequitable uptake, or inaccurate referrals.
-Responsible innovation includes sunset and rollback planning. If an AI tool does not produce expected benefit, creates harm, or becomes outdated, the agency should be prepared to modify, pause, or retire it. Social good depends on ongoing accountability, not one-time approval.</a:t>
+              <a:t>Public Health Example
+A health department may use AI to improve access to maternal and child health resources. A tool could help staff identify service gaps, summarize eligibility rules, translate plain-language information, and route families to local support. If designed well, the tool could reduce administrative burden and improve timely access to services.
+The same tool could fail if it assumes internet access, uses only English content, provides outdated referral information, exposes sensitive information, or replaces trusted human navigators. An AI for Social Good review would examine community needs, access barriers, language and disability accommodations, privacy, human fallback options, and measurable outcomes.</a:t>
             </a:r>
             <a:endParaRPr lang="en-US" dirty="0"/>
           </a:p>
@@ -2871,7 +3059,32 @@
       </p:sp>
       <p:sp>
         <p:nvSpPr>
-          <p:cNvPr id="3" name="Text 1"/>
+          <p:cNvPr id="3" name="Shape 1"/>
+          <p:cNvSpPr/>
+          <p:nvPr/>
+        </p:nvSpPr>
+        <p:spPr>
+          <a:xfrm>
+            <a:off x="0" y="164592"/>
+            <a:ext cx="146304" cy="6693408"/>
+          </a:xfrm>
+          <a:prstGeom prst="rect">
+            <a:avLst/>
+          </a:prstGeom>
+          <a:solidFill>
+            <a:srgbClr val="2F8A28"/>
+          </a:solidFill>
+          <a:ln w="12700">
+            <a:solidFill>
+              <a:srgbClr val="2F8A28"/>
+            </a:solidFill>
+            <a:prstDash val="solid"/>
+          </a:ln>
+        </p:spPr>
+      </p:sp>
+      <p:sp>
+        <p:nvSpPr>
+          <p:cNvPr id="4" name="Text 2"/>
           <p:cNvSpPr/>
           <p:nvPr/>
         </p:nvSpPr>
@@ -2910,7 +3123,7 @@
       </p:sp>
       <p:sp>
         <p:nvSpPr>
-          <p:cNvPr id="4" name="Text 2"/>
+          <p:cNvPr id="5" name="Text 3"/>
           <p:cNvSpPr/>
           <p:nvPr/>
         </p:nvSpPr>
@@ -2949,7 +3162,7 @@
       </p:sp>
       <p:sp>
         <p:nvSpPr>
-          <p:cNvPr id="5" name="Text 3"/>
+          <p:cNvPr id="6" name="Text 4"/>
           <p:cNvSpPr/>
           <p:nvPr/>
         </p:nvSpPr>
@@ -2988,13 +3201,77 @@
       </p:sp>
       <p:sp>
         <p:nvSpPr>
-          <p:cNvPr id="6" name="Text 4"/>
+          <p:cNvPr id="7" name="Shape 5"/>
           <p:cNvSpPr/>
           <p:nvPr/>
         </p:nvSpPr>
         <p:spPr>
           <a:xfrm>
             <a:off x="640080" y="658368"/>
+            <a:ext cx="420624" cy="420624"/>
+          </a:xfrm>
+          <a:prstGeom prst="ellipse">
+            <a:avLst/>
+          </a:prstGeom>
+          <a:solidFill>
+            <a:srgbClr val="0068B7"/>
+          </a:solidFill>
+          <a:ln w="12700">
+            <a:solidFill>
+              <a:srgbClr val="0068B7"/>
+            </a:solidFill>
+            <a:prstDash val="solid"/>
+          </a:ln>
+        </p:spPr>
+      </p:sp>
+      <p:sp>
+        <p:nvSpPr>
+          <p:cNvPr id="8" name="Text 6"/>
+          <p:cNvSpPr/>
+          <p:nvPr/>
+        </p:nvSpPr>
+        <p:spPr>
+          <a:xfrm>
+            <a:off x="640080" y="731520"/>
+            <a:ext cx="420624" cy="164592"/>
+          </a:xfrm>
+          <a:prstGeom prst="rect">
+            <a:avLst/>
+          </a:prstGeom>
+          <a:noFill/>
+          <a:ln/>
+        </p:spPr>
+        <p:txBody>
+          <a:bodyPr wrap="square" lIns="0" tIns="0" rIns="0" bIns="0" rtlCol="0" anchor="ctr"/>
+          <a:lstStyle/>
+          <a:p>
+            <a:pPr algn="ctr" indent="0" marL="0">
+              <a:buNone/>
+            </a:pPr>
+            <a:r>
+              <a:rPr lang="en-US" sz="1100" b="1" dirty="0">
+                <a:solidFill>
+                  <a:srgbClr val="FFFFFF"/>
+                </a:solidFill>
+                <a:latin typeface="Aptos" pitchFamily="34" charset="0"/>
+                <a:ea typeface="Aptos" pitchFamily="34" charset="-122"/>
+                <a:cs typeface="Aptos" pitchFamily="34" charset="-120"/>
+              </a:rPr>
+              <a:t>5</a:t>
+            </a:r>
+            <a:endParaRPr lang="en-US" sz="1100" dirty="0"/>
+          </a:p>
+        </p:txBody>
+      </p:sp>
+      <p:sp>
+        <p:nvSpPr>
+          <p:cNvPr id="9" name="Text 7"/>
+          <p:cNvSpPr/>
+          <p:nvPr/>
+        </p:nvSpPr>
+        <p:spPr>
+          <a:xfrm>
+            <a:off x="640080" y="621792"/>
             <a:ext cx="10881360" cy="566928"/>
           </a:xfrm>
           <a:prstGeom prst="rect">
@@ -3021,7 +3298,7 @@
                 <a:ea typeface="Aptos Display" pitchFamily="34" charset="-122"/>
                 <a:cs typeface="Aptos Display" pitchFamily="34" charset="-120"/>
               </a:rPr>
-              <a:t>Risks, Failure Modes, and Guardrails</a:t>
+              <a:t>Topic Deep Dive</a:t>
             </a:r>
             <a:endParaRPr lang="en-US" sz="2700" dirty="0"/>
           </a:p>
@@ -3029,32 +3306,178 @@
       </p:sp>
       <p:sp>
         <p:nvSpPr>
-          <p:cNvPr id="7" name="Text 5"/>
-          <p:cNvSpPr/>
-          <p:nvPr/>
-        </p:nvSpPr>
-        <p:spPr>
-          <a:xfrm>
-            <a:off x="822960" y="1325880"/>
-            <a:ext cx="10378440" cy="4800600"/>
-          </a:xfrm>
-          <a:prstGeom prst="rect">
-            <a:avLst/>
-          </a:prstGeom>
-          <a:noFill/>
-          <a:ln/>
-        </p:spPr>
-        <p:txBody>
-          <a:bodyPr wrap="square" lIns="1016" tIns="1016" rIns="1016" bIns="1016" rtlCol="0" anchor="t">
+          <p:cNvPr id="10" name="Text 8"/>
+          <p:cNvSpPr/>
+          <p:nvPr/>
+        </p:nvSpPr>
+        <p:spPr>
+          <a:xfrm>
+            <a:off x="868680" y="1417320"/>
+            <a:ext cx="6675120" cy="4434840"/>
+          </a:xfrm>
+          <a:prstGeom prst="rect">
+            <a:avLst/>
+          </a:prstGeom>
+          <a:noFill/>
+          <a:ln/>
+        </p:spPr>
+        <p:txBody>
+          <a:bodyPr wrap="square" lIns="635" tIns="635" rIns="635" bIns="635" rtlCol="0" anchor="t">
             <a:normAutofit/>
           </a:bodyPr>
           <a:lstStyle/>
           <a:p>
+            <a:r>
+              <a:rPr lang="en-US" sz="1700" dirty="0">
+                <a:solidFill>
+                  <a:srgbClr val="17364A"/>
+                </a:solidFill>
+                <a:latin typeface="Aptos" pitchFamily="34" charset="0"/>
+                <a:ea typeface="Aptos" pitchFamily="34" charset="-122"/>
+                <a:cs typeface="Aptos" pitchFamily="34" charset="-120"/>
+              </a:rPr>
+              <a:t>AI for Social Good begins with problem definition.</a:t>
+            </a:r>
+            <a:endParaRPr lang="en-US" sz="1700" dirty="0"/>
+          </a:p>
+          <a:p>
+            <a:r>
+              <a:rPr lang="en-US" sz="1700" dirty="0">
+                <a:solidFill>
+                  <a:srgbClr val="17364A"/>
+                </a:solidFill>
+                <a:latin typeface="Aptos" pitchFamily="34" charset="0"/>
+                <a:ea typeface="Aptos" pitchFamily="34" charset="-122"/>
+                <a:cs typeface="Aptos" pitchFamily="34" charset="-120"/>
+              </a:rPr>
+              <a:t>The problem should be a public health problem, not a technology opportunity.</a:t>
+            </a:r>
+            <a:endParaRPr lang="en-US" sz="1700" dirty="0"/>
+          </a:p>
+          <a:p>
+            <a:r>
+              <a:rPr lang="en-US" sz="1700" dirty="0">
+                <a:solidFill>
+                  <a:srgbClr val="17364A"/>
+                </a:solidFill>
+                <a:latin typeface="Aptos" pitchFamily="34" charset="0"/>
+                <a:ea typeface="Aptos" pitchFamily="34" charset="-122"/>
+                <a:cs typeface="Aptos" pitchFamily="34" charset="-120"/>
+              </a:rPr>
+              <a:t>For example, “use a chatbot” is not a problem definition. “Reduce delays in connecting families to local nutrition,.</a:t>
+            </a:r>
+            <a:endParaRPr lang="en-US" sz="1700" dirty="0"/>
+          </a:p>
+          <a:p>
+            <a:r>
+              <a:rPr lang="en-US" sz="1700" dirty="0">
+                <a:solidFill>
+                  <a:srgbClr val="17364A"/>
+                </a:solidFill>
+                <a:latin typeface="Aptos" pitchFamily="34" charset="0"/>
+                <a:ea typeface="Aptos" pitchFamily="34" charset="-122"/>
+                <a:cs typeface="Aptos" pitchFamily="34" charset="-120"/>
+              </a:rPr>
+              <a:t>Starting with the problem helps agencies avoid technology-driven solutions that do not address root needs.</a:t>
+            </a:r>
+            <a:endParaRPr lang="en-US" sz="1700" dirty="0"/>
+          </a:p>
+        </p:txBody>
+      </p:sp>
+      <p:sp>
+        <p:nvSpPr>
+          <p:cNvPr id="11" name="Shape 9"/>
+          <p:cNvSpPr/>
+          <p:nvPr/>
+        </p:nvSpPr>
+        <p:spPr>
+          <a:xfrm>
+            <a:off x="7909560" y="1417320"/>
+            <a:ext cx="3154680" cy="1828800"/>
+          </a:xfrm>
+          <a:prstGeom prst="roundRect">
+            <a:avLst>
+              <a:gd name="adj" fmla="val 6000"/>
+            </a:avLst>
+          </a:prstGeom>
+          <a:solidFill>
+            <a:srgbClr val="EEF8ED"/>
+          </a:solidFill>
+          <a:ln w="12700">
+            <a:solidFill>
+              <a:srgbClr val="B9D7E6"/>
+            </a:solidFill>
+            <a:prstDash val="solid"/>
+          </a:ln>
+        </p:spPr>
+      </p:sp>
+      <p:sp>
+        <p:nvSpPr>
+          <p:cNvPr id="12" name="Text 10"/>
+          <p:cNvSpPr/>
+          <p:nvPr/>
+        </p:nvSpPr>
+        <p:spPr>
+          <a:xfrm>
+            <a:off x="8074152" y="1563624"/>
+            <a:ext cx="2825496" cy="201168"/>
+          </a:xfrm>
+          <a:prstGeom prst="rect">
+            <a:avLst/>
+          </a:prstGeom>
+          <a:noFill/>
+          <a:ln/>
+        </p:spPr>
+        <p:txBody>
+          <a:bodyPr wrap="square" lIns="0" tIns="0" rIns="0" bIns="0" rtlCol="0" anchor="ctr"/>
+          <a:lstStyle/>
+          <a:p>
             <a:pPr indent="0" marL="0">
               <a:buNone/>
             </a:pPr>
             <a:r>
-              <a:rPr lang="en-US" sz="1420" dirty="0">
+              <a:rPr lang="en-US" sz="950" b="1" dirty="0">
+                <a:solidFill>
+                  <a:srgbClr val="0068B7"/>
+                </a:solidFill>
+                <a:latin typeface="Aptos" pitchFamily="34" charset="0"/>
+                <a:ea typeface="Aptos" pitchFamily="34" charset="-122"/>
+                <a:cs typeface="Aptos" pitchFamily="34" charset="-120"/>
+              </a:rPr>
+              <a:t>Key idea</a:t>
+            </a:r>
+            <a:endParaRPr lang="en-US" sz="950" dirty="0"/>
+          </a:p>
+        </p:txBody>
+      </p:sp>
+      <p:sp>
+        <p:nvSpPr>
+          <p:cNvPr id="13" name="Text 11"/>
+          <p:cNvSpPr/>
+          <p:nvPr/>
+        </p:nvSpPr>
+        <p:spPr>
+          <a:xfrm>
+            <a:off x="8074152" y="1856232"/>
+            <a:ext cx="2825496" cy="1261872"/>
+          </a:xfrm>
+          <a:prstGeom prst="rect">
+            <a:avLst/>
+          </a:prstGeom>
+          <a:noFill/>
+          <a:ln/>
+        </p:spPr>
+        <p:txBody>
+          <a:bodyPr wrap="square" lIns="0" tIns="0" rIns="0" bIns="0" rtlCol="0" anchor="t">
+            <a:normAutofit/>
+          </a:bodyPr>
+          <a:lstStyle/>
+          <a:p>
+            <a:pPr indent="0" marL="0">
+              <a:buNone/>
+            </a:pPr>
+            <a:r>
+              <a:rPr lang="en-US" sz="1250" dirty="0">
                 <a:solidFill>
                   <a:srgbClr val="17364A"/>
                 </a:solidFill>
@@ -3062,9 +3485,116 @@
                 <a:ea typeface="Aptos" pitchFamily="34" charset="-122"/>
                 <a:cs typeface="Aptos" pitchFamily="34" charset="-120"/>
               </a:rPr>
-              <a:t>Technology-first design. A tool may be adopted because it is novel rather than because it solves a public health problem. Guardrails include problem-first planning, alternatives analysis, and public value criteria. Unequal benefit. AI may help people with strong digital access while excluding others. Guardrails include language access, accessibility, offline options, and human fallback. Stigma and surveillance burden. AI may label communities or increase monitoring without support. Guardrails include equity framing, community engagement, and supportive-use restrictions.</a:t>
-            </a:r>
-            <a:endParaRPr lang="en-US" sz="1420" dirty="0"/>
+              <a:t>AI for Social Good begins with problem definition.</a:t>
+            </a:r>
+            <a:endParaRPr lang="en-US" sz="1250" dirty="0"/>
+          </a:p>
+        </p:txBody>
+      </p:sp>
+      <p:sp>
+        <p:nvSpPr>
+          <p:cNvPr id="14" name="Shape 12"/>
+          <p:cNvSpPr/>
+          <p:nvPr/>
+        </p:nvSpPr>
+        <p:spPr>
+          <a:xfrm>
+            <a:off x="7909560" y="3520440"/>
+            <a:ext cx="3154680" cy="1737360"/>
+          </a:xfrm>
+          <a:prstGeom prst="roundRect">
+            <a:avLst>
+              <a:gd name="adj" fmla="val 6316"/>
+            </a:avLst>
+          </a:prstGeom>
+          <a:solidFill>
+            <a:srgbClr val="EAF6F8"/>
+          </a:solidFill>
+          <a:ln w="12700">
+            <a:solidFill>
+              <a:srgbClr val="B9D7E6"/>
+            </a:solidFill>
+            <a:prstDash val="solid"/>
+          </a:ln>
+        </p:spPr>
+      </p:sp>
+      <p:sp>
+        <p:nvSpPr>
+          <p:cNvPr id="15" name="Text 13"/>
+          <p:cNvSpPr/>
+          <p:nvPr/>
+        </p:nvSpPr>
+        <p:spPr>
+          <a:xfrm>
+            <a:off x="8074152" y="3666744"/>
+            <a:ext cx="2825496" cy="201168"/>
+          </a:xfrm>
+          <a:prstGeom prst="rect">
+            <a:avLst/>
+          </a:prstGeom>
+          <a:noFill/>
+          <a:ln/>
+        </p:spPr>
+        <p:txBody>
+          <a:bodyPr wrap="square" lIns="0" tIns="0" rIns="0" bIns="0" rtlCol="0" anchor="ctr"/>
+          <a:lstStyle/>
+          <a:p>
+            <a:pPr indent="0" marL="0">
+              <a:buNone/>
+            </a:pPr>
+            <a:r>
+              <a:rPr lang="en-US" sz="950" b="1" dirty="0">
+                <a:solidFill>
+                  <a:srgbClr val="0068B7"/>
+                </a:solidFill>
+                <a:latin typeface="Aptos" pitchFamily="34" charset="0"/>
+                <a:ea typeface="Aptos" pitchFamily="34" charset="-122"/>
+                <a:cs typeface="Aptos" pitchFamily="34" charset="-120"/>
+              </a:rPr>
+              <a:t>Use this for</a:t>
+            </a:r>
+            <a:endParaRPr lang="en-US" sz="950" dirty="0"/>
+          </a:p>
+        </p:txBody>
+      </p:sp>
+      <p:sp>
+        <p:nvSpPr>
+          <p:cNvPr id="16" name="Text 14"/>
+          <p:cNvSpPr/>
+          <p:nvPr/>
+        </p:nvSpPr>
+        <p:spPr>
+          <a:xfrm>
+            <a:off x="8074152" y="3959352"/>
+            <a:ext cx="2825496" cy="1170432"/>
+          </a:xfrm>
+          <a:prstGeom prst="rect">
+            <a:avLst/>
+          </a:prstGeom>
+          <a:noFill/>
+          <a:ln/>
+        </p:spPr>
+        <p:txBody>
+          <a:bodyPr wrap="square" lIns="0" tIns="0" rIns="0" bIns="0" rtlCol="0" anchor="t">
+            <a:normAutofit/>
+          </a:bodyPr>
+          <a:lstStyle/>
+          <a:p>
+            <a:pPr indent="0" marL="0">
+              <a:buNone/>
+            </a:pPr>
+            <a:r>
+              <a:rPr lang="en-US" sz="1250" dirty="0">
+                <a:solidFill>
+                  <a:srgbClr val="17364A"/>
+                </a:solidFill>
+                <a:latin typeface="Aptos" pitchFamily="34" charset="0"/>
+                <a:ea typeface="Aptos" pitchFamily="34" charset="-122"/>
+                <a:cs typeface="Aptos" pitchFamily="34" charset="-120"/>
+              </a:rPr>
+              <a:t>Connect the concept to public health decisions, safeguards, documentation, or implementation work.</a:t>
+            </a:r>
+            <a:endParaRPr lang="en-US" sz="1250" dirty="0"/>
           </a:p>
         </p:txBody>
       </p:sp>
@@ -3127,7 +3657,32 @@
       </p:sp>
       <p:sp>
         <p:nvSpPr>
-          <p:cNvPr id="3" name="Text 1"/>
+          <p:cNvPr id="3" name="Shape 1"/>
+          <p:cNvSpPr/>
+          <p:nvPr/>
+        </p:nvSpPr>
+        <p:spPr>
+          <a:xfrm>
+            <a:off x="0" y="164592"/>
+            <a:ext cx="146304" cy="6693408"/>
+          </a:xfrm>
+          <a:prstGeom prst="rect">
+            <a:avLst/>
+          </a:prstGeom>
+          <a:solidFill>
+            <a:srgbClr val="2F8A28"/>
+          </a:solidFill>
+          <a:ln w="12700">
+            <a:solidFill>
+              <a:srgbClr val="2F8A28"/>
+            </a:solidFill>
+            <a:prstDash val="solid"/>
+          </a:ln>
+        </p:spPr>
+      </p:sp>
+      <p:sp>
+        <p:nvSpPr>
+          <p:cNvPr id="4" name="Text 2"/>
           <p:cNvSpPr/>
           <p:nvPr/>
         </p:nvSpPr>
@@ -3166,7 +3721,7 @@
       </p:sp>
       <p:sp>
         <p:nvSpPr>
-          <p:cNvPr id="4" name="Text 2"/>
+          <p:cNvPr id="5" name="Text 3"/>
           <p:cNvSpPr/>
           <p:nvPr/>
         </p:nvSpPr>
@@ -3205,7 +3760,7 @@
       </p:sp>
       <p:sp>
         <p:nvSpPr>
-          <p:cNvPr id="5" name="Text 3"/>
+          <p:cNvPr id="6" name="Text 4"/>
           <p:cNvSpPr/>
           <p:nvPr/>
         </p:nvSpPr>
@@ -3244,7 +3799,7 @@
       </p:sp>
       <p:sp>
         <p:nvSpPr>
-          <p:cNvPr id="6" name="Text 4"/>
+          <p:cNvPr id="7" name="Text 5"/>
           <p:cNvSpPr/>
           <p:nvPr/>
         </p:nvSpPr>
@@ -3277,7 +3832,7 @@
                 <a:ea typeface="Aptos Display" pitchFamily="34" charset="-122"/>
                 <a:cs typeface="Aptos Display" pitchFamily="34" charset="-120"/>
               </a:rPr>
-              <a:t>Risks, Failure Modes, and Guardrails Continued</a:t>
+              <a:t>Topic Deep Dive Continued</a:t>
             </a:r>
             <a:endParaRPr lang="en-US" sz="2700" dirty="0"/>
           </a:p>
@@ -3285,32 +3840,178 @@
       </p:sp>
       <p:sp>
         <p:nvSpPr>
-          <p:cNvPr id="7" name="Text 5"/>
-          <p:cNvSpPr/>
-          <p:nvPr/>
-        </p:nvSpPr>
-        <p:spPr>
-          <a:xfrm>
-            <a:off x="822960" y="1325880"/>
-            <a:ext cx="10378440" cy="4800600"/>
-          </a:xfrm>
-          <a:prstGeom prst="rect">
-            <a:avLst/>
-          </a:prstGeom>
-          <a:noFill/>
-          <a:ln/>
-        </p:spPr>
-        <p:txBody>
-          <a:bodyPr wrap="square" lIns="1016" tIns="1016" rIns="1016" bIns="1016" rtlCol="0" anchor="t">
+          <p:cNvPr id="8" name="Text 6"/>
+          <p:cNvSpPr/>
+          <p:nvPr/>
+        </p:nvSpPr>
+        <p:spPr>
+          <a:xfrm>
+            <a:off x="868680" y="1417320"/>
+            <a:ext cx="6675120" cy="4434840"/>
+          </a:xfrm>
+          <a:prstGeom prst="rect">
+            <a:avLst/>
+          </a:prstGeom>
+          <a:noFill/>
+          <a:ln/>
+        </p:spPr>
+        <p:txBody>
+          <a:bodyPr wrap="square" lIns="635" tIns="635" rIns="635" bIns="635" rtlCol="0" anchor="t">
             <a:normAutofit/>
           </a:bodyPr>
           <a:lstStyle/>
           <a:p>
+            <a:r>
+              <a:rPr lang="en-US" sz="1700" dirty="0">
+                <a:solidFill>
+                  <a:srgbClr val="17364A"/>
+                </a:solidFill>
+                <a:latin typeface="Aptos" pitchFamily="34" charset="0"/>
+                <a:ea typeface="Aptos" pitchFamily="34" charset="-122"/>
+                <a:cs typeface="Aptos" pitchFamily="34" charset="-120"/>
+              </a:rPr>
+              <a:t>Measuring social good requires more than counting users or outputs.</a:t>
+            </a:r>
+            <a:endParaRPr lang="en-US" sz="1700" dirty="0"/>
+          </a:p>
+          <a:p>
+            <a:r>
+              <a:rPr lang="en-US" sz="1700" dirty="0">
+                <a:solidFill>
+                  <a:srgbClr val="17364A"/>
+                </a:solidFill>
+                <a:latin typeface="Aptos" pitchFamily="34" charset="0"/>
+                <a:ea typeface="Aptos" pitchFamily="34" charset="-122"/>
+                <a:cs typeface="Aptos" pitchFamily="34" charset="-120"/>
+              </a:rPr>
+              <a:t>Agencies should measure whether the AI-supported workflow improves timeliness, access, quality, fairness, staff burden,.</a:t>
+            </a:r>
+            <a:endParaRPr lang="en-US" sz="1700" dirty="0"/>
+          </a:p>
+          <a:p>
+            <a:r>
+              <a:rPr lang="en-US" sz="1700" dirty="0">
+                <a:solidFill>
+                  <a:srgbClr val="17364A"/>
+                </a:solidFill>
+                <a:latin typeface="Aptos" pitchFamily="34" charset="0"/>
+                <a:ea typeface="Aptos" pitchFamily="34" charset="-122"/>
+                <a:cs typeface="Aptos" pitchFamily="34" charset="-120"/>
+              </a:rPr>
+              <a:t>They should also monitor unintended consequences, such as reduced service quality, increased complaints, inequitable.</a:t>
+            </a:r>
+            <a:endParaRPr lang="en-US" sz="1700" dirty="0"/>
+          </a:p>
+          <a:p>
+            <a:r>
+              <a:rPr lang="en-US" sz="1700" dirty="0">
+                <a:solidFill>
+                  <a:srgbClr val="17364A"/>
+                </a:solidFill>
+                <a:latin typeface="Aptos" pitchFamily="34" charset="0"/>
+                <a:ea typeface="Aptos" pitchFamily="34" charset="-122"/>
+                <a:cs typeface="Aptos" pitchFamily="34" charset="-120"/>
+              </a:rPr>
+              <a:t>Responsible innovation includes sunset and rollback planning.</a:t>
+            </a:r>
+            <a:endParaRPr lang="en-US" sz="1700" dirty="0"/>
+          </a:p>
+        </p:txBody>
+      </p:sp>
+      <p:sp>
+        <p:nvSpPr>
+          <p:cNvPr id="9" name="Shape 7"/>
+          <p:cNvSpPr/>
+          <p:nvPr/>
+        </p:nvSpPr>
+        <p:spPr>
+          <a:xfrm>
+            <a:off x="7909560" y="1417320"/>
+            <a:ext cx="3154680" cy="1828800"/>
+          </a:xfrm>
+          <a:prstGeom prst="roundRect">
+            <a:avLst>
+              <a:gd name="adj" fmla="val 6000"/>
+            </a:avLst>
+          </a:prstGeom>
+          <a:solidFill>
+            <a:srgbClr val="EEF8ED"/>
+          </a:solidFill>
+          <a:ln w="12700">
+            <a:solidFill>
+              <a:srgbClr val="B9D7E6"/>
+            </a:solidFill>
+            <a:prstDash val="solid"/>
+          </a:ln>
+        </p:spPr>
+      </p:sp>
+      <p:sp>
+        <p:nvSpPr>
+          <p:cNvPr id="10" name="Text 8"/>
+          <p:cNvSpPr/>
+          <p:nvPr/>
+        </p:nvSpPr>
+        <p:spPr>
+          <a:xfrm>
+            <a:off x="8074152" y="1563624"/>
+            <a:ext cx="2825496" cy="201168"/>
+          </a:xfrm>
+          <a:prstGeom prst="rect">
+            <a:avLst/>
+          </a:prstGeom>
+          <a:noFill/>
+          <a:ln/>
+        </p:spPr>
+        <p:txBody>
+          <a:bodyPr wrap="square" lIns="0" tIns="0" rIns="0" bIns="0" rtlCol="0" anchor="ctr"/>
+          <a:lstStyle/>
+          <a:p>
             <a:pPr indent="0" marL="0">
               <a:buNone/>
             </a:pPr>
             <a:r>
-              <a:rPr lang="en-US" sz="1420" dirty="0">
+              <a:rPr lang="en-US" sz="950" b="1" dirty="0">
+                <a:solidFill>
+                  <a:srgbClr val="0068B7"/>
+                </a:solidFill>
+                <a:latin typeface="Aptos" pitchFamily="34" charset="0"/>
+                <a:ea typeface="Aptos" pitchFamily="34" charset="-122"/>
+                <a:cs typeface="Aptos" pitchFamily="34" charset="-120"/>
+              </a:rPr>
+              <a:t>Key idea</a:t>
+            </a:r>
+            <a:endParaRPr lang="en-US" sz="950" dirty="0"/>
+          </a:p>
+        </p:txBody>
+      </p:sp>
+      <p:sp>
+        <p:nvSpPr>
+          <p:cNvPr id="11" name="Text 9"/>
+          <p:cNvSpPr/>
+          <p:nvPr/>
+        </p:nvSpPr>
+        <p:spPr>
+          <a:xfrm>
+            <a:off x="8074152" y="1856232"/>
+            <a:ext cx="2825496" cy="1261872"/>
+          </a:xfrm>
+          <a:prstGeom prst="rect">
+            <a:avLst/>
+          </a:prstGeom>
+          <a:noFill/>
+          <a:ln/>
+        </p:spPr>
+        <p:txBody>
+          <a:bodyPr wrap="square" lIns="0" tIns="0" rIns="0" bIns="0" rtlCol="0" anchor="t">
+            <a:normAutofit/>
+          </a:bodyPr>
+          <a:lstStyle/>
+          <a:p>
+            <a:pPr indent="0" marL="0">
+              <a:buNone/>
+            </a:pPr>
+            <a:r>
+              <a:rPr lang="en-US" sz="1250" dirty="0">
                 <a:solidFill>
                   <a:srgbClr val="17364A"/>
                 </a:solidFill>
@@ -3318,9 +4019,116 @@
                 <a:ea typeface="Aptos" pitchFamily="34" charset="-122"/>
                 <a:cs typeface="Aptos" pitchFamily="34" charset="-120"/>
               </a:rPr>
-              <a:t>Resource diversion. AI projects may consume resources that could be used for more effective interventions. Guardrails include impact measurement, cost-benefit review, and periodic reassessment.</a:t>
-            </a:r>
-            <a:endParaRPr lang="en-US" sz="1420" dirty="0"/>
+              <a:t>Measuring social good requires more than counting users or outputs.</a:t>
+            </a:r>
+            <a:endParaRPr lang="en-US" sz="1250" dirty="0"/>
+          </a:p>
+        </p:txBody>
+      </p:sp>
+      <p:sp>
+        <p:nvSpPr>
+          <p:cNvPr id="12" name="Shape 10"/>
+          <p:cNvSpPr/>
+          <p:nvPr/>
+        </p:nvSpPr>
+        <p:spPr>
+          <a:xfrm>
+            <a:off x="7909560" y="3520440"/>
+            <a:ext cx="3154680" cy="1737360"/>
+          </a:xfrm>
+          <a:prstGeom prst="roundRect">
+            <a:avLst>
+              <a:gd name="adj" fmla="val 6316"/>
+            </a:avLst>
+          </a:prstGeom>
+          <a:solidFill>
+            <a:srgbClr val="EAF6F8"/>
+          </a:solidFill>
+          <a:ln w="12700">
+            <a:solidFill>
+              <a:srgbClr val="B9D7E6"/>
+            </a:solidFill>
+            <a:prstDash val="solid"/>
+          </a:ln>
+        </p:spPr>
+      </p:sp>
+      <p:sp>
+        <p:nvSpPr>
+          <p:cNvPr id="13" name="Text 11"/>
+          <p:cNvSpPr/>
+          <p:nvPr/>
+        </p:nvSpPr>
+        <p:spPr>
+          <a:xfrm>
+            <a:off x="8074152" y="3666744"/>
+            <a:ext cx="2825496" cy="201168"/>
+          </a:xfrm>
+          <a:prstGeom prst="rect">
+            <a:avLst/>
+          </a:prstGeom>
+          <a:noFill/>
+          <a:ln/>
+        </p:spPr>
+        <p:txBody>
+          <a:bodyPr wrap="square" lIns="0" tIns="0" rIns="0" bIns="0" rtlCol="0" anchor="ctr"/>
+          <a:lstStyle/>
+          <a:p>
+            <a:pPr indent="0" marL="0">
+              <a:buNone/>
+            </a:pPr>
+            <a:r>
+              <a:rPr lang="en-US" sz="950" b="1" dirty="0">
+                <a:solidFill>
+                  <a:srgbClr val="0068B7"/>
+                </a:solidFill>
+                <a:latin typeface="Aptos" pitchFamily="34" charset="0"/>
+                <a:ea typeface="Aptos" pitchFamily="34" charset="-122"/>
+                <a:cs typeface="Aptos" pitchFamily="34" charset="-120"/>
+              </a:rPr>
+              <a:t>Use this for</a:t>
+            </a:r>
+            <a:endParaRPr lang="en-US" sz="950" dirty="0"/>
+          </a:p>
+        </p:txBody>
+      </p:sp>
+      <p:sp>
+        <p:nvSpPr>
+          <p:cNvPr id="14" name="Text 12"/>
+          <p:cNvSpPr/>
+          <p:nvPr/>
+        </p:nvSpPr>
+        <p:spPr>
+          <a:xfrm>
+            <a:off x="8074152" y="3959352"/>
+            <a:ext cx="2825496" cy="1170432"/>
+          </a:xfrm>
+          <a:prstGeom prst="rect">
+            <a:avLst/>
+          </a:prstGeom>
+          <a:noFill/>
+          <a:ln/>
+        </p:spPr>
+        <p:txBody>
+          <a:bodyPr wrap="square" lIns="0" tIns="0" rIns="0" bIns="0" rtlCol="0" anchor="t">
+            <a:normAutofit/>
+          </a:bodyPr>
+          <a:lstStyle/>
+          <a:p>
+            <a:pPr indent="0" marL="0">
+              <a:buNone/>
+            </a:pPr>
+            <a:r>
+              <a:rPr lang="en-US" sz="1250" dirty="0">
+                <a:solidFill>
+                  <a:srgbClr val="17364A"/>
+                </a:solidFill>
+                <a:latin typeface="Aptos" pitchFamily="34" charset="0"/>
+                <a:ea typeface="Aptos" pitchFamily="34" charset="-122"/>
+                <a:cs typeface="Aptos" pitchFamily="34" charset="-120"/>
+              </a:rPr>
+              <a:t>Connect the concept to public health decisions, safeguards, documentation, or implementation work.</a:t>
+            </a:r>
+            <a:endParaRPr lang="en-US" sz="1250" dirty="0"/>
           </a:p>
         </p:txBody>
       </p:sp>
@@ -3383,7 +4191,32 @@
       </p:sp>
       <p:sp>
         <p:nvSpPr>
-          <p:cNvPr id="3" name="Text 1"/>
+          <p:cNvPr id="3" name="Shape 1"/>
+          <p:cNvSpPr/>
+          <p:nvPr/>
+        </p:nvSpPr>
+        <p:spPr>
+          <a:xfrm>
+            <a:off x="0" y="164592"/>
+            <a:ext cx="146304" cy="6693408"/>
+          </a:xfrm>
+          <a:prstGeom prst="rect">
+            <a:avLst/>
+          </a:prstGeom>
+          <a:solidFill>
+            <a:srgbClr val="2F8A28"/>
+          </a:solidFill>
+          <a:ln w="12700">
+            <a:solidFill>
+              <a:srgbClr val="2F8A28"/>
+            </a:solidFill>
+            <a:prstDash val="solid"/>
+          </a:ln>
+        </p:spPr>
+      </p:sp>
+      <p:sp>
+        <p:nvSpPr>
+          <p:cNvPr id="4" name="Text 2"/>
           <p:cNvSpPr/>
           <p:nvPr/>
         </p:nvSpPr>
@@ -3422,7 +4255,7 @@
       </p:sp>
       <p:sp>
         <p:nvSpPr>
-          <p:cNvPr id="4" name="Text 2"/>
+          <p:cNvPr id="5" name="Text 3"/>
           <p:cNvSpPr/>
           <p:nvPr/>
         </p:nvSpPr>
@@ -3461,7 +4294,7 @@
       </p:sp>
       <p:sp>
         <p:nvSpPr>
-          <p:cNvPr id="5" name="Text 3"/>
+          <p:cNvPr id="6" name="Text 4"/>
           <p:cNvSpPr/>
           <p:nvPr/>
         </p:nvSpPr>
@@ -3500,13 +4333,77 @@
       </p:sp>
       <p:sp>
         <p:nvSpPr>
-          <p:cNvPr id="6" name="Text 4"/>
+          <p:cNvPr id="7" name="Shape 5"/>
           <p:cNvSpPr/>
           <p:nvPr/>
         </p:nvSpPr>
         <p:spPr>
           <a:xfrm>
             <a:off x="640080" y="658368"/>
+            <a:ext cx="420624" cy="420624"/>
+          </a:xfrm>
+          <a:prstGeom prst="ellipse">
+            <a:avLst/>
+          </a:prstGeom>
+          <a:solidFill>
+            <a:srgbClr val="0068B7"/>
+          </a:solidFill>
+          <a:ln w="12700">
+            <a:solidFill>
+              <a:srgbClr val="0068B7"/>
+            </a:solidFill>
+            <a:prstDash val="solid"/>
+          </a:ln>
+        </p:spPr>
+      </p:sp>
+      <p:sp>
+        <p:nvSpPr>
+          <p:cNvPr id="8" name="Text 6"/>
+          <p:cNvSpPr/>
+          <p:nvPr/>
+        </p:nvSpPr>
+        <p:spPr>
+          <a:xfrm>
+            <a:off x="640080" y="731520"/>
+            <a:ext cx="420624" cy="164592"/>
+          </a:xfrm>
+          <a:prstGeom prst="rect">
+            <a:avLst/>
+          </a:prstGeom>
+          <a:noFill/>
+          <a:ln/>
+        </p:spPr>
+        <p:txBody>
+          <a:bodyPr wrap="square" lIns="0" tIns="0" rIns="0" bIns="0" rtlCol="0" anchor="ctr"/>
+          <a:lstStyle/>
+          <a:p>
+            <a:pPr algn="ctr" indent="0" marL="0">
+              <a:buNone/>
+            </a:pPr>
+            <a:r>
+              <a:rPr lang="en-US" sz="1100" b="1" dirty="0">
+                <a:solidFill>
+                  <a:srgbClr val="FFFFFF"/>
+                </a:solidFill>
+                <a:latin typeface="Aptos" pitchFamily="34" charset="0"/>
+                <a:ea typeface="Aptos" pitchFamily="34" charset="-122"/>
+                <a:cs typeface="Aptos" pitchFamily="34" charset="-120"/>
+              </a:rPr>
+              <a:t>6</a:t>
+            </a:r>
+            <a:endParaRPr lang="en-US" sz="1100" dirty="0"/>
+          </a:p>
+        </p:txBody>
+      </p:sp>
+      <p:sp>
+        <p:nvSpPr>
+          <p:cNvPr id="9" name="Text 7"/>
+          <p:cNvSpPr/>
+          <p:nvPr/>
+        </p:nvSpPr>
+        <p:spPr>
+          <a:xfrm>
+            <a:off x="640080" y="621792"/>
             <a:ext cx="10881360" cy="566928"/>
           </a:xfrm>
           <a:prstGeom prst="rect">
@@ -3533,7 +4430,7 @@
                 <a:ea typeface="Aptos Display" pitchFamily="34" charset="-122"/>
                 <a:cs typeface="Aptos Display" pitchFamily="34" charset="-120"/>
               </a:rPr>
-              <a:t>Application to AI-Supported Workflows</a:t>
+              <a:t>Risks, Failure Modes, and Guardrails</a:t>
             </a:r>
             <a:endParaRPr lang="en-US" sz="2700" dirty="0"/>
           </a:p>
@@ -3541,32 +4438,178 @@
       </p:sp>
       <p:sp>
         <p:nvSpPr>
-          <p:cNvPr id="7" name="Text 5"/>
-          <p:cNvSpPr/>
-          <p:nvPr/>
-        </p:nvSpPr>
-        <p:spPr>
-          <a:xfrm>
-            <a:off x="822960" y="1325880"/>
-            <a:ext cx="10378440" cy="4800600"/>
-          </a:xfrm>
-          <a:prstGeom prst="rect">
-            <a:avLst/>
-          </a:prstGeom>
-          <a:noFill/>
-          <a:ln/>
-        </p:spPr>
-        <p:txBody>
-          <a:bodyPr wrap="square" lIns="1016" tIns="1016" rIns="1016" bIns="1016" rtlCol="0" anchor="t">
+          <p:cNvPr id="10" name="Text 8"/>
+          <p:cNvSpPr/>
+          <p:nvPr/>
+        </p:nvSpPr>
+        <p:spPr>
+          <a:xfrm>
+            <a:off x="868680" y="1417320"/>
+            <a:ext cx="6675120" cy="4434840"/>
+          </a:xfrm>
+          <a:prstGeom prst="rect">
+            <a:avLst/>
+          </a:prstGeom>
+          <a:noFill/>
+          <a:ln/>
+        </p:spPr>
+        <p:txBody>
+          <a:bodyPr wrap="square" lIns="635" tIns="635" rIns="635" bIns="635" rtlCol="0" anchor="t">
             <a:normAutofit/>
           </a:bodyPr>
           <a:lstStyle/>
           <a:p>
+            <a:r>
+              <a:rPr lang="en-US" sz="1700" dirty="0">
+                <a:solidFill>
+                  <a:srgbClr val="17364A"/>
+                </a:solidFill>
+                <a:latin typeface="Aptos" pitchFamily="34" charset="0"/>
+                <a:ea typeface="Aptos" pitchFamily="34" charset="-122"/>
+                <a:cs typeface="Aptos" pitchFamily="34" charset="-120"/>
+              </a:rPr>
+              <a:t>Technology-first design.</a:t>
+            </a:r>
+            <a:endParaRPr lang="en-US" sz="1700" dirty="0"/>
+          </a:p>
+          <a:p>
+            <a:r>
+              <a:rPr lang="en-US" sz="1700" dirty="0">
+                <a:solidFill>
+                  <a:srgbClr val="17364A"/>
+                </a:solidFill>
+                <a:latin typeface="Aptos" pitchFamily="34" charset="0"/>
+                <a:ea typeface="Aptos" pitchFamily="34" charset="-122"/>
+                <a:cs typeface="Aptos" pitchFamily="34" charset="-120"/>
+              </a:rPr>
+              <a:t>A tool may be adopted because it is novel rather than because it solves a public health problem.</a:t>
+            </a:r>
+            <a:endParaRPr lang="en-US" sz="1700" dirty="0"/>
+          </a:p>
+          <a:p>
+            <a:r>
+              <a:rPr lang="en-US" sz="1700" dirty="0">
+                <a:solidFill>
+                  <a:srgbClr val="17364A"/>
+                </a:solidFill>
+                <a:latin typeface="Aptos" pitchFamily="34" charset="0"/>
+                <a:ea typeface="Aptos" pitchFamily="34" charset="-122"/>
+                <a:cs typeface="Aptos" pitchFamily="34" charset="-120"/>
+              </a:rPr>
+              <a:t>Guardrails include problem-first planning, alternatives analysis, and public value criteria.</a:t>
+            </a:r>
+            <a:endParaRPr lang="en-US" sz="1700" dirty="0"/>
+          </a:p>
+          <a:p>
+            <a:r>
+              <a:rPr lang="en-US" sz="1700" dirty="0">
+                <a:solidFill>
+                  <a:srgbClr val="17364A"/>
+                </a:solidFill>
+                <a:latin typeface="Aptos" pitchFamily="34" charset="0"/>
+                <a:ea typeface="Aptos" pitchFamily="34" charset="-122"/>
+                <a:cs typeface="Aptos" pitchFamily="34" charset="-120"/>
+              </a:rPr>
+              <a:t>Unequal benefit.</a:t>
+            </a:r>
+            <a:endParaRPr lang="en-US" sz="1700" dirty="0"/>
+          </a:p>
+        </p:txBody>
+      </p:sp>
+      <p:sp>
+        <p:nvSpPr>
+          <p:cNvPr id="11" name="Shape 9"/>
+          <p:cNvSpPr/>
+          <p:nvPr/>
+        </p:nvSpPr>
+        <p:spPr>
+          <a:xfrm>
+            <a:off x="7909560" y="1417320"/>
+            <a:ext cx="3154680" cy="1828800"/>
+          </a:xfrm>
+          <a:prstGeom prst="roundRect">
+            <a:avLst>
+              <a:gd name="adj" fmla="val 6000"/>
+            </a:avLst>
+          </a:prstGeom>
+          <a:solidFill>
+            <a:srgbClr val="EEF8ED"/>
+          </a:solidFill>
+          <a:ln w="12700">
+            <a:solidFill>
+              <a:srgbClr val="B9D7E6"/>
+            </a:solidFill>
+            <a:prstDash val="solid"/>
+          </a:ln>
+        </p:spPr>
+      </p:sp>
+      <p:sp>
+        <p:nvSpPr>
+          <p:cNvPr id="12" name="Text 10"/>
+          <p:cNvSpPr/>
+          <p:nvPr/>
+        </p:nvSpPr>
+        <p:spPr>
+          <a:xfrm>
+            <a:off x="8074152" y="1563624"/>
+            <a:ext cx="2825496" cy="201168"/>
+          </a:xfrm>
+          <a:prstGeom prst="rect">
+            <a:avLst/>
+          </a:prstGeom>
+          <a:noFill/>
+          <a:ln/>
+        </p:spPr>
+        <p:txBody>
+          <a:bodyPr wrap="square" lIns="0" tIns="0" rIns="0" bIns="0" rtlCol="0" anchor="ctr"/>
+          <a:lstStyle/>
+          <a:p>
             <a:pPr indent="0" marL="0">
               <a:buNone/>
             </a:pPr>
             <a:r>
-              <a:rPr lang="en-US" sz="1420" dirty="0">
+              <a:rPr lang="en-US" sz="950" b="1" dirty="0">
+                <a:solidFill>
+                  <a:srgbClr val="0068B7"/>
+                </a:solidFill>
+                <a:latin typeface="Aptos" pitchFamily="34" charset="0"/>
+                <a:ea typeface="Aptos" pitchFamily="34" charset="-122"/>
+                <a:cs typeface="Aptos" pitchFamily="34" charset="-120"/>
+              </a:rPr>
+              <a:t>Key idea</a:t>
+            </a:r>
+            <a:endParaRPr lang="en-US" sz="950" dirty="0"/>
+          </a:p>
+        </p:txBody>
+      </p:sp>
+      <p:sp>
+        <p:nvSpPr>
+          <p:cNvPr id="13" name="Text 11"/>
+          <p:cNvSpPr/>
+          <p:nvPr/>
+        </p:nvSpPr>
+        <p:spPr>
+          <a:xfrm>
+            <a:off x="8074152" y="1856232"/>
+            <a:ext cx="2825496" cy="1261872"/>
+          </a:xfrm>
+          <a:prstGeom prst="rect">
+            <a:avLst/>
+          </a:prstGeom>
+          <a:noFill/>
+          <a:ln/>
+        </p:spPr>
+        <p:txBody>
+          <a:bodyPr wrap="square" lIns="0" tIns="0" rIns="0" bIns="0" rtlCol="0" anchor="t">
+            <a:normAutofit/>
+          </a:bodyPr>
+          <a:lstStyle/>
+          <a:p>
+            <a:pPr indent="0" marL="0">
+              <a:buNone/>
+            </a:pPr>
+            <a:r>
+              <a:rPr lang="en-US" sz="1250" dirty="0">
                 <a:solidFill>
                   <a:srgbClr val="17364A"/>
                 </a:solidFill>
@@ -3574,9 +4617,116 @@
                 <a:ea typeface="Aptos" pitchFamily="34" charset="-122"/>
                 <a:cs typeface="Aptos" pitchFamily="34" charset="-120"/>
               </a:rPr>
-              <a:t>AI for Social Good applies to every AI method. Generative AI may improve plain-language communication, but it must be accurate, accessible, and culturally appropriate. Predictive analytics may guide supportive outreach, but it should not become a tool for exclusion. RAG systems may improve staff access to guidance, but they must include current and authorized content. Agentic workflows may reduce burden, but they require boundaries and human accountability. The strongest public health AI projects define social good in operational terms. They identify the population benefit, the equity goal, the workflow change, the safeguards, and the measurement plan. They also acknowledge tradeoffs and document why AI is an appropriate tool compared with non-AI alternatives.</a:t>
-            </a:r>
-            <a:endParaRPr lang="en-US" sz="1420" dirty="0"/>
+              <a:t>Technology-first design.</a:t>
+            </a:r>
+            <a:endParaRPr lang="en-US" sz="1250" dirty="0"/>
+          </a:p>
+        </p:txBody>
+      </p:sp>
+      <p:sp>
+        <p:nvSpPr>
+          <p:cNvPr id="14" name="Shape 12"/>
+          <p:cNvSpPr/>
+          <p:nvPr/>
+        </p:nvSpPr>
+        <p:spPr>
+          <a:xfrm>
+            <a:off x="7909560" y="3520440"/>
+            <a:ext cx="3154680" cy="1737360"/>
+          </a:xfrm>
+          <a:prstGeom prst="roundRect">
+            <a:avLst>
+              <a:gd name="adj" fmla="val 6316"/>
+            </a:avLst>
+          </a:prstGeom>
+          <a:solidFill>
+            <a:srgbClr val="EAF6F8"/>
+          </a:solidFill>
+          <a:ln w="12700">
+            <a:solidFill>
+              <a:srgbClr val="B9D7E6"/>
+            </a:solidFill>
+            <a:prstDash val="solid"/>
+          </a:ln>
+        </p:spPr>
+      </p:sp>
+      <p:sp>
+        <p:nvSpPr>
+          <p:cNvPr id="15" name="Text 13"/>
+          <p:cNvSpPr/>
+          <p:nvPr/>
+        </p:nvSpPr>
+        <p:spPr>
+          <a:xfrm>
+            <a:off x="8074152" y="3666744"/>
+            <a:ext cx="2825496" cy="201168"/>
+          </a:xfrm>
+          <a:prstGeom prst="rect">
+            <a:avLst/>
+          </a:prstGeom>
+          <a:noFill/>
+          <a:ln/>
+        </p:spPr>
+        <p:txBody>
+          <a:bodyPr wrap="square" lIns="0" tIns="0" rIns="0" bIns="0" rtlCol="0" anchor="ctr"/>
+          <a:lstStyle/>
+          <a:p>
+            <a:pPr indent="0" marL="0">
+              <a:buNone/>
+            </a:pPr>
+            <a:r>
+              <a:rPr lang="en-US" sz="950" b="1" dirty="0">
+                <a:solidFill>
+                  <a:srgbClr val="0068B7"/>
+                </a:solidFill>
+                <a:latin typeface="Aptos" pitchFamily="34" charset="0"/>
+                <a:ea typeface="Aptos" pitchFamily="34" charset="-122"/>
+                <a:cs typeface="Aptos" pitchFamily="34" charset="-120"/>
+              </a:rPr>
+              <a:t>Use this for</a:t>
+            </a:r>
+            <a:endParaRPr lang="en-US" sz="950" dirty="0"/>
+          </a:p>
+        </p:txBody>
+      </p:sp>
+      <p:sp>
+        <p:nvSpPr>
+          <p:cNvPr id="16" name="Text 14"/>
+          <p:cNvSpPr/>
+          <p:nvPr/>
+        </p:nvSpPr>
+        <p:spPr>
+          <a:xfrm>
+            <a:off x="8074152" y="3959352"/>
+            <a:ext cx="2825496" cy="1170432"/>
+          </a:xfrm>
+          <a:prstGeom prst="rect">
+            <a:avLst/>
+          </a:prstGeom>
+          <a:noFill/>
+          <a:ln/>
+        </p:spPr>
+        <p:txBody>
+          <a:bodyPr wrap="square" lIns="0" tIns="0" rIns="0" bIns="0" rtlCol="0" anchor="t">
+            <a:normAutofit/>
+          </a:bodyPr>
+          <a:lstStyle/>
+          <a:p>
+            <a:pPr indent="0" marL="0">
+              <a:buNone/>
+            </a:pPr>
+            <a:r>
+              <a:rPr lang="en-US" sz="1250" dirty="0">
+                <a:solidFill>
+                  <a:srgbClr val="17364A"/>
+                </a:solidFill>
+                <a:latin typeface="Aptos" pitchFamily="34" charset="0"/>
+                <a:ea typeface="Aptos" pitchFamily="34" charset="-122"/>
+                <a:cs typeface="Aptos" pitchFamily="34" charset="-120"/>
+              </a:rPr>
+              <a:t>Connect the concept to public health decisions, safeguards, documentation, or implementation work.</a:t>
+            </a:r>
+            <a:endParaRPr lang="en-US" sz="1250" dirty="0"/>
           </a:p>
         </p:txBody>
       </p:sp>
@@ -3639,7 +4789,32 @@
       </p:sp>
       <p:sp>
         <p:nvSpPr>
-          <p:cNvPr id="3" name="Text 1"/>
+          <p:cNvPr id="3" name="Shape 1"/>
+          <p:cNvSpPr/>
+          <p:nvPr/>
+        </p:nvSpPr>
+        <p:spPr>
+          <a:xfrm>
+            <a:off x="0" y="164592"/>
+            <a:ext cx="146304" cy="6693408"/>
+          </a:xfrm>
+          <a:prstGeom prst="rect">
+            <a:avLst/>
+          </a:prstGeom>
+          <a:solidFill>
+            <a:srgbClr val="2F8A28"/>
+          </a:solidFill>
+          <a:ln w="12700">
+            <a:solidFill>
+              <a:srgbClr val="2F8A28"/>
+            </a:solidFill>
+            <a:prstDash val="solid"/>
+          </a:ln>
+        </p:spPr>
+      </p:sp>
+      <p:sp>
+        <p:nvSpPr>
+          <p:cNvPr id="4" name="Text 2"/>
           <p:cNvSpPr/>
           <p:nvPr/>
         </p:nvSpPr>
@@ -3678,7 +4853,7 @@
       </p:sp>
       <p:sp>
         <p:nvSpPr>
-          <p:cNvPr id="4" name="Text 2"/>
+          <p:cNvPr id="5" name="Text 3"/>
           <p:cNvSpPr/>
           <p:nvPr/>
         </p:nvSpPr>
@@ -3717,7 +4892,7 @@
       </p:sp>
       <p:sp>
         <p:nvSpPr>
-          <p:cNvPr id="5" name="Text 3"/>
+          <p:cNvPr id="6" name="Text 4"/>
           <p:cNvSpPr/>
           <p:nvPr/>
         </p:nvSpPr>
@@ -3756,7 +4931,7 @@
       </p:sp>
       <p:sp>
         <p:nvSpPr>
-          <p:cNvPr id="6" name="Text 4"/>
+          <p:cNvPr id="7" name="Text 5"/>
           <p:cNvSpPr/>
           <p:nvPr/>
         </p:nvSpPr>
@@ -3789,7 +4964,7 @@
                 <a:ea typeface="Aptos Display" pitchFamily="34" charset="-122"/>
                 <a:cs typeface="Aptos Display" pitchFamily="34" charset="-120"/>
               </a:rPr>
-              <a:t>Reflection Questions</a:t>
+              <a:t>Risks, Failure Modes, and Guardrails Continued</a:t>
             </a:r>
             <a:endParaRPr lang="en-US" sz="2700" dirty="0"/>
           </a:p>
@@ -3797,32 +4972,164 @@
       </p:sp>
       <p:sp>
         <p:nvSpPr>
-          <p:cNvPr id="7" name="Text 5"/>
-          <p:cNvSpPr/>
-          <p:nvPr/>
-        </p:nvSpPr>
-        <p:spPr>
-          <a:xfrm>
-            <a:off x="822960" y="1325880"/>
-            <a:ext cx="10378440" cy="4800600"/>
-          </a:xfrm>
-          <a:prstGeom prst="rect">
-            <a:avLst/>
-          </a:prstGeom>
-          <a:noFill/>
-          <a:ln/>
-        </p:spPr>
-        <p:txBody>
-          <a:bodyPr wrap="square" lIns="1016" tIns="1016" rIns="1016" bIns="1016" rtlCol="0" anchor="t">
+          <p:cNvPr id="8" name="Text 6"/>
+          <p:cNvSpPr/>
+          <p:nvPr/>
+        </p:nvSpPr>
+        <p:spPr>
+          <a:xfrm>
+            <a:off x="868680" y="1417320"/>
+            <a:ext cx="6675120" cy="4434840"/>
+          </a:xfrm>
+          <a:prstGeom prst="rect">
+            <a:avLst/>
+          </a:prstGeom>
+          <a:noFill/>
+          <a:ln/>
+        </p:spPr>
+        <p:txBody>
+          <a:bodyPr wrap="square" lIns="635" tIns="635" rIns="635" bIns="635" rtlCol="0" anchor="t">
             <a:normAutofit/>
           </a:bodyPr>
           <a:lstStyle/>
           <a:p>
+            <a:r>
+              <a:rPr lang="en-US" sz="1700" dirty="0">
+                <a:solidFill>
+                  <a:srgbClr val="17364A"/>
+                </a:solidFill>
+                <a:latin typeface="Aptos" pitchFamily="34" charset="0"/>
+                <a:ea typeface="Aptos" pitchFamily="34" charset="-122"/>
+                <a:cs typeface="Aptos" pitchFamily="34" charset="-120"/>
+              </a:rPr>
+              <a:t>Resource diversion.</a:t>
+            </a:r>
+            <a:endParaRPr lang="en-US" sz="1700" dirty="0"/>
+          </a:p>
+          <a:p>
+            <a:r>
+              <a:rPr lang="en-US" sz="1700" dirty="0">
+                <a:solidFill>
+                  <a:srgbClr val="17364A"/>
+                </a:solidFill>
+                <a:latin typeface="Aptos" pitchFamily="34" charset="0"/>
+                <a:ea typeface="Aptos" pitchFamily="34" charset="-122"/>
+                <a:cs typeface="Aptos" pitchFamily="34" charset="-120"/>
+              </a:rPr>
+              <a:t>AI projects may consume resources that could be used for more effective interventions.</a:t>
+            </a:r>
+            <a:endParaRPr lang="en-US" sz="1700" dirty="0"/>
+          </a:p>
+          <a:p>
+            <a:r>
+              <a:rPr lang="en-US" sz="1700" dirty="0">
+                <a:solidFill>
+                  <a:srgbClr val="17364A"/>
+                </a:solidFill>
+                <a:latin typeface="Aptos" pitchFamily="34" charset="0"/>
+                <a:ea typeface="Aptos" pitchFamily="34" charset="-122"/>
+                <a:cs typeface="Aptos" pitchFamily="34" charset="-120"/>
+              </a:rPr>
+              <a:t>Guardrails include impact measurement, cost-benefit review, and periodic reassessment.</a:t>
+            </a:r>
+            <a:endParaRPr lang="en-US" sz="1700" dirty="0"/>
+          </a:p>
+        </p:txBody>
+      </p:sp>
+      <p:sp>
+        <p:nvSpPr>
+          <p:cNvPr id="9" name="Shape 7"/>
+          <p:cNvSpPr/>
+          <p:nvPr/>
+        </p:nvSpPr>
+        <p:spPr>
+          <a:xfrm>
+            <a:off x="7909560" y="1417320"/>
+            <a:ext cx="3154680" cy="1828800"/>
+          </a:xfrm>
+          <a:prstGeom prst="roundRect">
+            <a:avLst>
+              <a:gd name="adj" fmla="val 6000"/>
+            </a:avLst>
+          </a:prstGeom>
+          <a:solidFill>
+            <a:srgbClr val="EEF8ED"/>
+          </a:solidFill>
+          <a:ln w="12700">
+            <a:solidFill>
+              <a:srgbClr val="B9D7E6"/>
+            </a:solidFill>
+            <a:prstDash val="solid"/>
+          </a:ln>
+        </p:spPr>
+      </p:sp>
+      <p:sp>
+        <p:nvSpPr>
+          <p:cNvPr id="10" name="Text 8"/>
+          <p:cNvSpPr/>
+          <p:nvPr/>
+        </p:nvSpPr>
+        <p:spPr>
+          <a:xfrm>
+            <a:off x="8074152" y="1563624"/>
+            <a:ext cx="2825496" cy="201168"/>
+          </a:xfrm>
+          <a:prstGeom prst="rect">
+            <a:avLst/>
+          </a:prstGeom>
+          <a:noFill/>
+          <a:ln/>
+        </p:spPr>
+        <p:txBody>
+          <a:bodyPr wrap="square" lIns="0" tIns="0" rIns="0" bIns="0" rtlCol="0" anchor="ctr"/>
+          <a:lstStyle/>
+          <a:p>
             <a:pPr indent="0" marL="0">
               <a:buNone/>
             </a:pPr>
             <a:r>
-              <a:rPr lang="en-US" sz="1420" dirty="0">
+              <a:rPr lang="en-US" sz="950" b="1" dirty="0">
+                <a:solidFill>
+                  <a:srgbClr val="0068B7"/>
+                </a:solidFill>
+                <a:latin typeface="Aptos" pitchFamily="34" charset="0"/>
+                <a:ea typeface="Aptos" pitchFamily="34" charset="-122"/>
+                <a:cs typeface="Aptos" pitchFamily="34" charset="-120"/>
+              </a:rPr>
+              <a:t>Key idea</a:t>
+            </a:r>
+            <a:endParaRPr lang="en-US" sz="950" dirty="0"/>
+          </a:p>
+        </p:txBody>
+      </p:sp>
+      <p:sp>
+        <p:nvSpPr>
+          <p:cNvPr id="11" name="Text 9"/>
+          <p:cNvSpPr/>
+          <p:nvPr/>
+        </p:nvSpPr>
+        <p:spPr>
+          <a:xfrm>
+            <a:off x="8074152" y="1856232"/>
+            <a:ext cx="2825496" cy="1261872"/>
+          </a:xfrm>
+          <a:prstGeom prst="rect">
+            <a:avLst/>
+          </a:prstGeom>
+          <a:noFill/>
+          <a:ln/>
+        </p:spPr>
+        <p:txBody>
+          <a:bodyPr wrap="square" lIns="0" tIns="0" rIns="0" bIns="0" rtlCol="0" anchor="t">
+            <a:normAutofit/>
+          </a:bodyPr>
+          <a:lstStyle/>
+          <a:p>
+            <a:pPr indent="0" marL="0">
+              <a:buNone/>
+            </a:pPr>
+            <a:r>
+              <a:rPr lang="en-US" sz="1250" dirty="0">
                 <a:solidFill>
                   <a:srgbClr val="17364A"/>
                 </a:solidFill>
@@ -3830,9 +5137,116 @@
                 <a:ea typeface="Aptos" pitchFamily="34" charset="-122"/>
                 <a:cs typeface="Aptos" pitchFamily="34" charset="-120"/>
               </a:rPr>
-              <a:t>What public health problem would this AI use address? Who would benefit, and who could be excluded or harmed? How were affected communities involved in defining the need and safeguards?</a:t>
-            </a:r>
-            <a:endParaRPr lang="en-US" sz="1420" dirty="0"/>
+              <a:t>Resource diversion.</a:t>
+            </a:r>
+            <a:endParaRPr lang="en-US" sz="1250" dirty="0"/>
+          </a:p>
+        </p:txBody>
+      </p:sp>
+      <p:sp>
+        <p:nvSpPr>
+          <p:cNvPr id="12" name="Shape 10"/>
+          <p:cNvSpPr/>
+          <p:nvPr/>
+        </p:nvSpPr>
+        <p:spPr>
+          <a:xfrm>
+            <a:off x="7909560" y="3520440"/>
+            <a:ext cx="3154680" cy="1737360"/>
+          </a:xfrm>
+          <a:prstGeom prst="roundRect">
+            <a:avLst>
+              <a:gd name="adj" fmla="val 6316"/>
+            </a:avLst>
+          </a:prstGeom>
+          <a:solidFill>
+            <a:srgbClr val="EAF6F8"/>
+          </a:solidFill>
+          <a:ln w="12700">
+            <a:solidFill>
+              <a:srgbClr val="B9D7E6"/>
+            </a:solidFill>
+            <a:prstDash val="solid"/>
+          </a:ln>
+        </p:spPr>
+      </p:sp>
+      <p:sp>
+        <p:nvSpPr>
+          <p:cNvPr id="13" name="Text 11"/>
+          <p:cNvSpPr/>
+          <p:nvPr/>
+        </p:nvSpPr>
+        <p:spPr>
+          <a:xfrm>
+            <a:off x="8074152" y="3666744"/>
+            <a:ext cx="2825496" cy="201168"/>
+          </a:xfrm>
+          <a:prstGeom prst="rect">
+            <a:avLst/>
+          </a:prstGeom>
+          <a:noFill/>
+          <a:ln/>
+        </p:spPr>
+        <p:txBody>
+          <a:bodyPr wrap="square" lIns="0" tIns="0" rIns="0" bIns="0" rtlCol="0" anchor="ctr"/>
+          <a:lstStyle/>
+          <a:p>
+            <a:pPr indent="0" marL="0">
+              <a:buNone/>
+            </a:pPr>
+            <a:r>
+              <a:rPr lang="en-US" sz="950" b="1" dirty="0">
+                <a:solidFill>
+                  <a:srgbClr val="0068B7"/>
+                </a:solidFill>
+                <a:latin typeface="Aptos" pitchFamily="34" charset="0"/>
+                <a:ea typeface="Aptos" pitchFamily="34" charset="-122"/>
+                <a:cs typeface="Aptos" pitchFamily="34" charset="-120"/>
+              </a:rPr>
+              <a:t>Use this for</a:t>
+            </a:r>
+            <a:endParaRPr lang="en-US" sz="950" dirty="0"/>
+          </a:p>
+        </p:txBody>
+      </p:sp>
+      <p:sp>
+        <p:nvSpPr>
+          <p:cNvPr id="14" name="Text 12"/>
+          <p:cNvSpPr/>
+          <p:nvPr/>
+        </p:nvSpPr>
+        <p:spPr>
+          <a:xfrm>
+            <a:off x="8074152" y="3959352"/>
+            <a:ext cx="2825496" cy="1170432"/>
+          </a:xfrm>
+          <a:prstGeom prst="rect">
+            <a:avLst/>
+          </a:prstGeom>
+          <a:noFill/>
+          <a:ln/>
+        </p:spPr>
+        <p:txBody>
+          <a:bodyPr wrap="square" lIns="0" tIns="0" rIns="0" bIns="0" rtlCol="0" anchor="t">
+            <a:normAutofit/>
+          </a:bodyPr>
+          <a:lstStyle/>
+          <a:p>
+            <a:pPr indent="0" marL="0">
+              <a:buNone/>
+            </a:pPr>
+            <a:r>
+              <a:rPr lang="en-US" sz="1250" dirty="0">
+                <a:solidFill>
+                  <a:srgbClr val="17364A"/>
+                </a:solidFill>
+                <a:latin typeface="Aptos" pitchFamily="34" charset="0"/>
+                <a:ea typeface="Aptos" pitchFamily="34" charset="-122"/>
+                <a:cs typeface="Aptos" pitchFamily="34" charset="-120"/>
+              </a:rPr>
+              <a:t>Connect the concept to public health decisions, safeguards, documentation, or implementation work.</a:t>
+            </a:r>
+            <a:endParaRPr lang="en-US" sz="1250" dirty="0"/>
           </a:p>
         </p:txBody>
       </p:sp>
@@ -3895,7 +5309,32 @@
       </p:sp>
       <p:sp>
         <p:nvSpPr>
-          <p:cNvPr id="3" name="Text 1"/>
+          <p:cNvPr id="3" name="Shape 1"/>
+          <p:cNvSpPr/>
+          <p:nvPr/>
+        </p:nvSpPr>
+        <p:spPr>
+          <a:xfrm>
+            <a:off x="0" y="164592"/>
+            <a:ext cx="146304" cy="6693408"/>
+          </a:xfrm>
+          <a:prstGeom prst="rect">
+            <a:avLst/>
+          </a:prstGeom>
+          <a:solidFill>
+            <a:srgbClr val="2F8A28"/>
+          </a:solidFill>
+          <a:ln w="12700">
+            <a:solidFill>
+              <a:srgbClr val="2F8A28"/>
+            </a:solidFill>
+            <a:prstDash val="solid"/>
+          </a:ln>
+        </p:spPr>
+      </p:sp>
+      <p:sp>
+        <p:nvSpPr>
+          <p:cNvPr id="4" name="Text 2"/>
           <p:cNvSpPr/>
           <p:nvPr/>
         </p:nvSpPr>
@@ -3934,7 +5373,7 @@
       </p:sp>
       <p:sp>
         <p:nvSpPr>
-          <p:cNvPr id="4" name="Text 2"/>
+          <p:cNvPr id="5" name="Text 3"/>
           <p:cNvSpPr/>
           <p:nvPr/>
         </p:nvSpPr>
@@ -3973,7 +5412,7 @@
       </p:sp>
       <p:sp>
         <p:nvSpPr>
-          <p:cNvPr id="5" name="Text 3"/>
+          <p:cNvPr id="6" name="Text 4"/>
           <p:cNvSpPr/>
           <p:nvPr/>
         </p:nvSpPr>
@@ -4012,13 +5451,77 @@
       </p:sp>
       <p:sp>
         <p:nvSpPr>
-          <p:cNvPr id="6" name="Text 4"/>
+          <p:cNvPr id="7" name="Shape 5"/>
           <p:cNvSpPr/>
           <p:nvPr/>
         </p:nvSpPr>
         <p:spPr>
           <a:xfrm>
             <a:off x="640080" y="658368"/>
+            <a:ext cx="420624" cy="420624"/>
+          </a:xfrm>
+          <a:prstGeom prst="ellipse">
+            <a:avLst/>
+          </a:prstGeom>
+          <a:solidFill>
+            <a:srgbClr val="0068B7"/>
+          </a:solidFill>
+          <a:ln w="12700">
+            <a:solidFill>
+              <a:srgbClr val="0068B7"/>
+            </a:solidFill>
+            <a:prstDash val="solid"/>
+          </a:ln>
+        </p:spPr>
+      </p:sp>
+      <p:sp>
+        <p:nvSpPr>
+          <p:cNvPr id="8" name="Text 6"/>
+          <p:cNvSpPr/>
+          <p:nvPr/>
+        </p:nvSpPr>
+        <p:spPr>
+          <a:xfrm>
+            <a:off x="640080" y="731520"/>
+            <a:ext cx="420624" cy="164592"/>
+          </a:xfrm>
+          <a:prstGeom prst="rect">
+            <a:avLst/>
+          </a:prstGeom>
+          <a:noFill/>
+          <a:ln/>
+        </p:spPr>
+        <p:txBody>
+          <a:bodyPr wrap="square" lIns="0" tIns="0" rIns="0" bIns="0" rtlCol="0" anchor="ctr"/>
+          <a:lstStyle/>
+          <a:p>
+            <a:pPr algn="ctr" indent="0" marL="0">
+              <a:buNone/>
+            </a:pPr>
+            <a:r>
+              <a:rPr lang="en-US" sz="1100" b="1" dirty="0">
+                <a:solidFill>
+                  <a:srgbClr val="FFFFFF"/>
+                </a:solidFill>
+                <a:latin typeface="Aptos" pitchFamily="34" charset="0"/>
+                <a:ea typeface="Aptos" pitchFamily="34" charset="-122"/>
+                <a:cs typeface="Aptos" pitchFamily="34" charset="-120"/>
+              </a:rPr>
+              <a:t>7</a:t>
+            </a:r>
+            <a:endParaRPr lang="en-US" sz="1100" dirty="0"/>
+          </a:p>
+        </p:txBody>
+      </p:sp>
+      <p:sp>
+        <p:nvSpPr>
+          <p:cNvPr id="9" name="Text 7"/>
+          <p:cNvSpPr/>
+          <p:nvPr/>
+        </p:nvSpPr>
+        <p:spPr>
+          <a:xfrm>
+            <a:off x="640080" y="621792"/>
             <a:ext cx="10881360" cy="566928"/>
           </a:xfrm>
           <a:prstGeom prst="rect">
@@ -4045,7 +5548,7 @@
                 <a:ea typeface="Aptos Display" pitchFamily="34" charset="-122"/>
                 <a:cs typeface="Aptos Display" pitchFamily="34" charset="-120"/>
               </a:rPr>
-              <a:t>Reflection Questions Continued</a:t>
+              <a:t>Application to AI-Supported Workflows</a:t>
             </a:r>
             <a:endParaRPr lang="en-US" sz="2700" dirty="0"/>
           </a:p>
@@ -4053,32 +5556,178 @@
       </p:sp>
       <p:sp>
         <p:nvSpPr>
-          <p:cNvPr id="7" name="Text 5"/>
-          <p:cNvSpPr/>
-          <p:nvPr/>
-        </p:nvSpPr>
-        <p:spPr>
-          <a:xfrm>
-            <a:off x="822960" y="1325880"/>
-            <a:ext cx="10378440" cy="4800600"/>
-          </a:xfrm>
-          <a:prstGeom prst="rect">
-            <a:avLst/>
-          </a:prstGeom>
-          <a:noFill/>
-          <a:ln/>
-        </p:spPr>
-        <p:txBody>
-          <a:bodyPr wrap="square" lIns="1016" tIns="1016" rIns="1016" bIns="1016" rtlCol="0" anchor="t">
+          <p:cNvPr id="10" name="Text 8"/>
+          <p:cNvSpPr/>
+          <p:nvPr/>
+        </p:nvSpPr>
+        <p:spPr>
+          <a:xfrm>
+            <a:off x="868680" y="1417320"/>
+            <a:ext cx="6675120" cy="4434840"/>
+          </a:xfrm>
+          <a:prstGeom prst="rect">
+            <a:avLst/>
+          </a:prstGeom>
+          <a:noFill/>
+          <a:ln/>
+        </p:spPr>
+        <p:txBody>
+          <a:bodyPr wrap="square" lIns="635" tIns="635" rIns="635" bIns="635" rtlCol="0" anchor="t">
             <a:normAutofit/>
           </a:bodyPr>
           <a:lstStyle/>
           <a:p>
+            <a:r>
+              <a:rPr lang="en-US" sz="1700" dirty="0">
+                <a:solidFill>
+                  <a:srgbClr val="17364A"/>
+                </a:solidFill>
+                <a:latin typeface="Aptos" pitchFamily="34" charset="0"/>
+                <a:ea typeface="Aptos" pitchFamily="34" charset="-122"/>
+                <a:cs typeface="Aptos" pitchFamily="34" charset="-120"/>
+              </a:rPr>
+              <a:t>AI for Social Good applies to every AI method.</a:t>
+            </a:r>
+            <a:endParaRPr lang="en-US" sz="1700" dirty="0"/>
+          </a:p>
+          <a:p>
+            <a:r>
+              <a:rPr lang="en-US" sz="1700" dirty="0">
+                <a:solidFill>
+                  <a:srgbClr val="17364A"/>
+                </a:solidFill>
+                <a:latin typeface="Aptos" pitchFamily="34" charset="0"/>
+                <a:ea typeface="Aptos" pitchFamily="34" charset="-122"/>
+                <a:cs typeface="Aptos" pitchFamily="34" charset="-120"/>
+              </a:rPr>
+              <a:t>Generative AI may improve plain-language communication, but it must be accurate, accessible, and culturally appropriate.</a:t>
+            </a:r>
+            <a:endParaRPr lang="en-US" sz="1700" dirty="0"/>
+          </a:p>
+          <a:p>
+            <a:r>
+              <a:rPr lang="en-US" sz="1700" dirty="0">
+                <a:solidFill>
+                  <a:srgbClr val="17364A"/>
+                </a:solidFill>
+                <a:latin typeface="Aptos" pitchFamily="34" charset="0"/>
+                <a:ea typeface="Aptos" pitchFamily="34" charset="-122"/>
+                <a:cs typeface="Aptos" pitchFamily="34" charset="-120"/>
+              </a:rPr>
+              <a:t>Predictive analytics may guide supportive outreach, but it should not become a tool for exclusion.</a:t>
+            </a:r>
+            <a:endParaRPr lang="en-US" sz="1700" dirty="0"/>
+          </a:p>
+          <a:p>
+            <a:r>
+              <a:rPr lang="en-US" sz="1700" dirty="0">
+                <a:solidFill>
+                  <a:srgbClr val="17364A"/>
+                </a:solidFill>
+                <a:latin typeface="Aptos" pitchFamily="34" charset="0"/>
+                <a:ea typeface="Aptos" pitchFamily="34" charset="-122"/>
+                <a:cs typeface="Aptos" pitchFamily="34" charset="-120"/>
+              </a:rPr>
+              <a:t>RAG systems may improve staff access to guidance, but they must include current and authorized content.</a:t>
+            </a:r>
+            <a:endParaRPr lang="en-US" sz="1700" dirty="0"/>
+          </a:p>
+        </p:txBody>
+      </p:sp>
+      <p:sp>
+        <p:nvSpPr>
+          <p:cNvPr id="11" name="Shape 9"/>
+          <p:cNvSpPr/>
+          <p:nvPr/>
+        </p:nvSpPr>
+        <p:spPr>
+          <a:xfrm>
+            <a:off x="7909560" y="1417320"/>
+            <a:ext cx="3154680" cy="1828800"/>
+          </a:xfrm>
+          <a:prstGeom prst="roundRect">
+            <a:avLst>
+              <a:gd name="adj" fmla="val 6000"/>
+            </a:avLst>
+          </a:prstGeom>
+          <a:solidFill>
+            <a:srgbClr val="EEF8ED"/>
+          </a:solidFill>
+          <a:ln w="12700">
+            <a:solidFill>
+              <a:srgbClr val="B9D7E6"/>
+            </a:solidFill>
+            <a:prstDash val="solid"/>
+          </a:ln>
+        </p:spPr>
+      </p:sp>
+      <p:sp>
+        <p:nvSpPr>
+          <p:cNvPr id="12" name="Text 10"/>
+          <p:cNvSpPr/>
+          <p:nvPr/>
+        </p:nvSpPr>
+        <p:spPr>
+          <a:xfrm>
+            <a:off x="8074152" y="1563624"/>
+            <a:ext cx="2825496" cy="201168"/>
+          </a:xfrm>
+          <a:prstGeom prst="rect">
+            <a:avLst/>
+          </a:prstGeom>
+          <a:noFill/>
+          <a:ln/>
+        </p:spPr>
+        <p:txBody>
+          <a:bodyPr wrap="square" lIns="0" tIns="0" rIns="0" bIns="0" rtlCol="0" anchor="ctr"/>
+          <a:lstStyle/>
+          <a:p>
             <a:pPr indent="0" marL="0">
               <a:buNone/>
             </a:pPr>
             <a:r>
-              <a:rPr lang="en-US" sz="1420" dirty="0">
+              <a:rPr lang="en-US" sz="950" b="1" dirty="0">
+                <a:solidFill>
+                  <a:srgbClr val="0068B7"/>
+                </a:solidFill>
+                <a:latin typeface="Aptos" pitchFamily="34" charset="0"/>
+                <a:ea typeface="Aptos" pitchFamily="34" charset="-122"/>
+                <a:cs typeface="Aptos" pitchFamily="34" charset="-120"/>
+              </a:rPr>
+              <a:t>Key idea</a:t>
+            </a:r>
+            <a:endParaRPr lang="en-US" sz="950" dirty="0"/>
+          </a:p>
+        </p:txBody>
+      </p:sp>
+      <p:sp>
+        <p:nvSpPr>
+          <p:cNvPr id="13" name="Text 11"/>
+          <p:cNvSpPr/>
+          <p:nvPr/>
+        </p:nvSpPr>
+        <p:spPr>
+          <a:xfrm>
+            <a:off x="8074152" y="1856232"/>
+            <a:ext cx="2825496" cy="1261872"/>
+          </a:xfrm>
+          <a:prstGeom prst="rect">
+            <a:avLst/>
+          </a:prstGeom>
+          <a:noFill/>
+          <a:ln/>
+        </p:spPr>
+        <p:txBody>
+          <a:bodyPr wrap="square" lIns="0" tIns="0" rIns="0" bIns="0" rtlCol="0" anchor="t">
+            <a:normAutofit/>
+          </a:bodyPr>
+          <a:lstStyle/>
+          <a:p>
+            <a:pPr indent="0" marL="0">
+              <a:buNone/>
+            </a:pPr>
+            <a:r>
+              <a:rPr lang="en-US" sz="1250" dirty="0">
                 <a:solidFill>
                   <a:srgbClr val="17364A"/>
                 </a:solidFill>
@@ -4086,9 +5735,116 @@
                 <a:ea typeface="Aptos" pitchFamily="34" charset="-122"/>
                 <a:cs typeface="Aptos" pitchFamily="34" charset="-120"/>
               </a:rPr>
-              <a:t>What non-AI alternatives should be considered? How will the agency measure public value, equity, trust, and unintended consequences?</a:t>
-            </a:r>
-            <a:endParaRPr lang="en-US" sz="1420" dirty="0"/>
+              <a:t>AI for Social Good applies to every AI method.</a:t>
+            </a:r>
+            <a:endParaRPr lang="en-US" sz="1250" dirty="0"/>
+          </a:p>
+        </p:txBody>
+      </p:sp>
+      <p:sp>
+        <p:nvSpPr>
+          <p:cNvPr id="14" name="Shape 12"/>
+          <p:cNvSpPr/>
+          <p:nvPr/>
+        </p:nvSpPr>
+        <p:spPr>
+          <a:xfrm>
+            <a:off x="7909560" y="3520440"/>
+            <a:ext cx="3154680" cy="1737360"/>
+          </a:xfrm>
+          <a:prstGeom prst="roundRect">
+            <a:avLst>
+              <a:gd name="adj" fmla="val 6316"/>
+            </a:avLst>
+          </a:prstGeom>
+          <a:solidFill>
+            <a:srgbClr val="EAF6F8"/>
+          </a:solidFill>
+          <a:ln w="12700">
+            <a:solidFill>
+              <a:srgbClr val="B9D7E6"/>
+            </a:solidFill>
+            <a:prstDash val="solid"/>
+          </a:ln>
+        </p:spPr>
+      </p:sp>
+      <p:sp>
+        <p:nvSpPr>
+          <p:cNvPr id="15" name="Text 13"/>
+          <p:cNvSpPr/>
+          <p:nvPr/>
+        </p:nvSpPr>
+        <p:spPr>
+          <a:xfrm>
+            <a:off x="8074152" y="3666744"/>
+            <a:ext cx="2825496" cy="201168"/>
+          </a:xfrm>
+          <a:prstGeom prst="rect">
+            <a:avLst/>
+          </a:prstGeom>
+          <a:noFill/>
+          <a:ln/>
+        </p:spPr>
+        <p:txBody>
+          <a:bodyPr wrap="square" lIns="0" tIns="0" rIns="0" bIns="0" rtlCol="0" anchor="ctr"/>
+          <a:lstStyle/>
+          <a:p>
+            <a:pPr indent="0" marL="0">
+              <a:buNone/>
+            </a:pPr>
+            <a:r>
+              <a:rPr lang="en-US" sz="950" b="1" dirty="0">
+                <a:solidFill>
+                  <a:srgbClr val="0068B7"/>
+                </a:solidFill>
+                <a:latin typeface="Aptos" pitchFamily="34" charset="0"/>
+                <a:ea typeface="Aptos" pitchFamily="34" charset="-122"/>
+                <a:cs typeface="Aptos" pitchFamily="34" charset="-120"/>
+              </a:rPr>
+              <a:t>Use this for</a:t>
+            </a:r>
+            <a:endParaRPr lang="en-US" sz="950" dirty="0"/>
+          </a:p>
+        </p:txBody>
+      </p:sp>
+      <p:sp>
+        <p:nvSpPr>
+          <p:cNvPr id="16" name="Text 14"/>
+          <p:cNvSpPr/>
+          <p:nvPr/>
+        </p:nvSpPr>
+        <p:spPr>
+          <a:xfrm>
+            <a:off x="8074152" y="3959352"/>
+            <a:ext cx="2825496" cy="1170432"/>
+          </a:xfrm>
+          <a:prstGeom prst="rect">
+            <a:avLst/>
+          </a:prstGeom>
+          <a:noFill/>
+          <a:ln/>
+        </p:spPr>
+        <p:txBody>
+          <a:bodyPr wrap="square" lIns="0" tIns="0" rIns="0" bIns="0" rtlCol="0" anchor="t">
+            <a:normAutofit/>
+          </a:bodyPr>
+          <a:lstStyle/>
+          <a:p>
+            <a:pPr indent="0" marL="0">
+              <a:buNone/>
+            </a:pPr>
+            <a:r>
+              <a:rPr lang="en-US" sz="1250" dirty="0">
+                <a:solidFill>
+                  <a:srgbClr val="17364A"/>
+                </a:solidFill>
+                <a:latin typeface="Aptos" pitchFamily="34" charset="0"/>
+                <a:ea typeface="Aptos" pitchFamily="34" charset="-122"/>
+                <a:cs typeface="Aptos" pitchFamily="34" charset="-120"/>
+              </a:rPr>
+              <a:t>Connect the concept to public health decisions, safeguards, documentation, or implementation work.</a:t>
+            </a:r>
+            <a:endParaRPr lang="en-US" sz="1250" dirty="0"/>
           </a:p>
         </p:txBody>
       </p:sp>
@@ -4151,7 +5907,32 @@
       </p:sp>
       <p:sp>
         <p:nvSpPr>
-          <p:cNvPr id="3" name="Text 1"/>
+          <p:cNvPr id="3" name="Shape 1"/>
+          <p:cNvSpPr/>
+          <p:nvPr/>
+        </p:nvSpPr>
+        <p:spPr>
+          <a:xfrm>
+            <a:off x="0" y="164592"/>
+            <a:ext cx="146304" cy="6693408"/>
+          </a:xfrm>
+          <a:prstGeom prst="rect">
+            <a:avLst/>
+          </a:prstGeom>
+          <a:solidFill>
+            <a:srgbClr val="2F8A28"/>
+          </a:solidFill>
+          <a:ln w="12700">
+            <a:solidFill>
+              <a:srgbClr val="2F8A28"/>
+            </a:solidFill>
+            <a:prstDash val="solid"/>
+          </a:ln>
+        </p:spPr>
+      </p:sp>
+      <p:sp>
+        <p:nvSpPr>
+          <p:cNvPr id="4" name="Text 2"/>
           <p:cNvSpPr/>
           <p:nvPr/>
         </p:nvSpPr>
@@ -4190,7 +5971,7 @@
       </p:sp>
       <p:sp>
         <p:nvSpPr>
-          <p:cNvPr id="4" name="Text 2"/>
+          <p:cNvPr id="5" name="Text 3"/>
           <p:cNvSpPr/>
           <p:nvPr/>
         </p:nvSpPr>
@@ -4229,7 +6010,7 @@
       </p:sp>
       <p:sp>
         <p:nvSpPr>
-          <p:cNvPr id="5" name="Text 3"/>
+          <p:cNvPr id="6" name="Text 4"/>
           <p:cNvSpPr/>
           <p:nvPr/>
         </p:nvSpPr>
@@ -4268,13 +6049,77 @@
       </p:sp>
       <p:sp>
         <p:nvSpPr>
-          <p:cNvPr id="6" name="Text 4"/>
+          <p:cNvPr id="7" name="Shape 5"/>
           <p:cNvSpPr/>
           <p:nvPr/>
         </p:nvSpPr>
         <p:spPr>
           <a:xfrm>
             <a:off x="640080" y="658368"/>
+            <a:ext cx="420624" cy="420624"/>
+          </a:xfrm>
+          <a:prstGeom prst="ellipse">
+            <a:avLst/>
+          </a:prstGeom>
+          <a:solidFill>
+            <a:srgbClr val="0068B7"/>
+          </a:solidFill>
+          <a:ln w="12700">
+            <a:solidFill>
+              <a:srgbClr val="0068B7"/>
+            </a:solidFill>
+            <a:prstDash val="solid"/>
+          </a:ln>
+        </p:spPr>
+      </p:sp>
+      <p:sp>
+        <p:nvSpPr>
+          <p:cNvPr id="8" name="Text 6"/>
+          <p:cNvSpPr/>
+          <p:nvPr/>
+        </p:nvSpPr>
+        <p:spPr>
+          <a:xfrm>
+            <a:off x="640080" y="731520"/>
+            <a:ext cx="420624" cy="164592"/>
+          </a:xfrm>
+          <a:prstGeom prst="rect">
+            <a:avLst/>
+          </a:prstGeom>
+          <a:noFill/>
+          <a:ln/>
+        </p:spPr>
+        <p:txBody>
+          <a:bodyPr wrap="square" lIns="0" tIns="0" rIns="0" bIns="0" rtlCol="0" anchor="ctr"/>
+          <a:lstStyle/>
+          <a:p>
+            <a:pPr algn="ctr" indent="0" marL="0">
+              <a:buNone/>
+            </a:pPr>
+            <a:r>
+              <a:rPr lang="en-US" sz="1100" b="1" dirty="0">
+                <a:solidFill>
+                  <a:srgbClr val="FFFFFF"/>
+                </a:solidFill>
+                <a:latin typeface="Aptos" pitchFamily="34" charset="0"/>
+                <a:ea typeface="Aptos" pitchFamily="34" charset="-122"/>
+                <a:cs typeface="Aptos" pitchFamily="34" charset="-120"/>
+              </a:rPr>
+              <a:t>8</a:t>
+            </a:r>
+            <a:endParaRPr lang="en-US" sz="1100" dirty="0"/>
+          </a:p>
+        </p:txBody>
+      </p:sp>
+      <p:sp>
+        <p:nvSpPr>
+          <p:cNvPr id="9" name="Text 7"/>
+          <p:cNvSpPr/>
+          <p:nvPr/>
+        </p:nvSpPr>
+        <p:spPr>
+          <a:xfrm>
+            <a:off x="640080" y="621792"/>
             <a:ext cx="10881360" cy="566928"/>
           </a:xfrm>
           <a:prstGeom prst="rect">
@@ -4301,7 +6146,7 @@
                 <a:ea typeface="Aptos Display" pitchFamily="34" charset="-122"/>
                 <a:cs typeface="Aptos Display" pitchFamily="34" charset="-120"/>
               </a:rPr>
-              <a:t>Practical Exercise</a:t>
+              <a:t>Reflection Questions</a:t>
             </a:r>
             <a:endParaRPr lang="en-US" sz="2700" dirty="0"/>
           </a:p>
@@ -4309,32 +6154,164 @@
       </p:sp>
       <p:sp>
         <p:nvSpPr>
-          <p:cNvPr id="7" name="Text 5"/>
-          <p:cNvSpPr/>
-          <p:nvPr/>
-        </p:nvSpPr>
-        <p:spPr>
-          <a:xfrm>
-            <a:off x="822960" y="1325880"/>
-            <a:ext cx="10378440" cy="4800600"/>
-          </a:xfrm>
-          <a:prstGeom prst="rect">
-            <a:avLst/>
-          </a:prstGeom>
-          <a:noFill/>
-          <a:ln/>
-        </p:spPr>
-        <p:txBody>
-          <a:bodyPr wrap="square" lIns="1016" tIns="1016" rIns="1016" bIns="1016" rtlCol="0" anchor="t">
+          <p:cNvPr id="10" name="Text 8"/>
+          <p:cNvSpPr/>
+          <p:nvPr/>
+        </p:nvSpPr>
+        <p:spPr>
+          <a:xfrm>
+            <a:off x="868680" y="1417320"/>
+            <a:ext cx="6675120" cy="4434840"/>
+          </a:xfrm>
+          <a:prstGeom prst="rect">
+            <a:avLst/>
+          </a:prstGeom>
+          <a:noFill/>
+          <a:ln/>
+        </p:spPr>
+        <p:txBody>
+          <a:bodyPr wrap="square" lIns="635" tIns="635" rIns="635" bIns="635" rtlCol="0" anchor="t">
             <a:normAutofit/>
           </a:bodyPr>
           <a:lstStyle/>
           <a:p>
+            <a:r>
+              <a:rPr lang="en-US" sz="1700" dirty="0">
+                <a:solidFill>
+                  <a:srgbClr val="17364A"/>
+                </a:solidFill>
+                <a:latin typeface="Aptos" pitchFamily="34" charset="0"/>
+                <a:ea typeface="Aptos" pitchFamily="34" charset="-122"/>
+                <a:cs typeface="Aptos" pitchFamily="34" charset="-120"/>
+              </a:rPr>
+              <a:t>What public health problem would this AI use address?</a:t>
+            </a:r>
+            <a:endParaRPr lang="en-US" sz="1700" dirty="0"/>
+          </a:p>
+          <a:p>
+            <a:r>
+              <a:rPr lang="en-US" sz="1700" dirty="0">
+                <a:solidFill>
+                  <a:srgbClr val="17364A"/>
+                </a:solidFill>
+                <a:latin typeface="Aptos" pitchFamily="34" charset="0"/>
+                <a:ea typeface="Aptos" pitchFamily="34" charset="-122"/>
+                <a:cs typeface="Aptos" pitchFamily="34" charset="-120"/>
+              </a:rPr>
+              <a:t>Who would benefit, and who could be excluded or harmed?</a:t>
+            </a:r>
+            <a:endParaRPr lang="en-US" sz="1700" dirty="0"/>
+          </a:p>
+          <a:p>
+            <a:r>
+              <a:rPr lang="en-US" sz="1700" dirty="0">
+                <a:solidFill>
+                  <a:srgbClr val="17364A"/>
+                </a:solidFill>
+                <a:latin typeface="Aptos" pitchFamily="34" charset="0"/>
+                <a:ea typeface="Aptos" pitchFamily="34" charset="-122"/>
+                <a:cs typeface="Aptos" pitchFamily="34" charset="-120"/>
+              </a:rPr>
+              <a:t>How were affected communities involved in defining the need and safeguards?</a:t>
+            </a:r>
+            <a:endParaRPr lang="en-US" sz="1700" dirty="0"/>
+          </a:p>
+        </p:txBody>
+      </p:sp>
+      <p:sp>
+        <p:nvSpPr>
+          <p:cNvPr id="11" name="Shape 9"/>
+          <p:cNvSpPr/>
+          <p:nvPr/>
+        </p:nvSpPr>
+        <p:spPr>
+          <a:xfrm>
+            <a:off x="7909560" y="1417320"/>
+            <a:ext cx="3154680" cy="1828800"/>
+          </a:xfrm>
+          <a:prstGeom prst="roundRect">
+            <a:avLst>
+              <a:gd name="adj" fmla="val 6000"/>
+            </a:avLst>
+          </a:prstGeom>
+          <a:solidFill>
+            <a:srgbClr val="EEF8ED"/>
+          </a:solidFill>
+          <a:ln w="12700">
+            <a:solidFill>
+              <a:srgbClr val="B9D7E6"/>
+            </a:solidFill>
+            <a:prstDash val="solid"/>
+          </a:ln>
+        </p:spPr>
+      </p:sp>
+      <p:sp>
+        <p:nvSpPr>
+          <p:cNvPr id="12" name="Text 10"/>
+          <p:cNvSpPr/>
+          <p:nvPr/>
+        </p:nvSpPr>
+        <p:spPr>
+          <a:xfrm>
+            <a:off x="8074152" y="1563624"/>
+            <a:ext cx="2825496" cy="201168"/>
+          </a:xfrm>
+          <a:prstGeom prst="rect">
+            <a:avLst/>
+          </a:prstGeom>
+          <a:noFill/>
+          <a:ln/>
+        </p:spPr>
+        <p:txBody>
+          <a:bodyPr wrap="square" lIns="0" tIns="0" rIns="0" bIns="0" rtlCol="0" anchor="ctr"/>
+          <a:lstStyle/>
+          <a:p>
             <a:pPr indent="0" marL="0">
               <a:buNone/>
             </a:pPr>
             <a:r>
-              <a:rPr lang="en-US" sz="1420" dirty="0">
+              <a:rPr lang="en-US" sz="950" b="1" dirty="0">
+                <a:solidFill>
+                  <a:srgbClr val="0068B7"/>
+                </a:solidFill>
+                <a:latin typeface="Aptos" pitchFamily="34" charset="0"/>
+                <a:ea typeface="Aptos" pitchFamily="34" charset="-122"/>
+                <a:cs typeface="Aptos" pitchFamily="34" charset="-120"/>
+              </a:rPr>
+              <a:t>Key idea</a:t>
+            </a:r>
+            <a:endParaRPr lang="en-US" sz="950" dirty="0"/>
+          </a:p>
+        </p:txBody>
+      </p:sp>
+      <p:sp>
+        <p:nvSpPr>
+          <p:cNvPr id="13" name="Text 11"/>
+          <p:cNvSpPr/>
+          <p:nvPr/>
+        </p:nvSpPr>
+        <p:spPr>
+          <a:xfrm>
+            <a:off x="8074152" y="1856232"/>
+            <a:ext cx="2825496" cy="1261872"/>
+          </a:xfrm>
+          <a:prstGeom prst="rect">
+            <a:avLst/>
+          </a:prstGeom>
+          <a:noFill/>
+          <a:ln/>
+        </p:spPr>
+        <p:txBody>
+          <a:bodyPr wrap="square" lIns="0" tIns="0" rIns="0" bIns="0" rtlCol="0" anchor="t">
+            <a:normAutofit/>
+          </a:bodyPr>
+          <a:lstStyle/>
+          <a:p>
+            <a:pPr indent="0" marL="0">
+              <a:buNone/>
+            </a:pPr>
+            <a:r>
+              <a:rPr lang="en-US" sz="1250" dirty="0">
                 <a:solidFill>
                   <a:srgbClr val="17364A"/>
                 </a:solidFill>
@@ -4342,9 +6319,116 @@
                 <a:ea typeface="Aptos" pitchFamily="34" charset="-122"/>
                 <a:cs typeface="Aptos" pitchFamily="34" charset="-120"/>
               </a:rPr>
-              <a:t>Create an AI for Social Good review brief for one public health use case. The brief should define the public health problem, intended public benefit, affected communities, equity considerations, non-AI alternatives, proposed AI role, safeguards, community engagement plan, evaluation measures, and sunset or rollback criteria. The exercise should result in a decision-support document that helps leaders and governance reviewers determine whether the proposed AI use advances public health values.</a:t>
-            </a:r>
-            <a:endParaRPr lang="en-US" sz="1420" dirty="0"/>
+              <a:t>What public health problem would this AI use address?</a:t>
+            </a:r>
+            <a:endParaRPr lang="en-US" sz="1250" dirty="0"/>
+          </a:p>
+        </p:txBody>
+      </p:sp>
+      <p:sp>
+        <p:nvSpPr>
+          <p:cNvPr id="14" name="Shape 12"/>
+          <p:cNvSpPr/>
+          <p:nvPr/>
+        </p:nvSpPr>
+        <p:spPr>
+          <a:xfrm>
+            <a:off x="7909560" y="3520440"/>
+            <a:ext cx="3154680" cy="1737360"/>
+          </a:xfrm>
+          <a:prstGeom prst="roundRect">
+            <a:avLst>
+              <a:gd name="adj" fmla="val 6316"/>
+            </a:avLst>
+          </a:prstGeom>
+          <a:solidFill>
+            <a:srgbClr val="EAF6F8"/>
+          </a:solidFill>
+          <a:ln w="12700">
+            <a:solidFill>
+              <a:srgbClr val="B9D7E6"/>
+            </a:solidFill>
+            <a:prstDash val="solid"/>
+          </a:ln>
+        </p:spPr>
+      </p:sp>
+      <p:sp>
+        <p:nvSpPr>
+          <p:cNvPr id="15" name="Text 13"/>
+          <p:cNvSpPr/>
+          <p:nvPr/>
+        </p:nvSpPr>
+        <p:spPr>
+          <a:xfrm>
+            <a:off x="8074152" y="3666744"/>
+            <a:ext cx="2825496" cy="201168"/>
+          </a:xfrm>
+          <a:prstGeom prst="rect">
+            <a:avLst/>
+          </a:prstGeom>
+          <a:noFill/>
+          <a:ln/>
+        </p:spPr>
+        <p:txBody>
+          <a:bodyPr wrap="square" lIns="0" tIns="0" rIns="0" bIns="0" rtlCol="0" anchor="ctr"/>
+          <a:lstStyle/>
+          <a:p>
+            <a:pPr indent="0" marL="0">
+              <a:buNone/>
+            </a:pPr>
+            <a:r>
+              <a:rPr lang="en-US" sz="950" b="1" dirty="0">
+                <a:solidFill>
+                  <a:srgbClr val="0068B7"/>
+                </a:solidFill>
+                <a:latin typeface="Aptos" pitchFamily="34" charset="0"/>
+                <a:ea typeface="Aptos" pitchFamily="34" charset="-122"/>
+                <a:cs typeface="Aptos" pitchFamily="34" charset="-120"/>
+              </a:rPr>
+              <a:t>Use this for</a:t>
+            </a:r>
+            <a:endParaRPr lang="en-US" sz="950" dirty="0"/>
+          </a:p>
+        </p:txBody>
+      </p:sp>
+      <p:sp>
+        <p:nvSpPr>
+          <p:cNvPr id="16" name="Text 14"/>
+          <p:cNvSpPr/>
+          <p:nvPr/>
+        </p:nvSpPr>
+        <p:spPr>
+          <a:xfrm>
+            <a:off x="8074152" y="3959352"/>
+            <a:ext cx="2825496" cy="1170432"/>
+          </a:xfrm>
+          <a:prstGeom prst="rect">
+            <a:avLst/>
+          </a:prstGeom>
+          <a:noFill/>
+          <a:ln/>
+        </p:spPr>
+        <p:txBody>
+          <a:bodyPr wrap="square" lIns="0" tIns="0" rIns="0" bIns="0" rtlCol="0" anchor="t">
+            <a:normAutofit/>
+          </a:bodyPr>
+          <a:lstStyle/>
+          <a:p>
+            <a:pPr indent="0" marL="0">
+              <a:buNone/>
+            </a:pPr>
+            <a:r>
+              <a:rPr lang="en-US" sz="1250" dirty="0">
+                <a:solidFill>
+                  <a:srgbClr val="17364A"/>
+                </a:solidFill>
+                <a:latin typeface="Aptos" pitchFamily="34" charset="0"/>
+                <a:ea typeface="Aptos" pitchFamily="34" charset="-122"/>
+                <a:cs typeface="Aptos" pitchFamily="34" charset="-120"/>
+              </a:rPr>
+              <a:t>Connect the concept to public health decisions, safeguards, documentation, or implementation work.</a:t>
+            </a:r>
+            <a:endParaRPr lang="en-US" sz="1250" dirty="0"/>
           </a:p>
         </p:txBody>
       </p:sp>
@@ -4407,7 +6491,32 @@
       </p:sp>
       <p:sp>
         <p:nvSpPr>
-          <p:cNvPr id="3" name="Text 1"/>
+          <p:cNvPr id="3" name="Shape 1"/>
+          <p:cNvSpPr/>
+          <p:nvPr/>
+        </p:nvSpPr>
+        <p:spPr>
+          <a:xfrm>
+            <a:off x="0" y="164592"/>
+            <a:ext cx="146304" cy="6693408"/>
+          </a:xfrm>
+          <a:prstGeom prst="rect">
+            <a:avLst/>
+          </a:prstGeom>
+          <a:solidFill>
+            <a:srgbClr val="2F8A28"/>
+          </a:solidFill>
+          <a:ln w="12700">
+            <a:solidFill>
+              <a:srgbClr val="2F8A28"/>
+            </a:solidFill>
+            <a:prstDash val="solid"/>
+          </a:ln>
+        </p:spPr>
+      </p:sp>
+      <p:sp>
+        <p:nvSpPr>
+          <p:cNvPr id="4" name="Text 2"/>
           <p:cNvSpPr/>
           <p:nvPr/>
         </p:nvSpPr>
@@ -4446,7 +6555,7 @@
       </p:sp>
       <p:sp>
         <p:nvSpPr>
-          <p:cNvPr id="4" name="Text 2"/>
+          <p:cNvPr id="5" name="Text 3"/>
           <p:cNvSpPr/>
           <p:nvPr/>
         </p:nvSpPr>
@@ -4485,7 +6594,7 @@
       </p:sp>
       <p:sp>
         <p:nvSpPr>
-          <p:cNvPr id="5" name="Text 3"/>
+          <p:cNvPr id="6" name="Text 4"/>
           <p:cNvSpPr/>
           <p:nvPr/>
         </p:nvSpPr>
@@ -4524,7 +6633,7 @@
       </p:sp>
       <p:sp>
         <p:nvSpPr>
-          <p:cNvPr id="6" name="Text 4"/>
+          <p:cNvPr id="7" name="Text 5"/>
           <p:cNvSpPr/>
           <p:nvPr/>
         </p:nvSpPr>
@@ -4557,7 +6666,7 @@
                 <a:ea typeface="Aptos Display" pitchFamily="34" charset="-122"/>
                 <a:cs typeface="Aptos Display" pitchFamily="34" charset="-120"/>
               </a:rPr>
-              <a:t>Expected Artifact or Evidence</a:t>
+              <a:t>Reflection Questions Continued</a:t>
             </a:r>
             <a:endParaRPr lang="en-US" sz="2700" dirty="0"/>
           </a:p>
@@ -4565,32 +6674,150 @@
       </p:sp>
       <p:sp>
         <p:nvSpPr>
-          <p:cNvPr id="7" name="Text 5"/>
-          <p:cNvSpPr/>
-          <p:nvPr/>
-        </p:nvSpPr>
-        <p:spPr>
-          <a:xfrm>
-            <a:off x="822960" y="1325880"/>
-            <a:ext cx="10378440" cy="4800600"/>
-          </a:xfrm>
-          <a:prstGeom prst="rect">
-            <a:avLst/>
-          </a:prstGeom>
-          <a:noFill/>
-          <a:ln/>
-        </p:spPr>
-        <p:txBody>
-          <a:bodyPr wrap="square" lIns="1016" tIns="1016" rIns="1016" bIns="1016" rtlCol="0" anchor="t">
+          <p:cNvPr id="8" name="Text 6"/>
+          <p:cNvSpPr/>
+          <p:nvPr/>
+        </p:nvSpPr>
+        <p:spPr>
+          <a:xfrm>
+            <a:off x="868680" y="1417320"/>
+            <a:ext cx="6675120" cy="4434840"/>
+          </a:xfrm>
+          <a:prstGeom prst="rect">
+            <a:avLst/>
+          </a:prstGeom>
+          <a:noFill/>
+          <a:ln/>
+        </p:spPr>
+        <p:txBody>
+          <a:bodyPr wrap="square" lIns="635" tIns="635" rIns="635" bIns="635" rtlCol="0" anchor="t">
             <a:normAutofit/>
           </a:bodyPr>
           <a:lstStyle/>
           <a:p>
+            <a:r>
+              <a:rPr lang="en-US" sz="1700" dirty="0">
+                <a:solidFill>
+                  <a:srgbClr val="17364A"/>
+                </a:solidFill>
+                <a:latin typeface="Aptos" pitchFamily="34" charset="0"/>
+                <a:ea typeface="Aptos" pitchFamily="34" charset="-122"/>
+                <a:cs typeface="Aptos" pitchFamily="34" charset="-120"/>
+              </a:rPr>
+              <a:t>What non-AI alternatives should be considered?</a:t>
+            </a:r>
+            <a:endParaRPr lang="en-US" sz="1700" dirty="0"/>
+          </a:p>
+          <a:p>
+            <a:r>
+              <a:rPr lang="en-US" sz="1700" dirty="0">
+                <a:solidFill>
+                  <a:srgbClr val="17364A"/>
+                </a:solidFill>
+                <a:latin typeface="Aptos" pitchFamily="34" charset="0"/>
+                <a:ea typeface="Aptos" pitchFamily="34" charset="-122"/>
+                <a:cs typeface="Aptos" pitchFamily="34" charset="-120"/>
+              </a:rPr>
+              <a:t>How will the agency measure public value, equity, trust, and unintended consequences?</a:t>
+            </a:r>
+            <a:endParaRPr lang="en-US" sz="1700" dirty="0"/>
+          </a:p>
+        </p:txBody>
+      </p:sp>
+      <p:sp>
+        <p:nvSpPr>
+          <p:cNvPr id="9" name="Shape 7"/>
+          <p:cNvSpPr/>
+          <p:nvPr/>
+        </p:nvSpPr>
+        <p:spPr>
+          <a:xfrm>
+            <a:off x="7909560" y="1417320"/>
+            <a:ext cx="3154680" cy="1828800"/>
+          </a:xfrm>
+          <a:prstGeom prst="roundRect">
+            <a:avLst>
+              <a:gd name="adj" fmla="val 6000"/>
+            </a:avLst>
+          </a:prstGeom>
+          <a:solidFill>
+            <a:srgbClr val="EEF8ED"/>
+          </a:solidFill>
+          <a:ln w="12700">
+            <a:solidFill>
+              <a:srgbClr val="B9D7E6"/>
+            </a:solidFill>
+            <a:prstDash val="solid"/>
+          </a:ln>
+        </p:spPr>
+      </p:sp>
+      <p:sp>
+        <p:nvSpPr>
+          <p:cNvPr id="10" name="Text 8"/>
+          <p:cNvSpPr/>
+          <p:nvPr/>
+        </p:nvSpPr>
+        <p:spPr>
+          <a:xfrm>
+            <a:off x="8074152" y="1563624"/>
+            <a:ext cx="2825496" cy="201168"/>
+          </a:xfrm>
+          <a:prstGeom prst="rect">
+            <a:avLst/>
+          </a:prstGeom>
+          <a:noFill/>
+          <a:ln/>
+        </p:spPr>
+        <p:txBody>
+          <a:bodyPr wrap="square" lIns="0" tIns="0" rIns="0" bIns="0" rtlCol="0" anchor="ctr"/>
+          <a:lstStyle/>
+          <a:p>
             <a:pPr indent="0" marL="0">
               <a:buNone/>
             </a:pPr>
             <a:r>
-              <a:rPr lang="en-US" sz="1420" dirty="0">
+              <a:rPr lang="en-US" sz="950" b="1" dirty="0">
+                <a:solidFill>
+                  <a:srgbClr val="0068B7"/>
+                </a:solidFill>
+                <a:latin typeface="Aptos" pitchFamily="34" charset="0"/>
+                <a:ea typeface="Aptos" pitchFamily="34" charset="-122"/>
+                <a:cs typeface="Aptos" pitchFamily="34" charset="-120"/>
+              </a:rPr>
+              <a:t>Key idea</a:t>
+            </a:r>
+            <a:endParaRPr lang="en-US" sz="950" dirty="0"/>
+          </a:p>
+        </p:txBody>
+      </p:sp>
+      <p:sp>
+        <p:nvSpPr>
+          <p:cNvPr id="11" name="Text 9"/>
+          <p:cNvSpPr/>
+          <p:nvPr/>
+        </p:nvSpPr>
+        <p:spPr>
+          <a:xfrm>
+            <a:off x="8074152" y="1856232"/>
+            <a:ext cx="2825496" cy="1261872"/>
+          </a:xfrm>
+          <a:prstGeom prst="rect">
+            <a:avLst/>
+          </a:prstGeom>
+          <a:noFill/>
+          <a:ln/>
+        </p:spPr>
+        <p:txBody>
+          <a:bodyPr wrap="square" lIns="0" tIns="0" rIns="0" bIns="0" rtlCol="0" anchor="t">
+            <a:normAutofit/>
+          </a:bodyPr>
+          <a:lstStyle/>
+          <a:p>
+            <a:pPr indent="0" marL="0">
+              <a:buNone/>
+            </a:pPr>
+            <a:r>
+              <a:rPr lang="en-US" sz="1250" dirty="0">
                 <a:solidFill>
                   <a:srgbClr val="17364A"/>
                 </a:solidFill>
@@ -4598,9 +6825,116 @@
                 <a:ea typeface="Aptos" pitchFamily="34" charset="-122"/>
                 <a:cs typeface="Aptos" pitchFamily="34" charset="-120"/>
               </a:rPr>
-              <a:t>AI for Social Good review brief Public value and equity assessment Community engagement and accessibility plan</a:t>
-            </a:r>
-            <a:endParaRPr lang="en-US" sz="1420" dirty="0"/>
+              <a:t>What non-AI alternatives should be considered?</a:t>
+            </a:r>
+            <a:endParaRPr lang="en-US" sz="1250" dirty="0"/>
+          </a:p>
+        </p:txBody>
+      </p:sp>
+      <p:sp>
+        <p:nvSpPr>
+          <p:cNvPr id="12" name="Shape 10"/>
+          <p:cNvSpPr/>
+          <p:nvPr/>
+        </p:nvSpPr>
+        <p:spPr>
+          <a:xfrm>
+            <a:off x="7909560" y="3520440"/>
+            <a:ext cx="3154680" cy="1737360"/>
+          </a:xfrm>
+          <a:prstGeom prst="roundRect">
+            <a:avLst>
+              <a:gd name="adj" fmla="val 6316"/>
+            </a:avLst>
+          </a:prstGeom>
+          <a:solidFill>
+            <a:srgbClr val="EAF6F8"/>
+          </a:solidFill>
+          <a:ln w="12700">
+            <a:solidFill>
+              <a:srgbClr val="B9D7E6"/>
+            </a:solidFill>
+            <a:prstDash val="solid"/>
+          </a:ln>
+        </p:spPr>
+      </p:sp>
+      <p:sp>
+        <p:nvSpPr>
+          <p:cNvPr id="13" name="Text 11"/>
+          <p:cNvSpPr/>
+          <p:nvPr/>
+        </p:nvSpPr>
+        <p:spPr>
+          <a:xfrm>
+            <a:off x="8074152" y="3666744"/>
+            <a:ext cx="2825496" cy="201168"/>
+          </a:xfrm>
+          <a:prstGeom prst="rect">
+            <a:avLst/>
+          </a:prstGeom>
+          <a:noFill/>
+          <a:ln/>
+        </p:spPr>
+        <p:txBody>
+          <a:bodyPr wrap="square" lIns="0" tIns="0" rIns="0" bIns="0" rtlCol="0" anchor="ctr"/>
+          <a:lstStyle/>
+          <a:p>
+            <a:pPr indent="0" marL="0">
+              <a:buNone/>
+            </a:pPr>
+            <a:r>
+              <a:rPr lang="en-US" sz="950" b="1" dirty="0">
+                <a:solidFill>
+                  <a:srgbClr val="0068B7"/>
+                </a:solidFill>
+                <a:latin typeface="Aptos" pitchFamily="34" charset="0"/>
+                <a:ea typeface="Aptos" pitchFamily="34" charset="-122"/>
+                <a:cs typeface="Aptos" pitchFamily="34" charset="-120"/>
+              </a:rPr>
+              <a:t>Use this for</a:t>
+            </a:r>
+            <a:endParaRPr lang="en-US" sz="950" dirty="0"/>
+          </a:p>
+        </p:txBody>
+      </p:sp>
+      <p:sp>
+        <p:nvSpPr>
+          <p:cNvPr id="14" name="Text 12"/>
+          <p:cNvSpPr/>
+          <p:nvPr/>
+        </p:nvSpPr>
+        <p:spPr>
+          <a:xfrm>
+            <a:off x="8074152" y="3959352"/>
+            <a:ext cx="2825496" cy="1170432"/>
+          </a:xfrm>
+          <a:prstGeom prst="rect">
+            <a:avLst/>
+          </a:prstGeom>
+          <a:noFill/>
+          <a:ln/>
+        </p:spPr>
+        <p:txBody>
+          <a:bodyPr wrap="square" lIns="0" tIns="0" rIns="0" bIns="0" rtlCol="0" anchor="t">
+            <a:normAutofit/>
+          </a:bodyPr>
+          <a:lstStyle/>
+          <a:p>
+            <a:pPr indent="0" marL="0">
+              <a:buNone/>
+            </a:pPr>
+            <a:r>
+              <a:rPr lang="en-US" sz="1250" dirty="0">
+                <a:solidFill>
+                  <a:srgbClr val="17364A"/>
+                </a:solidFill>
+                <a:latin typeface="Aptos" pitchFamily="34" charset="0"/>
+                <a:ea typeface="Aptos" pitchFamily="34" charset="-122"/>
+                <a:cs typeface="Aptos" pitchFamily="34" charset="-120"/>
+              </a:rPr>
+              <a:t>Connect the concept to public health decisions, safeguards, documentation, or implementation work.</a:t>
+            </a:r>
+            <a:endParaRPr lang="en-US" sz="1250" dirty="0"/>
           </a:p>
         </p:txBody>
       </p:sp>
@@ -4663,7 +6997,32 @@
       </p:sp>
       <p:sp>
         <p:nvSpPr>
-          <p:cNvPr id="3" name="Text 1"/>
+          <p:cNvPr id="3" name="Shape 1"/>
+          <p:cNvSpPr/>
+          <p:nvPr/>
+        </p:nvSpPr>
+        <p:spPr>
+          <a:xfrm>
+            <a:off x="0" y="164592"/>
+            <a:ext cx="146304" cy="6693408"/>
+          </a:xfrm>
+          <a:prstGeom prst="rect">
+            <a:avLst/>
+          </a:prstGeom>
+          <a:solidFill>
+            <a:srgbClr val="2F8A28"/>
+          </a:solidFill>
+          <a:ln w="12700">
+            <a:solidFill>
+              <a:srgbClr val="2F8A28"/>
+            </a:solidFill>
+            <a:prstDash val="solid"/>
+          </a:ln>
+        </p:spPr>
+      </p:sp>
+      <p:sp>
+        <p:nvSpPr>
+          <p:cNvPr id="4" name="Text 2"/>
           <p:cNvSpPr/>
           <p:nvPr/>
         </p:nvSpPr>
@@ -4702,7 +7061,7 @@
       </p:sp>
       <p:sp>
         <p:nvSpPr>
-          <p:cNvPr id="4" name="Text 2"/>
+          <p:cNvPr id="5" name="Text 3"/>
           <p:cNvSpPr/>
           <p:nvPr/>
         </p:nvSpPr>
@@ -4741,7 +7100,7 @@
       </p:sp>
       <p:sp>
         <p:nvSpPr>
-          <p:cNvPr id="5" name="Text 3"/>
+          <p:cNvPr id="6" name="Text 4"/>
           <p:cNvSpPr/>
           <p:nvPr/>
         </p:nvSpPr>
@@ -4780,13 +7139,77 @@
       </p:sp>
       <p:sp>
         <p:nvSpPr>
-          <p:cNvPr id="6" name="Text 4"/>
+          <p:cNvPr id="7" name="Shape 5"/>
           <p:cNvSpPr/>
           <p:nvPr/>
         </p:nvSpPr>
         <p:spPr>
           <a:xfrm>
             <a:off x="640080" y="658368"/>
+            <a:ext cx="420624" cy="420624"/>
+          </a:xfrm>
+          <a:prstGeom prst="ellipse">
+            <a:avLst/>
+          </a:prstGeom>
+          <a:solidFill>
+            <a:srgbClr val="0068B7"/>
+          </a:solidFill>
+          <a:ln w="12700">
+            <a:solidFill>
+              <a:srgbClr val="0068B7"/>
+            </a:solidFill>
+            <a:prstDash val="solid"/>
+          </a:ln>
+        </p:spPr>
+      </p:sp>
+      <p:sp>
+        <p:nvSpPr>
+          <p:cNvPr id="8" name="Text 6"/>
+          <p:cNvSpPr/>
+          <p:nvPr/>
+        </p:nvSpPr>
+        <p:spPr>
+          <a:xfrm>
+            <a:off x="640080" y="731520"/>
+            <a:ext cx="420624" cy="164592"/>
+          </a:xfrm>
+          <a:prstGeom prst="rect">
+            <a:avLst/>
+          </a:prstGeom>
+          <a:noFill/>
+          <a:ln/>
+        </p:spPr>
+        <p:txBody>
+          <a:bodyPr wrap="square" lIns="0" tIns="0" rIns="0" bIns="0" rtlCol="0" anchor="ctr"/>
+          <a:lstStyle/>
+          <a:p>
+            <a:pPr algn="ctr" indent="0" marL="0">
+              <a:buNone/>
+            </a:pPr>
+            <a:r>
+              <a:rPr lang="en-US" sz="1100" b="1" dirty="0">
+                <a:solidFill>
+                  <a:srgbClr val="FFFFFF"/>
+                </a:solidFill>
+                <a:latin typeface="Aptos" pitchFamily="34" charset="0"/>
+                <a:ea typeface="Aptos" pitchFamily="34" charset="-122"/>
+                <a:cs typeface="Aptos" pitchFamily="34" charset="-120"/>
+              </a:rPr>
+              <a:t>9</a:t>
+            </a:r>
+            <a:endParaRPr lang="en-US" sz="1100" dirty="0"/>
+          </a:p>
+        </p:txBody>
+      </p:sp>
+      <p:sp>
+        <p:nvSpPr>
+          <p:cNvPr id="9" name="Text 7"/>
+          <p:cNvSpPr/>
+          <p:nvPr/>
+        </p:nvSpPr>
+        <p:spPr>
+          <a:xfrm>
+            <a:off x="640080" y="621792"/>
             <a:ext cx="10881360" cy="566928"/>
           </a:xfrm>
           <a:prstGeom prst="rect">
@@ -4813,7 +7236,7 @@
                 <a:ea typeface="Aptos Display" pitchFamily="34" charset="-122"/>
                 <a:cs typeface="Aptos Display" pitchFamily="34" charset="-120"/>
               </a:rPr>
-              <a:t>Expected Artifact or Evidence Continued</a:t>
+              <a:t>Practical Exercise</a:t>
             </a:r>
             <a:endParaRPr lang="en-US" sz="2700" dirty="0"/>
           </a:p>
@@ -4821,32 +7244,164 @@
       </p:sp>
       <p:sp>
         <p:nvSpPr>
-          <p:cNvPr id="7" name="Text 5"/>
-          <p:cNvSpPr/>
-          <p:nvPr/>
-        </p:nvSpPr>
-        <p:spPr>
-          <a:xfrm>
-            <a:off x="822960" y="1325880"/>
-            <a:ext cx="10378440" cy="4800600"/>
-          </a:xfrm>
-          <a:prstGeom prst="rect">
-            <a:avLst/>
-          </a:prstGeom>
-          <a:noFill/>
-          <a:ln/>
-        </p:spPr>
-        <p:txBody>
-          <a:bodyPr wrap="square" lIns="1016" tIns="1016" rIns="1016" bIns="1016" rtlCol="0" anchor="t">
+          <p:cNvPr id="10" name="Text 8"/>
+          <p:cNvSpPr/>
+          <p:nvPr/>
+        </p:nvSpPr>
+        <p:spPr>
+          <a:xfrm>
+            <a:off x="868680" y="1417320"/>
+            <a:ext cx="6675120" cy="4434840"/>
+          </a:xfrm>
+          <a:prstGeom prst="rect">
+            <a:avLst/>
+          </a:prstGeom>
+          <a:noFill/>
+          <a:ln/>
+        </p:spPr>
+        <p:txBody>
+          <a:bodyPr wrap="square" lIns="635" tIns="635" rIns="635" bIns="635" rtlCol="0" anchor="t">
             <a:normAutofit/>
           </a:bodyPr>
           <a:lstStyle/>
           <a:p>
+            <a:r>
+              <a:rPr lang="en-US" sz="1700" dirty="0">
+                <a:solidFill>
+                  <a:srgbClr val="17364A"/>
+                </a:solidFill>
+                <a:latin typeface="Aptos" pitchFamily="34" charset="0"/>
+                <a:ea typeface="Aptos" pitchFamily="34" charset="-122"/>
+                <a:cs typeface="Aptos" pitchFamily="34" charset="-120"/>
+              </a:rPr>
+              <a:t>Create an AI for Social Good review brief for one public health use case.</a:t>
+            </a:r>
+            <a:endParaRPr lang="en-US" sz="1700" dirty="0"/>
+          </a:p>
+          <a:p>
+            <a:r>
+              <a:rPr lang="en-US" sz="1700" dirty="0">
+                <a:solidFill>
+                  <a:srgbClr val="17364A"/>
+                </a:solidFill>
+                <a:latin typeface="Aptos" pitchFamily="34" charset="0"/>
+                <a:ea typeface="Aptos" pitchFamily="34" charset="-122"/>
+                <a:cs typeface="Aptos" pitchFamily="34" charset="-120"/>
+              </a:rPr>
+              <a:t>The brief should define the public health problem, intended public benefit, affected communities, equity considerations,.</a:t>
+            </a:r>
+            <a:endParaRPr lang="en-US" sz="1700" dirty="0"/>
+          </a:p>
+          <a:p>
+            <a:r>
+              <a:rPr lang="en-US" sz="1700" dirty="0">
+                <a:solidFill>
+                  <a:srgbClr val="17364A"/>
+                </a:solidFill>
+                <a:latin typeface="Aptos" pitchFamily="34" charset="0"/>
+                <a:ea typeface="Aptos" pitchFamily="34" charset="-122"/>
+                <a:cs typeface="Aptos" pitchFamily="34" charset="-120"/>
+              </a:rPr>
+              <a:t>The exercise should result in a decision-support document that helps leaders and governance reviewers determine whether the.</a:t>
+            </a:r>
+            <a:endParaRPr lang="en-US" sz="1700" dirty="0"/>
+          </a:p>
+        </p:txBody>
+      </p:sp>
+      <p:sp>
+        <p:nvSpPr>
+          <p:cNvPr id="11" name="Shape 9"/>
+          <p:cNvSpPr/>
+          <p:nvPr/>
+        </p:nvSpPr>
+        <p:spPr>
+          <a:xfrm>
+            <a:off x="7909560" y="1417320"/>
+            <a:ext cx="3154680" cy="1828800"/>
+          </a:xfrm>
+          <a:prstGeom prst="roundRect">
+            <a:avLst>
+              <a:gd name="adj" fmla="val 6000"/>
+            </a:avLst>
+          </a:prstGeom>
+          <a:solidFill>
+            <a:srgbClr val="EEF8ED"/>
+          </a:solidFill>
+          <a:ln w="12700">
+            <a:solidFill>
+              <a:srgbClr val="B9D7E6"/>
+            </a:solidFill>
+            <a:prstDash val="solid"/>
+          </a:ln>
+        </p:spPr>
+      </p:sp>
+      <p:sp>
+        <p:nvSpPr>
+          <p:cNvPr id="12" name="Text 10"/>
+          <p:cNvSpPr/>
+          <p:nvPr/>
+        </p:nvSpPr>
+        <p:spPr>
+          <a:xfrm>
+            <a:off x="8074152" y="1563624"/>
+            <a:ext cx="2825496" cy="201168"/>
+          </a:xfrm>
+          <a:prstGeom prst="rect">
+            <a:avLst/>
+          </a:prstGeom>
+          <a:noFill/>
+          <a:ln/>
+        </p:spPr>
+        <p:txBody>
+          <a:bodyPr wrap="square" lIns="0" tIns="0" rIns="0" bIns="0" rtlCol="0" anchor="ctr"/>
+          <a:lstStyle/>
+          <a:p>
             <a:pPr indent="0" marL="0">
               <a:buNone/>
             </a:pPr>
             <a:r>
-              <a:rPr lang="en-US" sz="1420" dirty="0">
+              <a:rPr lang="en-US" sz="950" b="1" dirty="0">
+                <a:solidFill>
+                  <a:srgbClr val="0068B7"/>
+                </a:solidFill>
+                <a:latin typeface="Aptos" pitchFamily="34" charset="0"/>
+                <a:ea typeface="Aptos" pitchFamily="34" charset="-122"/>
+                <a:cs typeface="Aptos" pitchFamily="34" charset="-120"/>
+              </a:rPr>
+              <a:t>Key idea</a:t>
+            </a:r>
+            <a:endParaRPr lang="en-US" sz="950" dirty="0"/>
+          </a:p>
+        </p:txBody>
+      </p:sp>
+      <p:sp>
+        <p:nvSpPr>
+          <p:cNvPr id="13" name="Text 11"/>
+          <p:cNvSpPr/>
+          <p:nvPr/>
+        </p:nvSpPr>
+        <p:spPr>
+          <a:xfrm>
+            <a:off x="8074152" y="1856232"/>
+            <a:ext cx="2825496" cy="1261872"/>
+          </a:xfrm>
+          <a:prstGeom prst="rect">
+            <a:avLst/>
+          </a:prstGeom>
+          <a:noFill/>
+          <a:ln/>
+        </p:spPr>
+        <p:txBody>
+          <a:bodyPr wrap="square" lIns="0" tIns="0" rIns="0" bIns="0" rtlCol="0" anchor="t">
+            <a:normAutofit/>
+          </a:bodyPr>
+          <a:lstStyle/>
+          <a:p>
+            <a:pPr indent="0" marL="0">
+              <a:buNone/>
+            </a:pPr>
+            <a:r>
+              <a:rPr lang="en-US" sz="1250" dirty="0">
                 <a:solidFill>
                   <a:srgbClr val="17364A"/>
                 </a:solidFill>
@@ -4854,9 +7409,116 @@
                 <a:ea typeface="Aptos" pitchFamily="34" charset="-122"/>
                 <a:cs typeface="Aptos" pitchFamily="34" charset="-120"/>
               </a:rPr>
-              <a:t>Impact and unintended-consequence measurement plan</a:t>
-            </a:r>
-            <a:endParaRPr lang="en-US" sz="1420" dirty="0"/>
+              <a:t>Create an AI for Social Good review brief for one public health use case.</a:t>
+            </a:r>
+            <a:endParaRPr lang="en-US" sz="1250" dirty="0"/>
+          </a:p>
+        </p:txBody>
+      </p:sp>
+      <p:sp>
+        <p:nvSpPr>
+          <p:cNvPr id="14" name="Shape 12"/>
+          <p:cNvSpPr/>
+          <p:nvPr/>
+        </p:nvSpPr>
+        <p:spPr>
+          <a:xfrm>
+            <a:off x="7909560" y="3520440"/>
+            <a:ext cx="3154680" cy="1737360"/>
+          </a:xfrm>
+          <a:prstGeom prst="roundRect">
+            <a:avLst>
+              <a:gd name="adj" fmla="val 6316"/>
+            </a:avLst>
+          </a:prstGeom>
+          <a:solidFill>
+            <a:srgbClr val="EAF6F8"/>
+          </a:solidFill>
+          <a:ln w="12700">
+            <a:solidFill>
+              <a:srgbClr val="B9D7E6"/>
+            </a:solidFill>
+            <a:prstDash val="solid"/>
+          </a:ln>
+        </p:spPr>
+      </p:sp>
+      <p:sp>
+        <p:nvSpPr>
+          <p:cNvPr id="15" name="Text 13"/>
+          <p:cNvSpPr/>
+          <p:nvPr/>
+        </p:nvSpPr>
+        <p:spPr>
+          <a:xfrm>
+            <a:off x="8074152" y="3666744"/>
+            <a:ext cx="2825496" cy="201168"/>
+          </a:xfrm>
+          <a:prstGeom prst="rect">
+            <a:avLst/>
+          </a:prstGeom>
+          <a:noFill/>
+          <a:ln/>
+        </p:spPr>
+        <p:txBody>
+          <a:bodyPr wrap="square" lIns="0" tIns="0" rIns="0" bIns="0" rtlCol="0" anchor="ctr"/>
+          <a:lstStyle/>
+          <a:p>
+            <a:pPr indent="0" marL="0">
+              <a:buNone/>
+            </a:pPr>
+            <a:r>
+              <a:rPr lang="en-US" sz="950" b="1" dirty="0">
+                <a:solidFill>
+                  <a:srgbClr val="0068B7"/>
+                </a:solidFill>
+                <a:latin typeface="Aptos" pitchFamily="34" charset="0"/>
+                <a:ea typeface="Aptos" pitchFamily="34" charset="-122"/>
+                <a:cs typeface="Aptos" pitchFamily="34" charset="-120"/>
+              </a:rPr>
+              <a:t>Use this for</a:t>
+            </a:r>
+            <a:endParaRPr lang="en-US" sz="950" dirty="0"/>
+          </a:p>
+        </p:txBody>
+      </p:sp>
+      <p:sp>
+        <p:nvSpPr>
+          <p:cNvPr id="16" name="Text 14"/>
+          <p:cNvSpPr/>
+          <p:nvPr/>
+        </p:nvSpPr>
+        <p:spPr>
+          <a:xfrm>
+            <a:off x="8074152" y="3959352"/>
+            <a:ext cx="2825496" cy="1170432"/>
+          </a:xfrm>
+          <a:prstGeom prst="rect">
+            <a:avLst/>
+          </a:prstGeom>
+          <a:noFill/>
+          <a:ln/>
+        </p:spPr>
+        <p:txBody>
+          <a:bodyPr wrap="square" lIns="0" tIns="0" rIns="0" bIns="0" rtlCol="0" anchor="t">
+            <a:normAutofit/>
+          </a:bodyPr>
+          <a:lstStyle/>
+          <a:p>
+            <a:pPr indent="0" marL="0">
+              <a:buNone/>
+            </a:pPr>
+            <a:r>
+              <a:rPr lang="en-US" sz="1250" dirty="0">
+                <a:solidFill>
+                  <a:srgbClr val="17364A"/>
+                </a:solidFill>
+                <a:latin typeface="Aptos" pitchFamily="34" charset="0"/>
+                <a:ea typeface="Aptos" pitchFamily="34" charset="-122"/>
+                <a:cs typeface="Aptos" pitchFamily="34" charset="-120"/>
+              </a:rPr>
+              <a:t>Connect the concept to public health decisions, safeguards, documentation, or implementation work.</a:t>
+            </a:r>
+            <a:endParaRPr lang="en-US" sz="1250" dirty="0"/>
           </a:p>
         </p:txBody>
       </p:sp>
@@ -4919,7 +7581,32 @@
       </p:sp>
       <p:sp>
         <p:nvSpPr>
-          <p:cNvPr id="3" name="Text 1"/>
+          <p:cNvPr id="3" name="Shape 1"/>
+          <p:cNvSpPr/>
+          <p:nvPr/>
+        </p:nvSpPr>
+        <p:spPr>
+          <a:xfrm>
+            <a:off x="0" y="164592"/>
+            <a:ext cx="146304" cy="6693408"/>
+          </a:xfrm>
+          <a:prstGeom prst="rect">
+            <a:avLst/>
+          </a:prstGeom>
+          <a:solidFill>
+            <a:srgbClr val="2F8A28"/>
+          </a:solidFill>
+          <a:ln w="12700">
+            <a:solidFill>
+              <a:srgbClr val="2F8A28"/>
+            </a:solidFill>
+            <a:prstDash val="solid"/>
+          </a:ln>
+        </p:spPr>
+      </p:sp>
+      <p:sp>
+        <p:nvSpPr>
+          <p:cNvPr id="4" name="Text 2"/>
           <p:cNvSpPr/>
           <p:nvPr/>
         </p:nvSpPr>
@@ -4958,7 +7645,7 @@
       </p:sp>
       <p:sp>
         <p:nvSpPr>
-          <p:cNvPr id="4" name="Text 2"/>
+          <p:cNvPr id="5" name="Text 3"/>
           <p:cNvSpPr/>
           <p:nvPr/>
         </p:nvSpPr>
@@ -4997,7 +7684,7 @@
       </p:sp>
       <p:sp>
         <p:nvSpPr>
-          <p:cNvPr id="5" name="Text 3"/>
+          <p:cNvPr id="6" name="Text 4"/>
           <p:cNvSpPr/>
           <p:nvPr/>
         </p:nvSpPr>
@@ -5036,13 +7723,77 @@
       </p:sp>
       <p:sp>
         <p:nvSpPr>
-          <p:cNvPr id="6" name="Text 4"/>
+          <p:cNvPr id="7" name="Shape 5"/>
           <p:cNvSpPr/>
           <p:nvPr/>
         </p:nvSpPr>
         <p:spPr>
           <a:xfrm>
             <a:off x="640080" y="658368"/>
+            <a:ext cx="420624" cy="420624"/>
+          </a:xfrm>
+          <a:prstGeom prst="ellipse">
+            <a:avLst/>
+          </a:prstGeom>
+          <a:solidFill>
+            <a:srgbClr val="0068B7"/>
+          </a:solidFill>
+          <a:ln w="12700">
+            <a:solidFill>
+              <a:srgbClr val="0068B7"/>
+            </a:solidFill>
+            <a:prstDash val="solid"/>
+          </a:ln>
+        </p:spPr>
+      </p:sp>
+      <p:sp>
+        <p:nvSpPr>
+          <p:cNvPr id="8" name="Text 6"/>
+          <p:cNvSpPr/>
+          <p:nvPr/>
+        </p:nvSpPr>
+        <p:spPr>
+          <a:xfrm>
+            <a:off x="640080" y="731520"/>
+            <a:ext cx="420624" cy="164592"/>
+          </a:xfrm>
+          <a:prstGeom prst="rect">
+            <a:avLst/>
+          </a:prstGeom>
+          <a:noFill/>
+          <a:ln/>
+        </p:spPr>
+        <p:txBody>
+          <a:bodyPr wrap="square" lIns="0" tIns="0" rIns="0" bIns="0" rtlCol="0" anchor="ctr"/>
+          <a:lstStyle/>
+          <a:p>
+            <a:pPr algn="ctr" indent="0" marL="0">
+              <a:buNone/>
+            </a:pPr>
+            <a:r>
+              <a:rPr lang="en-US" sz="1100" b="1" dirty="0">
+                <a:solidFill>
+                  <a:srgbClr val="FFFFFF"/>
+                </a:solidFill>
+                <a:latin typeface="Aptos" pitchFamily="34" charset="0"/>
+                <a:ea typeface="Aptos" pitchFamily="34" charset="-122"/>
+                <a:cs typeface="Aptos" pitchFamily="34" charset="-120"/>
+              </a:rPr>
+              <a:t>10</a:t>
+            </a:r>
+            <a:endParaRPr lang="en-US" sz="1100" dirty="0"/>
+          </a:p>
+        </p:txBody>
+      </p:sp>
+      <p:sp>
+        <p:nvSpPr>
+          <p:cNvPr id="9" name="Text 7"/>
+          <p:cNvSpPr/>
+          <p:nvPr/>
+        </p:nvSpPr>
+        <p:spPr>
+          <a:xfrm>
+            <a:off x="640080" y="621792"/>
             <a:ext cx="10881360" cy="566928"/>
           </a:xfrm>
           <a:prstGeom prst="rect">
@@ -5069,7 +7820,7 @@
                 <a:ea typeface="Aptos Display" pitchFamily="34" charset="-122"/>
                 <a:cs typeface="Aptos Display" pitchFamily="34" charset="-120"/>
               </a:rPr>
-              <a:t>Expected Assignment</a:t>
+              <a:t>Expected Artifact or Evidence</a:t>
             </a:r>
             <a:endParaRPr lang="en-US" sz="2700" dirty="0"/>
           </a:p>
@@ -5077,14 +7828,14 @@
       </p:sp>
       <p:sp>
         <p:nvSpPr>
-          <p:cNvPr id="7" name="Text 5"/>
-          <p:cNvSpPr/>
-          <p:nvPr/>
-        </p:nvSpPr>
-        <p:spPr>
-          <a:xfrm>
-            <a:off x="822960" y="1325880"/>
-            <a:ext cx="10378440" cy="4800600"/>
+          <p:cNvPr id="10" name="Text 8"/>
+          <p:cNvSpPr/>
+          <p:nvPr/>
+        </p:nvSpPr>
+        <p:spPr>
+          <a:xfrm>
+            <a:off x="868680" y="1417320"/>
+            <a:ext cx="6675120" cy="4434840"/>
           </a:xfrm>
           <a:prstGeom prst="rect">
             <a:avLst/>
@@ -5099,7 +7850,7 @@
           <a:lstStyle/>
           <a:p>
             <a:r>
-              <a:rPr lang="en-US" sz="1450" dirty="0">
+              <a:rPr lang="en-US" sz="1700" dirty="0">
                 <a:solidFill>
                   <a:srgbClr val="17364A"/>
                 </a:solidFill>
@@ -5109,11 +7860,11 @@
               </a:rPr>
               <a:t>AI for Social Good review brief</a:t>
             </a:r>
-            <a:endParaRPr lang="en-US" sz="1450" dirty="0"/>
-          </a:p>
-          <a:p>
-            <a:r>
-              <a:rPr lang="en-US" sz="1450" dirty="0">
+            <a:endParaRPr lang="en-US" sz="1700" dirty="0"/>
+          </a:p>
+          <a:p>
+            <a:r>
+              <a:rPr lang="en-US" sz="1700" dirty="0">
                 <a:solidFill>
                   <a:srgbClr val="17364A"/>
                 </a:solidFill>
@@ -5123,11 +7874,11 @@
               </a:rPr>
               <a:t>Public value and equity assessment</a:t>
             </a:r>
-            <a:endParaRPr lang="en-US" sz="1450" dirty="0"/>
-          </a:p>
-          <a:p>
-            <a:r>
-              <a:rPr lang="en-US" sz="1450" dirty="0">
+            <a:endParaRPr lang="en-US" sz="1700" dirty="0"/>
+          </a:p>
+          <a:p>
+            <a:r>
+              <a:rPr lang="en-US" sz="1700" dirty="0">
                 <a:solidFill>
                   <a:srgbClr val="17364A"/>
                 </a:solidFill>
@@ -5137,11 +7888,104 @@
               </a:rPr>
               <a:t>Community engagement and accessibility plan</a:t>
             </a:r>
-            <a:endParaRPr lang="en-US" sz="1450" dirty="0"/>
-          </a:p>
-          <a:p>
-            <a:r>
-              <a:rPr lang="en-US" sz="1450" dirty="0">
+            <a:endParaRPr lang="en-US" sz="1700" dirty="0"/>
+          </a:p>
+        </p:txBody>
+      </p:sp>
+      <p:sp>
+        <p:nvSpPr>
+          <p:cNvPr id="11" name="Shape 9"/>
+          <p:cNvSpPr/>
+          <p:nvPr/>
+        </p:nvSpPr>
+        <p:spPr>
+          <a:xfrm>
+            <a:off x="7909560" y="1417320"/>
+            <a:ext cx="3154680" cy="1828800"/>
+          </a:xfrm>
+          <a:prstGeom prst="roundRect">
+            <a:avLst>
+              <a:gd name="adj" fmla="val 6000"/>
+            </a:avLst>
+          </a:prstGeom>
+          <a:solidFill>
+            <a:srgbClr val="EEF8ED"/>
+          </a:solidFill>
+          <a:ln w="12700">
+            <a:solidFill>
+              <a:srgbClr val="B9D7E6"/>
+            </a:solidFill>
+            <a:prstDash val="solid"/>
+          </a:ln>
+        </p:spPr>
+      </p:sp>
+      <p:sp>
+        <p:nvSpPr>
+          <p:cNvPr id="12" name="Text 10"/>
+          <p:cNvSpPr/>
+          <p:nvPr/>
+        </p:nvSpPr>
+        <p:spPr>
+          <a:xfrm>
+            <a:off x="8074152" y="1563624"/>
+            <a:ext cx="2825496" cy="201168"/>
+          </a:xfrm>
+          <a:prstGeom prst="rect">
+            <a:avLst/>
+          </a:prstGeom>
+          <a:noFill/>
+          <a:ln/>
+        </p:spPr>
+        <p:txBody>
+          <a:bodyPr wrap="square" lIns="0" tIns="0" rIns="0" bIns="0" rtlCol="0" anchor="ctr"/>
+          <a:lstStyle/>
+          <a:p>
+            <a:pPr indent="0" marL="0">
+              <a:buNone/>
+            </a:pPr>
+            <a:r>
+              <a:rPr lang="en-US" sz="950" b="1" dirty="0">
+                <a:solidFill>
+                  <a:srgbClr val="0068B7"/>
+                </a:solidFill>
+                <a:latin typeface="Aptos" pitchFamily="34" charset="0"/>
+                <a:ea typeface="Aptos" pitchFamily="34" charset="-122"/>
+                <a:cs typeface="Aptos" pitchFamily="34" charset="-120"/>
+              </a:rPr>
+              <a:t>Key idea</a:t>
+            </a:r>
+            <a:endParaRPr lang="en-US" sz="950" dirty="0"/>
+          </a:p>
+        </p:txBody>
+      </p:sp>
+      <p:sp>
+        <p:nvSpPr>
+          <p:cNvPr id="13" name="Text 11"/>
+          <p:cNvSpPr/>
+          <p:nvPr/>
+        </p:nvSpPr>
+        <p:spPr>
+          <a:xfrm>
+            <a:off x="8074152" y="1856232"/>
+            <a:ext cx="2825496" cy="1261872"/>
+          </a:xfrm>
+          <a:prstGeom prst="rect">
+            <a:avLst/>
+          </a:prstGeom>
+          <a:noFill/>
+          <a:ln/>
+        </p:spPr>
+        <p:txBody>
+          <a:bodyPr wrap="square" lIns="0" tIns="0" rIns="0" bIns="0" rtlCol="0" anchor="t">
+            <a:normAutofit/>
+          </a:bodyPr>
+          <a:lstStyle/>
+          <a:p>
+            <a:pPr indent="0" marL="0">
+              <a:buNone/>
+            </a:pPr>
+            <a:r>
+              <a:rPr lang="en-US" sz="1250" dirty="0">
                 <a:solidFill>
                   <a:srgbClr val="17364A"/>
                 </a:solidFill>
@@ -5149,9 +7993,116 @@
                 <a:ea typeface="Aptos" pitchFamily="34" charset="-122"/>
                 <a:cs typeface="Aptos" pitchFamily="34" charset="-120"/>
               </a:rPr>
-              <a:t>Impact and unintended-consequence measurement plan</a:t>
-            </a:r>
-            <a:endParaRPr lang="en-US" sz="1450" dirty="0"/>
+              <a:t>AI for Social Good review brief</a:t>
+            </a:r>
+            <a:endParaRPr lang="en-US" sz="1250" dirty="0"/>
+          </a:p>
+        </p:txBody>
+      </p:sp>
+      <p:sp>
+        <p:nvSpPr>
+          <p:cNvPr id="14" name="Shape 12"/>
+          <p:cNvSpPr/>
+          <p:nvPr/>
+        </p:nvSpPr>
+        <p:spPr>
+          <a:xfrm>
+            <a:off x="7909560" y="3520440"/>
+            <a:ext cx="3154680" cy="1737360"/>
+          </a:xfrm>
+          <a:prstGeom prst="roundRect">
+            <a:avLst>
+              <a:gd name="adj" fmla="val 6316"/>
+            </a:avLst>
+          </a:prstGeom>
+          <a:solidFill>
+            <a:srgbClr val="EAF6F8"/>
+          </a:solidFill>
+          <a:ln w="12700">
+            <a:solidFill>
+              <a:srgbClr val="B9D7E6"/>
+            </a:solidFill>
+            <a:prstDash val="solid"/>
+          </a:ln>
+        </p:spPr>
+      </p:sp>
+      <p:sp>
+        <p:nvSpPr>
+          <p:cNvPr id="15" name="Text 13"/>
+          <p:cNvSpPr/>
+          <p:nvPr/>
+        </p:nvSpPr>
+        <p:spPr>
+          <a:xfrm>
+            <a:off x="8074152" y="3666744"/>
+            <a:ext cx="2825496" cy="201168"/>
+          </a:xfrm>
+          <a:prstGeom prst="rect">
+            <a:avLst/>
+          </a:prstGeom>
+          <a:noFill/>
+          <a:ln/>
+        </p:spPr>
+        <p:txBody>
+          <a:bodyPr wrap="square" lIns="0" tIns="0" rIns="0" bIns="0" rtlCol="0" anchor="ctr"/>
+          <a:lstStyle/>
+          <a:p>
+            <a:pPr indent="0" marL="0">
+              <a:buNone/>
+            </a:pPr>
+            <a:r>
+              <a:rPr lang="en-US" sz="950" b="1" dirty="0">
+                <a:solidFill>
+                  <a:srgbClr val="0068B7"/>
+                </a:solidFill>
+                <a:latin typeface="Aptos" pitchFamily="34" charset="0"/>
+                <a:ea typeface="Aptos" pitchFamily="34" charset="-122"/>
+                <a:cs typeface="Aptos" pitchFamily="34" charset="-120"/>
+              </a:rPr>
+              <a:t>Use this for</a:t>
+            </a:r>
+            <a:endParaRPr lang="en-US" sz="950" dirty="0"/>
+          </a:p>
+        </p:txBody>
+      </p:sp>
+      <p:sp>
+        <p:nvSpPr>
+          <p:cNvPr id="16" name="Text 14"/>
+          <p:cNvSpPr/>
+          <p:nvPr/>
+        </p:nvSpPr>
+        <p:spPr>
+          <a:xfrm>
+            <a:off x="8074152" y="3959352"/>
+            <a:ext cx="2825496" cy="1170432"/>
+          </a:xfrm>
+          <a:prstGeom prst="rect">
+            <a:avLst/>
+          </a:prstGeom>
+          <a:noFill/>
+          <a:ln/>
+        </p:spPr>
+        <p:txBody>
+          <a:bodyPr wrap="square" lIns="0" tIns="0" rIns="0" bIns="0" rtlCol="0" anchor="t">
+            <a:normAutofit/>
+          </a:bodyPr>
+          <a:lstStyle/>
+          <a:p>
+            <a:pPr indent="0" marL="0">
+              <a:buNone/>
+            </a:pPr>
+            <a:r>
+              <a:rPr lang="en-US" sz="1250" dirty="0">
+                <a:solidFill>
+                  <a:srgbClr val="17364A"/>
+                </a:solidFill>
+                <a:latin typeface="Aptos" pitchFamily="34" charset="0"/>
+                <a:ea typeface="Aptos" pitchFamily="34" charset="-122"/>
+                <a:cs typeface="Aptos" pitchFamily="34" charset="-120"/>
+              </a:rPr>
+              <a:t>Connect the concept to public health decisions, safeguards, documentation, or implementation work.</a:t>
+            </a:r>
+            <a:endParaRPr lang="en-US" sz="1250" dirty="0"/>
           </a:p>
         </p:txBody>
       </p:sp>
@@ -5214,7 +8165,32 @@
       </p:sp>
       <p:sp>
         <p:nvSpPr>
-          <p:cNvPr id="3" name="Text 1"/>
+          <p:cNvPr id="3" name="Shape 1"/>
+          <p:cNvSpPr/>
+          <p:nvPr/>
+        </p:nvSpPr>
+        <p:spPr>
+          <a:xfrm>
+            <a:off x="0" y="164592"/>
+            <a:ext cx="146304" cy="6693408"/>
+          </a:xfrm>
+          <a:prstGeom prst="rect">
+            <a:avLst/>
+          </a:prstGeom>
+          <a:solidFill>
+            <a:srgbClr val="2F8A28"/>
+          </a:solidFill>
+          <a:ln w="12700">
+            <a:solidFill>
+              <a:srgbClr val="2F8A28"/>
+            </a:solidFill>
+            <a:prstDash val="solid"/>
+          </a:ln>
+        </p:spPr>
+      </p:sp>
+      <p:sp>
+        <p:nvSpPr>
+          <p:cNvPr id="4" name="Text 2"/>
           <p:cNvSpPr/>
           <p:nvPr/>
         </p:nvSpPr>
@@ -5253,7 +8229,7 @@
       </p:sp>
       <p:sp>
         <p:nvSpPr>
-          <p:cNvPr id="4" name="Text 2"/>
+          <p:cNvPr id="5" name="Text 3"/>
           <p:cNvSpPr/>
           <p:nvPr/>
         </p:nvSpPr>
@@ -5292,7 +8268,7 @@
       </p:sp>
       <p:sp>
         <p:nvSpPr>
-          <p:cNvPr id="5" name="Text 3"/>
+          <p:cNvPr id="6" name="Text 4"/>
           <p:cNvSpPr/>
           <p:nvPr/>
         </p:nvSpPr>
@@ -5331,7 +8307,7 @@
       </p:sp>
       <p:sp>
         <p:nvSpPr>
-          <p:cNvPr id="6" name="Text 4"/>
+          <p:cNvPr id="7" name="Text 5"/>
           <p:cNvSpPr/>
           <p:nvPr/>
         </p:nvSpPr>
@@ -5364,7 +8340,7 @@
                 <a:ea typeface="Aptos Display" pitchFamily="34" charset="-122"/>
                 <a:cs typeface="Aptos Display" pitchFamily="34" charset="-120"/>
               </a:rPr>
-              <a:t>Knowledge Check</a:t>
+              <a:t>Expected Artifact or Evidence Continued</a:t>
             </a:r>
             <a:endParaRPr lang="en-US" sz="2700" dirty="0"/>
           </a:p>
@@ -5372,14 +8348,14 @@
       </p:sp>
       <p:sp>
         <p:nvSpPr>
-          <p:cNvPr id="7" name="Text 5"/>
-          <p:cNvSpPr/>
-          <p:nvPr/>
-        </p:nvSpPr>
-        <p:spPr>
-          <a:xfrm>
-            <a:off x="822960" y="1325880"/>
-            <a:ext cx="10378440" cy="4800600"/>
+          <p:cNvPr id="8" name="Text 6"/>
+          <p:cNvSpPr/>
+          <p:nvPr/>
+        </p:nvSpPr>
+        <p:spPr>
+          <a:xfrm>
+            <a:off x="868680" y="1417320"/>
+            <a:ext cx="6675120" cy="4434840"/>
           </a:xfrm>
           <a:prstGeom prst="rect">
             <a:avLst/>
@@ -5394,7 +8370,7 @@
           <a:lstStyle/>
           <a:p>
             <a:r>
-              <a:rPr lang="en-US" sz="1450" dirty="0">
+              <a:rPr lang="en-US" sz="1700" dirty="0">
                 <a:solidFill>
                   <a:srgbClr val="17364A"/>
                 </a:solidFill>
@@ -5402,13 +8378,106 @@
                 <a:ea typeface="Aptos" pitchFamily="34" charset="-122"/>
                 <a:cs typeface="Aptos" pitchFamily="34" charset="-120"/>
               </a:rPr>
-              <a:t>1. What is the best definition of AI for Social Good in public health?</a:t>
-            </a:r>
-            <a:endParaRPr lang="en-US" sz="1450" dirty="0"/>
-          </a:p>
-          <a:p>
-            <a:r>
-              <a:rPr lang="en-US" sz="1450" dirty="0">
+              <a:t>Impact and unintended-consequence measurement plan</a:t>
+            </a:r>
+            <a:endParaRPr lang="en-US" sz="1700" dirty="0"/>
+          </a:p>
+        </p:txBody>
+      </p:sp>
+      <p:sp>
+        <p:nvSpPr>
+          <p:cNvPr id="9" name="Shape 7"/>
+          <p:cNvSpPr/>
+          <p:nvPr/>
+        </p:nvSpPr>
+        <p:spPr>
+          <a:xfrm>
+            <a:off x="7909560" y="1417320"/>
+            <a:ext cx="3154680" cy="1828800"/>
+          </a:xfrm>
+          <a:prstGeom prst="roundRect">
+            <a:avLst>
+              <a:gd name="adj" fmla="val 6000"/>
+            </a:avLst>
+          </a:prstGeom>
+          <a:solidFill>
+            <a:srgbClr val="EEF8ED"/>
+          </a:solidFill>
+          <a:ln w="12700">
+            <a:solidFill>
+              <a:srgbClr val="B9D7E6"/>
+            </a:solidFill>
+            <a:prstDash val="solid"/>
+          </a:ln>
+        </p:spPr>
+      </p:sp>
+      <p:sp>
+        <p:nvSpPr>
+          <p:cNvPr id="10" name="Text 8"/>
+          <p:cNvSpPr/>
+          <p:nvPr/>
+        </p:nvSpPr>
+        <p:spPr>
+          <a:xfrm>
+            <a:off x="8074152" y="1563624"/>
+            <a:ext cx="2825496" cy="201168"/>
+          </a:xfrm>
+          <a:prstGeom prst="rect">
+            <a:avLst/>
+          </a:prstGeom>
+          <a:noFill/>
+          <a:ln/>
+        </p:spPr>
+        <p:txBody>
+          <a:bodyPr wrap="square" lIns="0" tIns="0" rIns="0" bIns="0" rtlCol="0" anchor="ctr"/>
+          <a:lstStyle/>
+          <a:p>
+            <a:pPr indent="0" marL="0">
+              <a:buNone/>
+            </a:pPr>
+            <a:r>
+              <a:rPr lang="en-US" sz="950" b="1" dirty="0">
+                <a:solidFill>
+                  <a:srgbClr val="0068B7"/>
+                </a:solidFill>
+                <a:latin typeface="Aptos" pitchFamily="34" charset="0"/>
+                <a:ea typeface="Aptos" pitchFamily="34" charset="-122"/>
+                <a:cs typeface="Aptos" pitchFamily="34" charset="-120"/>
+              </a:rPr>
+              <a:t>Key idea</a:t>
+            </a:r>
+            <a:endParaRPr lang="en-US" sz="950" dirty="0"/>
+          </a:p>
+        </p:txBody>
+      </p:sp>
+      <p:sp>
+        <p:nvSpPr>
+          <p:cNvPr id="11" name="Text 9"/>
+          <p:cNvSpPr/>
+          <p:nvPr/>
+        </p:nvSpPr>
+        <p:spPr>
+          <a:xfrm>
+            <a:off x="8074152" y="1856232"/>
+            <a:ext cx="2825496" cy="1261872"/>
+          </a:xfrm>
+          <a:prstGeom prst="rect">
+            <a:avLst/>
+          </a:prstGeom>
+          <a:noFill/>
+          <a:ln/>
+        </p:spPr>
+        <p:txBody>
+          <a:bodyPr wrap="square" lIns="0" tIns="0" rIns="0" bIns="0" rtlCol="0" anchor="t">
+            <a:normAutofit/>
+          </a:bodyPr>
+          <a:lstStyle/>
+          <a:p>
+            <a:pPr indent="0" marL="0">
+              <a:buNone/>
+            </a:pPr>
+            <a:r>
+              <a:rPr lang="en-US" sz="1250" dirty="0">
                 <a:solidFill>
                   <a:srgbClr val="17364A"/>
                 </a:solidFill>
@@ -5416,13 +8485,106 @@
                 <a:ea typeface="Aptos" pitchFamily="34" charset="-122"/>
                 <a:cs typeface="Aptos" pitchFamily="34" charset="-120"/>
               </a:rPr>
-              <a:t>2. Why is efficiency alone not enough to show social good?</a:t>
-            </a:r>
-            <a:endParaRPr lang="en-US" sz="1450" dirty="0"/>
-          </a:p>
-          <a:p>
-            <a:r>
-              <a:rPr lang="en-US" sz="1450" dirty="0">
+              <a:t>Impact and unintended-consequence measurement plan</a:t>
+            </a:r>
+            <a:endParaRPr lang="en-US" sz="1250" dirty="0"/>
+          </a:p>
+        </p:txBody>
+      </p:sp>
+      <p:sp>
+        <p:nvSpPr>
+          <p:cNvPr id="12" name="Shape 10"/>
+          <p:cNvSpPr/>
+          <p:nvPr/>
+        </p:nvSpPr>
+        <p:spPr>
+          <a:xfrm>
+            <a:off x="7909560" y="3520440"/>
+            <a:ext cx="3154680" cy="1737360"/>
+          </a:xfrm>
+          <a:prstGeom prst="roundRect">
+            <a:avLst>
+              <a:gd name="adj" fmla="val 6316"/>
+            </a:avLst>
+          </a:prstGeom>
+          <a:solidFill>
+            <a:srgbClr val="EAF6F8"/>
+          </a:solidFill>
+          <a:ln w="12700">
+            <a:solidFill>
+              <a:srgbClr val="B9D7E6"/>
+            </a:solidFill>
+            <a:prstDash val="solid"/>
+          </a:ln>
+        </p:spPr>
+      </p:sp>
+      <p:sp>
+        <p:nvSpPr>
+          <p:cNvPr id="13" name="Text 11"/>
+          <p:cNvSpPr/>
+          <p:nvPr/>
+        </p:nvSpPr>
+        <p:spPr>
+          <a:xfrm>
+            <a:off x="8074152" y="3666744"/>
+            <a:ext cx="2825496" cy="201168"/>
+          </a:xfrm>
+          <a:prstGeom prst="rect">
+            <a:avLst/>
+          </a:prstGeom>
+          <a:noFill/>
+          <a:ln/>
+        </p:spPr>
+        <p:txBody>
+          <a:bodyPr wrap="square" lIns="0" tIns="0" rIns="0" bIns="0" rtlCol="0" anchor="ctr"/>
+          <a:lstStyle/>
+          <a:p>
+            <a:pPr indent="0" marL="0">
+              <a:buNone/>
+            </a:pPr>
+            <a:r>
+              <a:rPr lang="en-US" sz="950" b="1" dirty="0">
+                <a:solidFill>
+                  <a:srgbClr val="0068B7"/>
+                </a:solidFill>
+                <a:latin typeface="Aptos" pitchFamily="34" charset="0"/>
+                <a:ea typeface="Aptos" pitchFamily="34" charset="-122"/>
+                <a:cs typeface="Aptos" pitchFamily="34" charset="-120"/>
+              </a:rPr>
+              <a:t>Use this for</a:t>
+            </a:r>
+            <a:endParaRPr lang="en-US" sz="950" dirty="0"/>
+          </a:p>
+        </p:txBody>
+      </p:sp>
+      <p:sp>
+        <p:nvSpPr>
+          <p:cNvPr id="14" name="Text 12"/>
+          <p:cNvSpPr/>
+          <p:nvPr/>
+        </p:nvSpPr>
+        <p:spPr>
+          <a:xfrm>
+            <a:off x="8074152" y="3959352"/>
+            <a:ext cx="2825496" cy="1170432"/>
+          </a:xfrm>
+          <a:prstGeom prst="rect">
+            <a:avLst/>
+          </a:prstGeom>
+          <a:noFill/>
+          <a:ln/>
+        </p:spPr>
+        <p:txBody>
+          <a:bodyPr wrap="square" lIns="0" tIns="0" rIns="0" bIns="0" rtlCol="0" anchor="t">
+            <a:normAutofit/>
+          </a:bodyPr>
+          <a:lstStyle/>
+          <a:p>
+            <a:pPr indent="0" marL="0">
+              <a:buNone/>
+            </a:pPr>
+            <a:r>
+              <a:rPr lang="en-US" sz="1250" dirty="0">
                 <a:solidFill>
                   <a:srgbClr val="17364A"/>
                 </a:solidFill>
@@ -5430,37 +8592,9 @@
                 <a:ea typeface="Aptos" pitchFamily="34" charset="-122"/>
                 <a:cs typeface="Aptos" pitchFamily="34" charset="-120"/>
               </a:rPr>
-              <a:t>3. What does equity by design require?</a:t>
-            </a:r>
-            <a:endParaRPr lang="en-US" sz="1450" dirty="0"/>
-          </a:p>
-          <a:p>
-            <a:r>
-              <a:rPr lang="en-US" sz="1450" dirty="0">
-                <a:solidFill>
-                  <a:srgbClr val="17364A"/>
-                </a:solidFill>
-                <a:latin typeface="Aptos" pitchFamily="34" charset="0"/>
-                <a:ea typeface="Aptos" pitchFamily="34" charset="-122"/>
-                <a:cs typeface="Aptos" pitchFamily="34" charset="-120"/>
-              </a:rPr>
-              <a:t>4. Which use best reflects AI for Social Good?</a:t>
-            </a:r>
-            <a:endParaRPr lang="en-US" sz="1450" dirty="0"/>
-          </a:p>
-          <a:p>
-            <a:r>
-              <a:rPr lang="en-US" sz="1450" dirty="0">
-                <a:solidFill>
-                  <a:srgbClr val="17364A"/>
-                </a:solidFill>
-                <a:latin typeface="Aptos" pitchFamily="34" charset="0"/>
-                <a:ea typeface="Aptos" pitchFamily="34" charset="-122"/>
-                <a:cs typeface="Aptos" pitchFamily="34" charset="-120"/>
-              </a:rPr>
-              <a:t>5. What is strong completion evidence for this module?</a:t>
-            </a:r>
-            <a:endParaRPr lang="en-US" sz="1450" dirty="0"/>
+              <a:t>Connect the concept to public health decisions, safeguards, documentation, or implementation work.</a:t>
+            </a:r>
+            <a:endParaRPr lang="en-US" sz="1250" dirty="0"/>
           </a:p>
         </p:txBody>
       </p:sp>
@@ -5523,7 +8657,32 @@
       </p:sp>
       <p:sp>
         <p:nvSpPr>
-          <p:cNvPr id="3" name="Text 1"/>
+          <p:cNvPr id="3" name="Shape 1"/>
+          <p:cNvSpPr/>
+          <p:nvPr/>
+        </p:nvSpPr>
+        <p:spPr>
+          <a:xfrm>
+            <a:off x="0" y="164592"/>
+            <a:ext cx="146304" cy="6693408"/>
+          </a:xfrm>
+          <a:prstGeom prst="rect">
+            <a:avLst/>
+          </a:prstGeom>
+          <a:solidFill>
+            <a:srgbClr val="2F8A28"/>
+          </a:solidFill>
+          <a:ln w="12700">
+            <a:solidFill>
+              <a:srgbClr val="2F8A28"/>
+            </a:solidFill>
+            <a:prstDash val="solid"/>
+          </a:ln>
+        </p:spPr>
+      </p:sp>
+      <p:sp>
+        <p:nvSpPr>
+          <p:cNvPr id="4" name="Text 2"/>
           <p:cNvSpPr/>
           <p:nvPr/>
         </p:nvSpPr>
@@ -5562,7 +8721,7 @@
       </p:sp>
       <p:sp>
         <p:nvSpPr>
-          <p:cNvPr id="4" name="Text 2"/>
+          <p:cNvPr id="5" name="Text 3"/>
           <p:cNvSpPr/>
           <p:nvPr/>
         </p:nvSpPr>
@@ -5601,7 +8760,7 @@
       </p:sp>
       <p:sp>
         <p:nvSpPr>
-          <p:cNvPr id="5" name="Text 3"/>
+          <p:cNvPr id="6" name="Text 4"/>
           <p:cNvSpPr/>
           <p:nvPr/>
         </p:nvSpPr>
@@ -5640,7 +8799,7 @@
       </p:sp>
       <p:sp>
         <p:nvSpPr>
-          <p:cNvPr id="6" name="Text 4"/>
+          <p:cNvPr id="7" name="Text 5"/>
           <p:cNvSpPr/>
           <p:nvPr/>
         </p:nvSpPr>
@@ -5673,7 +8832,7 @@
                 <a:ea typeface="Aptos Display" pitchFamily="34" charset="-122"/>
                 <a:cs typeface="Aptos Display" pitchFamily="34" charset="-120"/>
               </a:rPr>
-              <a:t>Module Context</a:t>
+              <a:t>What this module helps you do</a:t>
             </a:r>
             <a:endParaRPr lang="en-US" sz="2700" dirty="0"/>
           </a:p>
@@ -5681,14 +8840,14 @@
       </p:sp>
       <p:sp>
         <p:nvSpPr>
-          <p:cNvPr id="7" name="Text 5"/>
-          <p:cNvSpPr/>
-          <p:nvPr/>
-        </p:nvSpPr>
-        <p:spPr>
-          <a:xfrm>
-            <a:off x="822960" y="1325880"/>
-            <a:ext cx="10378440" cy="1371600"/>
+          <p:cNvPr id="8" name="Text 6"/>
+          <p:cNvSpPr/>
+          <p:nvPr/>
+        </p:nvSpPr>
+        <p:spPr>
+          <a:xfrm>
+            <a:off x="868680" y="1417320"/>
+            <a:ext cx="6675120" cy="3291840"/>
           </a:xfrm>
           <a:prstGeom prst="rect">
             <a:avLst/>
@@ -5703,7 +8862,7 @@
           <a:lstStyle/>
           <a:p>
             <a:r>
-              <a:rPr lang="en-US" sz="1600" dirty="0">
+              <a:rPr lang="en-US" sz="1700" dirty="0">
                 <a:solidFill>
                   <a:srgbClr val="17364A"/>
                 </a:solidFill>
@@ -5711,13 +8870,13 @@
                 <a:ea typeface="Aptos" pitchFamily="34" charset="-122"/>
                 <a:cs typeface="Aptos" pitchFamily="34" charset="-120"/>
               </a:rPr>
-              <a:t>Level: introductory</a:t>
-            </a:r>
-            <a:endParaRPr lang="en-US" sz="1600" dirty="0"/>
-          </a:p>
-          <a:p>
-            <a:r>
-              <a:rPr lang="en-US" sz="1600" dirty="0">
+              <a:t>AI for Social Good refers to the intentional use of artificial intelligence to improve public well-being, reduce inequities, strengthen.</a:t>
+            </a:r>
+            <a:endParaRPr lang="en-US" sz="1700" dirty="0"/>
+          </a:p>
+          <a:p>
+            <a:r>
+              <a:rPr lang="en-US" sz="1700" dirty="0">
                 <a:solidFill>
                   <a:srgbClr val="17364A"/>
                 </a:solidFill>
@@ -5725,13 +8884,13 @@
                 <a:ea typeface="Aptos" pitchFamily="34" charset="-122"/>
                 <a:cs typeface="Aptos" pitchFamily="34" charset="-120"/>
               </a:rPr>
-              <a:t>Primary track: Shared Foundational / Introductory Course</a:t>
-            </a:r>
-            <a:endParaRPr lang="en-US" sz="1600" dirty="0"/>
-          </a:p>
-          <a:p>
-            <a:r>
-              <a:rPr lang="en-US" sz="1600" dirty="0">
+              <a:t>For public health, this concept is not abstract.</a:t>
+            </a:r>
+            <a:endParaRPr lang="en-US" sz="1700" dirty="0"/>
+          </a:p>
+          <a:p>
+            <a:r>
+              <a:rPr lang="en-US" sz="1700" dirty="0">
                 <a:solidFill>
                   <a:srgbClr val="17364A"/>
                 </a:solidFill>
@@ -5739,31 +8898,111 @@
                 <a:ea typeface="Aptos" pitchFamily="34" charset="-122"/>
                 <a:cs typeface="Aptos" pitchFamily="34" charset="-120"/>
               </a:rPr>
-              <a:t>Appears in tracks: shared-foundational, policy, communications</a:t>
-            </a:r>
-            <a:endParaRPr lang="en-US" sz="1600" dirty="0"/>
-          </a:p>
-        </p:txBody>
-      </p:sp>
-      <p:sp>
-        <p:nvSpPr>
-          <p:cNvPr id="8" name="Text 6"/>
-          <p:cNvSpPr/>
-          <p:nvPr/>
-        </p:nvSpPr>
-        <p:spPr>
-          <a:xfrm>
-            <a:off x="822960" y="2743200"/>
-            <a:ext cx="10378440" cy="2834640"/>
-          </a:xfrm>
-          <a:prstGeom prst="rect">
-            <a:avLst/>
-          </a:prstGeom>
-          <a:noFill/>
-          <a:ln/>
-        </p:spPr>
-        <p:txBody>
-          <a:bodyPr wrap="square" lIns="1016" tIns="1016" rIns="1016" bIns="1016" rtlCol="0" anchor="t">
+              <a:t>Public health agencies already work to prevent disease, protect communities, improve access, and reduce inequities.</a:t>
+            </a:r>
+            <a:endParaRPr lang="en-US" sz="1700" dirty="0"/>
+          </a:p>
+          <a:p>
+            <a:r>
+              <a:rPr lang="en-US" sz="1700" dirty="0">
+                <a:solidFill>
+                  <a:srgbClr val="17364A"/>
+                </a:solidFill>
+                <a:latin typeface="Aptos" pitchFamily="34" charset="0"/>
+                <a:ea typeface="Aptos" pitchFamily="34" charset="-122"/>
+                <a:cs typeface="Aptos" pitchFamily="34" charset="-120"/>
+              </a:rPr>
+              <a:t>AI for Social Good should therefore be judged by whether it advances public health values in measurable, accountable, and community-centered ways.</a:t>
+            </a:r>
+            <a:endParaRPr lang="en-US" sz="1700" dirty="0"/>
+          </a:p>
+        </p:txBody>
+      </p:sp>
+      <p:sp>
+        <p:nvSpPr>
+          <p:cNvPr id="9" name="Shape 7"/>
+          <p:cNvSpPr/>
+          <p:nvPr/>
+        </p:nvSpPr>
+        <p:spPr>
+          <a:xfrm>
+            <a:off x="7909560" y="1417320"/>
+            <a:ext cx="3154680" cy="1920240"/>
+          </a:xfrm>
+          <a:prstGeom prst="roundRect">
+            <a:avLst>
+              <a:gd name="adj" fmla="val 5714"/>
+            </a:avLst>
+          </a:prstGeom>
+          <a:solidFill>
+            <a:srgbClr val="EAF6F8"/>
+          </a:solidFill>
+          <a:ln w="12700">
+            <a:solidFill>
+              <a:srgbClr val="B9D7E6"/>
+            </a:solidFill>
+            <a:prstDash val="solid"/>
+          </a:ln>
+        </p:spPr>
+      </p:sp>
+      <p:sp>
+        <p:nvSpPr>
+          <p:cNvPr id="10" name="Text 8"/>
+          <p:cNvSpPr/>
+          <p:nvPr/>
+        </p:nvSpPr>
+        <p:spPr>
+          <a:xfrm>
+            <a:off x="8074152" y="1563624"/>
+            <a:ext cx="2825496" cy="201168"/>
+          </a:xfrm>
+          <a:prstGeom prst="rect">
+            <a:avLst/>
+          </a:prstGeom>
+          <a:noFill/>
+          <a:ln/>
+        </p:spPr>
+        <p:txBody>
+          <a:bodyPr wrap="square" lIns="0" tIns="0" rIns="0" bIns="0" rtlCol="0" anchor="ctr"/>
+          <a:lstStyle/>
+          <a:p>
+            <a:pPr indent="0" marL="0">
+              <a:buNone/>
+            </a:pPr>
+            <a:r>
+              <a:rPr lang="en-US" sz="950" b="1" dirty="0">
+                <a:solidFill>
+                  <a:srgbClr val="0068B7"/>
+                </a:solidFill>
+                <a:latin typeface="Aptos" pitchFamily="34" charset="0"/>
+                <a:ea typeface="Aptos" pitchFamily="34" charset="-122"/>
+                <a:cs typeface="Aptos" pitchFamily="34" charset="-120"/>
+              </a:rPr>
+              <a:t>Module details</a:t>
+            </a:r>
+            <a:endParaRPr lang="en-US" sz="950" dirty="0"/>
+          </a:p>
+        </p:txBody>
+      </p:sp>
+      <p:sp>
+        <p:nvSpPr>
+          <p:cNvPr id="11" name="Text 9"/>
+          <p:cNvSpPr/>
+          <p:nvPr/>
+        </p:nvSpPr>
+        <p:spPr>
+          <a:xfrm>
+            <a:off x="8074152" y="1856232"/>
+            <a:ext cx="2825496" cy="1353312"/>
+          </a:xfrm>
+          <a:prstGeom prst="rect">
+            <a:avLst/>
+          </a:prstGeom>
+          <a:noFill/>
+          <a:ln/>
+        </p:spPr>
+        <p:txBody>
+          <a:bodyPr wrap="square" lIns="0" tIns="0" rIns="0" bIns="0" rtlCol="0" anchor="t">
             <a:normAutofit/>
           </a:bodyPr>
           <a:lstStyle/>
@@ -5772,7 +9011,7 @@
               <a:buNone/>
             </a:pPr>
             <a:r>
-              <a:rPr lang="en-US" sz="1400" dirty="0">
+              <a:rPr lang="en-US" sz="1250" dirty="0">
                 <a:solidFill>
                   <a:srgbClr val="17364A"/>
                 </a:solidFill>
@@ -5780,9 +9019,150 @@
                 <a:ea typeface="Aptos" pitchFamily="34" charset="-122"/>
                 <a:cs typeface="Aptos" pitchFamily="34" charset="-120"/>
               </a:rPr>
-              <a:t>AI for Social Good refers to the intentional use of artificial intelligence to improve public well-being, reduce inequities, strengthen institutions, and address complex social problems. For public health, this concept is not abstract. Public health agencies already work to prevent disease, protect communities, improve access, and reduce inequities. AI for Social Good should therefore be judged by whether it advances public health values in measurable, accountable, and community-centered ways. This training helps learners distinguish socially beneficial AI from AI that is merely innovative or efficient. A tool can be technically impressive and still fail to advance the public good if it increases surveillance burden, excludes communities, weakens transparency, or diverts resources from more effective interventions. Conversely, a modest AI tool may create meaningful public value if it reduces staff burden, improves language access, directs services to underserved communities, or helps agencies respond faster and more fairly. The module emphasizes public purpose, equity by design, community engagement, responsible innovation, transparency, measurement, and avoidance of unintended harm. Learners will develop an AI for Social Good review brief for a public health use case.</a:t>
-            </a:r>
-            <a:endParaRPr lang="en-US" sz="1400" dirty="0"/>
+              <a:t>Level: introductory</a:t>
+            </a:r>
+            <a:endParaRPr lang="en-US" sz="1250" dirty="0"/>
+          </a:p>
+          <a:p>
+            <a:pPr indent="0" marL="0">
+              <a:buNone/>
+            </a:pPr>
+            <a:r>
+              <a:rPr lang="en-US" sz="1250" dirty="0">
+                <a:solidFill>
+                  <a:srgbClr val="17364A"/>
+                </a:solidFill>
+                <a:latin typeface="Aptos" pitchFamily="34" charset="0"/>
+                <a:ea typeface="Aptos" pitchFamily="34" charset="-122"/>
+                <a:cs typeface="Aptos" pitchFamily="34" charset="-120"/>
+              </a:rPr>
+              <a:t>Primary track: Shared Foundational / Introductory Course</a:t>
+            </a:r>
+            <a:endParaRPr lang="en-US" sz="1250" dirty="0"/>
+          </a:p>
+          <a:p>
+            <a:pPr indent="0" marL="0">
+              <a:buNone/>
+            </a:pPr>
+            <a:r>
+              <a:rPr lang="en-US" sz="1250" dirty="0">
+                <a:solidFill>
+                  <a:srgbClr val="17364A"/>
+                </a:solidFill>
+                <a:latin typeface="Aptos" pitchFamily="34" charset="0"/>
+                <a:ea typeface="Aptos" pitchFamily="34" charset="-122"/>
+                <a:cs typeface="Aptos" pitchFamily="34" charset="-120"/>
+              </a:rPr>
+              <a:t>Appears in tracks: shared-foundational, policy, communications</a:t>
+            </a:r>
+            <a:endParaRPr lang="en-US" sz="1250" dirty="0"/>
+          </a:p>
+        </p:txBody>
+      </p:sp>
+      <p:sp>
+        <p:nvSpPr>
+          <p:cNvPr id="12" name="Shape 10"/>
+          <p:cNvSpPr/>
+          <p:nvPr/>
+        </p:nvSpPr>
+        <p:spPr>
+          <a:xfrm>
+            <a:off x="7909560" y="3611880"/>
+            <a:ext cx="3154680" cy="1783080"/>
+          </a:xfrm>
+          <a:prstGeom prst="roundRect">
+            <a:avLst>
+              <a:gd name="adj" fmla="val 6154"/>
+            </a:avLst>
+          </a:prstGeom>
+          <a:solidFill>
+            <a:srgbClr val="EEF8ED"/>
+          </a:solidFill>
+          <a:ln w="12700">
+            <a:solidFill>
+              <a:srgbClr val="B9D7E6"/>
+            </a:solidFill>
+            <a:prstDash val="solid"/>
+          </a:ln>
+        </p:spPr>
+      </p:sp>
+      <p:sp>
+        <p:nvSpPr>
+          <p:cNvPr id="13" name="Text 11"/>
+          <p:cNvSpPr/>
+          <p:nvPr/>
+        </p:nvSpPr>
+        <p:spPr>
+          <a:xfrm>
+            <a:off x="8074152" y="3758184"/>
+            <a:ext cx="2825496" cy="201168"/>
+          </a:xfrm>
+          <a:prstGeom prst="rect">
+            <a:avLst/>
+          </a:prstGeom>
+          <a:noFill/>
+          <a:ln/>
+        </p:spPr>
+        <p:txBody>
+          <a:bodyPr wrap="square" lIns="0" tIns="0" rIns="0" bIns="0" rtlCol="0" anchor="ctr"/>
+          <a:lstStyle/>
+          <a:p>
+            <a:pPr indent="0" marL="0">
+              <a:buNone/>
+            </a:pPr>
+            <a:r>
+              <a:rPr lang="en-US" sz="950" b="1" dirty="0">
+                <a:solidFill>
+                  <a:srgbClr val="0068B7"/>
+                </a:solidFill>
+                <a:latin typeface="Aptos" pitchFamily="34" charset="0"/>
+                <a:ea typeface="Aptos" pitchFamily="34" charset="-122"/>
+                <a:cs typeface="Aptos" pitchFamily="34" charset="-120"/>
+              </a:rPr>
+              <a:t>Learning approach</a:t>
+            </a:r>
+            <a:endParaRPr lang="en-US" sz="950" dirty="0"/>
+          </a:p>
+        </p:txBody>
+      </p:sp>
+      <p:sp>
+        <p:nvSpPr>
+          <p:cNvPr id="14" name="Text 12"/>
+          <p:cNvSpPr/>
+          <p:nvPr/>
+        </p:nvSpPr>
+        <p:spPr>
+          <a:xfrm>
+            <a:off x="8074152" y="4050792"/>
+            <a:ext cx="2825496" cy="1216152"/>
+          </a:xfrm>
+          <a:prstGeom prst="rect">
+            <a:avLst/>
+          </a:prstGeom>
+          <a:noFill/>
+          <a:ln/>
+        </p:spPr>
+        <p:txBody>
+          <a:bodyPr wrap="square" lIns="0" tIns="0" rIns="0" bIns="0" rtlCol="0" anchor="t">
+            <a:normAutofit/>
+          </a:bodyPr>
+          <a:lstStyle/>
+          <a:p>
+            <a:pPr indent="0" marL="0">
+              <a:buNone/>
+            </a:pPr>
+            <a:r>
+              <a:rPr lang="en-US" sz="1250" dirty="0">
+                <a:solidFill>
+                  <a:srgbClr val="17364A"/>
+                </a:solidFill>
+                <a:latin typeface="Aptos" pitchFamily="34" charset="0"/>
+                <a:ea typeface="Aptos" pitchFamily="34" charset="-122"/>
+                <a:cs typeface="Aptos" pitchFamily="34" charset="-120"/>
+              </a:rPr>
+              <a:t>Review the core ideas, complete the practical exercise, check your understanding, and use the related plays and tools to apply the lesson.</a:t>
+            </a:r>
+            <a:endParaRPr lang="en-US" sz="1250" dirty="0"/>
           </a:p>
         </p:txBody>
       </p:sp>
@@ -5845,7 +9225,32 @@
       </p:sp>
       <p:sp>
         <p:nvSpPr>
-          <p:cNvPr id="3" name="Text 1"/>
+          <p:cNvPr id="3" name="Shape 1"/>
+          <p:cNvSpPr/>
+          <p:nvPr/>
+        </p:nvSpPr>
+        <p:spPr>
+          <a:xfrm>
+            <a:off x="0" y="164592"/>
+            <a:ext cx="146304" cy="6693408"/>
+          </a:xfrm>
+          <a:prstGeom prst="rect">
+            <a:avLst/>
+          </a:prstGeom>
+          <a:solidFill>
+            <a:srgbClr val="2F8A28"/>
+          </a:solidFill>
+          <a:ln w="12700">
+            <a:solidFill>
+              <a:srgbClr val="2F8A28"/>
+            </a:solidFill>
+            <a:prstDash val="solid"/>
+          </a:ln>
+        </p:spPr>
+      </p:sp>
+      <p:sp>
+        <p:nvSpPr>
+          <p:cNvPr id="4" name="Text 2"/>
           <p:cNvSpPr/>
           <p:nvPr/>
         </p:nvSpPr>
@@ -5884,7 +9289,7 @@
       </p:sp>
       <p:sp>
         <p:nvSpPr>
-          <p:cNvPr id="4" name="Text 2"/>
+          <p:cNvPr id="5" name="Text 3"/>
           <p:cNvSpPr/>
           <p:nvPr/>
         </p:nvSpPr>
@@ -5923,7 +9328,7 @@
       </p:sp>
       <p:sp>
         <p:nvSpPr>
-          <p:cNvPr id="5" name="Text 3"/>
+          <p:cNvPr id="6" name="Text 4"/>
           <p:cNvSpPr/>
           <p:nvPr/>
         </p:nvSpPr>
@@ -5962,13 +9367,77 @@
       </p:sp>
       <p:sp>
         <p:nvSpPr>
-          <p:cNvPr id="6" name="Text 4"/>
+          <p:cNvPr id="7" name="Shape 5"/>
           <p:cNvSpPr/>
           <p:nvPr/>
         </p:nvSpPr>
         <p:spPr>
           <a:xfrm>
             <a:off x="640080" y="658368"/>
+            <a:ext cx="420624" cy="420624"/>
+          </a:xfrm>
+          <a:prstGeom prst="ellipse">
+            <a:avLst/>
+          </a:prstGeom>
+          <a:solidFill>
+            <a:srgbClr val="0068B7"/>
+          </a:solidFill>
+          <a:ln w="12700">
+            <a:solidFill>
+              <a:srgbClr val="0068B7"/>
+            </a:solidFill>
+            <a:prstDash val="solid"/>
+          </a:ln>
+        </p:spPr>
+      </p:sp>
+      <p:sp>
+        <p:nvSpPr>
+          <p:cNvPr id="8" name="Text 6"/>
+          <p:cNvSpPr/>
+          <p:nvPr/>
+        </p:nvSpPr>
+        <p:spPr>
+          <a:xfrm>
+            <a:off x="640080" y="731520"/>
+            <a:ext cx="420624" cy="164592"/>
+          </a:xfrm>
+          <a:prstGeom prst="rect">
+            <a:avLst/>
+          </a:prstGeom>
+          <a:noFill/>
+          <a:ln/>
+        </p:spPr>
+        <p:txBody>
+          <a:bodyPr wrap="square" lIns="0" tIns="0" rIns="0" bIns="0" rtlCol="0" anchor="ctr"/>
+          <a:lstStyle/>
+          <a:p>
+            <a:pPr algn="ctr" indent="0" marL="0">
+              <a:buNone/>
+            </a:pPr>
+            <a:r>
+              <a:rPr lang="en-US" sz="1100" b="1" dirty="0">
+                <a:solidFill>
+                  <a:srgbClr val="FFFFFF"/>
+                </a:solidFill>
+                <a:latin typeface="Aptos" pitchFamily="34" charset="0"/>
+                <a:ea typeface="Aptos" pitchFamily="34" charset="-122"/>
+                <a:cs typeface="Aptos" pitchFamily="34" charset="-120"/>
+              </a:rPr>
+              <a:t>11</a:t>
+            </a:r>
+            <a:endParaRPr lang="en-US" sz="1100" dirty="0"/>
+          </a:p>
+        </p:txBody>
+      </p:sp>
+      <p:sp>
+        <p:nvSpPr>
+          <p:cNvPr id="9" name="Text 7"/>
+          <p:cNvSpPr/>
+          <p:nvPr/>
+        </p:nvSpPr>
+        <p:spPr>
+          <a:xfrm>
+            <a:off x="640080" y="621792"/>
             <a:ext cx="10881360" cy="566928"/>
           </a:xfrm>
           <a:prstGeom prst="rect">
@@ -5995,7 +9464,7 @@
                 <a:ea typeface="Aptos Display" pitchFamily="34" charset="-122"/>
                 <a:cs typeface="Aptos Display" pitchFamily="34" charset="-120"/>
               </a:rPr>
-              <a:t>References and Resources</a:t>
+              <a:t>Expected Assignment</a:t>
             </a:r>
             <a:endParaRPr lang="en-US" sz="2700" dirty="0"/>
           </a:p>
@@ -6003,14 +9472,14 @@
       </p:sp>
       <p:sp>
         <p:nvSpPr>
-          <p:cNvPr id="7" name="Text 5"/>
-          <p:cNvSpPr/>
-          <p:nvPr/>
-        </p:nvSpPr>
-        <p:spPr>
-          <a:xfrm>
-            <a:off x="822960" y="1325880"/>
-            <a:ext cx="10378440" cy="4800600"/>
+          <p:cNvPr id="10" name="Text 8"/>
+          <p:cNvSpPr/>
+          <p:nvPr/>
+        </p:nvSpPr>
+        <p:spPr>
+          <a:xfrm>
+            <a:off x="868680" y="1417320"/>
+            <a:ext cx="6675120" cy="4434840"/>
           </a:xfrm>
           <a:prstGeom prst="rect">
             <a:avLst/>
@@ -6025,7 +9494,7 @@
           <a:lstStyle/>
           <a:p>
             <a:r>
-              <a:rPr lang="en-US" sz="1450" dirty="0">
+              <a:rPr lang="en-US" sz="1700" dirty="0">
                 <a:solidFill>
                   <a:srgbClr val="17364A"/>
                 </a:solidFill>
@@ -6033,13 +9502,1209 @@
                 <a:ea typeface="Aptos" pitchFamily="34" charset="-122"/>
                 <a:cs typeface="Aptos" pitchFamily="34" charset="-120"/>
               </a:rPr>
+              <a:t>AI for Social Good review brief</a:t>
+            </a:r>
+            <a:endParaRPr lang="en-US" sz="1700" dirty="0"/>
+          </a:p>
+          <a:p>
+            <a:r>
+              <a:rPr lang="en-US" sz="1700" dirty="0">
+                <a:solidFill>
+                  <a:srgbClr val="17364A"/>
+                </a:solidFill>
+                <a:latin typeface="Aptos" pitchFamily="34" charset="0"/>
+                <a:ea typeface="Aptos" pitchFamily="34" charset="-122"/>
+                <a:cs typeface="Aptos" pitchFamily="34" charset="-120"/>
+              </a:rPr>
+              <a:t>Public value and equity assessment</a:t>
+            </a:r>
+            <a:endParaRPr lang="en-US" sz="1700" dirty="0"/>
+          </a:p>
+          <a:p>
+            <a:r>
+              <a:rPr lang="en-US" sz="1700" dirty="0">
+                <a:solidFill>
+                  <a:srgbClr val="17364A"/>
+                </a:solidFill>
+                <a:latin typeface="Aptos" pitchFamily="34" charset="0"/>
+                <a:ea typeface="Aptos" pitchFamily="34" charset="-122"/>
+                <a:cs typeface="Aptos" pitchFamily="34" charset="-120"/>
+              </a:rPr>
+              <a:t>Community engagement and accessibility plan</a:t>
+            </a:r>
+            <a:endParaRPr lang="en-US" sz="1700" dirty="0"/>
+          </a:p>
+          <a:p>
+            <a:r>
+              <a:rPr lang="en-US" sz="1700" dirty="0">
+                <a:solidFill>
+                  <a:srgbClr val="17364A"/>
+                </a:solidFill>
+                <a:latin typeface="Aptos" pitchFamily="34" charset="0"/>
+                <a:ea typeface="Aptos" pitchFamily="34" charset="-122"/>
+                <a:cs typeface="Aptos" pitchFamily="34" charset="-120"/>
+              </a:rPr>
+              <a:t>Impact and unintended-consequence measurement plan</a:t>
+            </a:r>
+            <a:endParaRPr lang="en-US" sz="1700" dirty="0"/>
+          </a:p>
+        </p:txBody>
+      </p:sp>
+      <p:sp>
+        <p:nvSpPr>
+          <p:cNvPr id="11" name="Shape 9"/>
+          <p:cNvSpPr/>
+          <p:nvPr/>
+        </p:nvSpPr>
+        <p:spPr>
+          <a:xfrm>
+            <a:off x="7909560" y="1417320"/>
+            <a:ext cx="3154680" cy="1828800"/>
+          </a:xfrm>
+          <a:prstGeom prst="roundRect">
+            <a:avLst>
+              <a:gd name="adj" fmla="val 6000"/>
+            </a:avLst>
+          </a:prstGeom>
+          <a:solidFill>
+            <a:srgbClr val="EEF8ED"/>
+          </a:solidFill>
+          <a:ln w="12700">
+            <a:solidFill>
+              <a:srgbClr val="B9D7E6"/>
+            </a:solidFill>
+            <a:prstDash val="solid"/>
+          </a:ln>
+        </p:spPr>
+      </p:sp>
+      <p:sp>
+        <p:nvSpPr>
+          <p:cNvPr id="12" name="Text 10"/>
+          <p:cNvSpPr/>
+          <p:nvPr/>
+        </p:nvSpPr>
+        <p:spPr>
+          <a:xfrm>
+            <a:off x="8074152" y="1563624"/>
+            <a:ext cx="2825496" cy="201168"/>
+          </a:xfrm>
+          <a:prstGeom prst="rect">
+            <a:avLst/>
+          </a:prstGeom>
+          <a:noFill/>
+          <a:ln/>
+        </p:spPr>
+        <p:txBody>
+          <a:bodyPr wrap="square" lIns="0" tIns="0" rIns="0" bIns="0" rtlCol="0" anchor="ctr"/>
+          <a:lstStyle/>
+          <a:p>
+            <a:pPr indent="0" marL="0">
+              <a:buNone/>
+            </a:pPr>
+            <a:r>
+              <a:rPr lang="en-US" sz="950" b="1" dirty="0">
+                <a:solidFill>
+                  <a:srgbClr val="0068B7"/>
+                </a:solidFill>
+                <a:latin typeface="Aptos" pitchFamily="34" charset="0"/>
+                <a:ea typeface="Aptos" pitchFamily="34" charset="-122"/>
+                <a:cs typeface="Aptos" pitchFamily="34" charset="-120"/>
+              </a:rPr>
+              <a:t>Key idea</a:t>
+            </a:r>
+            <a:endParaRPr lang="en-US" sz="950" dirty="0"/>
+          </a:p>
+        </p:txBody>
+      </p:sp>
+      <p:sp>
+        <p:nvSpPr>
+          <p:cNvPr id="13" name="Text 11"/>
+          <p:cNvSpPr/>
+          <p:nvPr/>
+        </p:nvSpPr>
+        <p:spPr>
+          <a:xfrm>
+            <a:off x="8074152" y="1856232"/>
+            <a:ext cx="2825496" cy="1261872"/>
+          </a:xfrm>
+          <a:prstGeom prst="rect">
+            <a:avLst/>
+          </a:prstGeom>
+          <a:noFill/>
+          <a:ln/>
+        </p:spPr>
+        <p:txBody>
+          <a:bodyPr wrap="square" lIns="0" tIns="0" rIns="0" bIns="0" rtlCol="0" anchor="t">
+            <a:normAutofit/>
+          </a:bodyPr>
+          <a:lstStyle/>
+          <a:p>
+            <a:pPr indent="0" marL="0">
+              <a:buNone/>
+            </a:pPr>
+            <a:r>
+              <a:rPr lang="en-US" sz="1250" dirty="0">
+                <a:solidFill>
+                  <a:srgbClr val="17364A"/>
+                </a:solidFill>
+                <a:latin typeface="Aptos" pitchFamily="34" charset="0"/>
+                <a:ea typeface="Aptos" pitchFamily="34" charset="-122"/>
+                <a:cs typeface="Aptos" pitchFamily="34" charset="-120"/>
+              </a:rPr>
+              <a:t>AI for Social Good review brief</a:t>
+            </a:r>
+            <a:endParaRPr lang="en-US" sz="1250" dirty="0"/>
+          </a:p>
+        </p:txBody>
+      </p:sp>
+      <p:sp>
+        <p:nvSpPr>
+          <p:cNvPr id="14" name="Shape 12"/>
+          <p:cNvSpPr/>
+          <p:nvPr/>
+        </p:nvSpPr>
+        <p:spPr>
+          <a:xfrm>
+            <a:off x="7909560" y="3520440"/>
+            <a:ext cx="3154680" cy="1737360"/>
+          </a:xfrm>
+          <a:prstGeom prst="roundRect">
+            <a:avLst>
+              <a:gd name="adj" fmla="val 6316"/>
+            </a:avLst>
+          </a:prstGeom>
+          <a:solidFill>
+            <a:srgbClr val="EAF6F8"/>
+          </a:solidFill>
+          <a:ln w="12700">
+            <a:solidFill>
+              <a:srgbClr val="B9D7E6"/>
+            </a:solidFill>
+            <a:prstDash val="solid"/>
+          </a:ln>
+        </p:spPr>
+      </p:sp>
+      <p:sp>
+        <p:nvSpPr>
+          <p:cNvPr id="15" name="Text 13"/>
+          <p:cNvSpPr/>
+          <p:nvPr/>
+        </p:nvSpPr>
+        <p:spPr>
+          <a:xfrm>
+            <a:off x="8074152" y="3666744"/>
+            <a:ext cx="2825496" cy="201168"/>
+          </a:xfrm>
+          <a:prstGeom prst="rect">
+            <a:avLst/>
+          </a:prstGeom>
+          <a:noFill/>
+          <a:ln/>
+        </p:spPr>
+        <p:txBody>
+          <a:bodyPr wrap="square" lIns="0" tIns="0" rIns="0" bIns="0" rtlCol="0" anchor="ctr"/>
+          <a:lstStyle/>
+          <a:p>
+            <a:pPr indent="0" marL="0">
+              <a:buNone/>
+            </a:pPr>
+            <a:r>
+              <a:rPr lang="en-US" sz="950" b="1" dirty="0">
+                <a:solidFill>
+                  <a:srgbClr val="0068B7"/>
+                </a:solidFill>
+                <a:latin typeface="Aptos" pitchFamily="34" charset="0"/>
+                <a:ea typeface="Aptos" pitchFamily="34" charset="-122"/>
+                <a:cs typeface="Aptos" pitchFamily="34" charset="-120"/>
+              </a:rPr>
+              <a:t>Use this for</a:t>
+            </a:r>
+            <a:endParaRPr lang="en-US" sz="950" dirty="0"/>
+          </a:p>
+        </p:txBody>
+      </p:sp>
+      <p:sp>
+        <p:nvSpPr>
+          <p:cNvPr id="16" name="Text 14"/>
+          <p:cNvSpPr/>
+          <p:nvPr/>
+        </p:nvSpPr>
+        <p:spPr>
+          <a:xfrm>
+            <a:off x="8074152" y="3959352"/>
+            <a:ext cx="2825496" cy="1170432"/>
+          </a:xfrm>
+          <a:prstGeom prst="rect">
+            <a:avLst/>
+          </a:prstGeom>
+          <a:noFill/>
+          <a:ln/>
+        </p:spPr>
+        <p:txBody>
+          <a:bodyPr wrap="square" lIns="0" tIns="0" rIns="0" bIns="0" rtlCol="0" anchor="t">
+            <a:normAutofit/>
+          </a:bodyPr>
+          <a:lstStyle/>
+          <a:p>
+            <a:pPr indent="0" marL="0">
+              <a:buNone/>
+            </a:pPr>
+            <a:r>
+              <a:rPr lang="en-US" sz="1250" dirty="0">
+                <a:solidFill>
+                  <a:srgbClr val="17364A"/>
+                </a:solidFill>
+                <a:latin typeface="Aptos" pitchFamily="34" charset="0"/>
+                <a:ea typeface="Aptos" pitchFamily="34" charset="-122"/>
+                <a:cs typeface="Aptos" pitchFamily="34" charset="-120"/>
+              </a:rPr>
+              <a:t>Connect the concept to public health decisions, safeguards, documentation, or implementation work.</a:t>
+            </a:r>
+            <a:endParaRPr lang="en-US" sz="1250" dirty="0"/>
+          </a:p>
+        </p:txBody>
+      </p:sp>
+    </p:spTree>
+  </p:cSld>
+  <p:clrMapOvr>
+    <a:masterClrMapping/>
+  </p:clrMapOvr>
+</p:sld>
+</file>
+
+<file path=ppt/slides/slide21.xml><?xml version="1.0" encoding="utf-8"?>
+<p:sld xmlns:a="http://schemas.openxmlformats.org/drawingml/2006/main" xmlns:r="http://schemas.openxmlformats.org/officeDocument/2006/relationships" xmlns:p="http://schemas.openxmlformats.org/presentationml/2006/main">
+  <p:cSld name="Slide 21">
+    <p:bg>
+      <p:bgPr>
+        <a:solidFill>
+          <a:srgbClr val="F7FBFD"/>
+        </a:solidFill>
+      </p:bgPr>
+    </p:bg>
+    <p:spTree>
+      <p:nvGrpSpPr>
+        <p:cNvPr id="1" name=""/>
+        <p:cNvGrpSpPr/>
+        <p:nvPr/>
+      </p:nvGrpSpPr>
+      <p:grpSpPr>
+        <a:xfrm>
+          <a:off x="0" y="0"/>
+          <a:ext cx="0" cy="0"/>
+          <a:chOff x="0" y="0"/>
+          <a:chExt cx="0" cy="0"/>
+        </a:xfrm>
+      </p:grpSpPr>
+      <p:sp>
+        <p:nvSpPr>
+          <p:cNvPr id="2" name="Shape 0"/>
+          <p:cNvSpPr/>
+          <p:nvPr/>
+        </p:nvSpPr>
+        <p:spPr>
+          <a:xfrm>
+            <a:off x="0" y="0"/>
+            <a:ext cx="12191695" cy="164592"/>
+          </a:xfrm>
+          <a:prstGeom prst="rect">
+            <a:avLst/>
+          </a:prstGeom>
+          <a:solidFill>
+            <a:srgbClr val="0068B7"/>
+          </a:solidFill>
+          <a:ln w="12700">
+            <a:solidFill>
+              <a:srgbClr val="0068B7"/>
+            </a:solidFill>
+            <a:prstDash val="solid"/>
+          </a:ln>
+        </p:spPr>
+      </p:sp>
+      <p:sp>
+        <p:nvSpPr>
+          <p:cNvPr id="3" name="Shape 1"/>
+          <p:cNvSpPr/>
+          <p:nvPr/>
+        </p:nvSpPr>
+        <p:spPr>
+          <a:xfrm>
+            <a:off x="0" y="164592"/>
+            <a:ext cx="146304" cy="6693408"/>
+          </a:xfrm>
+          <a:prstGeom prst="rect">
+            <a:avLst/>
+          </a:prstGeom>
+          <a:solidFill>
+            <a:srgbClr val="2F8A28"/>
+          </a:solidFill>
+          <a:ln w="12700">
+            <a:solidFill>
+              <a:srgbClr val="2F8A28"/>
+            </a:solidFill>
+            <a:prstDash val="solid"/>
+          </a:ln>
+        </p:spPr>
+      </p:sp>
+      <p:sp>
+        <p:nvSpPr>
+          <p:cNvPr id="4" name="Text 2"/>
+          <p:cNvSpPr/>
+          <p:nvPr/>
+        </p:nvSpPr>
+        <p:spPr>
+          <a:xfrm>
+            <a:off x="502920" y="292608"/>
+            <a:ext cx="10149840" cy="256032"/>
+          </a:xfrm>
+          <a:prstGeom prst="rect">
+            <a:avLst/>
+          </a:prstGeom>
+          <a:noFill/>
+          <a:ln/>
+        </p:spPr>
+        <p:txBody>
+          <a:bodyPr wrap="square" lIns="0" tIns="0" rIns="0" bIns="0" rtlCol="0" anchor="ctr"/>
+          <a:lstStyle/>
+          <a:p>
+            <a:pPr indent="0" marL="0">
+              <a:buNone/>
+            </a:pPr>
+            <a:r>
+              <a:rPr lang="en-US" sz="900" b="1" dirty="0">
+                <a:solidFill>
+                  <a:srgbClr val="5F7181"/>
+                </a:solidFill>
+                <a:latin typeface="Aptos" pitchFamily="34" charset="0"/>
+                <a:ea typeface="Aptos" pitchFamily="34" charset="-122"/>
+                <a:cs typeface="Aptos" pitchFamily="34" charset="-120"/>
+              </a:rPr>
+              <a:t>AI for Social Good</a:t>
+            </a:r>
+            <a:endParaRPr lang="en-US" sz="900" dirty="0"/>
+          </a:p>
+        </p:txBody>
+      </p:sp>
+      <p:sp>
+        <p:nvSpPr>
+          <p:cNvPr id="5" name="Text 3"/>
+          <p:cNvSpPr/>
+          <p:nvPr/>
+        </p:nvSpPr>
+        <p:spPr>
+          <a:xfrm>
+            <a:off x="502920" y="6537960"/>
+            <a:ext cx="7772400" cy="201168"/>
+          </a:xfrm>
+          <a:prstGeom prst="rect">
+            <a:avLst/>
+          </a:prstGeom>
+          <a:noFill/>
+          <a:ln/>
+        </p:spPr>
+        <p:txBody>
+          <a:bodyPr wrap="square" lIns="0" tIns="0" rIns="0" bIns="0" rtlCol="0" anchor="ctr"/>
+          <a:lstStyle/>
+          <a:p>
+            <a:pPr indent="0" marL="0">
+              <a:buNone/>
+            </a:pPr>
+            <a:r>
+              <a:rPr lang="en-US" sz="800" dirty="0">
+                <a:solidFill>
+                  <a:srgbClr val="5F7181"/>
+                </a:solidFill>
+                <a:latin typeface="Aptos" pitchFamily="34" charset="0"/>
+                <a:ea typeface="Aptos" pitchFamily="34" charset="-122"/>
+                <a:cs typeface="Aptos" pitchFamily="34" charset="-120"/>
+              </a:rPr>
+              <a:t>AI Playbook and Toolkit for Public Health Departments</a:t>
+            </a:r>
+            <a:endParaRPr lang="en-US" sz="800" dirty="0"/>
+          </a:p>
+        </p:txBody>
+      </p:sp>
+      <p:sp>
+        <p:nvSpPr>
+          <p:cNvPr id="6" name="Text 4"/>
+          <p:cNvSpPr/>
+          <p:nvPr/>
+        </p:nvSpPr>
+        <p:spPr>
+          <a:xfrm>
+            <a:off x="9966960" y="6537960"/>
+            <a:ext cx="1645920" cy="201168"/>
+          </a:xfrm>
+          <a:prstGeom prst="rect">
+            <a:avLst/>
+          </a:prstGeom>
+          <a:noFill/>
+          <a:ln/>
+        </p:spPr>
+        <p:txBody>
+          <a:bodyPr wrap="square" lIns="0" tIns="0" rIns="0" bIns="0" rtlCol="0" anchor="ctr"/>
+          <a:lstStyle/>
+          <a:p>
+            <a:pPr algn="r" indent="0" marL="0">
+              <a:buNone/>
+            </a:pPr>
+            <a:r>
+              <a:rPr lang="en-US" sz="800" dirty="0">
+                <a:solidFill>
+                  <a:srgbClr val="5F7181"/>
+                </a:solidFill>
+                <a:latin typeface="Aptos" pitchFamily="34" charset="0"/>
+                <a:ea typeface="Aptos" pitchFamily="34" charset="-122"/>
+                <a:cs typeface="Aptos" pitchFamily="34" charset="-120"/>
+              </a:rPr>
+              <a:t>© Paula Soper</a:t>
+            </a:r>
+            <a:endParaRPr lang="en-US" sz="800" dirty="0"/>
+          </a:p>
+        </p:txBody>
+      </p:sp>
+      <p:sp>
+        <p:nvSpPr>
+          <p:cNvPr id="7" name="Shape 5"/>
+          <p:cNvSpPr/>
+          <p:nvPr/>
+        </p:nvSpPr>
+        <p:spPr>
+          <a:xfrm>
+            <a:off x="640080" y="658368"/>
+            <a:ext cx="420624" cy="420624"/>
+          </a:xfrm>
+          <a:prstGeom prst="ellipse">
+            <a:avLst/>
+          </a:prstGeom>
+          <a:solidFill>
+            <a:srgbClr val="0068B7"/>
+          </a:solidFill>
+          <a:ln w="12700">
+            <a:solidFill>
+              <a:srgbClr val="0068B7"/>
+            </a:solidFill>
+            <a:prstDash val="solid"/>
+          </a:ln>
+        </p:spPr>
+      </p:sp>
+      <p:sp>
+        <p:nvSpPr>
+          <p:cNvPr id="8" name="Text 6"/>
+          <p:cNvSpPr/>
+          <p:nvPr/>
+        </p:nvSpPr>
+        <p:spPr>
+          <a:xfrm>
+            <a:off x="640080" y="731520"/>
+            <a:ext cx="420624" cy="164592"/>
+          </a:xfrm>
+          <a:prstGeom prst="rect">
+            <a:avLst/>
+          </a:prstGeom>
+          <a:noFill/>
+          <a:ln/>
+        </p:spPr>
+        <p:txBody>
+          <a:bodyPr wrap="square" lIns="0" tIns="0" rIns="0" bIns="0" rtlCol="0" anchor="ctr"/>
+          <a:lstStyle/>
+          <a:p>
+            <a:pPr algn="ctr" indent="0" marL="0">
+              <a:buNone/>
+            </a:pPr>
+            <a:r>
+              <a:rPr lang="en-US" sz="1100" b="1" dirty="0">
+                <a:solidFill>
+                  <a:srgbClr val="FFFFFF"/>
+                </a:solidFill>
+                <a:latin typeface="Aptos" pitchFamily="34" charset="0"/>
+                <a:ea typeface="Aptos" pitchFamily="34" charset="-122"/>
+                <a:cs typeface="Aptos" pitchFamily="34" charset="-120"/>
+              </a:rPr>
+              <a:t>12</a:t>
+            </a:r>
+            <a:endParaRPr lang="en-US" sz="1100" dirty="0"/>
+          </a:p>
+        </p:txBody>
+      </p:sp>
+      <p:sp>
+        <p:nvSpPr>
+          <p:cNvPr id="9" name="Text 7"/>
+          <p:cNvSpPr/>
+          <p:nvPr/>
+        </p:nvSpPr>
+        <p:spPr>
+          <a:xfrm>
+            <a:off x="640080" y="621792"/>
+            <a:ext cx="10881360" cy="566928"/>
+          </a:xfrm>
+          <a:prstGeom prst="rect">
+            <a:avLst/>
+          </a:prstGeom>
+          <a:noFill/>
+          <a:ln/>
+        </p:spPr>
+        <p:txBody>
+          <a:bodyPr wrap="square" lIns="0" tIns="0" rIns="0" bIns="0" rtlCol="0" anchor="ctr">
+            <a:normAutofit/>
+          </a:bodyPr>
+          <a:lstStyle/>
+          <a:p>
+            <a:pPr indent="0" marL="0">
+              <a:buNone/>
+            </a:pPr>
+            <a:r>
+              <a:rPr lang="en-US" sz="2700" b="1" dirty="0">
+                <a:solidFill>
+                  <a:srgbClr val="003A63"/>
+                </a:solidFill>
+                <a:latin typeface="Aptos Display" pitchFamily="34" charset="0"/>
+                <a:ea typeface="Aptos Display" pitchFamily="34" charset="-122"/>
+                <a:cs typeface="Aptos Display" pitchFamily="34" charset="-120"/>
+              </a:rPr>
+              <a:t>Knowledge Check</a:t>
+            </a:r>
+            <a:endParaRPr lang="en-US" sz="2700" dirty="0"/>
+          </a:p>
+        </p:txBody>
+      </p:sp>
+      <p:sp>
+        <p:nvSpPr>
+          <p:cNvPr id="10" name="Text 8"/>
+          <p:cNvSpPr/>
+          <p:nvPr/>
+        </p:nvSpPr>
+        <p:spPr>
+          <a:xfrm>
+            <a:off x="868680" y="1417320"/>
+            <a:ext cx="6675120" cy="4434840"/>
+          </a:xfrm>
+          <a:prstGeom prst="rect">
+            <a:avLst/>
+          </a:prstGeom>
+          <a:noFill/>
+          <a:ln/>
+        </p:spPr>
+        <p:txBody>
+          <a:bodyPr wrap="square" lIns="635" tIns="635" rIns="635" bIns="635" rtlCol="0" anchor="t">
+            <a:normAutofit/>
+          </a:bodyPr>
+          <a:lstStyle/>
+          <a:p>
+            <a:r>
+              <a:rPr lang="en-US" sz="1700" dirty="0">
+                <a:solidFill>
+                  <a:srgbClr val="17364A"/>
+                </a:solidFill>
+                <a:latin typeface="Aptos" pitchFamily="34" charset="0"/>
+                <a:ea typeface="Aptos" pitchFamily="34" charset="-122"/>
+                <a:cs typeface="Aptos" pitchFamily="34" charset="-120"/>
+              </a:rPr>
+              <a:t>1. What is the best definition of AI for Social Good in public health?</a:t>
+            </a:r>
+            <a:endParaRPr lang="en-US" sz="1700" dirty="0"/>
+          </a:p>
+          <a:p>
+            <a:r>
+              <a:rPr lang="en-US" sz="1700" dirty="0">
+                <a:solidFill>
+                  <a:srgbClr val="17364A"/>
+                </a:solidFill>
+                <a:latin typeface="Aptos" pitchFamily="34" charset="0"/>
+                <a:ea typeface="Aptos" pitchFamily="34" charset="-122"/>
+                <a:cs typeface="Aptos" pitchFamily="34" charset="-120"/>
+              </a:rPr>
+              <a:t>2. Why is efficiency alone not enough to show social good?</a:t>
+            </a:r>
+            <a:endParaRPr lang="en-US" sz="1700" dirty="0"/>
+          </a:p>
+          <a:p>
+            <a:r>
+              <a:rPr lang="en-US" sz="1700" dirty="0">
+                <a:solidFill>
+                  <a:srgbClr val="17364A"/>
+                </a:solidFill>
+                <a:latin typeface="Aptos" pitchFamily="34" charset="0"/>
+                <a:ea typeface="Aptos" pitchFamily="34" charset="-122"/>
+                <a:cs typeface="Aptos" pitchFamily="34" charset="-120"/>
+              </a:rPr>
+              <a:t>3. What does equity by design require?</a:t>
+            </a:r>
+            <a:endParaRPr lang="en-US" sz="1700" dirty="0"/>
+          </a:p>
+          <a:p>
+            <a:r>
+              <a:rPr lang="en-US" sz="1700" dirty="0">
+                <a:solidFill>
+                  <a:srgbClr val="17364A"/>
+                </a:solidFill>
+                <a:latin typeface="Aptos" pitchFamily="34" charset="0"/>
+                <a:ea typeface="Aptos" pitchFamily="34" charset="-122"/>
+                <a:cs typeface="Aptos" pitchFamily="34" charset="-120"/>
+              </a:rPr>
+              <a:t>4. Which use best reflects AI for Social Good?</a:t>
+            </a:r>
+            <a:endParaRPr lang="en-US" sz="1700" dirty="0"/>
+          </a:p>
+        </p:txBody>
+      </p:sp>
+      <p:sp>
+        <p:nvSpPr>
+          <p:cNvPr id="11" name="Shape 9"/>
+          <p:cNvSpPr/>
+          <p:nvPr/>
+        </p:nvSpPr>
+        <p:spPr>
+          <a:xfrm>
+            <a:off x="7909560" y="1417320"/>
+            <a:ext cx="3154680" cy="1828800"/>
+          </a:xfrm>
+          <a:prstGeom prst="roundRect">
+            <a:avLst>
+              <a:gd name="adj" fmla="val 6000"/>
+            </a:avLst>
+          </a:prstGeom>
+          <a:solidFill>
+            <a:srgbClr val="EEF8ED"/>
+          </a:solidFill>
+          <a:ln w="12700">
+            <a:solidFill>
+              <a:srgbClr val="B9D7E6"/>
+            </a:solidFill>
+            <a:prstDash val="solid"/>
+          </a:ln>
+        </p:spPr>
+      </p:sp>
+      <p:sp>
+        <p:nvSpPr>
+          <p:cNvPr id="12" name="Text 10"/>
+          <p:cNvSpPr/>
+          <p:nvPr/>
+        </p:nvSpPr>
+        <p:spPr>
+          <a:xfrm>
+            <a:off x="8074152" y="1563624"/>
+            <a:ext cx="2825496" cy="201168"/>
+          </a:xfrm>
+          <a:prstGeom prst="rect">
+            <a:avLst/>
+          </a:prstGeom>
+          <a:noFill/>
+          <a:ln/>
+        </p:spPr>
+        <p:txBody>
+          <a:bodyPr wrap="square" lIns="0" tIns="0" rIns="0" bIns="0" rtlCol="0" anchor="ctr"/>
+          <a:lstStyle/>
+          <a:p>
+            <a:pPr indent="0" marL="0">
+              <a:buNone/>
+            </a:pPr>
+            <a:r>
+              <a:rPr lang="en-US" sz="950" b="1" dirty="0">
+                <a:solidFill>
+                  <a:srgbClr val="0068B7"/>
+                </a:solidFill>
+                <a:latin typeface="Aptos" pitchFamily="34" charset="0"/>
+                <a:ea typeface="Aptos" pitchFamily="34" charset="-122"/>
+                <a:cs typeface="Aptos" pitchFamily="34" charset="-120"/>
+              </a:rPr>
+              <a:t>Key idea</a:t>
+            </a:r>
+            <a:endParaRPr lang="en-US" sz="950" dirty="0"/>
+          </a:p>
+        </p:txBody>
+      </p:sp>
+      <p:sp>
+        <p:nvSpPr>
+          <p:cNvPr id="13" name="Text 11"/>
+          <p:cNvSpPr/>
+          <p:nvPr/>
+        </p:nvSpPr>
+        <p:spPr>
+          <a:xfrm>
+            <a:off x="8074152" y="1856232"/>
+            <a:ext cx="2825496" cy="1261872"/>
+          </a:xfrm>
+          <a:prstGeom prst="rect">
+            <a:avLst/>
+          </a:prstGeom>
+          <a:noFill/>
+          <a:ln/>
+        </p:spPr>
+        <p:txBody>
+          <a:bodyPr wrap="square" lIns="0" tIns="0" rIns="0" bIns="0" rtlCol="0" anchor="t">
+            <a:normAutofit/>
+          </a:bodyPr>
+          <a:lstStyle/>
+          <a:p>
+            <a:pPr indent="0" marL="0">
+              <a:buNone/>
+            </a:pPr>
+            <a:r>
+              <a:rPr lang="en-US" sz="1250" dirty="0">
+                <a:solidFill>
+                  <a:srgbClr val="17364A"/>
+                </a:solidFill>
+                <a:latin typeface="Aptos" pitchFamily="34" charset="0"/>
+                <a:ea typeface="Aptos" pitchFamily="34" charset="-122"/>
+                <a:cs typeface="Aptos" pitchFamily="34" charset="-120"/>
+              </a:rPr>
+              <a:t>1. What is the best definition of AI for Social Good in public health?</a:t>
+            </a:r>
+            <a:endParaRPr lang="en-US" sz="1250" dirty="0"/>
+          </a:p>
+        </p:txBody>
+      </p:sp>
+      <p:sp>
+        <p:nvSpPr>
+          <p:cNvPr id="14" name="Shape 12"/>
+          <p:cNvSpPr/>
+          <p:nvPr/>
+        </p:nvSpPr>
+        <p:spPr>
+          <a:xfrm>
+            <a:off x="7909560" y="3520440"/>
+            <a:ext cx="3154680" cy="1737360"/>
+          </a:xfrm>
+          <a:prstGeom prst="roundRect">
+            <a:avLst>
+              <a:gd name="adj" fmla="val 6316"/>
+            </a:avLst>
+          </a:prstGeom>
+          <a:solidFill>
+            <a:srgbClr val="EAF6F8"/>
+          </a:solidFill>
+          <a:ln w="12700">
+            <a:solidFill>
+              <a:srgbClr val="B9D7E6"/>
+            </a:solidFill>
+            <a:prstDash val="solid"/>
+          </a:ln>
+        </p:spPr>
+      </p:sp>
+      <p:sp>
+        <p:nvSpPr>
+          <p:cNvPr id="15" name="Text 13"/>
+          <p:cNvSpPr/>
+          <p:nvPr/>
+        </p:nvSpPr>
+        <p:spPr>
+          <a:xfrm>
+            <a:off x="8074152" y="3666744"/>
+            <a:ext cx="2825496" cy="201168"/>
+          </a:xfrm>
+          <a:prstGeom prst="rect">
+            <a:avLst/>
+          </a:prstGeom>
+          <a:noFill/>
+          <a:ln/>
+        </p:spPr>
+        <p:txBody>
+          <a:bodyPr wrap="square" lIns="0" tIns="0" rIns="0" bIns="0" rtlCol="0" anchor="ctr"/>
+          <a:lstStyle/>
+          <a:p>
+            <a:pPr indent="0" marL="0">
+              <a:buNone/>
+            </a:pPr>
+            <a:r>
+              <a:rPr lang="en-US" sz="950" b="1" dirty="0">
+                <a:solidFill>
+                  <a:srgbClr val="0068B7"/>
+                </a:solidFill>
+                <a:latin typeface="Aptos" pitchFamily="34" charset="0"/>
+                <a:ea typeface="Aptos" pitchFamily="34" charset="-122"/>
+                <a:cs typeface="Aptos" pitchFamily="34" charset="-120"/>
+              </a:rPr>
+              <a:t>Use this for</a:t>
+            </a:r>
+            <a:endParaRPr lang="en-US" sz="950" dirty="0"/>
+          </a:p>
+        </p:txBody>
+      </p:sp>
+      <p:sp>
+        <p:nvSpPr>
+          <p:cNvPr id="16" name="Text 14"/>
+          <p:cNvSpPr/>
+          <p:nvPr/>
+        </p:nvSpPr>
+        <p:spPr>
+          <a:xfrm>
+            <a:off x="8074152" y="3959352"/>
+            <a:ext cx="2825496" cy="1170432"/>
+          </a:xfrm>
+          <a:prstGeom prst="rect">
+            <a:avLst/>
+          </a:prstGeom>
+          <a:noFill/>
+          <a:ln/>
+        </p:spPr>
+        <p:txBody>
+          <a:bodyPr wrap="square" lIns="0" tIns="0" rIns="0" bIns="0" rtlCol="0" anchor="t">
+            <a:normAutofit/>
+          </a:bodyPr>
+          <a:lstStyle/>
+          <a:p>
+            <a:pPr indent="0" marL="0">
+              <a:buNone/>
+            </a:pPr>
+            <a:r>
+              <a:rPr lang="en-US" sz="1250" dirty="0">
+                <a:solidFill>
+                  <a:srgbClr val="17364A"/>
+                </a:solidFill>
+                <a:latin typeface="Aptos" pitchFamily="34" charset="0"/>
+                <a:ea typeface="Aptos" pitchFamily="34" charset="-122"/>
+                <a:cs typeface="Aptos" pitchFamily="34" charset="-120"/>
+              </a:rPr>
+              <a:t>Connect the concept to public health decisions, safeguards, documentation, or implementation work.</a:t>
+            </a:r>
+            <a:endParaRPr lang="en-US" sz="1250" dirty="0"/>
+          </a:p>
+        </p:txBody>
+      </p:sp>
+    </p:spTree>
+  </p:cSld>
+  <p:clrMapOvr>
+    <a:masterClrMapping/>
+  </p:clrMapOvr>
+</p:sld>
+</file>
+
+<file path=ppt/slides/slide22.xml><?xml version="1.0" encoding="utf-8"?>
+<p:sld xmlns:a="http://schemas.openxmlformats.org/drawingml/2006/main" xmlns:r="http://schemas.openxmlformats.org/officeDocument/2006/relationships" xmlns:p="http://schemas.openxmlformats.org/presentationml/2006/main">
+  <p:cSld name="Slide 22">
+    <p:bg>
+      <p:bgPr>
+        <a:solidFill>
+          <a:srgbClr val="F7FBFD"/>
+        </a:solidFill>
+      </p:bgPr>
+    </p:bg>
+    <p:spTree>
+      <p:nvGrpSpPr>
+        <p:cNvPr id="1" name=""/>
+        <p:cNvGrpSpPr/>
+        <p:nvPr/>
+      </p:nvGrpSpPr>
+      <p:grpSpPr>
+        <a:xfrm>
+          <a:off x="0" y="0"/>
+          <a:ext cx="0" cy="0"/>
+          <a:chOff x="0" y="0"/>
+          <a:chExt cx="0" cy="0"/>
+        </a:xfrm>
+      </p:grpSpPr>
+      <p:sp>
+        <p:nvSpPr>
+          <p:cNvPr id="2" name="Shape 0"/>
+          <p:cNvSpPr/>
+          <p:nvPr/>
+        </p:nvSpPr>
+        <p:spPr>
+          <a:xfrm>
+            <a:off x="0" y="0"/>
+            <a:ext cx="12191695" cy="164592"/>
+          </a:xfrm>
+          <a:prstGeom prst="rect">
+            <a:avLst/>
+          </a:prstGeom>
+          <a:solidFill>
+            <a:srgbClr val="0068B7"/>
+          </a:solidFill>
+          <a:ln w="12700">
+            <a:solidFill>
+              <a:srgbClr val="0068B7"/>
+            </a:solidFill>
+            <a:prstDash val="solid"/>
+          </a:ln>
+        </p:spPr>
+      </p:sp>
+      <p:sp>
+        <p:nvSpPr>
+          <p:cNvPr id="3" name="Shape 1"/>
+          <p:cNvSpPr/>
+          <p:nvPr/>
+        </p:nvSpPr>
+        <p:spPr>
+          <a:xfrm>
+            <a:off x="0" y="164592"/>
+            <a:ext cx="146304" cy="6693408"/>
+          </a:xfrm>
+          <a:prstGeom prst="rect">
+            <a:avLst/>
+          </a:prstGeom>
+          <a:solidFill>
+            <a:srgbClr val="2F8A28"/>
+          </a:solidFill>
+          <a:ln w="12700">
+            <a:solidFill>
+              <a:srgbClr val="2F8A28"/>
+            </a:solidFill>
+            <a:prstDash val="solid"/>
+          </a:ln>
+        </p:spPr>
+      </p:sp>
+      <p:sp>
+        <p:nvSpPr>
+          <p:cNvPr id="4" name="Text 2"/>
+          <p:cNvSpPr/>
+          <p:nvPr/>
+        </p:nvSpPr>
+        <p:spPr>
+          <a:xfrm>
+            <a:off x="502920" y="292608"/>
+            <a:ext cx="10149840" cy="256032"/>
+          </a:xfrm>
+          <a:prstGeom prst="rect">
+            <a:avLst/>
+          </a:prstGeom>
+          <a:noFill/>
+          <a:ln/>
+        </p:spPr>
+        <p:txBody>
+          <a:bodyPr wrap="square" lIns="0" tIns="0" rIns="0" bIns="0" rtlCol="0" anchor="ctr"/>
+          <a:lstStyle/>
+          <a:p>
+            <a:pPr indent="0" marL="0">
+              <a:buNone/>
+            </a:pPr>
+            <a:r>
+              <a:rPr lang="en-US" sz="900" b="1" dirty="0">
+                <a:solidFill>
+                  <a:srgbClr val="5F7181"/>
+                </a:solidFill>
+                <a:latin typeface="Aptos" pitchFamily="34" charset="0"/>
+                <a:ea typeface="Aptos" pitchFamily="34" charset="-122"/>
+                <a:cs typeface="Aptos" pitchFamily="34" charset="-120"/>
+              </a:rPr>
+              <a:t>AI for Social Good</a:t>
+            </a:r>
+            <a:endParaRPr lang="en-US" sz="900" dirty="0"/>
+          </a:p>
+        </p:txBody>
+      </p:sp>
+      <p:sp>
+        <p:nvSpPr>
+          <p:cNvPr id="5" name="Text 3"/>
+          <p:cNvSpPr/>
+          <p:nvPr/>
+        </p:nvSpPr>
+        <p:spPr>
+          <a:xfrm>
+            <a:off x="502920" y="6537960"/>
+            <a:ext cx="7772400" cy="201168"/>
+          </a:xfrm>
+          <a:prstGeom prst="rect">
+            <a:avLst/>
+          </a:prstGeom>
+          <a:noFill/>
+          <a:ln/>
+        </p:spPr>
+        <p:txBody>
+          <a:bodyPr wrap="square" lIns="0" tIns="0" rIns="0" bIns="0" rtlCol="0" anchor="ctr"/>
+          <a:lstStyle/>
+          <a:p>
+            <a:pPr indent="0" marL="0">
+              <a:buNone/>
+            </a:pPr>
+            <a:r>
+              <a:rPr lang="en-US" sz="800" dirty="0">
+                <a:solidFill>
+                  <a:srgbClr val="5F7181"/>
+                </a:solidFill>
+                <a:latin typeface="Aptos" pitchFamily="34" charset="0"/>
+                <a:ea typeface="Aptos" pitchFamily="34" charset="-122"/>
+                <a:cs typeface="Aptos" pitchFamily="34" charset="-120"/>
+              </a:rPr>
+              <a:t>AI Playbook and Toolkit for Public Health Departments</a:t>
+            </a:r>
+            <a:endParaRPr lang="en-US" sz="800" dirty="0"/>
+          </a:p>
+        </p:txBody>
+      </p:sp>
+      <p:sp>
+        <p:nvSpPr>
+          <p:cNvPr id="6" name="Text 4"/>
+          <p:cNvSpPr/>
+          <p:nvPr/>
+        </p:nvSpPr>
+        <p:spPr>
+          <a:xfrm>
+            <a:off x="9966960" y="6537960"/>
+            <a:ext cx="1645920" cy="201168"/>
+          </a:xfrm>
+          <a:prstGeom prst="rect">
+            <a:avLst/>
+          </a:prstGeom>
+          <a:noFill/>
+          <a:ln/>
+        </p:spPr>
+        <p:txBody>
+          <a:bodyPr wrap="square" lIns="0" tIns="0" rIns="0" bIns="0" rtlCol="0" anchor="ctr"/>
+          <a:lstStyle/>
+          <a:p>
+            <a:pPr algn="r" indent="0" marL="0">
+              <a:buNone/>
+            </a:pPr>
+            <a:r>
+              <a:rPr lang="en-US" sz="800" dirty="0">
+                <a:solidFill>
+                  <a:srgbClr val="5F7181"/>
+                </a:solidFill>
+                <a:latin typeface="Aptos" pitchFamily="34" charset="0"/>
+                <a:ea typeface="Aptos" pitchFamily="34" charset="-122"/>
+                <a:cs typeface="Aptos" pitchFamily="34" charset="-120"/>
+              </a:rPr>
+              <a:t>© Paula Soper</a:t>
+            </a:r>
+            <a:endParaRPr lang="en-US" sz="800" dirty="0"/>
+          </a:p>
+        </p:txBody>
+      </p:sp>
+      <p:sp>
+        <p:nvSpPr>
+          <p:cNvPr id="7" name="Shape 5"/>
+          <p:cNvSpPr/>
+          <p:nvPr/>
+        </p:nvSpPr>
+        <p:spPr>
+          <a:xfrm>
+            <a:off x="640080" y="658368"/>
+            <a:ext cx="420624" cy="420624"/>
+          </a:xfrm>
+          <a:prstGeom prst="ellipse">
+            <a:avLst/>
+          </a:prstGeom>
+          <a:solidFill>
+            <a:srgbClr val="0068B7"/>
+          </a:solidFill>
+          <a:ln w="12700">
+            <a:solidFill>
+              <a:srgbClr val="0068B7"/>
+            </a:solidFill>
+            <a:prstDash val="solid"/>
+          </a:ln>
+        </p:spPr>
+      </p:sp>
+      <p:sp>
+        <p:nvSpPr>
+          <p:cNvPr id="8" name="Text 6"/>
+          <p:cNvSpPr/>
+          <p:nvPr/>
+        </p:nvSpPr>
+        <p:spPr>
+          <a:xfrm>
+            <a:off x="640080" y="731520"/>
+            <a:ext cx="420624" cy="164592"/>
+          </a:xfrm>
+          <a:prstGeom prst="rect">
+            <a:avLst/>
+          </a:prstGeom>
+          <a:noFill/>
+          <a:ln/>
+        </p:spPr>
+        <p:txBody>
+          <a:bodyPr wrap="square" lIns="0" tIns="0" rIns="0" bIns="0" rtlCol="0" anchor="ctr"/>
+          <a:lstStyle/>
+          <a:p>
+            <a:pPr algn="ctr" indent="0" marL="0">
+              <a:buNone/>
+            </a:pPr>
+            <a:r>
+              <a:rPr lang="en-US" sz="1100" b="1" dirty="0">
+                <a:solidFill>
+                  <a:srgbClr val="FFFFFF"/>
+                </a:solidFill>
+                <a:latin typeface="Aptos" pitchFamily="34" charset="0"/>
+                <a:ea typeface="Aptos" pitchFamily="34" charset="-122"/>
+                <a:cs typeface="Aptos" pitchFamily="34" charset="-120"/>
+              </a:rPr>
+              <a:t>13</a:t>
+            </a:r>
+            <a:endParaRPr lang="en-US" sz="1100" dirty="0"/>
+          </a:p>
+        </p:txBody>
+      </p:sp>
+      <p:sp>
+        <p:nvSpPr>
+          <p:cNvPr id="9" name="Text 7"/>
+          <p:cNvSpPr/>
+          <p:nvPr/>
+        </p:nvSpPr>
+        <p:spPr>
+          <a:xfrm>
+            <a:off x="640080" y="621792"/>
+            <a:ext cx="10881360" cy="566928"/>
+          </a:xfrm>
+          <a:prstGeom prst="rect">
+            <a:avLst/>
+          </a:prstGeom>
+          <a:noFill/>
+          <a:ln/>
+        </p:spPr>
+        <p:txBody>
+          <a:bodyPr wrap="square" lIns="0" tIns="0" rIns="0" bIns="0" rtlCol="0" anchor="ctr">
+            <a:normAutofit/>
+          </a:bodyPr>
+          <a:lstStyle/>
+          <a:p>
+            <a:pPr indent="0" marL="0">
+              <a:buNone/>
+            </a:pPr>
+            <a:r>
+              <a:rPr lang="en-US" sz="2700" b="1" dirty="0">
+                <a:solidFill>
+                  <a:srgbClr val="003A63"/>
+                </a:solidFill>
+                <a:latin typeface="Aptos Display" pitchFamily="34" charset="0"/>
+                <a:ea typeface="Aptos Display" pitchFamily="34" charset="-122"/>
+                <a:cs typeface="Aptos Display" pitchFamily="34" charset="-120"/>
+              </a:rPr>
+              <a:t>References and Resources</a:t>
+            </a:r>
+            <a:endParaRPr lang="en-US" sz="2700" dirty="0"/>
+          </a:p>
+        </p:txBody>
+      </p:sp>
+      <p:sp>
+        <p:nvSpPr>
+          <p:cNvPr id="10" name="Text 8"/>
+          <p:cNvSpPr/>
+          <p:nvPr/>
+        </p:nvSpPr>
+        <p:spPr>
+          <a:xfrm>
+            <a:off x="868680" y="1417320"/>
+            <a:ext cx="6675120" cy="4434840"/>
+          </a:xfrm>
+          <a:prstGeom prst="rect">
+            <a:avLst/>
+          </a:prstGeom>
+          <a:noFill/>
+          <a:ln/>
+        </p:spPr>
+        <p:txBody>
+          <a:bodyPr wrap="square" lIns="635" tIns="635" rIns="635" bIns="635" rtlCol="0" anchor="t">
+            <a:normAutofit/>
+          </a:bodyPr>
+          <a:lstStyle/>
+          <a:p>
+            <a:r>
+              <a:rPr lang="en-US" sz="1700" dirty="0">
+                <a:solidFill>
+                  <a:srgbClr val="17364A"/>
+                </a:solidFill>
+                <a:latin typeface="Aptos" pitchFamily="34" charset="0"/>
+                <a:ea typeface="Aptos" pitchFamily="34" charset="-122"/>
+                <a:cs typeface="Aptos" pitchFamily="34" charset="-120"/>
+              </a:rPr>
               <a:t>WHO Ethics and Governance of Artificial Intelligence for Health: https://www.who.int/publications/i/item/9789240029200</a:t>
             </a:r>
-            <a:endParaRPr lang="en-US" sz="1450" dirty="0"/>
-          </a:p>
-          <a:p>
-            <a:r>
-              <a:rPr lang="en-US" sz="1450" dirty="0">
+            <a:endParaRPr lang="en-US" sz="1700" dirty="0"/>
+          </a:p>
+          <a:p>
+            <a:r>
+              <a:rPr lang="en-US" sz="1700" dirty="0">
                 <a:solidFill>
                   <a:srgbClr val="17364A"/>
                 </a:solidFill>
@@ -6049,11 +10714,11 @@
               </a:rPr>
               <a:t>WHO Guidance on Large Multi-Modal Models: https://www.who.int/publications/i/item/9789240084759</a:t>
             </a:r>
-            <a:endParaRPr lang="en-US" sz="1450" dirty="0"/>
-          </a:p>
-          <a:p>
-            <a:r>
-              <a:rPr lang="en-US" sz="1450" dirty="0">
+            <a:endParaRPr lang="en-US" sz="1700" dirty="0"/>
+          </a:p>
+          <a:p>
+            <a:r>
+              <a:rPr lang="en-US" sz="1700" dirty="0">
                 <a:solidFill>
                   <a:srgbClr val="17364A"/>
                 </a:solidFill>
@@ -6063,11 +10728,11 @@
               </a:rPr>
               <a:t>NIST Artificial Intelligence Risk Management Framework: https://www.nist.gov/itl/ai-risk-management-framework</a:t>
             </a:r>
-            <a:endParaRPr lang="en-US" sz="1450" dirty="0"/>
-          </a:p>
-          <a:p>
-            <a:r>
-              <a:rPr lang="en-US" sz="1450" dirty="0">
+            <a:endParaRPr lang="en-US" sz="1700" dirty="0"/>
+          </a:p>
+          <a:p>
+            <a:r>
+              <a:rPr lang="en-US" sz="1700" dirty="0">
                 <a:solidFill>
                   <a:srgbClr val="17364A"/>
                 </a:solidFill>
@@ -6077,11 +10742,104 @@
               </a:rPr>
               <a:t>CDC Public Health Data Strategy: https://www.cdc.gov/public-health-data-strategy/php/about/index.html</a:t>
             </a:r>
-            <a:endParaRPr lang="en-US" sz="1450" dirty="0"/>
-          </a:p>
-          <a:p>
-            <a:r>
-              <a:rPr lang="en-US" sz="1450" dirty="0">
+            <a:endParaRPr lang="en-US" sz="1700" dirty="0"/>
+          </a:p>
+        </p:txBody>
+      </p:sp>
+      <p:sp>
+        <p:nvSpPr>
+          <p:cNvPr id="11" name="Shape 9"/>
+          <p:cNvSpPr/>
+          <p:nvPr/>
+        </p:nvSpPr>
+        <p:spPr>
+          <a:xfrm>
+            <a:off x="7909560" y="1417320"/>
+            <a:ext cx="3154680" cy="1828800"/>
+          </a:xfrm>
+          <a:prstGeom prst="roundRect">
+            <a:avLst>
+              <a:gd name="adj" fmla="val 6000"/>
+            </a:avLst>
+          </a:prstGeom>
+          <a:solidFill>
+            <a:srgbClr val="EEF8ED"/>
+          </a:solidFill>
+          <a:ln w="12700">
+            <a:solidFill>
+              <a:srgbClr val="B9D7E6"/>
+            </a:solidFill>
+            <a:prstDash val="solid"/>
+          </a:ln>
+        </p:spPr>
+      </p:sp>
+      <p:sp>
+        <p:nvSpPr>
+          <p:cNvPr id="12" name="Text 10"/>
+          <p:cNvSpPr/>
+          <p:nvPr/>
+        </p:nvSpPr>
+        <p:spPr>
+          <a:xfrm>
+            <a:off x="8074152" y="1563624"/>
+            <a:ext cx="2825496" cy="201168"/>
+          </a:xfrm>
+          <a:prstGeom prst="rect">
+            <a:avLst/>
+          </a:prstGeom>
+          <a:noFill/>
+          <a:ln/>
+        </p:spPr>
+        <p:txBody>
+          <a:bodyPr wrap="square" lIns="0" tIns="0" rIns="0" bIns="0" rtlCol="0" anchor="ctr"/>
+          <a:lstStyle/>
+          <a:p>
+            <a:pPr indent="0" marL="0">
+              <a:buNone/>
+            </a:pPr>
+            <a:r>
+              <a:rPr lang="en-US" sz="950" b="1" dirty="0">
+                <a:solidFill>
+                  <a:srgbClr val="0068B7"/>
+                </a:solidFill>
+                <a:latin typeface="Aptos" pitchFamily="34" charset="0"/>
+                <a:ea typeface="Aptos" pitchFamily="34" charset="-122"/>
+                <a:cs typeface="Aptos" pitchFamily="34" charset="-120"/>
+              </a:rPr>
+              <a:t>Key idea</a:t>
+            </a:r>
+            <a:endParaRPr lang="en-US" sz="950" dirty="0"/>
+          </a:p>
+        </p:txBody>
+      </p:sp>
+      <p:sp>
+        <p:nvSpPr>
+          <p:cNvPr id="13" name="Text 11"/>
+          <p:cNvSpPr/>
+          <p:nvPr/>
+        </p:nvSpPr>
+        <p:spPr>
+          <a:xfrm>
+            <a:off x="8074152" y="1856232"/>
+            <a:ext cx="2825496" cy="1261872"/>
+          </a:xfrm>
+          <a:prstGeom prst="rect">
+            <a:avLst/>
+          </a:prstGeom>
+          <a:noFill/>
+          <a:ln/>
+        </p:spPr>
+        <p:txBody>
+          <a:bodyPr wrap="square" lIns="0" tIns="0" rIns="0" bIns="0" rtlCol="0" anchor="t">
+            <a:normAutofit/>
+          </a:bodyPr>
+          <a:lstStyle/>
+          <a:p>
+            <a:pPr indent="0" marL="0">
+              <a:buNone/>
+            </a:pPr>
+            <a:r>
+              <a:rPr lang="en-US" sz="1250" dirty="0">
                 <a:solidFill>
                   <a:srgbClr val="17364A"/>
                 </a:solidFill>
@@ -6089,9 +10847,116 @@
                 <a:ea typeface="Aptos" pitchFamily="34" charset="-122"/>
                 <a:cs typeface="Aptos" pitchFamily="34" charset="-120"/>
               </a:rPr>
-              <a:t>Agency equity, community engagement, accessibility, and language access policies</a:t>
-            </a:r>
-            <a:endParaRPr lang="en-US" sz="1450" dirty="0"/>
+              <a:t>WHO Ethics and Governance of Artificial Intelligence for Health: https://www.who.int/publications/i/item/9789240029200</a:t>
+            </a:r>
+            <a:endParaRPr lang="en-US" sz="1250" dirty="0"/>
+          </a:p>
+        </p:txBody>
+      </p:sp>
+      <p:sp>
+        <p:nvSpPr>
+          <p:cNvPr id="14" name="Shape 12"/>
+          <p:cNvSpPr/>
+          <p:nvPr/>
+        </p:nvSpPr>
+        <p:spPr>
+          <a:xfrm>
+            <a:off x="7909560" y="3520440"/>
+            <a:ext cx="3154680" cy="1737360"/>
+          </a:xfrm>
+          <a:prstGeom prst="roundRect">
+            <a:avLst>
+              <a:gd name="adj" fmla="val 6316"/>
+            </a:avLst>
+          </a:prstGeom>
+          <a:solidFill>
+            <a:srgbClr val="EAF6F8"/>
+          </a:solidFill>
+          <a:ln w="12700">
+            <a:solidFill>
+              <a:srgbClr val="B9D7E6"/>
+            </a:solidFill>
+            <a:prstDash val="solid"/>
+          </a:ln>
+        </p:spPr>
+      </p:sp>
+      <p:sp>
+        <p:nvSpPr>
+          <p:cNvPr id="15" name="Text 13"/>
+          <p:cNvSpPr/>
+          <p:nvPr/>
+        </p:nvSpPr>
+        <p:spPr>
+          <a:xfrm>
+            <a:off x="8074152" y="3666744"/>
+            <a:ext cx="2825496" cy="201168"/>
+          </a:xfrm>
+          <a:prstGeom prst="rect">
+            <a:avLst/>
+          </a:prstGeom>
+          <a:noFill/>
+          <a:ln/>
+        </p:spPr>
+        <p:txBody>
+          <a:bodyPr wrap="square" lIns="0" tIns="0" rIns="0" bIns="0" rtlCol="0" anchor="ctr"/>
+          <a:lstStyle/>
+          <a:p>
+            <a:pPr indent="0" marL="0">
+              <a:buNone/>
+            </a:pPr>
+            <a:r>
+              <a:rPr lang="en-US" sz="950" b="1" dirty="0">
+                <a:solidFill>
+                  <a:srgbClr val="0068B7"/>
+                </a:solidFill>
+                <a:latin typeface="Aptos" pitchFamily="34" charset="0"/>
+                <a:ea typeface="Aptos" pitchFamily="34" charset="-122"/>
+                <a:cs typeface="Aptos" pitchFamily="34" charset="-120"/>
+              </a:rPr>
+              <a:t>Use this for</a:t>
+            </a:r>
+            <a:endParaRPr lang="en-US" sz="950" dirty="0"/>
+          </a:p>
+        </p:txBody>
+      </p:sp>
+      <p:sp>
+        <p:nvSpPr>
+          <p:cNvPr id="16" name="Text 14"/>
+          <p:cNvSpPr/>
+          <p:nvPr/>
+        </p:nvSpPr>
+        <p:spPr>
+          <a:xfrm>
+            <a:off x="8074152" y="3959352"/>
+            <a:ext cx="2825496" cy="1170432"/>
+          </a:xfrm>
+          <a:prstGeom prst="rect">
+            <a:avLst/>
+          </a:prstGeom>
+          <a:noFill/>
+          <a:ln/>
+        </p:spPr>
+        <p:txBody>
+          <a:bodyPr wrap="square" lIns="0" tIns="0" rIns="0" bIns="0" rtlCol="0" anchor="t">
+            <a:normAutofit/>
+          </a:bodyPr>
+          <a:lstStyle/>
+          <a:p>
+            <a:pPr indent="0" marL="0">
+              <a:buNone/>
+            </a:pPr>
+            <a:r>
+              <a:rPr lang="en-US" sz="1250" dirty="0">
+                <a:solidFill>
+                  <a:srgbClr val="17364A"/>
+                </a:solidFill>
+                <a:latin typeface="Aptos" pitchFamily="34" charset="0"/>
+                <a:ea typeface="Aptos" pitchFamily="34" charset="-122"/>
+                <a:cs typeface="Aptos" pitchFamily="34" charset="-120"/>
+              </a:rPr>
+              <a:t>Connect the concept to public health decisions, safeguards, documentation, or implementation work.</a:t>
+            </a:r>
+            <a:endParaRPr lang="en-US" sz="1250" dirty="0"/>
           </a:p>
         </p:txBody>
       </p:sp>
@@ -6154,7 +11019,32 @@
       </p:sp>
       <p:sp>
         <p:nvSpPr>
-          <p:cNvPr id="3" name="Text 1"/>
+          <p:cNvPr id="3" name="Shape 1"/>
+          <p:cNvSpPr/>
+          <p:nvPr/>
+        </p:nvSpPr>
+        <p:spPr>
+          <a:xfrm>
+            <a:off x="0" y="164592"/>
+            <a:ext cx="146304" cy="6693408"/>
+          </a:xfrm>
+          <a:prstGeom prst="rect">
+            <a:avLst/>
+          </a:prstGeom>
+          <a:solidFill>
+            <a:srgbClr val="2F8A28"/>
+          </a:solidFill>
+          <a:ln w="12700">
+            <a:solidFill>
+              <a:srgbClr val="2F8A28"/>
+            </a:solidFill>
+            <a:prstDash val="solid"/>
+          </a:ln>
+        </p:spPr>
+      </p:sp>
+      <p:sp>
+        <p:nvSpPr>
+          <p:cNvPr id="4" name="Text 2"/>
           <p:cNvSpPr/>
           <p:nvPr/>
         </p:nvSpPr>
@@ -6193,7 +11083,7 @@
       </p:sp>
       <p:sp>
         <p:nvSpPr>
-          <p:cNvPr id="4" name="Text 2"/>
+          <p:cNvPr id="5" name="Text 3"/>
           <p:cNvSpPr/>
           <p:nvPr/>
         </p:nvSpPr>
@@ -6232,7 +11122,7 @@
       </p:sp>
       <p:sp>
         <p:nvSpPr>
-          <p:cNvPr id="5" name="Text 3"/>
+          <p:cNvPr id="6" name="Text 4"/>
           <p:cNvSpPr/>
           <p:nvPr/>
         </p:nvSpPr>
@@ -6271,7 +11161,7 @@
       </p:sp>
       <p:sp>
         <p:nvSpPr>
-          <p:cNvPr id="6" name="Text 4"/>
+          <p:cNvPr id="7" name="Text 5"/>
           <p:cNvSpPr/>
           <p:nvPr/>
         </p:nvSpPr>
@@ -6304,7 +11194,7 @@
                 <a:ea typeface="Aptos Display" pitchFamily="34" charset="-122"/>
                 <a:cs typeface="Aptos Display" pitchFamily="34" charset="-120"/>
               </a:rPr>
-              <a:t>Learning Objectives</a:t>
+              <a:t>How this module connects to the playbook</a:t>
             </a:r>
             <a:endParaRPr lang="en-US" sz="2700" dirty="0"/>
           </a:p>
@@ -6312,14 +11202,14 @@
       </p:sp>
       <p:sp>
         <p:nvSpPr>
-          <p:cNvPr id="7" name="Text 5"/>
-          <p:cNvSpPr/>
-          <p:nvPr/>
-        </p:nvSpPr>
-        <p:spPr>
-          <a:xfrm>
-            <a:off x="822960" y="1325880"/>
-            <a:ext cx="10378440" cy="4800600"/>
+          <p:cNvPr id="8" name="Text 6"/>
+          <p:cNvSpPr/>
+          <p:nvPr/>
+        </p:nvSpPr>
+        <p:spPr>
+          <a:xfrm>
+            <a:off x="868680" y="1417320"/>
+            <a:ext cx="6903720" cy="4480560"/>
           </a:xfrm>
           <a:prstGeom prst="rect">
             <a:avLst/>
@@ -6334,7 +11224,7 @@
           <a:lstStyle/>
           <a:p>
             <a:r>
-              <a:rPr lang="en-US" sz="1450" dirty="0">
+              <a:rPr lang="en-US" sz="1540" dirty="0">
                 <a:solidFill>
                   <a:srgbClr val="17364A"/>
                 </a:solidFill>
@@ -6342,13 +11232,13 @@
                 <a:ea typeface="Aptos" pitchFamily="34" charset="-122"/>
                 <a:cs typeface="Aptos" pitchFamily="34" charset="-120"/>
               </a:rPr>
-              <a:t>Define AI for Social Good in public health terms.</a:t>
-            </a:r>
-            <a:endParaRPr lang="en-US" sz="1450" dirty="0"/>
-          </a:p>
-          <a:p>
-            <a:r>
-              <a:rPr lang="en-US" sz="1450" dirty="0">
+              <a:t>Play 4: Engage Stakeholders - This lesson informs Play 4 by helping learners connect the lesson topic to engage stakeholders work in.</a:t>
+            </a:r>
+            <a:endParaRPr lang="en-US" sz="1540" dirty="0"/>
+          </a:p>
+          <a:p>
+            <a:r>
+              <a:rPr lang="en-US" sz="1540" dirty="0">
                 <a:solidFill>
                   <a:srgbClr val="17364A"/>
                 </a:solidFill>
@@ -6356,13 +11246,13 @@
                 <a:ea typeface="Aptos" pitchFamily="34" charset="-122"/>
                 <a:cs typeface="Aptos" pitchFamily="34" charset="-120"/>
               </a:rPr>
-              <a:t>Distinguish public benefit from novelty, efficiency, or automation alone.</a:t>
-            </a:r>
-            <a:endParaRPr lang="en-US" sz="1450" dirty="0"/>
-          </a:p>
-          <a:p>
-            <a:r>
-              <a:rPr lang="en-US" sz="1450" dirty="0">
+              <a:t>Play 7: Prioritize Use Cases - This lesson informs Play 7 by helping learners connect the lesson topic to prioritize use cases work.</a:t>
+            </a:r>
+            <a:endParaRPr lang="en-US" sz="1540" dirty="0"/>
+          </a:p>
+          <a:p>
+            <a:r>
+              <a:rPr lang="en-US" sz="1540" dirty="0">
                 <a:solidFill>
                   <a:srgbClr val="17364A"/>
                 </a:solidFill>
@@ -6370,13 +11260,13 @@
                 <a:ea typeface="Aptos" pitchFamily="34" charset="-122"/>
                 <a:cs typeface="Aptos" pitchFamily="34" charset="-120"/>
               </a:rPr>
-              <a:t>Identify how AI can support public health values, including equity, transparency, accessibility, accountability, and community trust.</a:t>
-            </a:r>
-            <a:endParaRPr lang="en-US" sz="1450" dirty="0"/>
-          </a:p>
-          <a:p>
-            <a:r>
-              <a:rPr lang="en-US" sz="1450" dirty="0">
+              <a:t>Play 1: Vision &amp; Guardrails - This lesson informs Play 1 by helping learners connect the lesson topic to vision &amp; guardrails work in.</a:t>
+            </a:r>
+            <a:endParaRPr lang="en-US" sz="1540" dirty="0"/>
+          </a:p>
+          <a:p>
+            <a:r>
+              <a:rPr lang="en-US" sz="1540" dirty="0">
                 <a:solidFill>
                   <a:srgbClr val="17364A"/>
                 </a:solidFill>
@@ -6384,13 +11274,106 @@
                 <a:ea typeface="Aptos" pitchFamily="34" charset="-122"/>
                 <a:cs typeface="Aptos" pitchFamily="34" charset="-120"/>
               </a:rPr>
-              <a:t>Assess potential harms, including exclusion, surveillance burden, stigma, resource diversion, and unequal benefit.</a:t>
-            </a:r>
-            <a:endParaRPr lang="en-US" sz="1450" dirty="0"/>
-          </a:p>
-          <a:p>
-            <a:r>
-              <a:rPr lang="en-US" sz="1450" dirty="0">
+              <a:t>Play 13: Monitor and Evaluate AI Systems - This lesson informs Play 13 by helping learners connect the lesson topic to monitor and.</a:t>
+            </a:r>
+            <a:endParaRPr lang="en-US" sz="1540" dirty="0"/>
+          </a:p>
+        </p:txBody>
+      </p:sp>
+      <p:sp>
+        <p:nvSpPr>
+          <p:cNvPr id="9" name="Shape 7"/>
+          <p:cNvSpPr/>
+          <p:nvPr/>
+        </p:nvSpPr>
+        <p:spPr>
+          <a:xfrm>
+            <a:off x="8046720" y="1417320"/>
+            <a:ext cx="3063240" cy="2103120"/>
+          </a:xfrm>
+          <a:prstGeom prst="roundRect">
+            <a:avLst>
+              <a:gd name="adj" fmla="val 5217"/>
+            </a:avLst>
+          </a:prstGeom>
+          <a:solidFill>
+            <a:srgbClr val="EEF8ED"/>
+          </a:solidFill>
+          <a:ln w="12700">
+            <a:solidFill>
+              <a:srgbClr val="B9D7E6"/>
+            </a:solidFill>
+            <a:prstDash val="solid"/>
+          </a:ln>
+        </p:spPr>
+      </p:sp>
+      <p:sp>
+        <p:nvSpPr>
+          <p:cNvPr id="10" name="Text 8"/>
+          <p:cNvSpPr/>
+          <p:nvPr/>
+        </p:nvSpPr>
+        <p:spPr>
+          <a:xfrm>
+            <a:off x="8211312" y="1563624"/>
+            <a:ext cx="2734056" cy="201168"/>
+          </a:xfrm>
+          <a:prstGeom prst="rect">
+            <a:avLst/>
+          </a:prstGeom>
+          <a:noFill/>
+          <a:ln/>
+        </p:spPr>
+        <p:txBody>
+          <a:bodyPr wrap="square" lIns="0" tIns="0" rIns="0" bIns="0" rtlCol="0" anchor="ctr"/>
+          <a:lstStyle/>
+          <a:p>
+            <a:pPr indent="0" marL="0">
+              <a:buNone/>
+            </a:pPr>
+            <a:r>
+              <a:rPr lang="en-US" sz="950" b="1" dirty="0">
+                <a:solidFill>
+                  <a:srgbClr val="0068B7"/>
+                </a:solidFill>
+                <a:latin typeface="Aptos" pitchFamily="34" charset="0"/>
+                <a:ea typeface="Aptos" pitchFamily="34" charset="-122"/>
+                <a:cs typeface="Aptos" pitchFamily="34" charset="-120"/>
+              </a:rPr>
+              <a:t>Apply the lesson</a:t>
+            </a:r>
+            <a:endParaRPr lang="en-US" sz="950" dirty="0"/>
+          </a:p>
+        </p:txBody>
+      </p:sp>
+      <p:sp>
+        <p:nvSpPr>
+          <p:cNvPr id="11" name="Text 9"/>
+          <p:cNvSpPr/>
+          <p:nvPr/>
+        </p:nvSpPr>
+        <p:spPr>
+          <a:xfrm>
+            <a:off x="8211312" y="1856232"/>
+            <a:ext cx="2734056" cy="1536192"/>
+          </a:xfrm>
+          <a:prstGeom prst="rect">
+            <a:avLst/>
+          </a:prstGeom>
+          <a:noFill/>
+          <a:ln/>
+        </p:spPr>
+        <p:txBody>
+          <a:bodyPr wrap="square" lIns="0" tIns="0" rIns="0" bIns="0" rtlCol="0" anchor="t">
+            <a:normAutofit/>
+          </a:bodyPr>
+          <a:lstStyle/>
+          <a:p>
+            <a:pPr indent="0" marL="0">
+              <a:buNone/>
+            </a:pPr>
+            <a:r>
+              <a:rPr lang="en-US" sz="1250" dirty="0">
                 <a:solidFill>
                   <a:srgbClr val="17364A"/>
                 </a:solidFill>
@@ -6398,9 +11381,116 @@
                 <a:ea typeface="Aptos" pitchFamily="34" charset="-122"/>
                 <a:cs typeface="Aptos" pitchFamily="34" charset="-120"/>
               </a:rPr>
-              <a:t>Design community-centered safeguards for socially beneficial AI use.</a:t>
-            </a:r>
-            <a:endParaRPr lang="en-US" sz="1450" dirty="0"/>
+              <a:t>Use the related plays to identify decisions, participants, timing, approvals, and documentation needed for responsible implementation.</a:t>
+            </a:r>
+            <a:endParaRPr lang="en-US" sz="1250" dirty="0"/>
+          </a:p>
+        </p:txBody>
+      </p:sp>
+      <p:sp>
+        <p:nvSpPr>
+          <p:cNvPr id="12" name="Shape 10"/>
+          <p:cNvSpPr/>
+          <p:nvPr/>
+        </p:nvSpPr>
+        <p:spPr>
+          <a:xfrm>
+            <a:off x="8046720" y="3794760"/>
+            <a:ext cx="3063240" cy="1508760"/>
+          </a:xfrm>
+          <a:prstGeom prst="roundRect">
+            <a:avLst>
+              <a:gd name="adj" fmla="val 7273"/>
+            </a:avLst>
+          </a:prstGeom>
+          <a:solidFill>
+            <a:srgbClr val="FFF4D9"/>
+          </a:solidFill>
+          <a:ln w="12700">
+            <a:solidFill>
+              <a:srgbClr val="B9D7E6"/>
+            </a:solidFill>
+            <a:prstDash val="solid"/>
+          </a:ln>
+        </p:spPr>
+      </p:sp>
+      <p:sp>
+        <p:nvSpPr>
+          <p:cNvPr id="13" name="Text 11"/>
+          <p:cNvSpPr/>
+          <p:nvPr/>
+        </p:nvSpPr>
+        <p:spPr>
+          <a:xfrm>
+            <a:off x="8211312" y="3941064"/>
+            <a:ext cx="2734056" cy="201168"/>
+          </a:xfrm>
+          <a:prstGeom prst="rect">
+            <a:avLst/>
+          </a:prstGeom>
+          <a:noFill/>
+          <a:ln/>
+        </p:spPr>
+        <p:txBody>
+          <a:bodyPr wrap="square" lIns="0" tIns="0" rIns="0" bIns="0" rtlCol="0" anchor="ctr"/>
+          <a:lstStyle/>
+          <a:p>
+            <a:pPr indent="0" marL="0">
+              <a:buNone/>
+            </a:pPr>
+            <a:r>
+              <a:rPr lang="en-US" sz="950" b="1" dirty="0">
+                <a:solidFill>
+                  <a:srgbClr val="0068B7"/>
+                </a:solidFill>
+                <a:latin typeface="Aptos" pitchFamily="34" charset="0"/>
+                <a:ea typeface="Aptos" pitchFamily="34" charset="-122"/>
+                <a:cs typeface="Aptos" pitchFamily="34" charset="-120"/>
+              </a:rPr>
+              <a:t>Keep in mind</a:t>
+            </a:r>
+            <a:endParaRPr lang="en-US" sz="950" dirty="0"/>
+          </a:p>
+        </p:txBody>
+      </p:sp>
+      <p:sp>
+        <p:nvSpPr>
+          <p:cNvPr id="14" name="Text 12"/>
+          <p:cNvSpPr/>
+          <p:nvPr/>
+        </p:nvSpPr>
+        <p:spPr>
+          <a:xfrm>
+            <a:off x="8211312" y="4233672"/>
+            <a:ext cx="2734056" cy="941832"/>
+          </a:xfrm>
+          <a:prstGeom prst="rect">
+            <a:avLst/>
+          </a:prstGeom>
+          <a:noFill/>
+          <a:ln/>
+        </p:spPr>
+        <p:txBody>
+          <a:bodyPr wrap="square" lIns="0" tIns="0" rIns="0" bIns="0" rtlCol="0" anchor="t">
+            <a:normAutofit/>
+          </a:bodyPr>
+          <a:lstStyle/>
+          <a:p>
+            <a:pPr indent="0" marL="0">
+              <a:buNone/>
+            </a:pPr>
+            <a:r>
+              <a:rPr lang="en-US" sz="1250" dirty="0">
+                <a:solidFill>
+                  <a:srgbClr val="17364A"/>
+                </a:solidFill>
+                <a:latin typeface="Aptos" pitchFamily="34" charset="0"/>
+                <a:ea typeface="Aptos" pitchFamily="34" charset="-122"/>
+                <a:cs typeface="Aptos" pitchFamily="34" charset="-120"/>
+              </a:rPr>
+              <a:t>The playbook connection helps turn training into agency work, not just individual knowledge.</a:t>
+            </a:r>
+            <a:endParaRPr lang="en-US" sz="1250" dirty="0"/>
           </a:p>
         </p:txBody>
       </p:sp>
@@ -6463,7 +11553,32 @@
       </p:sp>
       <p:sp>
         <p:nvSpPr>
-          <p:cNvPr id="3" name="Text 1"/>
+          <p:cNvPr id="3" name="Shape 1"/>
+          <p:cNvSpPr/>
+          <p:nvPr/>
+        </p:nvSpPr>
+        <p:spPr>
+          <a:xfrm>
+            <a:off x="0" y="164592"/>
+            <a:ext cx="146304" cy="6693408"/>
+          </a:xfrm>
+          <a:prstGeom prst="rect">
+            <a:avLst/>
+          </a:prstGeom>
+          <a:solidFill>
+            <a:srgbClr val="2F8A28"/>
+          </a:solidFill>
+          <a:ln w="12700">
+            <a:solidFill>
+              <a:srgbClr val="2F8A28"/>
+            </a:solidFill>
+            <a:prstDash val="solid"/>
+          </a:ln>
+        </p:spPr>
+      </p:sp>
+      <p:sp>
+        <p:nvSpPr>
+          <p:cNvPr id="4" name="Text 2"/>
           <p:cNvSpPr/>
           <p:nvPr/>
         </p:nvSpPr>
@@ -6502,7 +11617,7 @@
       </p:sp>
       <p:sp>
         <p:nvSpPr>
-          <p:cNvPr id="4" name="Text 2"/>
+          <p:cNvPr id="5" name="Text 3"/>
           <p:cNvSpPr/>
           <p:nvPr/>
         </p:nvSpPr>
@@ -6541,7 +11656,7 @@
       </p:sp>
       <p:sp>
         <p:nvSpPr>
-          <p:cNvPr id="5" name="Text 3"/>
+          <p:cNvPr id="6" name="Text 4"/>
           <p:cNvSpPr/>
           <p:nvPr/>
         </p:nvSpPr>
@@ -6580,7 +11695,7 @@
       </p:sp>
       <p:sp>
         <p:nvSpPr>
-          <p:cNvPr id="6" name="Text 4"/>
+          <p:cNvPr id="7" name="Text 5"/>
           <p:cNvSpPr/>
           <p:nvPr/>
         </p:nvSpPr>
@@ -6613,7 +11728,7 @@
                 <a:ea typeface="Aptos Display" pitchFamily="34" charset="-122"/>
                 <a:cs typeface="Aptos Display" pitchFamily="34" charset="-120"/>
               </a:rPr>
-              <a:t>Learning Objectives Continued</a:t>
+              <a:t>Related toolkit resources</a:t>
             </a:r>
             <a:endParaRPr lang="en-US" sz="2700" dirty="0"/>
           </a:p>
@@ -6621,14 +11736,14 @@
       </p:sp>
       <p:sp>
         <p:nvSpPr>
-          <p:cNvPr id="7" name="Text 5"/>
-          <p:cNvSpPr/>
-          <p:nvPr/>
-        </p:nvSpPr>
-        <p:spPr>
-          <a:xfrm>
-            <a:off x="822960" y="1325880"/>
-            <a:ext cx="10378440" cy="4800600"/>
+          <p:cNvPr id="8" name="Text 6"/>
+          <p:cNvSpPr/>
+          <p:nvPr/>
+        </p:nvSpPr>
+        <p:spPr>
+          <a:xfrm>
+            <a:off x="868680" y="1417320"/>
+            <a:ext cx="6903720" cy="4480560"/>
           </a:xfrm>
           <a:prstGeom prst="rect">
             <a:avLst/>
@@ -6643,7 +11758,7 @@
           <a:lstStyle/>
           <a:p>
             <a:r>
-              <a:rPr lang="en-US" sz="1450" dirty="0">
+              <a:rPr lang="en-US" sz="1460" dirty="0">
                 <a:solidFill>
                   <a:srgbClr val="17364A"/>
                 </a:solidFill>
@@ -6651,9 +11766,279 @@
                 <a:ea typeface="Aptos" pitchFamily="34" charset="-122"/>
                 <a:cs typeface="Aptos" pitchFamily="34" charset="-120"/>
               </a:rPr>
-              <a:t>Produce an AI for Social Good review brief for a public health use case.</a:t>
-            </a:r>
-            <a:endParaRPr lang="en-US" sz="1450" dirty="0"/>
+              <a:t>Tool 20: Community Engagement Planning (Planning) - Use this tool to complete or strengthen the practical exercise for the module.</a:t>
+            </a:r>
+            <a:endParaRPr lang="en-US" sz="1460" dirty="0"/>
+          </a:p>
+          <a:p>
+            <a:r>
+              <a:rPr lang="en-US" sz="1460" dirty="0">
+                <a:solidFill>
+                  <a:srgbClr val="17364A"/>
+                </a:solidFill>
+                <a:latin typeface="Aptos" pitchFamily="34" charset="0"/>
+                <a:ea typeface="Aptos" pitchFamily="34" charset="-122"/>
+                <a:cs typeface="Aptos" pitchFamily="34" charset="-120"/>
+              </a:rPr>
+              <a:t>Tool 21: Stakeholder Mapping &amp; RACI (Template) - Use this tool to complete or strengthen the practical exercise for the module using.</a:t>
+            </a:r>
+            <a:endParaRPr lang="en-US" sz="1460" dirty="0"/>
+          </a:p>
+          <a:p>
+            <a:r>
+              <a:rPr lang="en-US" sz="1460" dirty="0">
+                <a:solidFill>
+                  <a:srgbClr val="17364A"/>
+                </a:solidFill>
+                <a:latin typeface="Aptos" pitchFamily="34" charset="0"/>
+                <a:ea typeface="Aptos" pitchFamily="34" charset="-122"/>
+                <a:cs typeface="Aptos" pitchFamily="34" charset="-120"/>
+              </a:rPr>
+              <a:t>Tool 22: Missing Voices Analysis (Checklist) - Use this tool to complete or strengthen the practical exercise for the module using.</a:t>
+            </a:r>
+            <a:endParaRPr lang="en-US" sz="1460" dirty="0"/>
+          </a:p>
+          <a:p>
+            <a:r>
+              <a:rPr lang="en-US" sz="1460" dirty="0">
+                <a:solidFill>
+                  <a:srgbClr val="17364A"/>
+                </a:solidFill>
+                <a:latin typeface="Aptos" pitchFamily="34" charset="0"/>
+                <a:ea typeface="Aptos" pitchFamily="34" charset="-122"/>
+                <a:cs typeface="Aptos" pitchFamily="34" charset="-120"/>
+              </a:rPr>
+              <a:t>Tool 4: AI Policy Landscape Scan (Worksheet) - Use AI Policy Landscape Scan to translate this lesson into a documented public health.</a:t>
+            </a:r>
+            <a:endParaRPr lang="en-US" sz="1460" dirty="0"/>
+          </a:p>
+          <a:p>
+            <a:r>
+              <a:rPr lang="en-US" sz="1460" dirty="0">
+                <a:solidFill>
+                  <a:srgbClr val="17364A"/>
+                </a:solidFill>
+                <a:latin typeface="Aptos" pitchFamily="34" charset="0"/>
+                <a:ea typeface="Aptos" pitchFamily="34" charset="-122"/>
+                <a:cs typeface="Aptos" pitchFamily="34" charset="-120"/>
+              </a:rPr>
+              <a:t>Tool 5: AI Environmental and Resource Impact Review (Checklist) - Use AI Environmental and Resource Impact Review to translate this.</a:t>
+            </a:r>
+            <a:endParaRPr lang="en-US" sz="1460" dirty="0"/>
+          </a:p>
+        </p:txBody>
+      </p:sp>
+      <p:sp>
+        <p:nvSpPr>
+          <p:cNvPr id="9" name="Shape 7"/>
+          <p:cNvSpPr/>
+          <p:nvPr/>
+        </p:nvSpPr>
+        <p:spPr>
+          <a:xfrm>
+            <a:off x="8046720" y="1417320"/>
+            <a:ext cx="3063240" cy="2103120"/>
+          </a:xfrm>
+          <a:prstGeom prst="roundRect">
+            <a:avLst>
+              <a:gd name="adj" fmla="val 5217"/>
+            </a:avLst>
+          </a:prstGeom>
+          <a:solidFill>
+            <a:srgbClr val="EAF6F8"/>
+          </a:solidFill>
+          <a:ln w="12700">
+            <a:solidFill>
+              <a:srgbClr val="B9D7E6"/>
+            </a:solidFill>
+            <a:prstDash val="solid"/>
+          </a:ln>
+        </p:spPr>
+      </p:sp>
+      <p:sp>
+        <p:nvSpPr>
+          <p:cNvPr id="10" name="Text 8"/>
+          <p:cNvSpPr/>
+          <p:nvPr/>
+        </p:nvSpPr>
+        <p:spPr>
+          <a:xfrm>
+            <a:off x="8211312" y="1563624"/>
+            <a:ext cx="2734056" cy="201168"/>
+          </a:xfrm>
+          <a:prstGeom prst="rect">
+            <a:avLst/>
+          </a:prstGeom>
+          <a:noFill/>
+          <a:ln/>
+        </p:spPr>
+        <p:txBody>
+          <a:bodyPr wrap="square" lIns="0" tIns="0" rIns="0" bIns="0" rtlCol="0" anchor="ctr"/>
+          <a:lstStyle/>
+          <a:p>
+            <a:pPr indent="0" marL="0">
+              <a:buNone/>
+            </a:pPr>
+            <a:r>
+              <a:rPr lang="en-US" sz="950" b="1" dirty="0">
+                <a:solidFill>
+                  <a:srgbClr val="0068B7"/>
+                </a:solidFill>
+                <a:latin typeface="Aptos" pitchFamily="34" charset="0"/>
+                <a:ea typeface="Aptos" pitchFamily="34" charset="-122"/>
+                <a:cs typeface="Aptos" pitchFamily="34" charset="-120"/>
+              </a:rPr>
+              <a:t>Use the tools</a:t>
+            </a:r>
+            <a:endParaRPr lang="en-US" sz="950" dirty="0"/>
+          </a:p>
+        </p:txBody>
+      </p:sp>
+      <p:sp>
+        <p:nvSpPr>
+          <p:cNvPr id="11" name="Text 9"/>
+          <p:cNvSpPr/>
+          <p:nvPr/>
+        </p:nvSpPr>
+        <p:spPr>
+          <a:xfrm>
+            <a:off x="8211312" y="1856232"/>
+            <a:ext cx="2734056" cy="1536192"/>
+          </a:xfrm>
+          <a:prstGeom prst="rect">
+            <a:avLst/>
+          </a:prstGeom>
+          <a:noFill/>
+          <a:ln/>
+        </p:spPr>
+        <p:txBody>
+          <a:bodyPr wrap="square" lIns="0" tIns="0" rIns="0" bIns="0" rtlCol="0" anchor="t">
+            <a:normAutofit/>
+          </a:bodyPr>
+          <a:lstStyle/>
+          <a:p>
+            <a:pPr indent="0" marL="0">
+              <a:buNone/>
+            </a:pPr>
+            <a:r>
+              <a:rPr lang="en-US" sz="1250" dirty="0">
+                <a:solidFill>
+                  <a:srgbClr val="17364A"/>
+                </a:solidFill>
+                <a:latin typeface="Aptos" pitchFamily="34" charset="0"/>
+                <a:ea typeface="Aptos" pitchFamily="34" charset="-122"/>
+                <a:cs typeface="Aptos" pitchFamily="34" charset="-120"/>
+              </a:rPr>
+              <a:t>Use linked tools when your department needs a structured worksheet, template, checklist, review process, or documentation artifact.</a:t>
+            </a:r>
+            <a:endParaRPr lang="en-US" sz="1250" dirty="0"/>
+          </a:p>
+        </p:txBody>
+      </p:sp>
+      <p:sp>
+        <p:nvSpPr>
+          <p:cNvPr id="12" name="Shape 10"/>
+          <p:cNvSpPr/>
+          <p:nvPr/>
+        </p:nvSpPr>
+        <p:spPr>
+          <a:xfrm>
+            <a:off x="8046720" y="3794760"/>
+            <a:ext cx="3063240" cy="1508760"/>
+          </a:xfrm>
+          <a:prstGeom prst="roundRect">
+            <a:avLst>
+              <a:gd name="adj" fmla="val 7273"/>
+            </a:avLst>
+          </a:prstGeom>
+          <a:solidFill>
+            <a:srgbClr val="EEF8ED"/>
+          </a:solidFill>
+          <a:ln w="12700">
+            <a:solidFill>
+              <a:srgbClr val="B9D7E6"/>
+            </a:solidFill>
+            <a:prstDash val="solid"/>
+          </a:ln>
+        </p:spPr>
+      </p:sp>
+      <p:sp>
+        <p:nvSpPr>
+          <p:cNvPr id="13" name="Text 11"/>
+          <p:cNvSpPr/>
+          <p:nvPr/>
+        </p:nvSpPr>
+        <p:spPr>
+          <a:xfrm>
+            <a:off x="8211312" y="3941064"/>
+            <a:ext cx="2734056" cy="201168"/>
+          </a:xfrm>
+          <a:prstGeom prst="rect">
+            <a:avLst/>
+          </a:prstGeom>
+          <a:noFill/>
+          <a:ln/>
+        </p:spPr>
+        <p:txBody>
+          <a:bodyPr wrap="square" lIns="0" tIns="0" rIns="0" bIns="0" rtlCol="0" anchor="ctr"/>
+          <a:lstStyle/>
+          <a:p>
+            <a:pPr indent="0" marL="0">
+              <a:buNone/>
+            </a:pPr>
+            <a:r>
+              <a:rPr lang="en-US" sz="950" b="1" dirty="0">
+                <a:solidFill>
+                  <a:srgbClr val="0068B7"/>
+                </a:solidFill>
+                <a:latin typeface="Aptos" pitchFamily="34" charset="0"/>
+                <a:ea typeface="Aptos" pitchFamily="34" charset="-122"/>
+                <a:cs typeface="Aptos" pitchFamily="34" charset="-120"/>
+              </a:rPr>
+              <a:t>Avoid duplication</a:t>
+            </a:r>
+            <a:endParaRPr lang="en-US" sz="950" dirty="0"/>
+          </a:p>
+        </p:txBody>
+      </p:sp>
+      <p:sp>
+        <p:nvSpPr>
+          <p:cNvPr id="14" name="Text 12"/>
+          <p:cNvSpPr/>
+          <p:nvPr/>
+        </p:nvSpPr>
+        <p:spPr>
+          <a:xfrm>
+            <a:off x="8211312" y="4233672"/>
+            <a:ext cx="2734056" cy="941832"/>
+          </a:xfrm>
+          <a:prstGeom prst="rect">
+            <a:avLst/>
+          </a:prstGeom>
+          <a:noFill/>
+          <a:ln/>
+        </p:spPr>
+        <p:txBody>
+          <a:bodyPr wrap="square" lIns="0" tIns="0" rIns="0" bIns="0" rtlCol="0" anchor="t">
+            <a:normAutofit/>
+          </a:bodyPr>
+          <a:lstStyle/>
+          <a:p>
+            <a:pPr indent="0" marL="0">
+              <a:buNone/>
+            </a:pPr>
+            <a:r>
+              <a:rPr lang="en-US" sz="1250" dirty="0">
+                <a:solidFill>
+                  <a:srgbClr val="17364A"/>
+                </a:solidFill>
+                <a:latin typeface="Aptos" pitchFamily="34" charset="0"/>
+                <a:ea typeface="Aptos" pitchFamily="34" charset="-122"/>
+                <a:cs typeface="Aptos" pitchFamily="34" charset="-120"/>
+              </a:rPr>
+              <a:t>If your department already has a strong equivalent tool, adapt or use the existing process instead of recreating it.</a:t>
+            </a:r>
+            <a:endParaRPr lang="en-US" sz="1250" dirty="0"/>
           </a:p>
         </p:txBody>
       </p:sp>
@@ -6716,7 +12101,32 @@
       </p:sp>
       <p:sp>
         <p:nvSpPr>
-          <p:cNvPr id="3" name="Text 1"/>
+          <p:cNvPr id="3" name="Shape 1"/>
+          <p:cNvSpPr/>
+          <p:nvPr/>
+        </p:nvSpPr>
+        <p:spPr>
+          <a:xfrm>
+            <a:off x="0" y="164592"/>
+            <a:ext cx="146304" cy="6693408"/>
+          </a:xfrm>
+          <a:prstGeom prst="rect">
+            <a:avLst/>
+          </a:prstGeom>
+          <a:solidFill>
+            <a:srgbClr val="2F8A28"/>
+          </a:solidFill>
+          <a:ln w="12700">
+            <a:solidFill>
+              <a:srgbClr val="2F8A28"/>
+            </a:solidFill>
+            <a:prstDash val="solid"/>
+          </a:ln>
+        </p:spPr>
+      </p:sp>
+      <p:sp>
+        <p:nvSpPr>
+          <p:cNvPr id="4" name="Text 2"/>
           <p:cNvSpPr/>
           <p:nvPr/>
         </p:nvSpPr>
@@ -6755,7 +12165,7 @@
       </p:sp>
       <p:sp>
         <p:nvSpPr>
-          <p:cNvPr id="4" name="Text 2"/>
+          <p:cNvPr id="5" name="Text 3"/>
           <p:cNvSpPr/>
           <p:nvPr/>
         </p:nvSpPr>
@@ -6794,7 +12204,7 @@
       </p:sp>
       <p:sp>
         <p:nvSpPr>
-          <p:cNvPr id="5" name="Text 3"/>
+          <p:cNvPr id="6" name="Text 4"/>
           <p:cNvSpPr/>
           <p:nvPr/>
         </p:nvSpPr>
@@ -6833,13 +12243,77 @@
       </p:sp>
       <p:sp>
         <p:nvSpPr>
-          <p:cNvPr id="6" name="Text 4"/>
+          <p:cNvPr id="7" name="Shape 5"/>
           <p:cNvSpPr/>
           <p:nvPr/>
         </p:nvSpPr>
         <p:spPr>
           <a:xfrm>
             <a:off x="640080" y="658368"/>
+            <a:ext cx="420624" cy="420624"/>
+          </a:xfrm>
+          <a:prstGeom prst="ellipse">
+            <a:avLst/>
+          </a:prstGeom>
+          <a:solidFill>
+            <a:srgbClr val="0068B7"/>
+          </a:solidFill>
+          <a:ln w="12700">
+            <a:solidFill>
+              <a:srgbClr val="0068B7"/>
+            </a:solidFill>
+            <a:prstDash val="solid"/>
+          </a:ln>
+        </p:spPr>
+      </p:sp>
+      <p:sp>
+        <p:nvSpPr>
+          <p:cNvPr id="8" name="Text 6"/>
+          <p:cNvSpPr/>
+          <p:nvPr/>
+        </p:nvSpPr>
+        <p:spPr>
+          <a:xfrm>
+            <a:off x="640080" y="731520"/>
+            <a:ext cx="420624" cy="164592"/>
+          </a:xfrm>
+          <a:prstGeom prst="rect">
+            <a:avLst/>
+          </a:prstGeom>
+          <a:noFill/>
+          <a:ln/>
+        </p:spPr>
+        <p:txBody>
+          <a:bodyPr wrap="square" lIns="0" tIns="0" rIns="0" bIns="0" rtlCol="0" anchor="ctr"/>
+          <a:lstStyle/>
+          <a:p>
+            <a:pPr algn="ctr" indent="0" marL="0">
+              <a:buNone/>
+            </a:pPr>
+            <a:r>
+              <a:rPr lang="en-US" sz="1100" b="1" dirty="0">
+                <a:solidFill>
+                  <a:srgbClr val="FFFFFF"/>
+                </a:solidFill>
+                <a:latin typeface="Aptos" pitchFamily="34" charset="0"/>
+                <a:ea typeface="Aptos" pitchFamily="34" charset="-122"/>
+                <a:cs typeface="Aptos" pitchFamily="34" charset="-120"/>
+              </a:rPr>
+              <a:t>1</a:t>
+            </a:r>
+            <a:endParaRPr lang="en-US" sz="1100" dirty="0"/>
+          </a:p>
+        </p:txBody>
+      </p:sp>
+      <p:sp>
+        <p:nvSpPr>
+          <p:cNvPr id="9" name="Text 7"/>
+          <p:cNvSpPr/>
+          <p:nvPr/>
+        </p:nvSpPr>
+        <p:spPr>
+          <a:xfrm>
+            <a:off x="640080" y="621792"/>
             <a:ext cx="10881360" cy="566928"/>
           </a:xfrm>
           <a:prstGeom prst="rect">
@@ -6866,7 +12340,7 @@
                 <a:ea typeface="Aptos Display" pitchFamily="34" charset="-122"/>
                 <a:cs typeface="Aptos Display" pitchFamily="34" charset="-120"/>
               </a:rPr>
-              <a:t>Module Overview</a:t>
+              <a:t>Learning Objectives</a:t>
             </a:r>
             <a:endParaRPr lang="en-US" sz="2700" dirty="0"/>
           </a:p>
@@ -6874,32 +12348,178 @@
       </p:sp>
       <p:sp>
         <p:nvSpPr>
-          <p:cNvPr id="7" name="Text 5"/>
-          <p:cNvSpPr/>
-          <p:nvPr/>
-        </p:nvSpPr>
-        <p:spPr>
-          <a:xfrm>
-            <a:off x="822960" y="1325880"/>
-            <a:ext cx="10378440" cy="4800600"/>
-          </a:xfrm>
-          <a:prstGeom prst="rect">
-            <a:avLst/>
-          </a:prstGeom>
-          <a:noFill/>
-          <a:ln/>
-        </p:spPr>
-        <p:txBody>
-          <a:bodyPr wrap="square" lIns="1016" tIns="1016" rIns="1016" bIns="1016" rtlCol="0" anchor="t">
+          <p:cNvPr id="10" name="Text 8"/>
+          <p:cNvSpPr/>
+          <p:nvPr/>
+        </p:nvSpPr>
+        <p:spPr>
+          <a:xfrm>
+            <a:off x="868680" y="1417320"/>
+            <a:ext cx="6675120" cy="4434840"/>
+          </a:xfrm>
+          <a:prstGeom prst="rect">
+            <a:avLst/>
+          </a:prstGeom>
+          <a:noFill/>
+          <a:ln/>
+        </p:spPr>
+        <p:txBody>
+          <a:bodyPr wrap="square" lIns="635" tIns="635" rIns="635" bIns="635" rtlCol="0" anchor="t">
             <a:normAutofit/>
           </a:bodyPr>
           <a:lstStyle/>
           <a:p>
+            <a:r>
+              <a:rPr lang="en-US" sz="1700" dirty="0">
+                <a:solidFill>
+                  <a:srgbClr val="17364A"/>
+                </a:solidFill>
+                <a:latin typeface="Aptos" pitchFamily="34" charset="0"/>
+                <a:ea typeface="Aptos" pitchFamily="34" charset="-122"/>
+                <a:cs typeface="Aptos" pitchFamily="34" charset="-120"/>
+              </a:rPr>
+              <a:t>Define AI for Social Good in public health terms.</a:t>
+            </a:r>
+            <a:endParaRPr lang="en-US" sz="1700" dirty="0"/>
+          </a:p>
+          <a:p>
+            <a:r>
+              <a:rPr lang="en-US" sz="1700" dirty="0">
+                <a:solidFill>
+                  <a:srgbClr val="17364A"/>
+                </a:solidFill>
+                <a:latin typeface="Aptos" pitchFamily="34" charset="0"/>
+                <a:ea typeface="Aptos" pitchFamily="34" charset="-122"/>
+                <a:cs typeface="Aptos" pitchFamily="34" charset="-120"/>
+              </a:rPr>
+              <a:t>Distinguish public benefit from novelty, efficiency, or automation alone.</a:t>
+            </a:r>
+            <a:endParaRPr lang="en-US" sz="1700" dirty="0"/>
+          </a:p>
+          <a:p>
+            <a:r>
+              <a:rPr lang="en-US" sz="1700" dirty="0">
+                <a:solidFill>
+                  <a:srgbClr val="17364A"/>
+                </a:solidFill>
+                <a:latin typeface="Aptos" pitchFamily="34" charset="0"/>
+                <a:ea typeface="Aptos" pitchFamily="34" charset="-122"/>
+                <a:cs typeface="Aptos" pitchFamily="34" charset="-120"/>
+              </a:rPr>
+              <a:t>Identify how AI can support public health values, including equity, transparency, accessibility, accountability, and community.</a:t>
+            </a:r>
+            <a:endParaRPr lang="en-US" sz="1700" dirty="0"/>
+          </a:p>
+          <a:p>
+            <a:r>
+              <a:rPr lang="en-US" sz="1700" dirty="0">
+                <a:solidFill>
+                  <a:srgbClr val="17364A"/>
+                </a:solidFill>
+                <a:latin typeface="Aptos" pitchFamily="34" charset="0"/>
+                <a:ea typeface="Aptos" pitchFamily="34" charset="-122"/>
+                <a:cs typeface="Aptos" pitchFamily="34" charset="-120"/>
+              </a:rPr>
+              <a:t>Assess potential harms, including exclusion, surveillance burden, stigma, resource diversion, and unequal benefit.</a:t>
+            </a:r>
+            <a:endParaRPr lang="en-US" sz="1700" dirty="0"/>
+          </a:p>
+        </p:txBody>
+      </p:sp>
+      <p:sp>
+        <p:nvSpPr>
+          <p:cNvPr id="11" name="Shape 9"/>
+          <p:cNvSpPr/>
+          <p:nvPr/>
+        </p:nvSpPr>
+        <p:spPr>
+          <a:xfrm>
+            <a:off x="7909560" y="1417320"/>
+            <a:ext cx="3154680" cy="1828800"/>
+          </a:xfrm>
+          <a:prstGeom prst="roundRect">
+            <a:avLst>
+              <a:gd name="adj" fmla="val 6000"/>
+            </a:avLst>
+          </a:prstGeom>
+          <a:solidFill>
+            <a:srgbClr val="EEF8ED"/>
+          </a:solidFill>
+          <a:ln w="12700">
+            <a:solidFill>
+              <a:srgbClr val="B9D7E6"/>
+            </a:solidFill>
+            <a:prstDash val="solid"/>
+          </a:ln>
+        </p:spPr>
+      </p:sp>
+      <p:sp>
+        <p:nvSpPr>
+          <p:cNvPr id="12" name="Text 10"/>
+          <p:cNvSpPr/>
+          <p:nvPr/>
+        </p:nvSpPr>
+        <p:spPr>
+          <a:xfrm>
+            <a:off x="8074152" y="1563624"/>
+            <a:ext cx="2825496" cy="201168"/>
+          </a:xfrm>
+          <a:prstGeom prst="rect">
+            <a:avLst/>
+          </a:prstGeom>
+          <a:noFill/>
+          <a:ln/>
+        </p:spPr>
+        <p:txBody>
+          <a:bodyPr wrap="square" lIns="0" tIns="0" rIns="0" bIns="0" rtlCol="0" anchor="ctr"/>
+          <a:lstStyle/>
+          <a:p>
             <a:pPr indent="0" marL="0">
               <a:buNone/>
             </a:pPr>
             <a:r>
-              <a:rPr lang="en-US" sz="1420" dirty="0">
+              <a:rPr lang="en-US" sz="950" b="1" dirty="0">
+                <a:solidFill>
+                  <a:srgbClr val="0068B7"/>
+                </a:solidFill>
+                <a:latin typeface="Aptos" pitchFamily="34" charset="0"/>
+                <a:ea typeface="Aptos" pitchFamily="34" charset="-122"/>
+                <a:cs typeface="Aptos" pitchFamily="34" charset="-120"/>
+              </a:rPr>
+              <a:t>Key idea</a:t>
+            </a:r>
+            <a:endParaRPr lang="en-US" sz="950" dirty="0"/>
+          </a:p>
+        </p:txBody>
+      </p:sp>
+      <p:sp>
+        <p:nvSpPr>
+          <p:cNvPr id="13" name="Text 11"/>
+          <p:cNvSpPr/>
+          <p:nvPr/>
+        </p:nvSpPr>
+        <p:spPr>
+          <a:xfrm>
+            <a:off x="8074152" y="1856232"/>
+            <a:ext cx="2825496" cy="1261872"/>
+          </a:xfrm>
+          <a:prstGeom prst="rect">
+            <a:avLst/>
+          </a:prstGeom>
+          <a:noFill/>
+          <a:ln/>
+        </p:spPr>
+        <p:txBody>
+          <a:bodyPr wrap="square" lIns="0" tIns="0" rIns="0" bIns="0" rtlCol="0" anchor="t">
+            <a:normAutofit/>
+          </a:bodyPr>
+          <a:lstStyle/>
+          <a:p>
+            <a:pPr indent="0" marL="0">
+              <a:buNone/>
+            </a:pPr>
+            <a:r>
+              <a:rPr lang="en-US" sz="1250" dirty="0">
                 <a:solidFill>
                   <a:srgbClr val="17364A"/>
                 </a:solidFill>
@@ -6907,9 +12527,116 @@
                 <a:ea typeface="Aptos" pitchFamily="34" charset="-122"/>
                 <a:cs typeface="Aptos" pitchFamily="34" charset="-120"/>
               </a:rPr>
-              <a:t>AI for Social Good refers to the intentional use of artificial intelligence to improve public well-being, reduce inequities, strengthen institutions, and address complex social problems. For public health, this concept is not abstract. Public health agencies already work to prevent disease, protect communities, improve access, and reduce inequities. AI for Social Good should therefore be judged by whether it advances public health values in measurable, accountable, and community-centered ways. This training helps learners distinguish socially beneficial AI from AI that is merely innovative or efficient. A tool can be technically impressive and still fail to advance the public good if it increases surveillance burden, excludes communities, weakens transparency, or diverts resources from more effective interventions. Conversely, a modest AI tool may create meaningful public value if it reduces staff burden, improves language access, directs services to underserved communities, or helps agencies respond faster and more fairly. The module emphasizes public purpose, equity by design, community engagement, responsible innovation, transparency, measurement, and avoidance of unintended harm. Learners will develop an AI for Social Good review brief for a public health use case.</a:t>
-            </a:r>
-            <a:endParaRPr lang="en-US" sz="1420" dirty="0"/>
+              <a:t>Define AI for Social Good in public health terms.</a:t>
+            </a:r>
+            <a:endParaRPr lang="en-US" sz="1250" dirty="0"/>
+          </a:p>
+        </p:txBody>
+      </p:sp>
+      <p:sp>
+        <p:nvSpPr>
+          <p:cNvPr id="14" name="Shape 12"/>
+          <p:cNvSpPr/>
+          <p:nvPr/>
+        </p:nvSpPr>
+        <p:spPr>
+          <a:xfrm>
+            <a:off x="7909560" y="3520440"/>
+            <a:ext cx="3154680" cy="1737360"/>
+          </a:xfrm>
+          <a:prstGeom prst="roundRect">
+            <a:avLst>
+              <a:gd name="adj" fmla="val 6316"/>
+            </a:avLst>
+          </a:prstGeom>
+          <a:solidFill>
+            <a:srgbClr val="EAF6F8"/>
+          </a:solidFill>
+          <a:ln w="12700">
+            <a:solidFill>
+              <a:srgbClr val="B9D7E6"/>
+            </a:solidFill>
+            <a:prstDash val="solid"/>
+          </a:ln>
+        </p:spPr>
+      </p:sp>
+      <p:sp>
+        <p:nvSpPr>
+          <p:cNvPr id="15" name="Text 13"/>
+          <p:cNvSpPr/>
+          <p:nvPr/>
+        </p:nvSpPr>
+        <p:spPr>
+          <a:xfrm>
+            <a:off x="8074152" y="3666744"/>
+            <a:ext cx="2825496" cy="201168"/>
+          </a:xfrm>
+          <a:prstGeom prst="rect">
+            <a:avLst/>
+          </a:prstGeom>
+          <a:noFill/>
+          <a:ln/>
+        </p:spPr>
+        <p:txBody>
+          <a:bodyPr wrap="square" lIns="0" tIns="0" rIns="0" bIns="0" rtlCol="0" anchor="ctr"/>
+          <a:lstStyle/>
+          <a:p>
+            <a:pPr indent="0" marL="0">
+              <a:buNone/>
+            </a:pPr>
+            <a:r>
+              <a:rPr lang="en-US" sz="950" b="1" dirty="0">
+                <a:solidFill>
+                  <a:srgbClr val="0068B7"/>
+                </a:solidFill>
+                <a:latin typeface="Aptos" pitchFamily="34" charset="0"/>
+                <a:ea typeface="Aptos" pitchFamily="34" charset="-122"/>
+                <a:cs typeface="Aptos" pitchFamily="34" charset="-120"/>
+              </a:rPr>
+              <a:t>Use this for</a:t>
+            </a:r>
+            <a:endParaRPr lang="en-US" sz="950" dirty="0"/>
+          </a:p>
+        </p:txBody>
+      </p:sp>
+      <p:sp>
+        <p:nvSpPr>
+          <p:cNvPr id="16" name="Text 14"/>
+          <p:cNvSpPr/>
+          <p:nvPr/>
+        </p:nvSpPr>
+        <p:spPr>
+          <a:xfrm>
+            <a:off x="8074152" y="3959352"/>
+            <a:ext cx="2825496" cy="1170432"/>
+          </a:xfrm>
+          <a:prstGeom prst="rect">
+            <a:avLst/>
+          </a:prstGeom>
+          <a:noFill/>
+          <a:ln/>
+        </p:spPr>
+        <p:txBody>
+          <a:bodyPr wrap="square" lIns="0" tIns="0" rIns="0" bIns="0" rtlCol="0" anchor="t">
+            <a:normAutofit/>
+          </a:bodyPr>
+          <a:lstStyle/>
+          <a:p>
+            <a:pPr indent="0" marL="0">
+              <a:buNone/>
+            </a:pPr>
+            <a:r>
+              <a:rPr lang="en-US" sz="1250" dirty="0">
+                <a:solidFill>
+                  <a:srgbClr val="17364A"/>
+                </a:solidFill>
+                <a:latin typeface="Aptos" pitchFamily="34" charset="0"/>
+                <a:ea typeface="Aptos" pitchFamily="34" charset="-122"/>
+                <a:cs typeface="Aptos" pitchFamily="34" charset="-120"/>
+              </a:rPr>
+              <a:t>Connect the concept to public health decisions, safeguards, documentation, or implementation work.</a:t>
+            </a:r>
+            <a:endParaRPr lang="en-US" sz="1250" dirty="0"/>
           </a:p>
         </p:txBody>
       </p:sp>
@@ -6972,7 +12699,32 @@
       </p:sp>
       <p:sp>
         <p:nvSpPr>
-          <p:cNvPr id="3" name="Text 1"/>
+          <p:cNvPr id="3" name="Shape 1"/>
+          <p:cNvSpPr/>
+          <p:nvPr/>
+        </p:nvSpPr>
+        <p:spPr>
+          <a:xfrm>
+            <a:off x="0" y="164592"/>
+            <a:ext cx="146304" cy="6693408"/>
+          </a:xfrm>
+          <a:prstGeom prst="rect">
+            <a:avLst/>
+          </a:prstGeom>
+          <a:solidFill>
+            <a:srgbClr val="2F8A28"/>
+          </a:solidFill>
+          <a:ln w="12700">
+            <a:solidFill>
+              <a:srgbClr val="2F8A28"/>
+            </a:solidFill>
+            <a:prstDash val="solid"/>
+          </a:ln>
+        </p:spPr>
+      </p:sp>
+      <p:sp>
+        <p:nvSpPr>
+          <p:cNvPr id="4" name="Text 2"/>
           <p:cNvSpPr/>
           <p:nvPr/>
         </p:nvSpPr>
@@ -7011,7 +12763,7 @@
       </p:sp>
       <p:sp>
         <p:nvSpPr>
-          <p:cNvPr id="4" name="Text 2"/>
+          <p:cNvPr id="5" name="Text 3"/>
           <p:cNvSpPr/>
           <p:nvPr/>
         </p:nvSpPr>
@@ -7050,7 +12802,7 @@
       </p:sp>
       <p:sp>
         <p:nvSpPr>
-          <p:cNvPr id="5" name="Text 3"/>
+          <p:cNvPr id="6" name="Text 4"/>
           <p:cNvSpPr/>
           <p:nvPr/>
         </p:nvSpPr>
@@ -7089,7 +12841,7 @@
       </p:sp>
       <p:sp>
         <p:nvSpPr>
-          <p:cNvPr id="6" name="Text 4"/>
+          <p:cNvPr id="7" name="Text 5"/>
           <p:cNvSpPr/>
           <p:nvPr/>
         </p:nvSpPr>
@@ -7122,7 +12874,7 @@
                 <a:ea typeface="Aptos Display" pitchFamily="34" charset="-122"/>
                 <a:cs typeface="Aptos Display" pitchFamily="34" charset="-120"/>
               </a:rPr>
-              <a:t>Why This Topic Matters for Public Health AI</a:t>
+              <a:t>Learning Objectives Continued</a:t>
             </a:r>
             <a:endParaRPr lang="en-US" sz="2700" dirty="0"/>
           </a:p>
@@ -7130,32 +12882,136 @@
       </p:sp>
       <p:sp>
         <p:nvSpPr>
-          <p:cNvPr id="7" name="Text 5"/>
-          <p:cNvSpPr/>
-          <p:nvPr/>
-        </p:nvSpPr>
-        <p:spPr>
-          <a:xfrm>
-            <a:off x="822960" y="1325880"/>
-            <a:ext cx="10378440" cy="4800600"/>
-          </a:xfrm>
-          <a:prstGeom prst="rect">
-            <a:avLst/>
-          </a:prstGeom>
-          <a:noFill/>
-          <a:ln/>
-        </p:spPr>
-        <p:txBody>
-          <a:bodyPr wrap="square" lIns="1016" tIns="1016" rIns="1016" bIns="1016" rtlCol="0" anchor="t">
+          <p:cNvPr id="8" name="Text 6"/>
+          <p:cNvSpPr/>
+          <p:nvPr/>
+        </p:nvSpPr>
+        <p:spPr>
+          <a:xfrm>
+            <a:off x="868680" y="1417320"/>
+            <a:ext cx="6675120" cy="4434840"/>
+          </a:xfrm>
+          <a:prstGeom prst="rect">
+            <a:avLst/>
+          </a:prstGeom>
+          <a:noFill/>
+          <a:ln/>
+        </p:spPr>
+        <p:txBody>
+          <a:bodyPr wrap="square" lIns="635" tIns="635" rIns="635" bIns="635" rtlCol="0" anchor="t">
             <a:normAutofit/>
           </a:bodyPr>
           <a:lstStyle/>
           <a:p>
+            <a:r>
+              <a:rPr lang="en-US" sz="1700" dirty="0">
+                <a:solidFill>
+                  <a:srgbClr val="17364A"/>
+                </a:solidFill>
+                <a:latin typeface="Aptos" pitchFamily="34" charset="0"/>
+                <a:ea typeface="Aptos" pitchFamily="34" charset="-122"/>
+                <a:cs typeface="Aptos" pitchFamily="34" charset="-120"/>
+              </a:rPr>
+              <a:t>Produce an AI for Social Good review brief for a public health use case.</a:t>
+            </a:r>
+            <a:endParaRPr lang="en-US" sz="1700" dirty="0"/>
+          </a:p>
+        </p:txBody>
+      </p:sp>
+      <p:sp>
+        <p:nvSpPr>
+          <p:cNvPr id="9" name="Shape 7"/>
+          <p:cNvSpPr/>
+          <p:nvPr/>
+        </p:nvSpPr>
+        <p:spPr>
+          <a:xfrm>
+            <a:off x="7909560" y="1417320"/>
+            <a:ext cx="3154680" cy="1828800"/>
+          </a:xfrm>
+          <a:prstGeom prst="roundRect">
+            <a:avLst>
+              <a:gd name="adj" fmla="val 6000"/>
+            </a:avLst>
+          </a:prstGeom>
+          <a:solidFill>
+            <a:srgbClr val="EEF8ED"/>
+          </a:solidFill>
+          <a:ln w="12700">
+            <a:solidFill>
+              <a:srgbClr val="B9D7E6"/>
+            </a:solidFill>
+            <a:prstDash val="solid"/>
+          </a:ln>
+        </p:spPr>
+      </p:sp>
+      <p:sp>
+        <p:nvSpPr>
+          <p:cNvPr id="10" name="Text 8"/>
+          <p:cNvSpPr/>
+          <p:nvPr/>
+        </p:nvSpPr>
+        <p:spPr>
+          <a:xfrm>
+            <a:off x="8074152" y="1563624"/>
+            <a:ext cx="2825496" cy="201168"/>
+          </a:xfrm>
+          <a:prstGeom prst="rect">
+            <a:avLst/>
+          </a:prstGeom>
+          <a:noFill/>
+          <a:ln/>
+        </p:spPr>
+        <p:txBody>
+          <a:bodyPr wrap="square" lIns="0" tIns="0" rIns="0" bIns="0" rtlCol="0" anchor="ctr"/>
+          <a:lstStyle/>
+          <a:p>
             <a:pPr indent="0" marL="0">
               <a:buNone/>
             </a:pPr>
             <a:r>
-              <a:rPr lang="en-US" sz="1420" dirty="0">
+              <a:rPr lang="en-US" sz="950" b="1" dirty="0">
+                <a:solidFill>
+                  <a:srgbClr val="0068B7"/>
+                </a:solidFill>
+                <a:latin typeface="Aptos" pitchFamily="34" charset="0"/>
+                <a:ea typeface="Aptos" pitchFamily="34" charset="-122"/>
+                <a:cs typeface="Aptos" pitchFamily="34" charset="-120"/>
+              </a:rPr>
+              <a:t>Key idea</a:t>
+            </a:r>
+            <a:endParaRPr lang="en-US" sz="950" dirty="0"/>
+          </a:p>
+        </p:txBody>
+      </p:sp>
+      <p:sp>
+        <p:nvSpPr>
+          <p:cNvPr id="11" name="Text 9"/>
+          <p:cNvSpPr/>
+          <p:nvPr/>
+        </p:nvSpPr>
+        <p:spPr>
+          <a:xfrm>
+            <a:off x="8074152" y="1856232"/>
+            <a:ext cx="2825496" cy="1261872"/>
+          </a:xfrm>
+          <a:prstGeom prst="rect">
+            <a:avLst/>
+          </a:prstGeom>
+          <a:noFill/>
+          <a:ln/>
+        </p:spPr>
+        <p:txBody>
+          <a:bodyPr wrap="square" lIns="0" tIns="0" rIns="0" bIns="0" rtlCol="0" anchor="t">
+            <a:normAutofit/>
+          </a:bodyPr>
+          <a:lstStyle/>
+          <a:p>
+            <a:pPr indent="0" marL="0">
+              <a:buNone/>
+            </a:pPr>
+            <a:r>
+              <a:rPr lang="en-US" sz="1250" dirty="0">
                 <a:solidFill>
                   <a:srgbClr val="17364A"/>
                 </a:solidFill>
@@ -7163,9 +13019,116 @@
                 <a:ea typeface="Aptos" pitchFamily="34" charset="-122"/>
                 <a:cs typeface="Aptos" pitchFamily="34" charset="-120"/>
               </a:rPr>
-              <a:t>Public health is uniquely positioned to use AI for social good because its mission is population well-being rather than private gain. AI can help agencies identify emerging needs, improve access to information, reduce administrative burden, support community outreach, and allocate resources more effectively. These benefits are especially important when agencies face workforce shortages, fragmented systems, and increasing demands. However, AI for Social Good is not guaranteed by good intentions. Tools built for efficiency may shift burden onto communities, reduce human contact, or make services harder to access for people with limited digital literacy. Predictive tools may label communities as risky without addressing structural causes. Chatbots may improve information access for some users while excluding people who need language, disability, or offline support. The public health standard for social good should be rigorous. Agencies should define the public problem, identify who benefits, identify who could be harmed, involve affected communities, measure outcomes, and document safeguards. The central question is not “Can AI do this?” but “Should AI be used for this purpose, and under what conditions would it create public value?”</a:t>
-            </a:r>
-            <a:endParaRPr lang="en-US" sz="1420" dirty="0"/>
+              <a:t>Produce an AI for Social Good review brief for a public health use case.</a:t>
+            </a:r>
+            <a:endParaRPr lang="en-US" sz="1250" dirty="0"/>
+          </a:p>
+        </p:txBody>
+      </p:sp>
+      <p:sp>
+        <p:nvSpPr>
+          <p:cNvPr id="12" name="Shape 10"/>
+          <p:cNvSpPr/>
+          <p:nvPr/>
+        </p:nvSpPr>
+        <p:spPr>
+          <a:xfrm>
+            <a:off x="7909560" y="3520440"/>
+            <a:ext cx="3154680" cy="1737360"/>
+          </a:xfrm>
+          <a:prstGeom prst="roundRect">
+            <a:avLst>
+              <a:gd name="adj" fmla="val 6316"/>
+            </a:avLst>
+          </a:prstGeom>
+          <a:solidFill>
+            <a:srgbClr val="EAF6F8"/>
+          </a:solidFill>
+          <a:ln w="12700">
+            <a:solidFill>
+              <a:srgbClr val="B9D7E6"/>
+            </a:solidFill>
+            <a:prstDash val="solid"/>
+          </a:ln>
+        </p:spPr>
+      </p:sp>
+      <p:sp>
+        <p:nvSpPr>
+          <p:cNvPr id="13" name="Text 11"/>
+          <p:cNvSpPr/>
+          <p:nvPr/>
+        </p:nvSpPr>
+        <p:spPr>
+          <a:xfrm>
+            <a:off x="8074152" y="3666744"/>
+            <a:ext cx="2825496" cy="201168"/>
+          </a:xfrm>
+          <a:prstGeom prst="rect">
+            <a:avLst/>
+          </a:prstGeom>
+          <a:noFill/>
+          <a:ln/>
+        </p:spPr>
+        <p:txBody>
+          <a:bodyPr wrap="square" lIns="0" tIns="0" rIns="0" bIns="0" rtlCol="0" anchor="ctr"/>
+          <a:lstStyle/>
+          <a:p>
+            <a:pPr indent="0" marL="0">
+              <a:buNone/>
+            </a:pPr>
+            <a:r>
+              <a:rPr lang="en-US" sz="950" b="1" dirty="0">
+                <a:solidFill>
+                  <a:srgbClr val="0068B7"/>
+                </a:solidFill>
+                <a:latin typeface="Aptos" pitchFamily="34" charset="0"/>
+                <a:ea typeface="Aptos" pitchFamily="34" charset="-122"/>
+                <a:cs typeface="Aptos" pitchFamily="34" charset="-120"/>
+              </a:rPr>
+              <a:t>Use this for</a:t>
+            </a:r>
+            <a:endParaRPr lang="en-US" sz="950" dirty="0"/>
+          </a:p>
+        </p:txBody>
+      </p:sp>
+      <p:sp>
+        <p:nvSpPr>
+          <p:cNvPr id="14" name="Text 12"/>
+          <p:cNvSpPr/>
+          <p:nvPr/>
+        </p:nvSpPr>
+        <p:spPr>
+          <a:xfrm>
+            <a:off x="8074152" y="3959352"/>
+            <a:ext cx="2825496" cy="1170432"/>
+          </a:xfrm>
+          <a:prstGeom prst="rect">
+            <a:avLst/>
+          </a:prstGeom>
+          <a:noFill/>
+          <a:ln/>
+        </p:spPr>
+        <p:txBody>
+          <a:bodyPr wrap="square" lIns="0" tIns="0" rIns="0" bIns="0" rtlCol="0" anchor="t">
+            <a:normAutofit/>
+          </a:bodyPr>
+          <a:lstStyle/>
+          <a:p>
+            <a:pPr indent="0" marL="0">
+              <a:buNone/>
+            </a:pPr>
+            <a:r>
+              <a:rPr lang="en-US" sz="1250" dirty="0">
+                <a:solidFill>
+                  <a:srgbClr val="17364A"/>
+                </a:solidFill>
+                <a:latin typeface="Aptos" pitchFamily="34" charset="0"/>
+                <a:ea typeface="Aptos" pitchFamily="34" charset="-122"/>
+                <a:cs typeface="Aptos" pitchFamily="34" charset="-120"/>
+              </a:rPr>
+              <a:t>Connect the concept to public health decisions, safeguards, documentation, or implementation work.</a:t>
+            </a:r>
+            <a:endParaRPr lang="en-US" sz="1250" dirty="0"/>
           </a:p>
         </p:txBody>
       </p:sp>
@@ -7228,7 +13191,32 @@
       </p:sp>
       <p:sp>
         <p:nvSpPr>
-          <p:cNvPr id="3" name="Text 1"/>
+          <p:cNvPr id="3" name="Shape 1"/>
+          <p:cNvSpPr/>
+          <p:nvPr/>
+        </p:nvSpPr>
+        <p:spPr>
+          <a:xfrm>
+            <a:off x="0" y="164592"/>
+            <a:ext cx="146304" cy="6693408"/>
+          </a:xfrm>
+          <a:prstGeom prst="rect">
+            <a:avLst/>
+          </a:prstGeom>
+          <a:solidFill>
+            <a:srgbClr val="2F8A28"/>
+          </a:solidFill>
+          <a:ln w="12700">
+            <a:solidFill>
+              <a:srgbClr val="2F8A28"/>
+            </a:solidFill>
+            <a:prstDash val="solid"/>
+          </a:ln>
+        </p:spPr>
+      </p:sp>
+      <p:sp>
+        <p:nvSpPr>
+          <p:cNvPr id="4" name="Text 2"/>
           <p:cNvSpPr/>
           <p:nvPr/>
         </p:nvSpPr>
@@ -7267,7 +13255,7 @@
       </p:sp>
       <p:sp>
         <p:nvSpPr>
-          <p:cNvPr id="4" name="Text 2"/>
+          <p:cNvPr id="5" name="Text 3"/>
           <p:cNvSpPr/>
           <p:nvPr/>
         </p:nvSpPr>
@@ -7306,7 +13294,7 @@
       </p:sp>
       <p:sp>
         <p:nvSpPr>
-          <p:cNvPr id="5" name="Text 3"/>
+          <p:cNvPr id="6" name="Text 4"/>
           <p:cNvSpPr/>
           <p:nvPr/>
         </p:nvSpPr>
@@ -7345,13 +13333,77 @@
       </p:sp>
       <p:sp>
         <p:nvSpPr>
-          <p:cNvPr id="6" name="Text 4"/>
+          <p:cNvPr id="7" name="Shape 5"/>
           <p:cNvSpPr/>
           <p:nvPr/>
         </p:nvSpPr>
         <p:spPr>
           <a:xfrm>
             <a:off x="640080" y="658368"/>
+            <a:ext cx="420624" cy="420624"/>
+          </a:xfrm>
+          <a:prstGeom prst="ellipse">
+            <a:avLst/>
+          </a:prstGeom>
+          <a:solidFill>
+            <a:srgbClr val="0068B7"/>
+          </a:solidFill>
+          <a:ln w="12700">
+            <a:solidFill>
+              <a:srgbClr val="0068B7"/>
+            </a:solidFill>
+            <a:prstDash val="solid"/>
+          </a:ln>
+        </p:spPr>
+      </p:sp>
+      <p:sp>
+        <p:nvSpPr>
+          <p:cNvPr id="8" name="Text 6"/>
+          <p:cNvSpPr/>
+          <p:nvPr/>
+        </p:nvSpPr>
+        <p:spPr>
+          <a:xfrm>
+            <a:off x="640080" y="731520"/>
+            <a:ext cx="420624" cy="164592"/>
+          </a:xfrm>
+          <a:prstGeom prst="rect">
+            <a:avLst/>
+          </a:prstGeom>
+          <a:noFill/>
+          <a:ln/>
+        </p:spPr>
+        <p:txBody>
+          <a:bodyPr wrap="square" lIns="0" tIns="0" rIns="0" bIns="0" rtlCol="0" anchor="ctr"/>
+          <a:lstStyle/>
+          <a:p>
+            <a:pPr algn="ctr" indent="0" marL="0">
+              <a:buNone/>
+            </a:pPr>
+            <a:r>
+              <a:rPr lang="en-US" sz="1100" b="1" dirty="0">
+                <a:solidFill>
+                  <a:srgbClr val="FFFFFF"/>
+                </a:solidFill>
+                <a:latin typeface="Aptos" pitchFamily="34" charset="0"/>
+                <a:ea typeface="Aptos" pitchFamily="34" charset="-122"/>
+                <a:cs typeface="Aptos" pitchFamily="34" charset="-120"/>
+              </a:rPr>
+              <a:t>2</a:t>
+            </a:r>
+            <a:endParaRPr lang="en-US" sz="1100" dirty="0"/>
+          </a:p>
+        </p:txBody>
+      </p:sp>
+      <p:sp>
+        <p:nvSpPr>
+          <p:cNvPr id="9" name="Text 7"/>
+          <p:cNvSpPr/>
+          <p:nvPr/>
+        </p:nvSpPr>
+        <p:spPr>
+          <a:xfrm>
+            <a:off x="640080" y="621792"/>
             <a:ext cx="10881360" cy="566928"/>
           </a:xfrm>
           <a:prstGeom prst="rect">
@@ -7378,7 +13430,7 @@
                 <a:ea typeface="Aptos Display" pitchFamily="34" charset="-122"/>
                 <a:cs typeface="Aptos Display" pitchFamily="34" charset="-120"/>
               </a:rPr>
-              <a:t>Public Health Example</a:t>
+              <a:t>Module Overview</a:t>
             </a:r>
             <a:endParaRPr lang="en-US" sz="2700" dirty="0"/>
           </a:p>
@@ -7386,32 +13438,178 @@
       </p:sp>
       <p:sp>
         <p:nvSpPr>
-          <p:cNvPr id="7" name="Text 5"/>
-          <p:cNvSpPr/>
-          <p:nvPr/>
-        </p:nvSpPr>
-        <p:spPr>
-          <a:xfrm>
-            <a:off x="822960" y="1325880"/>
-            <a:ext cx="10378440" cy="4800600"/>
-          </a:xfrm>
-          <a:prstGeom prst="rect">
-            <a:avLst/>
-          </a:prstGeom>
-          <a:noFill/>
-          <a:ln/>
-        </p:spPr>
-        <p:txBody>
-          <a:bodyPr wrap="square" lIns="1016" tIns="1016" rIns="1016" bIns="1016" rtlCol="0" anchor="t">
+          <p:cNvPr id="10" name="Text 8"/>
+          <p:cNvSpPr/>
+          <p:nvPr/>
+        </p:nvSpPr>
+        <p:spPr>
+          <a:xfrm>
+            <a:off x="868680" y="1417320"/>
+            <a:ext cx="6675120" cy="4434840"/>
+          </a:xfrm>
+          <a:prstGeom prst="rect">
+            <a:avLst/>
+          </a:prstGeom>
+          <a:noFill/>
+          <a:ln/>
+        </p:spPr>
+        <p:txBody>
+          <a:bodyPr wrap="square" lIns="635" tIns="635" rIns="635" bIns="635" rtlCol="0" anchor="t">
             <a:normAutofit/>
           </a:bodyPr>
           <a:lstStyle/>
           <a:p>
+            <a:r>
+              <a:rPr lang="en-US" sz="1700" dirty="0">
+                <a:solidFill>
+                  <a:srgbClr val="17364A"/>
+                </a:solidFill>
+                <a:latin typeface="Aptos" pitchFamily="34" charset="0"/>
+                <a:ea typeface="Aptos" pitchFamily="34" charset="-122"/>
+                <a:cs typeface="Aptos" pitchFamily="34" charset="-120"/>
+              </a:rPr>
+              <a:t>AI for Social Good refers to the intentional use of artificial intelligence to improve public well-being, reduce.</a:t>
+            </a:r>
+            <a:endParaRPr lang="en-US" sz="1700" dirty="0"/>
+          </a:p>
+          <a:p>
+            <a:r>
+              <a:rPr lang="en-US" sz="1700" dirty="0">
+                <a:solidFill>
+                  <a:srgbClr val="17364A"/>
+                </a:solidFill>
+                <a:latin typeface="Aptos" pitchFamily="34" charset="0"/>
+                <a:ea typeface="Aptos" pitchFamily="34" charset="-122"/>
+                <a:cs typeface="Aptos" pitchFamily="34" charset="-120"/>
+              </a:rPr>
+              <a:t>For public health, this concept is not abstract.</a:t>
+            </a:r>
+            <a:endParaRPr lang="en-US" sz="1700" dirty="0"/>
+          </a:p>
+          <a:p>
+            <a:r>
+              <a:rPr lang="en-US" sz="1700" dirty="0">
+                <a:solidFill>
+                  <a:srgbClr val="17364A"/>
+                </a:solidFill>
+                <a:latin typeface="Aptos" pitchFamily="34" charset="0"/>
+                <a:ea typeface="Aptos" pitchFamily="34" charset="-122"/>
+                <a:cs typeface="Aptos" pitchFamily="34" charset="-120"/>
+              </a:rPr>
+              <a:t>Public health agencies already work to prevent disease, protect communities, improve access, and reduce inequities.</a:t>
+            </a:r>
+            <a:endParaRPr lang="en-US" sz="1700" dirty="0"/>
+          </a:p>
+          <a:p>
+            <a:r>
+              <a:rPr lang="en-US" sz="1700" dirty="0">
+                <a:solidFill>
+                  <a:srgbClr val="17364A"/>
+                </a:solidFill>
+                <a:latin typeface="Aptos" pitchFamily="34" charset="0"/>
+                <a:ea typeface="Aptos" pitchFamily="34" charset="-122"/>
+                <a:cs typeface="Aptos" pitchFamily="34" charset="-120"/>
+              </a:rPr>
+              <a:t>AI for Social Good should therefore be judged by whether it advances public health values in measurable, accountable, and.</a:t>
+            </a:r>
+            <a:endParaRPr lang="en-US" sz="1700" dirty="0"/>
+          </a:p>
+        </p:txBody>
+      </p:sp>
+      <p:sp>
+        <p:nvSpPr>
+          <p:cNvPr id="11" name="Shape 9"/>
+          <p:cNvSpPr/>
+          <p:nvPr/>
+        </p:nvSpPr>
+        <p:spPr>
+          <a:xfrm>
+            <a:off x="7909560" y="1417320"/>
+            <a:ext cx="3154680" cy="1828800"/>
+          </a:xfrm>
+          <a:prstGeom prst="roundRect">
+            <a:avLst>
+              <a:gd name="adj" fmla="val 6000"/>
+            </a:avLst>
+          </a:prstGeom>
+          <a:solidFill>
+            <a:srgbClr val="EEF8ED"/>
+          </a:solidFill>
+          <a:ln w="12700">
+            <a:solidFill>
+              <a:srgbClr val="B9D7E6"/>
+            </a:solidFill>
+            <a:prstDash val="solid"/>
+          </a:ln>
+        </p:spPr>
+      </p:sp>
+      <p:sp>
+        <p:nvSpPr>
+          <p:cNvPr id="12" name="Text 10"/>
+          <p:cNvSpPr/>
+          <p:nvPr/>
+        </p:nvSpPr>
+        <p:spPr>
+          <a:xfrm>
+            <a:off x="8074152" y="1563624"/>
+            <a:ext cx="2825496" cy="201168"/>
+          </a:xfrm>
+          <a:prstGeom prst="rect">
+            <a:avLst/>
+          </a:prstGeom>
+          <a:noFill/>
+          <a:ln/>
+        </p:spPr>
+        <p:txBody>
+          <a:bodyPr wrap="square" lIns="0" tIns="0" rIns="0" bIns="0" rtlCol="0" anchor="ctr"/>
+          <a:lstStyle/>
+          <a:p>
             <a:pPr indent="0" marL="0">
               <a:buNone/>
             </a:pPr>
             <a:r>
-              <a:rPr lang="en-US" sz="1420" dirty="0">
+              <a:rPr lang="en-US" sz="950" b="1" dirty="0">
+                <a:solidFill>
+                  <a:srgbClr val="0068B7"/>
+                </a:solidFill>
+                <a:latin typeface="Aptos" pitchFamily="34" charset="0"/>
+                <a:ea typeface="Aptos" pitchFamily="34" charset="-122"/>
+                <a:cs typeface="Aptos" pitchFamily="34" charset="-120"/>
+              </a:rPr>
+              <a:t>Key idea</a:t>
+            </a:r>
+            <a:endParaRPr lang="en-US" sz="950" dirty="0"/>
+          </a:p>
+        </p:txBody>
+      </p:sp>
+      <p:sp>
+        <p:nvSpPr>
+          <p:cNvPr id="13" name="Text 11"/>
+          <p:cNvSpPr/>
+          <p:nvPr/>
+        </p:nvSpPr>
+        <p:spPr>
+          <a:xfrm>
+            <a:off x="8074152" y="1856232"/>
+            <a:ext cx="2825496" cy="1261872"/>
+          </a:xfrm>
+          <a:prstGeom prst="rect">
+            <a:avLst/>
+          </a:prstGeom>
+          <a:noFill/>
+          <a:ln/>
+        </p:spPr>
+        <p:txBody>
+          <a:bodyPr wrap="square" lIns="0" tIns="0" rIns="0" bIns="0" rtlCol="0" anchor="t">
+            <a:normAutofit/>
+          </a:bodyPr>
+          <a:lstStyle/>
+          <a:p>
+            <a:pPr indent="0" marL="0">
+              <a:buNone/>
+            </a:pPr>
+            <a:r>
+              <a:rPr lang="en-US" sz="1250" dirty="0">
                 <a:solidFill>
                   <a:srgbClr val="17364A"/>
                 </a:solidFill>
@@ -7419,9 +13617,116 @@
                 <a:ea typeface="Aptos" pitchFamily="34" charset="-122"/>
                 <a:cs typeface="Aptos" pitchFamily="34" charset="-120"/>
               </a:rPr>
-              <a:t>A health department may use AI to improve access to maternal and child health resources. A tool could help staff identify service gaps, summarize eligibility rules, translate plain-language information, and route families to local support. If designed well, the tool could reduce administrative burden and improve timely access to services. The same tool could fail if it assumes internet access, uses only English content, provides outdated referral information, exposes sensitive information, or replaces trusted human navigators. An AI for Social Good review would examine community needs, access barriers, language and disability accommodations, privacy, human fallback options, and measurable outcomes.</a:t>
-            </a:r>
-            <a:endParaRPr lang="en-US" sz="1420" dirty="0"/>
+              <a:t>AI for Social Good refers to the intentional use of artificial intelligence to improve public well-being, reduce.</a:t>
+            </a:r>
+            <a:endParaRPr lang="en-US" sz="1250" dirty="0"/>
+          </a:p>
+        </p:txBody>
+      </p:sp>
+      <p:sp>
+        <p:nvSpPr>
+          <p:cNvPr id="14" name="Shape 12"/>
+          <p:cNvSpPr/>
+          <p:nvPr/>
+        </p:nvSpPr>
+        <p:spPr>
+          <a:xfrm>
+            <a:off x="7909560" y="3520440"/>
+            <a:ext cx="3154680" cy="1737360"/>
+          </a:xfrm>
+          <a:prstGeom prst="roundRect">
+            <a:avLst>
+              <a:gd name="adj" fmla="val 6316"/>
+            </a:avLst>
+          </a:prstGeom>
+          <a:solidFill>
+            <a:srgbClr val="EAF6F8"/>
+          </a:solidFill>
+          <a:ln w="12700">
+            <a:solidFill>
+              <a:srgbClr val="B9D7E6"/>
+            </a:solidFill>
+            <a:prstDash val="solid"/>
+          </a:ln>
+        </p:spPr>
+      </p:sp>
+      <p:sp>
+        <p:nvSpPr>
+          <p:cNvPr id="15" name="Text 13"/>
+          <p:cNvSpPr/>
+          <p:nvPr/>
+        </p:nvSpPr>
+        <p:spPr>
+          <a:xfrm>
+            <a:off x="8074152" y="3666744"/>
+            <a:ext cx="2825496" cy="201168"/>
+          </a:xfrm>
+          <a:prstGeom prst="rect">
+            <a:avLst/>
+          </a:prstGeom>
+          <a:noFill/>
+          <a:ln/>
+        </p:spPr>
+        <p:txBody>
+          <a:bodyPr wrap="square" lIns="0" tIns="0" rIns="0" bIns="0" rtlCol="0" anchor="ctr"/>
+          <a:lstStyle/>
+          <a:p>
+            <a:pPr indent="0" marL="0">
+              <a:buNone/>
+            </a:pPr>
+            <a:r>
+              <a:rPr lang="en-US" sz="950" b="1" dirty="0">
+                <a:solidFill>
+                  <a:srgbClr val="0068B7"/>
+                </a:solidFill>
+                <a:latin typeface="Aptos" pitchFamily="34" charset="0"/>
+                <a:ea typeface="Aptos" pitchFamily="34" charset="-122"/>
+                <a:cs typeface="Aptos" pitchFamily="34" charset="-120"/>
+              </a:rPr>
+              <a:t>Use this for</a:t>
+            </a:r>
+            <a:endParaRPr lang="en-US" sz="950" dirty="0"/>
+          </a:p>
+        </p:txBody>
+      </p:sp>
+      <p:sp>
+        <p:nvSpPr>
+          <p:cNvPr id="16" name="Text 14"/>
+          <p:cNvSpPr/>
+          <p:nvPr/>
+        </p:nvSpPr>
+        <p:spPr>
+          <a:xfrm>
+            <a:off x="8074152" y="3959352"/>
+            <a:ext cx="2825496" cy="1170432"/>
+          </a:xfrm>
+          <a:prstGeom prst="rect">
+            <a:avLst/>
+          </a:prstGeom>
+          <a:noFill/>
+          <a:ln/>
+        </p:spPr>
+        <p:txBody>
+          <a:bodyPr wrap="square" lIns="0" tIns="0" rIns="0" bIns="0" rtlCol="0" anchor="t">
+            <a:normAutofit/>
+          </a:bodyPr>
+          <a:lstStyle/>
+          <a:p>
+            <a:pPr indent="0" marL="0">
+              <a:buNone/>
+            </a:pPr>
+            <a:r>
+              <a:rPr lang="en-US" sz="1250" dirty="0">
+                <a:solidFill>
+                  <a:srgbClr val="17364A"/>
+                </a:solidFill>
+                <a:latin typeface="Aptos" pitchFamily="34" charset="0"/>
+                <a:ea typeface="Aptos" pitchFamily="34" charset="-122"/>
+                <a:cs typeface="Aptos" pitchFamily="34" charset="-120"/>
+              </a:rPr>
+              <a:t>Connect the concept to public health decisions, safeguards, documentation, or implementation work.</a:t>
+            </a:r>
+            <a:endParaRPr lang="en-US" sz="1250" dirty="0"/>
           </a:p>
         </p:txBody>
       </p:sp>
@@ -7484,7 +13789,32 @@
       </p:sp>
       <p:sp>
         <p:nvSpPr>
-          <p:cNvPr id="3" name="Text 1"/>
+          <p:cNvPr id="3" name="Shape 1"/>
+          <p:cNvSpPr/>
+          <p:nvPr/>
+        </p:nvSpPr>
+        <p:spPr>
+          <a:xfrm>
+            <a:off x="0" y="164592"/>
+            <a:ext cx="146304" cy="6693408"/>
+          </a:xfrm>
+          <a:prstGeom prst="rect">
+            <a:avLst/>
+          </a:prstGeom>
+          <a:solidFill>
+            <a:srgbClr val="2F8A28"/>
+          </a:solidFill>
+          <a:ln w="12700">
+            <a:solidFill>
+              <a:srgbClr val="2F8A28"/>
+            </a:solidFill>
+            <a:prstDash val="solid"/>
+          </a:ln>
+        </p:spPr>
+      </p:sp>
+      <p:sp>
+        <p:nvSpPr>
+          <p:cNvPr id="4" name="Text 2"/>
           <p:cNvSpPr/>
           <p:nvPr/>
         </p:nvSpPr>
@@ -7523,7 +13853,7 @@
       </p:sp>
       <p:sp>
         <p:nvSpPr>
-          <p:cNvPr id="4" name="Text 2"/>
+          <p:cNvPr id="5" name="Text 3"/>
           <p:cNvSpPr/>
           <p:nvPr/>
         </p:nvSpPr>
@@ -7562,7 +13892,7 @@
       </p:sp>
       <p:sp>
         <p:nvSpPr>
-          <p:cNvPr id="5" name="Text 3"/>
+          <p:cNvPr id="6" name="Text 4"/>
           <p:cNvSpPr/>
           <p:nvPr/>
         </p:nvSpPr>
@@ -7601,13 +13931,77 @@
       </p:sp>
       <p:sp>
         <p:nvSpPr>
-          <p:cNvPr id="6" name="Text 4"/>
+          <p:cNvPr id="7" name="Shape 5"/>
           <p:cNvSpPr/>
           <p:nvPr/>
         </p:nvSpPr>
         <p:spPr>
           <a:xfrm>
             <a:off x="640080" y="658368"/>
+            <a:ext cx="420624" cy="420624"/>
+          </a:xfrm>
+          <a:prstGeom prst="ellipse">
+            <a:avLst/>
+          </a:prstGeom>
+          <a:solidFill>
+            <a:srgbClr val="0068B7"/>
+          </a:solidFill>
+          <a:ln w="12700">
+            <a:solidFill>
+              <a:srgbClr val="0068B7"/>
+            </a:solidFill>
+            <a:prstDash val="solid"/>
+          </a:ln>
+        </p:spPr>
+      </p:sp>
+      <p:sp>
+        <p:nvSpPr>
+          <p:cNvPr id="8" name="Text 6"/>
+          <p:cNvSpPr/>
+          <p:nvPr/>
+        </p:nvSpPr>
+        <p:spPr>
+          <a:xfrm>
+            <a:off x="640080" y="731520"/>
+            <a:ext cx="420624" cy="164592"/>
+          </a:xfrm>
+          <a:prstGeom prst="rect">
+            <a:avLst/>
+          </a:prstGeom>
+          <a:noFill/>
+          <a:ln/>
+        </p:spPr>
+        <p:txBody>
+          <a:bodyPr wrap="square" lIns="0" tIns="0" rIns="0" bIns="0" rtlCol="0" anchor="ctr"/>
+          <a:lstStyle/>
+          <a:p>
+            <a:pPr algn="ctr" indent="0" marL="0">
+              <a:buNone/>
+            </a:pPr>
+            <a:r>
+              <a:rPr lang="en-US" sz="1100" b="1" dirty="0">
+                <a:solidFill>
+                  <a:srgbClr val="FFFFFF"/>
+                </a:solidFill>
+                <a:latin typeface="Aptos" pitchFamily="34" charset="0"/>
+                <a:ea typeface="Aptos" pitchFamily="34" charset="-122"/>
+                <a:cs typeface="Aptos" pitchFamily="34" charset="-120"/>
+              </a:rPr>
+              <a:t>3</a:t>
+            </a:r>
+            <a:endParaRPr lang="en-US" sz="1100" dirty="0"/>
+          </a:p>
+        </p:txBody>
+      </p:sp>
+      <p:sp>
+        <p:nvSpPr>
+          <p:cNvPr id="9" name="Text 7"/>
+          <p:cNvSpPr/>
+          <p:nvPr/>
+        </p:nvSpPr>
+        <p:spPr>
+          <a:xfrm>
+            <a:off x="640080" y="621792"/>
             <a:ext cx="10881360" cy="566928"/>
           </a:xfrm>
           <a:prstGeom prst="rect">
@@ -7634,7 +14028,7 @@
                 <a:ea typeface="Aptos Display" pitchFamily="34" charset="-122"/>
                 <a:cs typeface="Aptos Display" pitchFamily="34" charset="-120"/>
               </a:rPr>
-              <a:t>Topic Deep Dive</a:t>
+              <a:t>Why This Topic Matters for Public Health AI</a:t>
             </a:r>
             <a:endParaRPr lang="en-US" sz="2700" dirty="0"/>
           </a:p>
@@ -7642,32 +14036,178 @@
       </p:sp>
       <p:sp>
         <p:nvSpPr>
-          <p:cNvPr id="7" name="Text 5"/>
-          <p:cNvSpPr/>
-          <p:nvPr/>
-        </p:nvSpPr>
-        <p:spPr>
-          <a:xfrm>
-            <a:off x="822960" y="1325880"/>
-            <a:ext cx="10378440" cy="4800600"/>
-          </a:xfrm>
-          <a:prstGeom prst="rect">
-            <a:avLst/>
-          </a:prstGeom>
-          <a:noFill/>
-          <a:ln/>
-        </p:spPr>
-        <p:txBody>
-          <a:bodyPr wrap="square" lIns="1016" tIns="1016" rIns="1016" bIns="1016" rtlCol="0" anchor="t">
+          <p:cNvPr id="10" name="Text 8"/>
+          <p:cNvSpPr/>
+          <p:nvPr/>
+        </p:nvSpPr>
+        <p:spPr>
+          <a:xfrm>
+            <a:off x="868680" y="1417320"/>
+            <a:ext cx="6675120" cy="4434840"/>
+          </a:xfrm>
+          <a:prstGeom prst="rect">
+            <a:avLst/>
+          </a:prstGeom>
+          <a:noFill/>
+          <a:ln/>
+        </p:spPr>
+        <p:txBody>
+          <a:bodyPr wrap="square" lIns="635" tIns="635" rIns="635" bIns="635" rtlCol="0" anchor="t">
             <a:normAutofit/>
           </a:bodyPr>
           <a:lstStyle/>
           <a:p>
+            <a:r>
+              <a:rPr lang="en-US" sz="1700" dirty="0">
+                <a:solidFill>
+                  <a:srgbClr val="17364A"/>
+                </a:solidFill>
+                <a:latin typeface="Aptos" pitchFamily="34" charset="0"/>
+                <a:ea typeface="Aptos" pitchFamily="34" charset="-122"/>
+                <a:cs typeface="Aptos" pitchFamily="34" charset="-120"/>
+              </a:rPr>
+              <a:t>Public health is uniquely positioned to use AI for social good because its mission is population well-being rather than.</a:t>
+            </a:r>
+            <a:endParaRPr lang="en-US" sz="1700" dirty="0"/>
+          </a:p>
+          <a:p>
+            <a:r>
+              <a:rPr lang="en-US" sz="1700" dirty="0">
+                <a:solidFill>
+                  <a:srgbClr val="17364A"/>
+                </a:solidFill>
+                <a:latin typeface="Aptos" pitchFamily="34" charset="0"/>
+                <a:ea typeface="Aptos" pitchFamily="34" charset="-122"/>
+                <a:cs typeface="Aptos" pitchFamily="34" charset="-120"/>
+              </a:rPr>
+              <a:t>AI can help agencies identify emerging needs, improve access to information, reduce administrative burden, support.</a:t>
+            </a:r>
+            <a:endParaRPr lang="en-US" sz="1700" dirty="0"/>
+          </a:p>
+          <a:p>
+            <a:r>
+              <a:rPr lang="en-US" sz="1700" dirty="0">
+                <a:solidFill>
+                  <a:srgbClr val="17364A"/>
+                </a:solidFill>
+                <a:latin typeface="Aptos" pitchFamily="34" charset="0"/>
+                <a:ea typeface="Aptos" pitchFamily="34" charset="-122"/>
+                <a:cs typeface="Aptos" pitchFamily="34" charset="-120"/>
+              </a:rPr>
+              <a:t>These benefits are especially important when agencies face workforce shortages, fragmented systems, and increasing demands.</a:t>
+            </a:r>
+            <a:endParaRPr lang="en-US" sz="1700" dirty="0"/>
+          </a:p>
+          <a:p>
+            <a:r>
+              <a:rPr lang="en-US" sz="1700" dirty="0">
+                <a:solidFill>
+                  <a:srgbClr val="17364A"/>
+                </a:solidFill>
+                <a:latin typeface="Aptos" pitchFamily="34" charset="0"/>
+                <a:ea typeface="Aptos" pitchFamily="34" charset="-122"/>
+                <a:cs typeface="Aptos" pitchFamily="34" charset="-120"/>
+              </a:rPr>
+              <a:t>However, AI for Social Good is not guaranteed by good intentions.</a:t>
+            </a:r>
+            <a:endParaRPr lang="en-US" sz="1700" dirty="0"/>
+          </a:p>
+        </p:txBody>
+      </p:sp>
+      <p:sp>
+        <p:nvSpPr>
+          <p:cNvPr id="11" name="Shape 9"/>
+          <p:cNvSpPr/>
+          <p:nvPr/>
+        </p:nvSpPr>
+        <p:spPr>
+          <a:xfrm>
+            <a:off x="7909560" y="1417320"/>
+            <a:ext cx="3154680" cy="1828800"/>
+          </a:xfrm>
+          <a:prstGeom prst="roundRect">
+            <a:avLst>
+              <a:gd name="adj" fmla="val 6000"/>
+            </a:avLst>
+          </a:prstGeom>
+          <a:solidFill>
+            <a:srgbClr val="EEF8ED"/>
+          </a:solidFill>
+          <a:ln w="12700">
+            <a:solidFill>
+              <a:srgbClr val="B9D7E6"/>
+            </a:solidFill>
+            <a:prstDash val="solid"/>
+          </a:ln>
+        </p:spPr>
+      </p:sp>
+      <p:sp>
+        <p:nvSpPr>
+          <p:cNvPr id="12" name="Text 10"/>
+          <p:cNvSpPr/>
+          <p:nvPr/>
+        </p:nvSpPr>
+        <p:spPr>
+          <a:xfrm>
+            <a:off x="8074152" y="1563624"/>
+            <a:ext cx="2825496" cy="201168"/>
+          </a:xfrm>
+          <a:prstGeom prst="rect">
+            <a:avLst/>
+          </a:prstGeom>
+          <a:noFill/>
+          <a:ln/>
+        </p:spPr>
+        <p:txBody>
+          <a:bodyPr wrap="square" lIns="0" tIns="0" rIns="0" bIns="0" rtlCol="0" anchor="ctr"/>
+          <a:lstStyle/>
+          <a:p>
             <a:pPr indent="0" marL="0">
               <a:buNone/>
             </a:pPr>
             <a:r>
-              <a:rPr lang="en-US" sz="1420" dirty="0">
+              <a:rPr lang="en-US" sz="950" b="1" dirty="0">
+                <a:solidFill>
+                  <a:srgbClr val="0068B7"/>
+                </a:solidFill>
+                <a:latin typeface="Aptos" pitchFamily="34" charset="0"/>
+                <a:ea typeface="Aptos" pitchFamily="34" charset="-122"/>
+                <a:cs typeface="Aptos" pitchFamily="34" charset="-120"/>
+              </a:rPr>
+              <a:t>Key idea</a:t>
+            </a:r>
+            <a:endParaRPr lang="en-US" sz="950" dirty="0"/>
+          </a:p>
+        </p:txBody>
+      </p:sp>
+      <p:sp>
+        <p:nvSpPr>
+          <p:cNvPr id="13" name="Text 11"/>
+          <p:cNvSpPr/>
+          <p:nvPr/>
+        </p:nvSpPr>
+        <p:spPr>
+          <a:xfrm>
+            <a:off x="8074152" y="1856232"/>
+            <a:ext cx="2825496" cy="1261872"/>
+          </a:xfrm>
+          <a:prstGeom prst="rect">
+            <a:avLst/>
+          </a:prstGeom>
+          <a:noFill/>
+          <a:ln/>
+        </p:spPr>
+        <p:txBody>
+          <a:bodyPr wrap="square" lIns="0" tIns="0" rIns="0" bIns="0" rtlCol="0" anchor="t">
+            <a:normAutofit/>
+          </a:bodyPr>
+          <a:lstStyle/>
+          <a:p>
+            <a:pPr indent="0" marL="0">
+              <a:buNone/>
+            </a:pPr>
+            <a:r>
+              <a:rPr lang="en-US" sz="1250" dirty="0">
                 <a:solidFill>
                   <a:srgbClr val="17364A"/>
                 </a:solidFill>
@@ -7675,9 +14215,116 @@
                 <a:ea typeface="Aptos" pitchFamily="34" charset="-122"/>
                 <a:cs typeface="Aptos" pitchFamily="34" charset="-120"/>
               </a:rPr>
-              <a:t>AI for Social Good begins with problem definition. The problem should be a public health problem, not a technology opportunity. For example, “use a chatbot” is not a problem definition. “Reduce delays in connecting families to local nutrition, housing, transportation, and home visiting resources” is a stronger public health problem definition. Starting with the problem helps agencies avoid technology-driven solutions that do not address root needs. Equity by design requires agencies to identify who is included, who is excluded, and who bears risk. This includes reviewing data representativeness, digital access, language access, disability access, rural access, immigration-related concerns, privacy expectations, and historical mistrust. Equity review should shape the use case, data sources, interface, outreach strategy, and evaluation metrics. Community engagement should occur before deployment, not only after concerns arise. Affected communities can help identify priorities, unacceptable uses, preferred communication channels, needed safeguards, and measures of success. Engagement does not mean asking communities to approve a predetermined tool. It means allowing community input to change the design, scope, or decision to proceed.</a:t>
-            </a:r>
-            <a:endParaRPr lang="en-US" sz="1420" dirty="0"/>
+              <a:t>Public health is uniquely positioned to use AI for social good because its mission is population well-being rather than.</a:t>
+            </a:r>
+            <a:endParaRPr lang="en-US" sz="1250" dirty="0"/>
+          </a:p>
+        </p:txBody>
+      </p:sp>
+      <p:sp>
+        <p:nvSpPr>
+          <p:cNvPr id="14" name="Shape 12"/>
+          <p:cNvSpPr/>
+          <p:nvPr/>
+        </p:nvSpPr>
+        <p:spPr>
+          <a:xfrm>
+            <a:off x="7909560" y="3520440"/>
+            <a:ext cx="3154680" cy="1737360"/>
+          </a:xfrm>
+          <a:prstGeom prst="roundRect">
+            <a:avLst>
+              <a:gd name="adj" fmla="val 6316"/>
+            </a:avLst>
+          </a:prstGeom>
+          <a:solidFill>
+            <a:srgbClr val="EAF6F8"/>
+          </a:solidFill>
+          <a:ln w="12700">
+            <a:solidFill>
+              <a:srgbClr val="B9D7E6"/>
+            </a:solidFill>
+            <a:prstDash val="solid"/>
+          </a:ln>
+        </p:spPr>
+      </p:sp>
+      <p:sp>
+        <p:nvSpPr>
+          <p:cNvPr id="15" name="Text 13"/>
+          <p:cNvSpPr/>
+          <p:nvPr/>
+        </p:nvSpPr>
+        <p:spPr>
+          <a:xfrm>
+            <a:off x="8074152" y="3666744"/>
+            <a:ext cx="2825496" cy="201168"/>
+          </a:xfrm>
+          <a:prstGeom prst="rect">
+            <a:avLst/>
+          </a:prstGeom>
+          <a:noFill/>
+          <a:ln/>
+        </p:spPr>
+        <p:txBody>
+          <a:bodyPr wrap="square" lIns="0" tIns="0" rIns="0" bIns="0" rtlCol="0" anchor="ctr"/>
+          <a:lstStyle/>
+          <a:p>
+            <a:pPr indent="0" marL="0">
+              <a:buNone/>
+            </a:pPr>
+            <a:r>
+              <a:rPr lang="en-US" sz="950" b="1" dirty="0">
+                <a:solidFill>
+                  <a:srgbClr val="0068B7"/>
+                </a:solidFill>
+                <a:latin typeface="Aptos" pitchFamily="34" charset="0"/>
+                <a:ea typeface="Aptos" pitchFamily="34" charset="-122"/>
+                <a:cs typeface="Aptos" pitchFamily="34" charset="-120"/>
+              </a:rPr>
+              <a:t>Use this for</a:t>
+            </a:r>
+            <a:endParaRPr lang="en-US" sz="950" dirty="0"/>
+          </a:p>
+        </p:txBody>
+      </p:sp>
+      <p:sp>
+        <p:nvSpPr>
+          <p:cNvPr id="16" name="Text 14"/>
+          <p:cNvSpPr/>
+          <p:nvPr/>
+        </p:nvSpPr>
+        <p:spPr>
+          <a:xfrm>
+            <a:off x="8074152" y="3959352"/>
+            <a:ext cx="2825496" cy="1170432"/>
+          </a:xfrm>
+          <a:prstGeom prst="rect">
+            <a:avLst/>
+          </a:prstGeom>
+          <a:noFill/>
+          <a:ln/>
+        </p:spPr>
+        <p:txBody>
+          <a:bodyPr wrap="square" lIns="0" tIns="0" rIns="0" bIns="0" rtlCol="0" anchor="t">
+            <a:normAutofit/>
+          </a:bodyPr>
+          <a:lstStyle/>
+          <a:p>
+            <a:pPr indent="0" marL="0">
+              <a:buNone/>
+            </a:pPr>
+            <a:r>
+              <a:rPr lang="en-US" sz="1250" dirty="0">
+                <a:solidFill>
+                  <a:srgbClr val="17364A"/>
+                </a:solidFill>
+                <a:latin typeface="Aptos" pitchFamily="34" charset="0"/>
+                <a:ea typeface="Aptos" pitchFamily="34" charset="-122"/>
+                <a:cs typeface="Aptos" pitchFamily="34" charset="-120"/>
+              </a:rPr>
+              <a:t>Connect the concept to public health decisions, safeguards, documentation, or implementation work.</a:t>
+            </a:r>
+            <a:endParaRPr lang="en-US" sz="1250" dirty="0"/>
           </a:p>
         </p:txBody>
       </p:sp>
@@ -7740,7 +14387,32 @@
       </p:sp>
       <p:sp>
         <p:nvSpPr>
-          <p:cNvPr id="3" name="Text 1"/>
+          <p:cNvPr id="3" name="Shape 1"/>
+          <p:cNvSpPr/>
+          <p:nvPr/>
+        </p:nvSpPr>
+        <p:spPr>
+          <a:xfrm>
+            <a:off x="0" y="164592"/>
+            <a:ext cx="146304" cy="6693408"/>
+          </a:xfrm>
+          <a:prstGeom prst="rect">
+            <a:avLst/>
+          </a:prstGeom>
+          <a:solidFill>
+            <a:srgbClr val="2F8A28"/>
+          </a:solidFill>
+          <a:ln w="12700">
+            <a:solidFill>
+              <a:srgbClr val="2F8A28"/>
+            </a:solidFill>
+            <a:prstDash val="solid"/>
+          </a:ln>
+        </p:spPr>
+      </p:sp>
+      <p:sp>
+        <p:nvSpPr>
+          <p:cNvPr id="4" name="Text 2"/>
           <p:cNvSpPr/>
           <p:nvPr/>
         </p:nvSpPr>
@@ -7779,7 +14451,7 @@
       </p:sp>
       <p:sp>
         <p:nvSpPr>
-          <p:cNvPr id="4" name="Text 2"/>
+          <p:cNvPr id="5" name="Text 3"/>
           <p:cNvSpPr/>
           <p:nvPr/>
         </p:nvSpPr>
@@ -7818,7 +14490,7 @@
       </p:sp>
       <p:sp>
         <p:nvSpPr>
-          <p:cNvPr id="5" name="Text 3"/>
+          <p:cNvPr id="6" name="Text 4"/>
           <p:cNvSpPr/>
           <p:nvPr/>
         </p:nvSpPr>
@@ -7857,13 +14529,77 @@
       </p:sp>
       <p:sp>
         <p:nvSpPr>
-          <p:cNvPr id="6" name="Text 4"/>
+          <p:cNvPr id="7" name="Shape 5"/>
           <p:cNvSpPr/>
           <p:nvPr/>
         </p:nvSpPr>
         <p:spPr>
           <a:xfrm>
             <a:off x="640080" y="658368"/>
+            <a:ext cx="420624" cy="420624"/>
+          </a:xfrm>
+          <a:prstGeom prst="ellipse">
+            <a:avLst/>
+          </a:prstGeom>
+          <a:solidFill>
+            <a:srgbClr val="0068B7"/>
+          </a:solidFill>
+          <a:ln w="12700">
+            <a:solidFill>
+              <a:srgbClr val="0068B7"/>
+            </a:solidFill>
+            <a:prstDash val="solid"/>
+          </a:ln>
+        </p:spPr>
+      </p:sp>
+      <p:sp>
+        <p:nvSpPr>
+          <p:cNvPr id="8" name="Text 6"/>
+          <p:cNvSpPr/>
+          <p:nvPr/>
+        </p:nvSpPr>
+        <p:spPr>
+          <a:xfrm>
+            <a:off x="640080" y="731520"/>
+            <a:ext cx="420624" cy="164592"/>
+          </a:xfrm>
+          <a:prstGeom prst="rect">
+            <a:avLst/>
+          </a:prstGeom>
+          <a:noFill/>
+          <a:ln/>
+        </p:spPr>
+        <p:txBody>
+          <a:bodyPr wrap="square" lIns="0" tIns="0" rIns="0" bIns="0" rtlCol="0" anchor="ctr"/>
+          <a:lstStyle/>
+          <a:p>
+            <a:pPr algn="ctr" indent="0" marL="0">
+              <a:buNone/>
+            </a:pPr>
+            <a:r>
+              <a:rPr lang="en-US" sz="1100" b="1" dirty="0">
+                <a:solidFill>
+                  <a:srgbClr val="FFFFFF"/>
+                </a:solidFill>
+                <a:latin typeface="Aptos" pitchFamily="34" charset="0"/>
+                <a:ea typeface="Aptos" pitchFamily="34" charset="-122"/>
+                <a:cs typeface="Aptos" pitchFamily="34" charset="-120"/>
+              </a:rPr>
+              <a:t>4</a:t>
+            </a:r>
+            <a:endParaRPr lang="en-US" sz="1100" dirty="0"/>
+          </a:p>
+        </p:txBody>
+      </p:sp>
+      <p:sp>
+        <p:nvSpPr>
+          <p:cNvPr id="9" name="Text 7"/>
+          <p:cNvSpPr/>
+          <p:nvPr/>
+        </p:nvSpPr>
+        <p:spPr>
+          <a:xfrm>
+            <a:off x="640080" y="621792"/>
             <a:ext cx="10881360" cy="566928"/>
           </a:xfrm>
           <a:prstGeom prst="rect">
@@ -7890,7 +14626,7 @@
                 <a:ea typeface="Aptos Display" pitchFamily="34" charset="-122"/>
                 <a:cs typeface="Aptos Display" pitchFamily="34" charset="-120"/>
               </a:rPr>
-              <a:t>Topic Deep Dive Continued</a:t>
+              <a:t>Public Health Example</a:t>
             </a:r>
             <a:endParaRPr lang="en-US" sz="2700" dirty="0"/>
           </a:p>
@@ -7898,32 +14634,178 @@
       </p:sp>
       <p:sp>
         <p:nvSpPr>
-          <p:cNvPr id="7" name="Text 5"/>
-          <p:cNvSpPr/>
-          <p:nvPr/>
-        </p:nvSpPr>
-        <p:spPr>
-          <a:xfrm>
-            <a:off x="822960" y="1325880"/>
-            <a:ext cx="10378440" cy="4800600"/>
-          </a:xfrm>
-          <a:prstGeom prst="rect">
-            <a:avLst/>
-          </a:prstGeom>
-          <a:noFill/>
-          <a:ln/>
-        </p:spPr>
-        <p:txBody>
-          <a:bodyPr wrap="square" lIns="1016" tIns="1016" rIns="1016" bIns="1016" rtlCol="0" anchor="t">
+          <p:cNvPr id="10" name="Text 8"/>
+          <p:cNvSpPr/>
+          <p:nvPr/>
+        </p:nvSpPr>
+        <p:spPr>
+          <a:xfrm>
+            <a:off x="868680" y="1417320"/>
+            <a:ext cx="6675120" cy="4434840"/>
+          </a:xfrm>
+          <a:prstGeom prst="rect">
+            <a:avLst/>
+          </a:prstGeom>
+          <a:noFill/>
+          <a:ln/>
+        </p:spPr>
+        <p:txBody>
+          <a:bodyPr wrap="square" lIns="635" tIns="635" rIns="635" bIns="635" rtlCol="0" anchor="t">
             <a:normAutofit/>
           </a:bodyPr>
           <a:lstStyle/>
           <a:p>
+            <a:r>
+              <a:rPr lang="en-US" sz="1700" dirty="0">
+                <a:solidFill>
+                  <a:srgbClr val="17364A"/>
+                </a:solidFill>
+                <a:latin typeface="Aptos" pitchFamily="34" charset="0"/>
+                <a:ea typeface="Aptos" pitchFamily="34" charset="-122"/>
+                <a:cs typeface="Aptos" pitchFamily="34" charset="-120"/>
+              </a:rPr>
+              <a:t>A health department may use AI to improve access to maternal and child health resources.</a:t>
+            </a:r>
+            <a:endParaRPr lang="en-US" sz="1700" dirty="0"/>
+          </a:p>
+          <a:p>
+            <a:r>
+              <a:rPr lang="en-US" sz="1700" dirty="0">
+                <a:solidFill>
+                  <a:srgbClr val="17364A"/>
+                </a:solidFill>
+                <a:latin typeface="Aptos" pitchFamily="34" charset="0"/>
+                <a:ea typeface="Aptos" pitchFamily="34" charset="-122"/>
+                <a:cs typeface="Aptos" pitchFamily="34" charset="-120"/>
+              </a:rPr>
+              <a:t>A tool could help staff identify service gaps, summarize eligibility rules, translate plain-language information, and route.</a:t>
+            </a:r>
+            <a:endParaRPr lang="en-US" sz="1700" dirty="0"/>
+          </a:p>
+          <a:p>
+            <a:r>
+              <a:rPr lang="en-US" sz="1700" dirty="0">
+                <a:solidFill>
+                  <a:srgbClr val="17364A"/>
+                </a:solidFill>
+                <a:latin typeface="Aptos" pitchFamily="34" charset="0"/>
+                <a:ea typeface="Aptos" pitchFamily="34" charset="-122"/>
+                <a:cs typeface="Aptos" pitchFamily="34" charset="-120"/>
+              </a:rPr>
+              <a:t>If designed well, the tool could reduce administrative burden and improve timely access to services.</a:t>
+            </a:r>
+            <a:endParaRPr lang="en-US" sz="1700" dirty="0"/>
+          </a:p>
+          <a:p>
+            <a:r>
+              <a:rPr lang="en-US" sz="1700" dirty="0">
+                <a:solidFill>
+                  <a:srgbClr val="17364A"/>
+                </a:solidFill>
+                <a:latin typeface="Aptos" pitchFamily="34" charset="0"/>
+                <a:ea typeface="Aptos" pitchFamily="34" charset="-122"/>
+                <a:cs typeface="Aptos" pitchFamily="34" charset="-120"/>
+              </a:rPr>
+              <a:t>The same tool could fail if it assumes internet access, uses only English content, provides outdated referral information,.</a:t>
+            </a:r>
+            <a:endParaRPr lang="en-US" sz="1700" dirty="0"/>
+          </a:p>
+        </p:txBody>
+      </p:sp>
+      <p:sp>
+        <p:nvSpPr>
+          <p:cNvPr id="11" name="Shape 9"/>
+          <p:cNvSpPr/>
+          <p:nvPr/>
+        </p:nvSpPr>
+        <p:spPr>
+          <a:xfrm>
+            <a:off x="7909560" y="1417320"/>
+            <a:ext cx="3154680" cy="1828800"/>
+          </a:xfrm>
+          <a:prstGeom prst="roundRect">
+            <a:avLst>
+              <a:gd name="adj" fmla="val 6000"/>
+            </a:avLst>
+          </a:prstGeom>
+          <a:solidFill>
+            <a:srgbClr val="EEF8ED"/>
+          </a:solidFill>
+          <a:ln w="12700">
+            <a:solidFill>
+              <a:srgbClr val="B9D7E6"/>
+            </a:solidFill>
+            <a:prstDash val="solid"/>
+          </a:ln>
+        </p:spPr>
+      </p:sp>
+      <p:sp>
+        <p:nvSpPr>
+          <p:cNvPr id="12" name="Text 10"/>
+          <p:cNvSpPr/>
+          <p:nvPr/>
+        </p:nvSpPr>
+        <p:spPr>
+          <a:xfrm>
+            <a:off x="8074152" y="1563624"/>
+            <a:ext cx="2825496" cy="201168"/>
+          </a:xfrm>
+          <a:prstGeom prst="rect">
+            <a:avLst/>
+          </a:prstGeom>
+          <a:noFill/>
+          <a:ln/>
+        </p:spPr>
+        <p:txBody>
+          <a:bodyPr wrap="square" lIns="0" tIns="0" rIns="0" bIns="0" rtlCol="0" anchor="ctr"/>
+          <a:lstStyle/>
+          <a:p>
             <a:pPr indent="0" marL="0">
               <a:buNone/>
             </a:pPr>
             <a:r>
-              <a:rPr lang="en-US" sz="1420" dirty="0">
+              <a:rPr lang="en-US" sz="950" b="1" dirty="0">
+                <a:solidFill>
+                  <a:srgbClr val="0068B7"/>
+                </a:solidFill>
+                <a:latin typeface="Aptos" pitchFamily="34" charset="0"/>
+                <a:ea typeface="Aptos" pitchFamily="34" charset="-122"/>
+                <a:cs typeface="Aptos" pitchFamily="34" charset="-120"/>
+              </a:rPr>
+              <a:t>Key idea</a:t>
+            </a:r>
+            <a:endParaRPr lang="en-US" sz="950" dirty="0"/>
+          </a:p>
+        </p:txBody>
+      </p:sp>
+      <p:sp>
+        <p:nvSpPr>
+          <p:cNvPr id="13" name="Text 11"/>
+          <p:cNvSpPr/>
+          <p:nvPr/>
+        </p:nvSpPr>
+        <p:spPr>
+          <a:xfrm>
+            <a:off x="8074152" y="1856232"/>
+            <a:ext cx="2825496" cy="1261872"/>
+          </a:xfrm>
+          <a:prstGeom prst="rect">
+            <a:avLst/>
+          </a:prstGeom>
+          <a:noFill/>
+          <a:ln/>
+        </p:spPr>
+        <p:txBody>
+          <a:bodyPr wrap="square" lIns="0" tIns="0" rIns="0" bIns="0" rtlCol="0" anchor="t">
+            <a:normAutofit/>
+          </a:bodyPr>
+          <a:lstStyle/>
+          <a:p>
+            <a:pPr indent="0" marL="0">
+              <a:buNone/>
+            </a:pPr>
+            <a:r>
+              <a:rPr lang="en-US" sz="1250" dirty="0">
                 <a:solidFill>
                   <a:srgbClr val="17364A"/>
                 </a:solidFill>
@@ -7931,9 +14813,116 @@
                 <a:ea typeface="Aptos" pitchFamily="34" charset="-122"/>
                 <a:cs typeface="Aptos" pitchFamily="34" charset="-120"/>
               </a:rPr>
-              <a:t>Measuring social good requires more than counting users or outputs. Agencies should measure whether the AI-supported workflow improves timeliness, access, quality, fairness, staff burden, community trust, and public health outcomes. They should also monitor unintended consequences, such as reduced service quality, increased complaints, inequitable uptake, or inaccurate referrals. Responsible innovation includes sunset and rollback planning. If an AI tool does not produce expected benefit, creates harm, or becomes outdated, the agency should be prepared to modify, pause, or retire it. Social good depends on ongoing accountability, not one-time approval.</a:t>
-            </a:r>
-            <a:endParaRPr lang="en-US" sz="1420" dirty="0"/>
+              <a:t>A health department may use AI to improve access to maternal and child health resources.</a:t>
+            </a:r>
+            <a:endParaRPr lang="en-US" sz="1250" dirty="0"/>
+          </a:p>
+        </p:txBody>
+      </p:sp>
+      <p:sp>
+        <p:nvSpPr>
+          <p:cNvPr id="14" name="Shape 12"/>
+          <p:cNvSpPr/>
+          <p:nvPr/>
+        </p:nvSpPr>
+        <p:spPr>
+          <a:xfrm>
+            <a:off x="7909560" y="3520440"/>
+            <a:ext cx="3154680" cy="1737360"/>
+          </a:xfrm>
+          <a:prstGeom prst="roundRect">
+            <a:avLst>
+              <a:gd name="adj" fmla="val 6316"/>
+            </a:avLst>
+          </a:prstGeom>
+          <a:solidFill>
+            <a:srgbClr val="EAF6F8"/>
+          </a:solidFill>
+          <a:ln w="12700">
+            <a:solidFill>
+              <a:srgbClr val="B9D7E6"/>
+            </a:solidFill>
+            <a:prstDash val="solid"/>
+          </a:ln>
+        </p:spPr>
+      </p:sp>
+      <p:sp>
+        <p:nvSpPr>
+          <p:cNvPr id="15" name="Text 13"/>
+          <p:cNvSpPr/>
+          <p:nvPr/>
+        </p:nvSpPr>
+        <p:spPr>
+          <a:xfrm>
+            <a:off x="8074152" y="3666744"/>
+            <a:ext cx="2825496" cy="201168"/>
+          </a:xfrm>
+          <a:prstGeom prst="rect">
+            <a:avLst/>
+          </a:prstGeom>
+          <a:noFill/>
+          <a:ln/>
+        </p:spPr>
+        <p:txBody>
+          <a:bodyPr wrap="square" lIns="0" tIns="0" rIns="0" bIns="0" rtlCol="0" anchor="ctr"/>
+          <a:lstStyle/>
+          <a:p>
+            <a:pPr indent="0" marL="0">
+              <a:buNone/>
+            </a:pPr>
+            <a:r>
+              <a:rPr lang="en-US" sz="950" b="1" dirty="0">
+                <a:solidFill>
+                  <a:srgbClr val="0068B7"/>
+                </a:solidFill>
+                <a:latin typeface="Aptos" pitchFamily="34" charset="0"/>
+                <a:ea typeface="Aptos" pitchFamily="34" charset="-122"/>
+                <a:cs typeface="Aptos" pitchFamily="34" charset="-120"/>
+              </a:rPr>
+              <a:t>Use this for</a:t>
+            </a:r>
+            <a:endParaRPr lang="en-US" sz="950" dirty="0"/>
+          </a:p>
+        </p:txBody>
+      </p:sp>
+      <p:sp>
+        <p:nvSpPr>
+          <p:cNvPr id="16" name="Text 14"/>
+          <p:cNvSpPr/>
+          <p:nvPr/>
+        </p:nvSpPr>
+        <p:spPr>
+          <a:xfrm>
+            <a:off x="8074152" y="3959352"/>
+            <a:ext cx="2825496" cy="1170432"/>
+          </a:xfrm>
+          <a:prstGeom prst="rect">
+            <a:avLst/>
+          </a:prstGeom>
+          <a:noFill/>
+          <a:ln/>
+        </p:spPr>
+        <p:txBody>
+          <a:bodyPr wrap="square" lIns="0" tIns="0" rIns="0" bIns="0" rtlCol="0" anchor="t">
+            <a:normAutofit/>
+          </a:bodyPr>
+          <a:lstStyle/>
+          <a:p>
+            <a:pPr indent="0" marL="0">
+              <a:buNone/>
+            </a:pPr>
+            <a:r>
+              <a:rPr lang="en-US" sz="1250" dirty="0">
+                <a:solidFill>
+                  <a:srgbClr val="17364A"/>
+                </a:solidFill>
+                <a:latin typeface="Aptos" pitchFamily="34" charset="0"/>
+                <a:ea typeface="Aptos" pitchFamily="34" charset="-122"/>
+                <a:cs typeface="Aptos" pitchFamily="34" charset="-120"/>
+              </a:rPr>
+              <a:t>Connect the concept to public health decisions, safeguards, documentation, or implementation work.</a:t>
+            </a:r>
+            <a:endParaRPr lang="en-US" sz="1250" dirty="0"/>
           </a:p>
         </p:txBody>
       </p:sp>

--- a/downloads/presentations/modules/lesson-51-ai-for-social-good.pptx
+++ b/downloads/presentations/modules/lesson-51-ai-for-social-good.pptx
@@ -3000,6 +3000,45 @@
           </a:p>
         </p:txBody>
       </p:sp>
+      <p:sp>
+        <p:nvSpPr>
+          <p:cNvPr id="8" name="Text 5"/>
+          <p:cNvSpPr/>
+          <p:nvPr/>
+        </p:nvSpPr>
+        <p:spPr>
+          <a:xfrm>
+            <a:off x="11137392" y="6510528"/>
+            <a:ext cx="411480" cy="201168"/>
+          </a:xfrm>
+          <a:prstGeom prst="rect">
+            <a:avLst/>
+          </a:prstGeom>
+          <a:noFill/>
+          <a:ln/>
+        </p:spPr>
+        <p:txBody>
+          <a:bodyPr wrap="square" lIns="0" tIns="0" rIns="0" bIns="0" rtlCol="0" anchor="ctr"/>
+          <a:lstStyle/>
+          <a:p>
+            <a:pPr algn="r" indent="0" marL="0">
+              <a:buNone/>
+            </a:pPr>
+            <a:r>
+              <a:rPr lang="en-US" sz="900" dirty="0">
+                <a:solidFill>
+                  <a:srgbClr val="5F7181"/>
+                </a:solidFill>
+                <a:latin typeface="Aptos" pitchFamily="34" charset="0"/>
+                <a:ea typeface="Aptos" pitchFamily="34" charset="-122"/>
+                <a:cs typeface="Aptos" pitchFamily="34" charset="-120"/>
+              </a:rPr>
+              <a:t>1</a:t>
+            </a:r>
+            <a:endParaRPr lang="en-US" sz="900" dirty="0"/>
+          </a:p>
+        </p:txBody>
+      </p:sp>
     </p:spTree>
   </p:cSld>
   <p:clrMapOvr>
@@ -3193,7 +3232,7 @@
                 <a:ea typeface="Aptos" pitchFamily="34" charset="-122"/>
                 <a:cs typeface="Aptos" pitchFamily="34" charset="-120"/>
               </a:rPr>
-              <a:t>© Paula Soper</a:t>
+              <a:t>Â© Paula Soper</a:t>
             </a:r>
             <a:endParaRPr lang="en-US" sz="800" dirty="0"/>
           </a:p>
@@ -3201,7 +3240,46 @@
       </p:sp>
       <p:sp>
         <p:nvSpPr>
-          <p:cNvPr id="7" name="Shape 5"/>
+          <p:cNvPr id="7" name="Text 5"/>
+          <p:cNvSpPr/>
+          <p:nvPr/>
+        </p:nvSpPr>
+        <p:spPr>
+          <a:xfrm>
+            <a:off x="11137392" y="6510528"/>
+            <a:ext cx="411480" cy="201168"/>
+          </a:xfrm>
+          <a:prstGeom prst="rect">
+            <a:avLst/>
+          </a:prstGeom>
+          <a:noFill/>
+          <a:ln/>
+        </p:spPr>
+        <p:txBody>
+          <a:bodyPr wrap="square" lIns="0" tIns="0" rIns="0" bIns="0" rtlCol="0" anchor="ctr"/>
+          <a:lstStyle/>
+          <a:p>
+            <a:pPr algn="r" indent="0" marL="0">
+              <a:buNone/>
+            </a:pPr>
+            <a:r>
+              <a:rPr lang="en-US" sz="900" dirty="0">
+                <a:solidFill>
+                  <a:srgbClr val="5F7181"/>
+                </a:solidFill>
+                <a:latin typeface="Aptos" pitchFamily="34" charset="0"/>
+                <a:ea typeface="Aptos" pitchFamily="34" charset="-122"/>
+                <a:cs typeface="Aptos" pitchFamily="34" charset="-120"/>
+              </a:rPr>
+              <a:t>10</a:t>
+            </a:r>
+            <a:endParaRPr lang="en-US" sz="900" dirty="0"/>
+          </a:p>
+        </p:txBody>
+      </p:sp>
+      <p:sp>
+        <p:nvSpPr>
+          <p:cNvPr id="8" name="Shape 6"/>
           <p:cNvSpPr/>
           <p:nvPr/>
         </p:nvSpPr>
@@ -3226,7 +3304,7 @@
       </p:sp>
       <p:sp>
         <p:nvSpPr>
-          <p:cNvPr id="8" name="Text 6"/>
+          <p:cNvPr id="9" name="Text 7"/>
           <p:cNvSpPr/>
           <p:nvPr/>
         </p:nvSpPr>
@@ -3265,14 +3343,14 @@
       </p:sp>
       <p:sp>
         <p:nvSpPr>
-          <p:cNvPr id="9" name="Text 7"/>
+          <p:cNvPr id="10" name="Text 8"/>
           <p:cNvSpPr/>
           <p:nvPr/>
         </p:nvSpPr>
         <p:spPr>
           <a:xfrm>
             <a:off x="640080" y="621792"/>
-            <a:ext cx="10881360" cy="566928"/>
+            <a:ext cx="10881360" cy="713232"/>
           </a:xfrm>
           <a:prstGeom prst="rect">
             <a:avLst/>
@@ -3290,7 +3368,7 @@
               <a:buNone/>
             </a:pPr>
             <a:r>
-              <a:rPr lang="en-US" sz="2700" b="1" dirty="0">
+              <a:rPr lang="en-US" sz="3400" b="1" dirty="0">
                 <a:solidFill>
                   <a:srgbClr val="003A63"/>
                 </a:solidFill>
@@ -3300,20 +3378,20 @@
               </a:rPr>
               <a:t>Topic Deep Dive</a:t>
             </a:r>
-            <a:endParaRPr lang="en-US" sz="2700" dirty="0"/>
-          </a:p>
-        </p:txBody>
-      </p:sp>
-      <p:sp>
-        <p:nvSpPr>
-          <p:cNvPr id="10" name="Text 8"/>
-          <p:cNvSpPr/>
-          <p:nvPr/>
-        </p:nvSpPr>
-        <p:spPr>
-          <a:xfrm>
-            <a:off x="868680" y="1417320"/>
-            <a:ext cx="6675120" cy="4434840"/>
+            <a:endParaRPr lang="en-US" sz="3400" dirty="0"/>
+          </a:p>
+        </p:txBody>
+      </p:sp>
+      <p:sp>
+        <p:nvSpPr>
+          <p:cNvPr id="11" name="Text 9"/>
+          <p:cNvSpPr/>
+          <p:nvPr/>
+        </p:nvSpPr>
+        <p:spPr>
+          <a:xfrm>
+            <a:off x="868680" y="1508760"/>
+            <a:ext cx="6537960" cy="4160520"/>
           </a:xfrm>
           <a:prstGeom prst="rect">
             <a:avLst/>
@@ -3328,7 +3406,7 @@
           <a:lstStyle/>
           <a:p>
             <a:r>
-              <a:rPr lang="en-US" sz="1700" dirty="0">
+              <a:rPr lang="en-US" sz="2100" dirty="0">
                 <a:solidFill>
                   <a:srgbClr val="17364A"/>
                 </a:solidFill>
@@ -3338,11 +3416,11 @@
               </a:rPr>
               <a:t>AI for Social Good begins with problem definition.</a:t>
             </a:r>
-            <a:endParaRPr lang="en-US" sz="1700" dirty="0"/>
-          </a:p>
-          <a:p>
-            <a:r>
-              <a:rPr lang="en-US" sz="1700" dirty="0">
+            <a:endParaRPr lang="en-US" sz="2100" dirty="0"/>
+          </a:p>
+          <a:p>
+            <a:r>
+              <a:rPr lang="en-US" sz="2100" dirty="0">
                 <a:solidFill>
                   <a:srgbClr val="17364A"/>
                 </a:solidFill>
@@ -3352,11 +3430,11 @@
               </a:rPr>
               <a:t>The problem should be a public health problem, not a technology opportunity.</a:t>
             </a:r>
-            <a:endParaRPr lang="en-US" sz="1700" dirty="0"/>
-          </a:p>
-          <a:p>
-            <a:r>
-              <a:rPr lang="en-US" sz="1700" dirty="0">
+            <a:endParaRPr lang="en-US" sz="2100" dirty="0"/>
+          </a:p>
+          <a:p>
+            <a:r>
+              <a:rPr lang="en-US" sz="2100" dirty="0">
                 <a:solidFill>
                   <a:srgbClr val="17364A"/>
                 </a:solidFill>
@@ -3364,29 +3442,15 @@
                 <a:ea typeface="Aptos" pitchFamily="34" charset="-122"/>
                 <a:cs typeface="Aptos" pitchFamily="34" charset="-120"/>
               </a:rPr>
-              <a:t>For example, “use a chatbot” is not a problem definition. “Reduce delays in connecting families to local nutrition,.</a:t>
-            </a:r>
-            <a:endParaRPr lang="en-US" sz="1700" dirty="0"/>
-          </a:p>
-          <a:p>
-            <a:r>
-              <a:rPr lang="en-US" sz="1700" dirty="0">
-                <a:solidFill>
-                  <a:srgbClr val="17364A"/>
-                </a:solidFill>
-                <a:latin typeface="Aptos" pitchFamily="34" charset="0"/>
-                <a:ea typeface="Aptos" pitchFamily="34" charset="-122"/>
-                <a:cs typeface="Aptos" pitchFamily="34" charset="-120"/>
-              </a:rPr>
-              <a:t>Starting with the problem helps agencies avoid technology-driven solutions that do not address root needs.</a:t>
-            </a:r>
-            <a:endParaRPr lang="en-US" sz="1700" dirty="0"/>
-          </a:p>
-        </p:txBody>
-      </p:sp>
-      <p:sp>
-        <p:nvSpPr>
-          <p:cNvPr id="11" name="Shape 9"/>
+              <a:t>For example, “use a chatbot” is not a problem definition. “Reduce delays in connecting families to.</a:t>
+            </a:r>
+            <a:endParaRPr lang="en-US" sz="2100" dirty="0"/>
+          </a:p>
+        </p:txBody>
+      </p:sp>
+      <p:sp>
+        <p:nvSpPr>
+          <p:cNvPr id="12" name="Shape 10"/>
           <p:cNvSpPr/>
           <p:nvPr/>
         </p:nvSpPr>
@@ -3413,14 +3477,14 @@
       </p:sp>
       <p:sp>
         <p:nvSpPr>
-          <p:cNvPr id="12" name="Text 10"/>
+          <p:cNvPr id="13" name="Text 11"/>
           <p:cNvSpPr/>
           <p:nvPr/>
         </p:nvSpPr>
         <p:spPr>
           <a:xfrm>
             <a:off x="8074152" y="1563624"/>
-            <a:ext cx="2825496" cy="201168"/>
+            <a:ext cx="2825496" cy="256032"/>
           </a:xfrm>
           <a:prstGeom prst="rect">
             <a:avLst/>
@@ -3436,7 +3500,7 @@
               <a:buNone/>
             </a:pPr>
             <a:r>
-              <a:rPr lang="en-US" sz="950" b="1" dirty="0">
+              <a:rPr lang="en-US" sz="1300" b="1" dirty="0">
                 <a:solidFill>
                   <a:srgbClr val="0068B7"/>
                 </a:solidFill>
@@ -3446,20 +3510,20 @@
               </a:rPr>
               <a:t>Key idea</a:t>
             </a:r>
-            <a:endParaRPr lang="en-US" sz="950" dirty="0"/>
-          </a:p>
-        </p:txBody>
-      </p:sp>
-      <p:sp>
-        <p:nvSpPr>
-          <p:cNvPr id="13" name="Text 11"/>
-          <p:cNvSpPr/>
-          <p:nvPr/>
-        </p:nvSpPr>
-        <p:spPr>
-          <a:xfrm>
-            <a:off x="8074152" y="1856232"/>
-            <a:ext cx="2825496" cy="1261872"/>
+            <a:endParaRPr lang="en-US" sz="1300" dirty="0"/>
+          </a:p>
+        </p:txBody>
+      </p:sp>
+      <p:sp>
+        <p:nvSpPr>
+          <p:cNvPr id="14" name="Text 12"/>
+          <p:cNvSpPr/>
+          <p:nvPr/>
+        </p:nvSpPr>
+        <p:spPr>
+          <a:xfrm>
+            <a:off x="8074152" y="1920240"/>
+            <a:ext cx="2825496" cy="1188720"/>
           </a:xfrm>
           <a:prstGeom prst="rect">
             <a:avLst/>
@@ -3477,7 +3541,7 @@
               <a:buNone/>
             </a:pPr>
             <a:r>
-              <a:rPr lang="en-US" sz="1250" dirty="0">
+              <a:rPr lang="en-US" sz="1550" dirty="0">
                 <a:solidFill>
                   <a:srgbClr val="17364A"/>
                 </a:solidFill>
@@ -3487,13 +3551,13 @@
               </a:rPr>
               <a:t>AI for Social Good begins with problem definition.</a:t>
             </a:r>
-            <a:endParaRPr lang="en-US" sz="1250" dirty="0"/>
-          </a:p>
-        </p:txBody>
-      </p:sp>
-      <p:sp>
-        <p:nvSpPr>
-          <p:cNvPr id="14" name="Shape 12"/>
+            <a:endParaRPr lang="en-US" sz="1550" dirty="0"/>
+          </a:p>
+        </p:txBody>
+      </p:sp>
+      <p:sp>
+        <p:nvSpPr>
+          <p:cNvPr id="15" name="Shape 13"/>
           <p:cNvSpPr/>
           <p:nvPr/>
         </p:nvSpPr>
@@ -3520,14 +3584,14 @@
       </p:sp>
       <p:sp>
         <p:nvSpPr>
-          <p:cNvPr id="15" name="Text 13"/>
+          <p:cNvPr id="16" name="Text 14"/>
           <p:cNvSpPr/>
           <p:nvPr/>
         </p:nvSpPr>
         <p:spPr>
           <a:xfrm>
             <a:off x="8074152" y="3666744"/>
-            <a:ext cx="2825496" cy="201168"/>
+            <a:ext cx="2825496" cy="256032"/>
           </a:xfrm>
           <a:prstGeom prst="rect">
             <a:avLst/>
@@ -3543,7 +3607,7 @@
               <a:buNone/>
             </a:pPr>
             <a:r>
-              <a:rPr lang="en-US" sz="950" b="1" dirty="0">
+              <a:rPr lang="en-US" sz="1300" b="1" dirty="0">
                 <a:solidFill>
                   <a:srgbClr val="0068B7"/>
                 </a:solidFill>
@@ -3553,20 +3617,20 @@
               </a:rPr>
               <a:t>Use this for</a:t>
             </a:r>
-            <a:endParaRPr lang="en-US" sz="950" dirty="0"/>
-          </a:p>
-        </p:txBody>
-      </p:sp>
-      <p:sp>
-        <p:nvSpPr>
-          <p:cNvPr id="16" name="Text 14"/>
-          <p:cNvSpPr/>
-          <p:nvPr/>
-        </p:nvSpPr>
-        <p:spPr>
-          <a:xfrm>
-            <a:off x="8074152" y="3959352"/>
-            <a:ext cx="2825496" cy="1170432"/>
+            <a:endParaRPr lang="en-US" sz="1300" dirty="0"/>
+          </a:p>
+        </p:txBody>
+      </p:sp>
+      <p:sp>
+        <p:nvSpPr>
+          <p:cNvPr id="17" name="Text 15"/>
+          <p:cNvSpPr/>
+          <p:nvPr/>
+        </p:nvSpPr>
+        <p:spPr>
+          <a:xfrm>
+            <a:off x="8074152" y="4023360"/>
+            <a:ext cx="2825496" cy="1097280"/>
           </a:xfrm>
           <a:prstGeom prst="rect">
             <a:avLst/>
@@ -3584,7 +3648,7 @@
               <a:buNone/>
             </a:pPr>
             <a:r>
-              <a:rPr lang="en-US" sz="1250" dirty="0">
+              <a:rPr lang="en-US" sz="1550" dirty="0">
                 <a:solidFill>
                   <a:srgbClr val="17364A"/>
                 </a:solidFill>
@@ -3594,7 +3658,7 @@
               </a:rPr>
               <a:t>Connect the concept to public health decisions, safeguards, documentation, or implementation work.</a:t>
             </a:r>
-            <a:endParaRPr lang="en-US" sz="1250" dirty="0"/>
+            <a:endParaRPr lang="en-US" sz="1550" dirty="0"/>
           </a:p>
         </p:txBody>
       </p:sp>
@@ -3791,7 +3855,7 @@
                 <a:ea typeface="Aptos" pitchFamily="34" charset="-122"/>
                 <a:cs typeface="Aptos" pitchFamily="34" charset="-120"/>
               </a:rPr>
-              <a:t>© Paula Soper</a:t>
+              <a:t>Â© Paula Soper</a:t>
             </a:r>
             <a:endParaRPr lang="en-US" sz="800" dirty="0"/>
           </a:p>
@@ -3805,8 +3869,47 @@
         </p:nvSpPr>
         <p:spPr>
           <a:xfrm>
+            <a:off x="11137392" y="6510528"/>
+            <a:ext cx="411480" cy="201168"/>
+          </a:xfrm>
+          <a:prstGeom prst="rect">
+            <a:avLst/>
+          </a:prstGeom>
+          <a:noFill/>
+          <a:ln/>
+        </p:spPr>
+        <p:txBody>
+          <a:bodyPr wrap="square" lIns="0" tIns="0" rIns="0" bIns="0" rtlCol="0" anchor="ctr"/>
+          <a:lstStyle/>
+          <a:p>
+            <a:pPr algn="r" indent="0" marL="0">
+              <a:buNone/>
+            </a:pPr>
+            <a:r>
+              <a:rPr lang="en-US" sz="900" dirty="0">
+                <a:solidFill>
+                  <a:srgbClr val="5F7181"/>
+                </a:solidFill>
+                <a:latin typeface="Aptos" pitchFamily="34" charset="0"/>
+                <a:ea typeface="Aptos" pitchFamily="34" charset="-122"/>
+                <a:cs typeface="Aptos" pitchFamily="34" charset="-120"/>
+              </a:rPr>
+              <a:t>11</a:t>
+            </a:r>
+            <a:endParaRPr lang="en-US" sz="900" dirty="0"/>
+          </a:p>
+        </p:txBody>
+      </p:sp>
+      <p:sp>
+        <p:nvSpPr>
+          <p:cNvPr id="8" name="Text 6"/>
+          <p:cNvSpPr/>
+          <p:nvPr/>
+        </p:nvSpPr>
+        <p:spPr>
+          <a:xfrm>
             <a:off x="640080" y="658368"/>
-            <a:ext cx="10881360" cy="566928"/>
+            <a:ext cx="10881360" cy="713232"/>
           </a:xfrm>
           <a:prstGeom prst="rect">
             <a:avLst/>
@@ -3824,7 +3927,7 @@
               <a:buNone/>
             </a:pPr>
             <a:r>
-              <a:rPr lang="en-US" sz="2700" b="1" dirty="0">
+              <a:rPr lang="en-US" sz="3400" b="1" dirty="0">
                 <a:solidFill>
                   <a:srgbClr val="003A63"/>
                 </a:solidFill>
@@ -3834,20 +3937,20 @@
               </a:rPr>
               <a:t>Topic Deep Dive Continued</a:t>
             </a:r>
-            <a:endParaRPr lang="en-US" sz="2700" dirty="0"/>
-          </a:p>
-        </p:txBody>
-      </p:sp>
-      <p:sp>
-        <p:nvSpPr>
-          <p:cNvPr id="8" name="Text 6"/>
-          <p:cNvSpPr/>
-          <p:nvPr/>
-        </p:nvSpPr>
-        <p:spPr>
-          <a:xfrm>
-            <a:off x="868680" y="1417320"/>
-            <a:ext cx="6675120" cy="4434840"/>
+            <a:endParaRPr lang="en-US" sz="3400" dirty="0"/>
+          </a:p>
+        </p:txBody>
+      </p:sp>
+      <p:sp>
+        <p:nvSpPr>
+          <p:cNvPr id="9" name="Text 7"/>
+          <p:cNvSpPr/>
+          <p:nvPr/>
+        </p:nvSpPr>
+        <p:spPr>
+          <a:xfrm>
+            <a:off x="868680" y="1508760"/>
+            <a:ext cx="6537960" cy="4160520"/>
           </a:xfrm>
           <a:prstGeom prst="rect">
             <a:avLst/>
@@ -3862,7 +3965,7 @@
           <a:lstStyle/>
           <a:p>
             <a:r>
-              <a:rPr lang="en-US" sz="1700" dirty="0">
+              <a:rPr lang="en-US" sz="2100" dirty="0">
                 <a:solidFill>
                   <a:srgbClr val="17364A"/>
                 </a:solidFill>
@@ -3872,11 +3975,11 @@
               </a:rPr>
               <a:t>Measuring social good requires more than counting users or outputs.</a:t>
             </a:r>
-            <a:endParaRPr lang="en-US" sz="1700" dirty="0"/>
-          </a:p>
-          <a:p>
-            <a:r>
-              <a:rPr lang="en-US" sz="1700" dirty="0">
+            <a:endParaRPr lang="en-US" sz="2100" dirty="0"/>
+          </a:p>
+          <a:p>
+            <a:r>
+              <a:rPr lang="en-US" sz="2100" dirty="0">
                 <a:solidFill>
                   <a:srgbClr val="17364A"/>
                 </a:solidFill>
@@ -3884,13 +3987,13 @@
                 <a:ea typeface="Aptos" pitchFamily="34" charset="-122"/>
                 <a:cs typeface="Aptos" pitchFamily="34" charset="-120"/>
               </a:rPr>
-              <a:t>Agencies should measure whether the AI-supported workflow improves timeliness, access, quality, fairness, staff burden,.</a:t>
-            </a:r>
-            <a:endParaRPr lang="en-US" sz="1700" dirty="0"/>
-          </a:p>
-          <a:p>
-            <a:r>
-              <a:rPr lang="en-US" sz="1700" dirty="0">
+              <a:t>Agencies should measure whether the AI-supported workflow improves timeliness, access, quality,.</a:t>
+            </a:r>
+            <a:endParaRPr lang="en-US" sz="2100" dirty="0"/>
+          </a:p>
+          <a:p>
+            <a:r>
+              <a:rPr lang="en-US" sz="2100" dirty="0">
                 <a:solidFill>
                   <a:srgbClr val="17364A"/>
                 </a:solidFill>
@@ -3898,29 +4001,15 @@
                 <a:ea typeface="Aptos" pitchFamily="34" charset="-122"/>
                 <a:cs typeface="Aptos" pitchFamily="34" charset="-120"/>
               </a:rPr>
-              <a:t>They should also monitor unintended consequences, such as reduced service quality, increased complaints, inequitable.</a:t>
-            </a:r>
-            <a:endParaRPr lang="en-US" sz="1700" dirty="0"/>
-          </a:p>
-          <a:p>
-            <a:r>
-              <a:rPr lang="en-US" sz="1700" dirty="0">
-                <a:solidFill>
-                  <a:srgbClr val="17364A"/>
-                </a:solidFill>
-                <a:latin typeface="Aptos" pitchFamily="34" charset="0"/>
-                <a:ea typeface="Aptos" pitchFamily="34" charset="-122"/>
-                <a:cs typeface="Aptos" pitchFamily="34" charset="-120"/>
-              </a:rPr>
-              <a:t>Responsible innovation includes sunset and rollback planning.</a:t>
-            </a:r>
-            <a:endParaRPr lang="en-US" sz="1700" dirty="0"/>
-          </a:p>
-        </p:txBody>
-      </p:sp>
-      <p:sp>
-        <p:nvSpPr>
-          <p:cNvPr id="9" name="Shape 7"/>
+              <a:t>They should also monitor unintended consequences, such as reduced service quality, increased.</a:t>
+            </a:r>
+            <a:endParaRPr lang="en-US" sz="2100" dirty="0"/>
+          </a:p>
+        </p:txBody>
+      </p:sp>
+      <p:sp>
+        <p:nvSpPr>
+          <p:cNvPr id="10" name="Shape 8"/>
           <p:cNvSpPr/>
           <p:nvPr/>
         </p:nvSpPr>
@@ -3947,14 +4036,14 @@
       </p:sp>
       <p:sp>
         <p:nvSpPr>
-          <p:cNvPr id="10" name="Text 8"/>
+          <p:cNvPr id="11" name="Text 9"/>
           <p:cNvSpPr/>
           <p:nvPr/>
         </p:nvSpPr>
         <p:spPr>
           <a:xfrm>
             <a:off x="8074152" y="1563624"/>
-            <a:ext cx="2825496" cy="201168"/>
+            <a:ext cx="2825496" cy="256032"/>
           </a:xfrm>
           <a:prstGeom prst="rect">
             <a:avLst/>
@@ -3970,7 +4059,7 @@
               <a:buNone/>
             </a:pPr>
             <a:r>
-              <a:rPr lang="en-US" sz="950" b="1" dirty="0">
+              <a:rPr lang="en-US" sz="1300" b="1" dirty="0">
                 <a:solidFill>
                   <a:srgbClr val="0068B7"/>
                 </a:solidFill>
@@ -3980,20 +4069,20 @@
               </a:rPr>
               <a:t>Key idea</a:t>
             </a:r>
-            <a:endParaRPr lang="en-US" sz="950" dirty="0"/>
-          </a:p>
-        </p:txBody>
-      </p:sp>
-      <p:sp>
-        <p:nvSpPr>
-          <p:cNvPr id="11" name="Text 9"/>
-          <p:cNvSpPr/>
-          <p:nvPr/>
-        </p:nvSpPr>
-        <p:spPr>
-          <a:xfrm>
-            <a:off x="8074152" y="1856232"/>
-            <a:ext cx="2825496" cy="1261872"/>
+            <a:endParaRPr lang="en-US" sz="1300" dirty="0"/>
+          </a:p>
+        </p:txBody>
+      </p:sp>
+      <p:sp>
+        <p:nvSpPr>
+          <p:cNvPr id="12" name="Text 10"/>
+          <p:cNvSpPr/>
+          <p:nvPr/>
+        </p:nvSpPr>
+        <p:spPr>
+          <a:xfrm>
+            <a:off x="8074152" y="1920240"/>
+            <a:ext cx="2825496" cy="1188720"/>
           </a:xfrm>
           <a:prstGeom prst="rect">
             <a:avLst/>
@@ -4011,7 +4100,7 @@
               <a:buNone/>
             </a:pPr>
             <a:r>
-              <a:rPr lang="en-US" sz="1250" dirty="0">
+              <a:rPr lang="en-US" sz="1550" dirty="0">
                 <a:solidFill>
                   <a:srgbClr val="17364A"/>
                 </a:solidFill>
@@ -4021,13 +4110,13 @@
               </a:rPr>
               <a:t>Measuring social good requires more than counting users or outputs.</a:t>
             </a:r>
-            <a:endParaRPr lang="en-US" sz="1250" dirty="0"/>
-          </a:p>
-        </p:txBody>
-      </p:sp>
-      <p:sp>
-        <p:nvSpPr>
-          <p:cNvPr id="12" name="Shape 10"/>
+            <a:endParaRPr lang="en-US" sz="1550" dirty="0"/>
+          </a:p>
+        </p:txBody>
+      </p:sp>
+      <p:sp>
+        <p:nvSpPr>
+          <p:cNvPr id="13" name="Shape 11"/>
           <p:cNvSpPr/>
           <p:nvPr/>
         </p:nvSpPr>
@@ -4054,14 +4143,14 @@
       </p:sp>
       <p:sp>
         <p:nvSpPr>
-          <p:cNvPr id="13" name="Text 11"/>
+          <p:cNvPr id="14" name="Text 12"/>
           <p:cNvSpPr/>
           <p:nvPr/>
         </p:nvSpPr>
         <p:spPr>
           <a:xfrm>
             <a:off x="8074152" y="3666744"/>
-            <a:ext cx="2825496" cy="201168"/>
+            <a:ext cx="2825496" cy="256032"/>
           </a:xfrm>
           <a:prstGeom prst="rect">
             <a:avLst/>
@@ -4077,7 +4166,7 @@
               <a:buNone/>
             </a:pPr>
             <a:r>
-              <a:rPr lang="en-US" sz="950" b="1" dirty="0">
+              <a:rPr lang="en-US" sz="1300" b="1" dirty="0">
                 <a:solidFill>
                   <a:srgbClr val="0068B7"/>
                 </a:solidFill>
@@ -4087,20 +4176,20 @@
               </a:rPr>
               <a:t>Use this for</a:t>
             </a:r>
-            <a:endParaRPr lang="en-US" sz="950" dirty="0"/>
-          </a:p>
-        </p:txBody>
-      </p:sp>
-      <p:sp>
-        <p:nvSpPr>
-          <p:cNvPr id="14" name="Text 12"/>
-          <p:cNvSpPr/>
-          <p:nvPr/>
-        </p:nvSpPr>
-        <p:spPr>
-          <a:xfrm>
-            <a:off x="8074152" y="3959352"/>
-            <a:ext cx="2825496" cy="1170432"/>
+            <a:endParaRPr lang="en-US" sz="1300" dirty="0"/>
+          </a:p>
+        </p:txBody>
+      </p:sp>
+      <p:sp>
+        <p:nvSpPr>
+          <p:cNvPr id="15" name="Text 13"/>
+          <p:cNvSpPr/>
+          <p:nvPr/>
+        </p:nvSpPr>
+        <p:spPr>
+          <a:xfrm>
+            <a:off x="8074152" y="4023360"/>
+            <a:ext cx="2825496" cy="1097280"/>
           </a:xfrm>
           <a:prstGeom prst="rect">
             <a:avLst/>
@@ -4118,7 +4207,7 @@
               <a:buNone/>
             </a:pPr>
             <a:r>
-              <a:rPr lang="en-US" sz="1250" dirty="0">
+              <a:rPr lang="en-US" sz="1550" dirty="0">
                 <a:solidFill>
                   <a:srgbClr val="17364A"/>
                 </a:solidFill>
@@ -4128,7 +4217,7 @@
               </a:rPr>
               <a:t>Connect the concept to public health decisions, safeguards, documentation, or implementation work.</a:t>
             </a:r>
-            <a:endParaRPr lang="en-US" sz="1250" dirty="0"/>
+            <a:endParaRPr lang="en-US" sz="1550" dirty="0"/>
           </a:p>
         </p:txBody>
       </p:sp>
@@ -4325,7 +4414,7 @@
                 <a:ea typeface="Aptos" pitchFamily="34" charset="-122"/>
                 <a:cs typeface="Aptos" pitchFamily="34" charset="-120"/>
               </a:rPr>
-              <a:t>© Paula Soper</a:t>
+              <a:t>Â© Paula Soper</a:t>
             </a:r>
             <a:endParaRPr lang="en-US" sz="800" dirty="0"/>
           </a:p>
@@ -4333,7 +4422,46 @@
       </p:sp>
       <p:sp>
         <p:nvSpPr>
-          <p:cNvPr id="7" name="Shape 5"/>
+          <p:cNvPr id="7" name="Text 5"/>
+          <p:cNvSpPr/>
+          <p:nvPr/>
+        </p:nvSpPr>
+        <p:spPr>
+          <a:xfrm>
+            <a:off x="11137392" y="6510528"/>
+            <a:ext cx="411480" cy="201168"/>
+          </a:xfrm>
+          <a:prstGeom prst="rect">
+            <a:avLst/>
+          </a:prstGeom>
+          <a:noFill/>
+          <a:ln/>
+        </p:spPr>
+        <p:txBody>
+          <a:bodyPr wrap="square" lIns="0" tIns="0" rIns="0" bIns="0" rtlCol="0" anchor="ctr"/>
+          <a:lstStyle/>
+          <a:p>
+            <a:pPr algn="r" indent="0" marL="0">
+              <a:buNone/>
+            </a:pPr>
+            <a:r>
+              <a:rPr lang="en-US" sz="900" dirty="0">
+                <a:solidFill>
+                  <a:srgbClr val="5F7181"/>
+                </a:solidFill>
+                <a:latin typeface="Aptos" pitchFamily="34" charset="0"/>
+                <a:ea typeface="Aptos" pitchFamily="34" charset="-122"/>
+                <a:cs typeface="Aptos" pitchFamily="34" charset="-120"/>
+              </a:rPr>
+              <a:t>12</a:t>
+            </a:r>
+            <a:endParaRPr lang="en-US" sz="900" dirty="0"/>
+          </a:p>
+        </p:txBody>
+      </p:sp>
+      <p:sp>
+        <p:nvSpPr>
+          <p:cNvPr id="8" name="Shape 6"/>
           <p:cNvSpPr/>
           <p:nvPr/>
         </p:nvSpPr>
@@ -4358,7 +4486,7 @@
       </p:sp>
       <p:sp>
         <p:nvSpPr>
-          <p:cNvPr id="8" name="Text 6"/>
+          <p:cNvPr id="9" name="Text 7"/>
           <p:cNvSpPr/>
           <p:nvPr/>
         </p:nvSpPr>
@@ -4397,14 +4525,14 @@
       </p:sp>
       <p:sp>
         <p:nvSpPr>
-          <p:cNvPr id="9" name="Text 7"/>
+          <p:cNvPr id="10" name="Text 8"/>
           <p:cNvSpPr/>
           <p:nvPr/>
         </p:nvSpPr>
         <p:spPr>
           <a:xfrm>
             <a:off x="640080" y="621792"/>
-            <a:ext cx="10881360" cy="566928"/>
+            <a:ext cx="10881360" cy="713232"/>
           </a:xfrm>
           <a:prstGeom prst="rect">
             <a:avLst/>
@@ -4422,7 +4550,7 @@
               <a:buNone/>
             </a:pPr>
             <a:r>
-              <a:rPr lang="en-US" sz="2700" b="1" dirty="0">
+              <a:rPr lang="en-US" sz="3400" b="1" dirty="0">
                 <a:solidFill>
                   <a:srgbClr val="003A63"/>
                 </a:solidFill>
@@ -4432,20 +4560,20 @@
               </a:rPr>
               <a:t>Risks, Failure Modes, and Guardrails</a:t>
             </a:r>
-            <a:endParaRPr lang="en-US" sz="2700" dirty="0"/>
-          </a:p>
-        </p:txBody>
-      </p:sp>
-      <p:sp>
-        <p:nvSpPr>
-          <p:cNvPr id="10" name="Text 8"/>
-          <p:cNvSpPr/>
-          <p:nvPr/>
-        </p:nvSpPr>
-        <p:spPr>
-          <a:xfrm>
-            <a:off x="868680" y="1417320"/>
-            <a:ext cx="6675120" cy="4434840"/>
+            <a:endParaRPr lang="en-US" sz="3400" dirty="0"/>
+          </a:p>
+        </p:txBody>
+      </p:sp>
+      <p:sp>
+        <p:nvSpPr>
+          <p:cNvPr id="11" name="Text 9"/>
+          <p:cNvSpPr/>
+          <p:nvPr/>
+        </p:nvSpPr>
+        <p:spPr>
+          <a:xfrm>
+            <a:off x="868680" y="1508760"/>
+            <a:ext cx="6537960" cy="4160520"/>
           </a:xfrm>
           <a:prstGeom prst="rect">
             <a:avLst/>
@@ -4460,7 +4588,7 @@
           <a:lstStyle/>
           <a:p>
             <a:r>
-              <a:rPr lang="en-US" sz="1700" dirty="0">
+              <a:rPr lang="en-US" sz="2100" dirty="0">
                 <a:solidFill>
                   <a:srgbClr val="17364A"/>
                 </a:solidFill>
@@ -4470,11 +4598,11 @@
               </a:rPr>
               <a:t>Technology-first design.</a:t>
             </a:r>
-            <a:endParaRPr lang="en-US" sz="1700" dirty="0"/>
-          </a:p>
-          <a:p>
-            <a:r>
-              <a:rPr lang="en-US" sz="1700" dirty="0">
+            <a:endParaRPr lang="en-US" sz="2100" dirty="0"/>
+          </a:p>
+          <a:p>
+            <a:r>
+              <a:rPr lang="en-US" sz="2100" dirty="0">
                 <a:solidFill>
                   <a:srgbClr val="17364A"/>
                 </a:solidFill>
@@ -4484,11 +4612,11 @@
               </a:rPr>
               <a:t>A tool may be adopted because it is novel rather than because it solves a public health problem.</a:t>
             </a:r>
-            <a:endParaRPr lang="en-US" sz="1700" dirty="0"/>
-          </a:p>
-          <a:p>
-            <a:r>
-              <a:rPr lang="en-US" sz="1700" dirty="0">
+            <a:endParaRPr lang="en-US" sz="2100" dirty="0"/>
+          </a:p>
+          <a:p>
+            <a:r>
+              <a:rPr lang="en-US" sz="2100" dirty="0">
                 <a:solidFill>
                   <a:srgbClr val="17364A"/>
                 </a:solidFill>
@@ -4498,27 +4626,13 @@
               </a:rPr>
               <a:t>Guardrails include problem-first planning, alternatives analysis, and public value criteria.</a:t>
             </a:r>
-            <a:endParaRPr lang="en-US" sz="1700" dirty="0"/>
-          </a:p>
-          <a:p>
-            <a:r>
-              <a:rPr lang="en-US" sz="1700" dirty="0">
-                <a:solidFill>
-                  <a:srgbClr val="17364A"/>
-                </a:solidFill>
-                <a:latin typeface="Aptos" pitchFamily="34" charset="0"/>
-                <a:ea typeface="Aptos" pitchFamily="34" charset="-122"/>
-                <a:cs typeface="Aptos" pitchFamily="34" charset="-120"/>
-              </a:rPr>
-              <a:t>Unequal benefit.</a:t>
-            </a:r>
-            <a:endParaRPr lang="en-US" sz="1700" dirty="0"/>
-          </a:p>
-        </p:txBody>
-      </p:sp>
-      <p:sp>
-        <p:nvSpPr>
-          <p:cNvPr id="11" name="Shape 9"/>
+            <a:endParaRPr lang="en-US" sz="2100" dirty="0"/>
+          </a:p>
+        </p:txBody>
+      </p:sp>
+      <p:sp>
+        <p:nvSpPr>
+          <p:cNvPr id="12" name="Shape 10"/>
           <p:cNvSpPr/>
           <p:nvPr/>
         </p:nvSpPr>
@@ -4545,14 +4659,14 @@
       </p:sp>
       <p:sp>
         <p:nvSpPr>
-          <p:cNvPr id="12" name="Text 10"/>
+          <p:cNvPr id="13" name="Text 11"/>
           <p:cNvSpPr/>
           <p:nvPr/>
         </p:nvSpPr>
         <p:spPr>
           <a:xfrm>
             <a:off x="8074152" y="1563624"/>
-            <a:ext cx="2825496" cy="201168"/>
+            <a:ext cx="2825496" cy="256032"/>
           </a:xfrm>
           <a:prstGeom prst="rect">
             <a:avLst/>
@@ -4568,7 +4682,7 @@
               <a:buNone/>
             </a:pPr>
             <a:r>
-              <a:rPr lang="en-US" sz="950" b="1" dirty="0">
+              <a:rPr lang="en-US" sz="1300" b="1" dirty="0">
                 <a:solidFill>
                   <a:srgbClr val="0068B7"/>
                 </a:solidFill>
@@ -4578,20 +4692,20 @@
               </a:rPr>
               <a:t>Key idea</a:t>
             </a:r>
-            <a:endParaRPr lang="en-US" sz="950" dirty="0"/>
-          </a:p>
-        </p:txBody>
-      </p:sp>
-      <p:sp>
-        <p:nvSpPr>
-          <p:cNvPr id="13" name="Text 11"/>
-          <p:cNvSpPr/>
-          <p:nvPr/>
-        </p:nvSpPr>
-        <p:spPr>
-          <a:xfrm>
-            <a:off x="8074152" y="1856232"/>
-            <a:ext cx="2825496" cy="1261872"/>
+            <a:endParaRPr lang="en-US" sz="1300" dirty="0"/>
+          </a:p>
+        </p:txBody>
+      </p:sp>
+      <p:sp>
+        <p:nvSpPr>
+          <p:cNvPr id="14" name="Text 12"/>
+          <p:cNvSpPr/>
+          <p:nvPr/>
+        </p:nvSpPr>
+        <p:spPr>
+          <a:xfrm>
+            <a:off x="8074152" y="1920240"/>
+            <a:ext cx="2825496" cy="1188720"/>
           </a:xfrm>
           <a:prstGeom prst="rect">
             <a:avLst/>
@@ -4609,7 +4723,7 @@
               <a:buNone/>
             </a:pPr>
             <a:r>
-              <a:rPr lang="en-US" sz="1250" dirty="0">
+              <a:rPr lang="en-US" sz="1550" dirty="0">
                 <a:solidFill>
                   <a:srgbClr val="17364A"/>
                 </a:solidFill>
@@ -4619,13 +4733,13 @@
               </a:rPr>
               <a:t>Technology-first design.</a:t>
             </a:r>
-            <a:endParaRPr lang="en-US" sz="1250" dirty="0"/>
-          </a:p>
-        </p:txBody>
-      </p:sp>
-      <p:sp>
-        <p:nvSpPr>
-          <p:cNvPr id="14" name="Shape 12"/>
+            <a:endParaRPr lang="en-US" sz="1550" dirty="0"/>
+          </a:p>
+        </p:txBody>
+      </p:sp>
+      <p:sp>
+        <p:nvSpPr>
+          <p:cNvPr id="15" name="Shape 13"/>
           <p:cNvSpPr/>
           <p:nvPr/>
         </p:nvSpPr>
@@ -4652,14 +4766,14 @@
       </p:sp>
       <p:sp>
         <p:nvSpPr>
-          <p:cNvPr id="15" name="Text 13"/>
+          <p:cNvPr id="16" name="Text 14"/>
           <p:cNvSpPr/>
           <p:nvPr/>
         </p:nvSpPr>
         <p:spPr>
           <a:xfrm>
             <a:off x="8074152" y="3666744"/>
-            <a:ext cx="2825496" cy="201168"/>
+            <a:ext cx="2825496" cy="256032"/>
           </a:xfrm>
           <a:prstGeom prst="rect">
             <a:avLst/>
@@ -4675,7 +4789,7 @@
               <a:buNone/>
             </a:pPr>
             <a:r>
-              <a:rPr lang="en-US" sz="950" b="1" dirty="0">
+              <a:rPr lang="en-US" sz="1300" b="1" dirty="0">
                 <a:solidFill>
                   <a:srgbClr val="0068B7"/>
                 </a:solidFill>
@@ -4685,20 +4799,20 @@
               </a:rPr>
               <a:t>Use this for</a:t>
             </a:r>
-            <a:endParaRPr lang="en-US" sz="950" dirty="0"/>
-          </a:p>
-        </p:txBody>
-      </p:sp>
-      <p:sp>
-        <p:nvSpPr>
-          <p:cNvPr id="16" name="Text 14"/>
-          <p:cNvSpPr/>
-          <p:nvPr/>
-        </p:nvSpPr>
-        <p:spPr>
-          <a:xfrm>
-            <a:off x="8074152" y="3959352"/>
-            <a:ext cx="2825496" cy="1170432"/>
+            <a:endParaRPr lang="en-US" sz="1300" dirty="0"/>
+          </a:p>
+        </p:txBody>
+      </p:sp>
+      <p:sp>
+        <p:nvSpPr>
+          <p:cNvPr id="17" name="Text 15"/>
+          <p:cNvSpPr/>
+          <p:nvPr/>
+        </p:nvSpPr>
+        <p:spPr>
+          <a:xfrm>
+            <a:off x="8074152" y="4023360"/>
+            <a:ext cx="2825496" cy="1097280"/>
           </a:xfrm>
           <a:prstGeom prst="rect">
             <a:avLst/>
@@ -4716,7 +4830,7 @@
               <a:buNone/>
             </a:pPr>
             <a:r>
-              <a:rPr lang="en-US" sz="1250" dirty="0">
+              <a:rPr lang="en-US" sz="1550" dirty="0">
                 <a:solidFill>
                   <a:srgbClr val="17364A"/>
                 </a:solidFill>
@@ -4726,7 +4840,7 @@
               </a:rPr>
               <a:t>Connect the concept to public health decisions, safeguards, documentation, or implementation work.</a:t>
             </a:r>
-            <a:endParaRPr lang="en-US" sz="1250" dirty="0"/>
+            <a:endParaRPr lang="en-US" sz="1550" dirty="0"/>
           </a:p>
         </p:txBody>
       </p:sp>
@@ -4923,7 +5037,7 @@
                 <a:ea typeface="Aptos" pitchFamily="34" charset="-122"/>
                 <a:cs typeface="Aptos" pitchFamily="34" charset="-120"/>
               </a:rPr>
-              <a:t>© Paula Soper</a:t>
+              <a:t>Â© Paula Soper</a:t>
             </a:r>
             <a:endParaRPr lang="en-US" sz="800" dirty="0"/>
           </a:p>
@@ -4937,8 +5051,47 @@
         </p:nvSpPr>
         <p:spPr>
           <a:xfrm>
+            <a:off x="11137392" y="6510528"/>
+            <a:ext cx="411480" cy="201168"/>
+          </a:xfrm>
+          <a:prstGeom prst="rect">
+            <a:avLst/>
+          </a:prstGeom>
+          <a:noFill/>
+          <a:ln/>
+        </p:spPr>
+        <p:txBody>
+          <a:bodyPr wrap="square" lIns="0" tIns="0" rIns="0" bIns="0" rtlCol="0" anchor="ctr"/>
+          <a:lstStyle/>
+          <a:p>
+            <a:pPr algn="r" indent="0" marL="0">
+              <a:buNone/>
+            </a:pPr>
+            <a:r>
+              <a:rPr lang="en-US" sz="900" dirty="0">
+                <a:solidFill>
+                  <a:srgbClr val="5F7181"/>
+                </a:solidFill>
+                <a:latin typeface="Aptos" pitchFamily="34" charset="0"/>
+                <a:ea typeface="Aptos" pitchFamily="34" charset="-122"/>
+                <a:cs typeface="Aptos" pitchFamily="34" charset="-120"/>
+              </a:rPr>
+              <a:t>13</a:t>
+            </a:r>
+            <a:endParaRPr lang="en-US" sz="900" dirty="0"/>
+          </a:p>
+        </p:txBody>
+      </p:sp>
+      <p:sp>
+        <p:nvSpPr>
+          <p:cNvPr id="8" name="Text 6"/>
+          <p:cNvSpPr/>
+          <p:nvPr/>
+        </p:nvSpPr>
+        <p:spPr>
+          <a:xfrm>
             <a:off x="640080" y="658368"/>
-            <a:ext cx="10881360" cy="566928"/>
+            <a:ext cx="10881360" cy="713232"/>
           </a:xfrm>
           <a:prstGeom prst="rect">
             <a:avLst/>
@@ -4956,7 +5109,7 @@
               <a:buNone/>
             </a:pPr>
             <a:r>
-              <a:rPr lang="en-US" sz="2700" b="1" dirty="0">
+              <a:rPr lang="en-US" sz="3400" b="1" dirty="0">
                 <a:solidFill>
                   <a:srgbClr val="003A63"/>
                 </a:solidFill>
@@ -4966,20 +5119,20 @@
               </a:rPr>
               <a:t>Risks, Failure Modes, and Guardrails Continued</a:t>
             </a:r>
-            <a:endParaRPr lang="en-US" sz="2700" dirty="0"/>
-          </a:p>
-        </p:txBody>
-      </p:sp>
-      <p:sp>
-        <p:nvSpPr>
-          <p:cNvPr id="8" name="Text 6"/>
-          <p:cNvSpPr/>
-          <p:nvPr/>
-        </p:nvSpPr>
-        <p:spPr>
-          <a:xfrm>
-            <a:off x="868680" y="1417320"/>
-            <a:ext cx="6675120" cy="4434840"/>
+            <a:endParaRPr lang="en-US" sz="3400" dirty="0"/>
+          </a:p>
+        </p:txBody>
+      </p:sp>
+      <p:sp>
+        <p:nvSpPr>
+          <p:cNvPr id="9" name="Text 7"/>
+          <p:cNvSpPr/>
+          <p:nvPr/>
+        </p:nvSpPr>
+        <p:spPr>
+          <a:xfrm>
+            <a:off x="868680" y="1508760"/>
+            <a:ext cx="6537960" cy="4160520"/>
           </a:xfrm>
           <a:prstGeom prst="rect">
             <a:avLst/>
@@ -4994,7 +5147,7 @@
           <a:lstStyle/>
           <a:p>
             <a:r>
-              <a:rPr lang="en-US" sz="1700" dirty="0">
+              <a:rPr lang="en-US" sz="2100" dirty="0">
                 <a:solidFill>
                   <a:srgbClr val="17364A"/>
                 </a:solidFill>
@@ -5004,11 +5157,11 @@
               </a:rPr>
               <a:t>Resource diversion.</a:t>
             </a:r>
-            <a:endParaRPr lang="en-US" sz="1700" dirty="0"/>
-          </a:p>
-          <a:p>
-            <a:r>
-              <a:rPr lang="en-US" sz="1700" dirty="0">
+            <a:endParaRPr lang="en-US" sz="2100" dirty="0"/>
+          </a:p>
+          <a:p>
+            <a:r>
+              <a:rPr lang="en-US" sz="2100" dirty="0">
                 <a:solidFill>
                   <a:srgbClr val="17364A"/>
                 </a:solidFill>
@@ -5018,11 +5171,11 @@
               </a:rPr>
               <a:t>AI projects may consume resources that could be used for more effective interventions.</a:t>
             </a:r>
-            <a:endParaRPr lang="en-US" sz="1700" dirty="0"/>
-          </a:p>
-          <a:p>
-            <a:r>
-              <a:rPr lang="en-US" sz="1700" dirty="0">
+            <a:endParaRPr lang="en-US" sz="2100" dirty="0"/>
+          </a:p>
+          <a:p>
+            <a:r>
+              <a:rPr lang="en-US" sz="2100" dirty="0">
                 <a:solidFill>
                   <a:srgbClr val="17364A"/>
                 </a:solidFill>
@@ -5032,13 +5185,13 @@
               </a:rPr>
               <a:t>Guardrails include impact measurement, cost-benefit review, and periodic reassessment.</a:t>
             </a:r>
-            <a:endParaRPr lang="en-US" sz="1700" dirty="0"/>
-          </a:p>
-        </p:txBody>
-      </p:sp>
-      <p:sp>
-        <p:nvSpPr>
-          <p:cNvPr id="9" name="Shape 7"/>
+            <a:endParaRPr lang="en-US" sz="2100" dirty="0"/>
+          </a:p>
+        </p:txBody>
+      </p:sp>
+      <p:sp>
+        <p:nvSpPr>
+          <p:cNvPr id="10" name="Shape 8"/>
           <p:cNvSpPr/>
           <p:nvPr/>
         </p:nvSpPr>
@@ -5065,14 +5218,14 @@
       </p:sp>
       <p:sp>
         <p:nvSpPr>
-          <p:cNvPr id="10" name="Text 8"/>
+          <p:cNvPr id="11" name="Text 9"/>
           <p:cNvSpPr/>
           <p:nvPr/>
         </p:nvSpPr>
         <p:spPr>
           <a:xfrm>
             <a:off x="8074152" y="1563624"/>
-            <a:ext cx="2825496" cy="201168"/>
+            <a:ext cx="2825496" cy="256032"/>
           </a:xfrm>
           <a:prstGeom prst="rect">
             <a:avLst/>
@@ -5088,7 +5241,7 @@
               <a:buNone/>
             </a:pPr>
             <a:r>
-              <a:rPr lang="en-US" sz="950" b="1" dirty="0">
+              <a:rPr lang="en-US" sz="1300" b="1" dirty="0">
                 <a:solidFill>
                   <a:srgbClr val="0068B7"/>
                 </a:solidFill>
@@ -5098,20 +5251,20 @@
               </a:rPr>
               <a:t>Key idea</a:t>
             </a:r>
-            <a:endParaRPr lang="en-US" sz="950" dirty="0"/>
-          </a:p>
-        </p:txBody>
-      </p:sp>
-      <p:sp>
-        <p:nvSpPr>
-          <p:cNvPr id="11" name="Text 9"/>
-          <p:cNvSpPr/>
-          <p:nvPr/>
-        </p:nvSpPr>
-        <p:spPr>
-          <a:xfrm>
-            <a:off x="8074152" y="1856232"/>
-            <a:ext cx="2825496" cy="1261872"/>
+            <a:endParaRPr lang="en-US" sz="1300" dirty="0"/>
+          </a:p>
+        </p:txBody>
+      </p:sp>
+      <p:sp>
+        <p:nvSpPr>
+          <p:cNvPr id="12" name="Text 10"/>
+          <p:cNvSpPr/>
+          <p:nvPr/>
+        </p:nvSpPr>
+        <p:spPr>
+          <a:xfrm>
+            <a:off x="8074152" y="1920240"/>
+            <a:ext cx="2825496" cy="1188720"/>
           </a:xfrm>
           <a:prstGeom prst="rect">
             <a:avLst/>
@@ -5129,7 +5282,7 @@
               <a:buNone/>
             </a:pPr>
             <a:r>
-              <a:rPr lang="en-US" sz="1250" dirty="0">
+              <a:rPr lang="en-US" sz="1550" dirty="0">
                 <a:solidFill>
                   <a:srgbClr val="17364A"/>
                 </a:solidFill>
@@ -5139,13 +5292,13 @@
               </a:rPr>
               <a:t>Resource diversion.</a:t>
             </a:r>
-            <a:endParaRPr lang="en-US" sz="1250" dirty="0"/>
-          </a:p>
-        </p:txBody>
-      </p:sp>
-      <p:sp>
-        <p:nvSpPr>
-          <p:cNvPr id="12" name="Shape 10"/>
+            <a:endParaRPr lang="en-US" sz="1550" dirty="0"/>
+          </a:p>
+        </p:txBody>
+      </p:sp>
+      <p:sp>
+        <p:nvSpPr>
+          <p:cNvPr id="13" name="Shape 11"/>
           <p:cNvSpPr/>
           <p:nvPr/>
         </p:nvSpPr>
@@ -5172,14 +5325,14 @@
       </p:sp>
       <p:sp>
         <p:nvSpPr>
-          <p:cNvPr id="13" name="Text 11"/>
+          <p:cNvPr id="14" name="Text 12"/>
           <p:cNvSpPr/>
           <p:nvPr/>
         </p:nvSpPr>
         <p:spPr>
           <a:xfrm>
             <a:off x="8074152" y="3666744"/>
-            <a:ext cx="2825496" cy="201168"/>
+            <a:ext cx="2825496" cy="256032"/>
           </a:xfrm>
           <a:prstGeom prst="rect">
             <a:avLst/>
@@ -5195,7 +5348,7 @@
               <a:buNone/>
             </a:pPr>
             <a:r>
-              <a:rPr lang="en-US" sz="950" b="1" dirty="0">
+              <a:rPr lang="en-US" sz="1300" b="1" dirty="0">
                 <a:solidFill>
                   <a:srgbClr val="0068B7"/>
                 </a:solidFill>
@@ -5205,20 +5358,20 @@
               </a:rPr>
               <a:t>Use this for</a:t>
             </a:r>
-            <a:endParaRPr lang="en-US" sz="950" dirty="0"/>
-          </a:p>
-        </p:txBody>
-      </p:sp>
-      <p:sp>
-        <p:nvSpPr>
-          <p:cNvPr id="14" name="Text 12"/>
-          <p:cNvSpPr/>
-          <p:nvPr/>
-        </p:nvSpPr>
-        <p:spPr>
-          <a:xfrm>
-            <a:off x="8074152" y="3959352"/>
-            <a:ext cx="2825496" cy="1170432"/>
+            <a:endParaRPr lang="en-US" sz="1300" dirty="0"/>
+          </a:p>
+        </p:txBody>
+      </p:sp>
+      <p:sp>
+        <p:nvSpPr>
+          <p:cNvPr id="15" name="Text 13"/>
+          <p:cNvSpPr/>
+          <p:nvPr/>
+        </p:nvSpPr>
+        <p:spPr>
+          <a:xfrm>
+            <a:off x="8074152" y="4023360"/>
+            <a:ext cx="2825496" cy="1097280"/>
           </a:xfrm>
           <a:prstGeom prst="rect">
             <a:avLst/>
@@ -5236,7 +5389,7 @@
               <a:buNone/>
             </a:pPr>
             <a:r>
-              <a:rPr lang="en-US" sz="1250" dirty="0">
+              <a:rPr lang="en-US" sz="1550" dirty="0">
                 <a:solidFill>
                   <a:srgbClr val="17364A"/>
                 </a:solidFill>
@@ -5246,7 +5399,7 @@
               </a:rPr>
               <a:t>Connect the concept to public health decisions, safeguards, documentation, or implementation work.</a:t>
             </a:r>
-            <a:endParaRPr lang="en-US" sz="1250" dirty="0"/>
+            <a:endParaRPr lang="en-US" sz="1550" dirty="0"/>
           </a:p>
         </p:txBody>
       </p:sp>
@@ -5443,7 +5596,7 @@
                 <a:ea typeface="Aptos" pitchFamily="34" charset="-122"/>
                 <a:cs typeface="Aptos" pitchFamily="34" charset="-120"/>
               </a:rPr>
-              <a:t>© Paula Soper</a:t>
+              <a:t>Â© Paula Soper</a:t>
             </a:r>
             <a:endParaRPr lang="en-US" sz="800" dirty="0"/>
           </a:p>
@@ -5451,7 +5604,46 @@
       </p:sp>
       <p:sp>
         <p:nvSpPr>
-          <p:cNvPr id="7" name="Shape 5"/>
+          <p:cNvPr id="7" name="Text 5"/>
+          <p:cNvSpPr/>
+          <p:nvPr/>
+        </p:nvSpPr>
+        <p:spPr>
+          <a:xfrm>
+            <a:off x="11137392" y="6510528"/>
+            <a:ext cx="411480" cy="201168"/>
+          </a:xfrm>
+          <a:prstGeom prst="rect">
+            <a:avLst/>
+          </a:prstGeom>
+          <a:noFill/>
+          <a:ln/>
+        </p:spPr>
+        <p:txBody>
+          <a:bodyPr wrap="square" lIns="0" tIns="0" rIns="0" bIns="0" rtlCol="0" anchor="ctr"/>
+          <a:lstStyle/>
+          <a:p>
+            <a:pPr algn="r" indent="0" marL="0">
+              <a:buNone/>
+            </a:pPr>
+            <a:r>
+              <a:rPr lang="en-US" sz="900" dirty="0">
+                <a:solidFill>
+                  <a:srgbClr val="5F7181"/>
+                </a:solidFill>
+                <a:latin typeface="Aptos" pitchFamily="34" charset="0"/>
+                <a:ea typeface="Aptos" pitchFamily="34" charset="-122"/>
+                <a:cs typeface="Aptos" pitchFamily="34" charset="-120"/>
+              </a:rPr>
+              <a:t>14</a:t>
+            </a:r>
+            <a:endParaRPr lang="en-US" sz="900" dirty="0"/>
+          </a:p>
+        </p:txBody>
+      </p:sp>
+      <p:sp>
+        <p:nvSpPr>
+          <p:cNvPr id="8" name="Shape 6"/>
           <p:cNvSpPr/>
           <p:nvPr/>
         </p:nvSpPr>
@@ -5476,7 +5668,7 @@
       </p:sp>
       <p:sp>
         <p:nvSpPr>
-          <p:cNvPr id="8" name="Text 6"/>
+          <p:cNvPr id="9" name="Text 7"/>
           <p:cNvSpPr/>
           <p:nvPr/>
         </p:nvSpPr>
@@ -5515,14 +5707,14 @@
       </p:sp>
       <p:sp>
         <p:nvSpPr>
-          <p:cNvPr id="9" name="Text 7"/>
+          <p:cNvPr id="10" name="Text 8"/>
           <p:cNvSpPr/>
           <p:nvPr/>
         </p:nvSpPr>
         <p:spPr>
           <a:xfrm>
             <a:off x="640080" y="621792"/>
-            <a:ext cx="10881360" cy="566928"/>
+            <a:ext cx="10881360" cy="713232"/>
           </a:xfrm>
           <a:prstGeom prst="rect">
             <a:avLst/>
@@ -5540,7 +5732,7 @@
               <a:buNone/>
             </a:pPr>
             <a:r>
-              <a:rPr lang="en-US" sz="2700" b="1" dirty="0">
+              <a:rPr lang="en-US" sz="3400" b="1" dirty="0">
                 <a:solidFill>
                   <a:srgbClr val="003A63"/>
                 </a:solidFill>
@@ -5550,20 +5742,20 @@
               </a:rPr>
               <a:t>Application to AI-Supported Workflows</a:t>
             </a:r>
-            <a:endParaRPr lang="en-US" sz="2700" dirty="0"/>
-          </a:p>
-        </p:txBody>
-      </p:sp>
-      <p:sp>
-        <p:nvSpPr>
-          <p:cNvPr id="10" name="Text 8"/>
-          <p:cNvSpPr/>
-          <p:nvPr/>
-        </p:nvSpPr>
-        <p:spPr>
-          <a:xfrm>
-            <a:off x="868680" y="1417320"/>
-            <a:ext cx="6675120" cy="4434840"/>
+            <a:endParaRPr lang="en-US" sz="3400" dirty="0"/>
+          </a:p>
+        </p:txBody>
+      </p:sp>
+      <p:sp>
+        <p:nvSpPr>
+          <p:cNvPr id="11" name="Text 9"/>
+          <p:cNvSpPr/>
+          <p:nvPr/>
+        </p:nvSpPr>
+        <p:spPr>
+          <a:xfrm>
+            <a:off x="868680" y="1508760"/>
+            <a:ext cx="6537960" cy="4160520"/>
           </a:xfrm>
           <a:prstGeom prst="rect">
             <a:avLst/>
@@ -5578,7 +5770,7 @@
           <a:lstStyle/>
           <a:p>
             <a:r>
-              <a:rPr lang="en-US" sz="1700" dirty="0">
+              <a:rPr lang="en-US" sz="2100" dirty="0">
                 <a:solidFill>
                   <a:srgbClr val="17364A"/>
                 </a:solidFill>
@@ -5588,11 +5780,11 @@
               </a:rPr>
               <a:t>AI for Social Good applies to every AI method.</a:t>
             </a:r>
-            <a:endParaRPr lang="en-US" sz="1700" dirty="0"/>
-          </a:p>
-          <a:p>
-            <a:r>
-              <a:rPr lang="en-US" sz="1700" dirty="0">
+            <a:endParaRPr lang="en-US" sz="2100" dirty="0"/>
+          </a:p>
+          <a:p>
+            <a:r>
+              <a:rPr lang="en-US" sz="2100" dirty="0">
                 <a:solidFill>
                   <a:srgbClr val="17364A"/>
                 </a:solidFill>
@@ -5600,13 +5792,13 @@
                 <a:ea typeface="Aptos" pitchFamily="34" charset="-122"/>
                 <a:cs typeface="Aptos" pitchFamily="34" charset="-120"/>
               </a:rPr>
-              <a:t>Generative AI may improve plain-language communication, but it must be accurate, accessible, and culturally appropriate.</a:t>
-            </a:r>
-            <a:endParaRPr lang="en-US" sz="1700" dirty="0"/>
-          </a:p>
-          <a:p>
-            <a:r>
-              <a:rPr lang="en-US" sz="1700" dirty="0">
+              <a:t>Generative AI may improve plain-language communication, but it must be accurate, accessible, and.</a:t>
+            </a:r>
+            <a:endParaRPr lang="en-US" sz="2100" dirty="0"/>
+          </a:p>
+          <a:p>
+            <a:r>
+              <a:rPr lang="en-US" sz="2100" dirty="0">
                 <a:solidFill>
                   <a:srgbClr val="17364A"/>
                 </a:solidFill>
@@ -5616,27 +5808,13 @@
               </a:rPr>
               <a:t>Predictive analytics may guide supportive outreach, but it should not become a tool for exclusion.</a:t>
             </a:r>
-            <a:endParaRPr lang="en-US" sz="1700" dirty="0"/>
-          </a:p>
-          <a:p>
-            <a:r>
-              <a:rPr lang="en-US" sz="1700" dirty="0">
-                <a:solidFill>
-                  <a:srgbClr val="17364A"/>
-                </a:solidFill>
-                <a:latin typeface="Aptos" pitchFamily="34" charset="0"/>
-                <a:ea typeface="Aptos" pitchFamily="34" charset="-122"/>
-                <a:cs typeface="Aptos" pitchFamily="34" charset="-120"/>
-              </a:rPr>
-              <a:t>RAG systems may improve staff access to guidance, but they must include current and authorized content.</a:t>
-            </a:r>
-            <a:endParaRPr lang="en-US" sz="1700" dirty="0"/>
-          </a:p>
-        </p:txBody>
-      </p:sp>
-      <p:sp>
-        <p:nvSpPr>
-          <p:cNvPr id="11" name="Shape 9"/>
+            <a:endParaRPr lang="en-US" sz="2100" dirty="0"/>
+          </a:p>
+        </p:txBody>
+      </p:sp>
+      <p:sp>
+        <p:nvSpPr>
+          <p:cNvPr id="12" name="Shape 10"/>
           <p:cNvSpPr/>
           <p:nvPr/>
         </p:nvSpPr>
@@ -5663,14 +5841,14 @@
       </p:sp>
       <p:sp>
         <p:nvSpPr>
-          <p:cNvPr id="12" name="Text 10"/>
+          <p:cNvPr id="13" name="Text 11"/>
           <p:cNvSpPr/>
           <p:nvPr/>
         </p:nvSpPr>
         <p:spPr>
           <a:xfrm>
             <a:off x="8074152" y="1563624"/>
-            <a:ext cx="2825496" cy="201168"/>
+            <a:ext cx="2825496" cy="256032"/>
           </a:xfrm>
           <a:prstGeom prst="rect">
             <a:avLst/>
@@ -5686,7 +5864,7 @@
               <a:buNone/>
             </a:pPr>
             <a:r>
-              <a:rPr lang="en-US" sz="950" b="1" dirty="0">
+              <a:rPr lang="en-US" sz="1300" b="1" dirty="0">
                 <a:solidFill>
                   <a:srgbClr val="0068B7"/>
                 </a:solidFill>
@@ -5696,20 +5874,20 @@
               </a:rPr>
               <a:t>Key idea</a:t>
             </a:r>
-            <a:endParaRPr lang="en-US" sz="950" dirty="0"/>
-          </a:p>
-        </p:txBody>
-      </p:sp>
-      <p:sp>
-        <p:nvSpPr>
-          <p:cNvPr id="13" name="Text 11"/>
-          <p:cNvSpPr/>
-          <p:nvPr/>
-        </p:nvSpPr>
-        <p:spPr>
-          <a:xfrm>
-            <a:off x="8074152" y="1856232"/>
-            <a:ext cx="2825496" cy="1261872"/>
+            <a:endParaRPr lang="en-US" sz="1300" dirty="0"/>
+          </a:p>
+        </p:txBody>
+      </p:sp>
+      <p:sp>
+        <p:nvSpPr>
+          <p:cNvPr id="14" name="Text 12"/>
+          <p:cNvSpPr/>
+          <p:nvPr/>
+        </p:nvSpPr>
+        <p:spPr>
+          <a:xfrm>
+            <a:off x="8074152" y="1920240"/>
+            <a:ext cx="2825496" cy="1188720"/>
           </a:xfrm>
           <a:prstGeom prst="rect">
             <a:avLst/>
@@ -5727,7 +5905,7 @@
               <a:buNone/>
             </a:pPr>
             <a:r>
-              <a:rPr lang="en-US" sz="1250" dirty="0">
+              <a:rPr lang="en-US" sz="1550" dirty="0">
                 <a:solidFill>
                   <a:srgbClr val="17364A"/>
                 </a:solidFill>
@@ -5737,13 +5915,13 @@
               </a:rPr>
               <a:t>AI for Social Good applies to every AI method.</a:t>
             </a:r>
-            <a:endParaRPr lang="en-US" sz="1250" dirty="0"/>
-          </a:p>
-        </p:txBody>
-      </p:sp>
-      <p:sp>
-        <p:nvSpPr>
-          <p:cNvPr id="14" name="Shape 12"/>
+            <a:endParaRPr lang="en-US" sz="1550" dirty="0"/>
+          </a:p>
+        </p:txBody>
+      </p:sp>
+      <p:sp>
+        <p:nvSpPr>
+          <p:cNvPr id="15" name="Shape 13"/>
           <p:cNvSpPr/>
           <p:nvPr/>
         </p:nvSpPr>
@@ -5770,14 +5948,14 @@
       </p:sp>
       <p:sp>
         <p:nvSpPr>
-          <p:cNvPr id="15" name="Text 13"/>
+          <p:cNvPr id="16" name="Text 14"/>
           <p:cNvSpPr/>
           <p:nvPr/>
         </p:nvSpPr>
         <p:spPr>
           <a:xfrm>
             <a:off x="8074152" y="3666744"/>
-            <a:ext cx="2825496" cy="201168"/>
+            <a:ext cx="2825496" cy="256032"/>
           </a:xfrm>
           <a:prstGeom prst="rect">
             <a:avLst/>
@@ -5793,7 +5971,7 @@
               <a:buNone/>
             </a:pPr>
             <a:r>
-              <a:rPr lang="en-US" sz="950" b="1" dirty="0">
+              <a:rPr lang="en-US" sz="1300" b="1" dirty="0">
                 <a:solidFill>
                   <a:srgbClr val="0068B7"/>
                 </a:solidFill>
@@ -5803,20 +5981,20 @@
               </a:rPr>
               <a:t>Use this for</a:t>
             </a:r>
-            <a:endParaRPr lang="en-US" sz="950" dirty="0"/>
-          </a:p>
-        </p:txBody>
-      </p:sp>
-      <p:sp>
-        <p:nvSpPr>
-          <p:cNvPr id="16" name="Text 14"/>
-          <p:cNvSpPr/>
-          <p:nvPr/>
-        </p:nvSpPr>
-        <p:spPr>
-          <a:xfrm>
-            <a:off x="8074152" y="3959352"/>
-            <a:ext cx="2825496" cy="1170432"/>
+            <a:endParaRPr lang="en-US" sz="1300" dirty="0"/>
+          </a:p>
+        </p:txBody>
+      </p:sp>
+      <p:sp>
+        <p:nvSpPr>
+          <p:cNvPr id="17" name="Text 15"/>
+          <p:cNvSpPr/>
+          <p:nvPr/>
+        </p:nvSpPr>
+        <p:spPr>
+          <a:xfrm>
+            <a:off x="8074152" y="4023360"/>
+            <a:ext cx="2825496" cy="1097280"/>
           </a:xfrm>
           <a:prstGeom prst="rect">
             <a:avLst/>
@@ -5834,7 +6012,7 @@
               <a:buNone/>
             </a:pPr>
             <a:r>
-              <a:rPr lang="en-US" sz="1250" dirty="0">
+              <a:rPr lang="en-US" sz="1550" dirty="0">
                 <a:solidFill>
                   <a:srgbClr val="17364A"/>
                 </a:solidFill>
@@ -5844,7 +6022,7 @@
               </a:rPr>
               <a:t>Connect the concept to public health decisions, safeguards, documentation, or implementation work.</a:t>
             </a:r>
-            <a:endParaRPr lang="en-US" sz="1250" dirty="0"/>
+            <a:endParaRPr lang="en-US" sz="1550" dirty="0"/>
           </a:p>
         </p:txBody>
       </p:sp>
@@ -6041,7 +6219,7 @@
                 <a:ea typeface="Aptos" pitchFamily="34" charset="-122"/>
                 <a:cs typeface="Aptos" pitchFamily="34" charset="-120"/>
               </a:rPr>
-              <a:t>© Paula Soper</a:t>
+              <a:t>Â© Paula Soper</a:t>
             </a:r>
             <a:endParaRPr lang="en-US" sz="800" dirty="0"/>
           </a:p>
@@ -6049,7 +6227,46 @@
       </p:sp>
       <p:sp>
         <p:nvSpPr>
-          <p:cNvPr id="7" name="Shape 5"/>
+          <p:cNvPr id="7" name="Text 5"/>
+          <p:cNvSpPr/>
+          <p:nvPr/>
+        </p:nvSpPr>
+        <p:spPr>
+          <a:xfrm>
+            <a:off x="11137392" y="6510528"/>
+            <a:ext cx="411480" cy="201168"/>
+          </a:xfrm>
+          <a:prstGeom prst="rect">
+            <a:avLst/>
+          </a:prstGeom>
+          <a:noFill/>
+          <a:ln/>
+        </p:spPr>
+        <p:txBody>
+          <a:bodyPr wrap="square" lIns="0" tIns="0" rIns="0" bIns="0" rtlCol="0" anchor="ctr"/>
+          <a:lstStyle/>
+          <a:p>
+            <a:pPr algn="r" indent="0" marL="0">
+              <a:buNone/>
+            </a:pPr>
+            <a:r>
+              <a:rPr lang="en-US" sz="900" dirty="0">
+                <a:solidFill>
+                  <a:srgbClr val="5F7181"/>
+                </a:solidFill>
+                <a:latin typeface="Aptos" pitchFamily="34" charset="0"/>
+                <a:ea typeface="Aptos" pitchFamily="34" charset="-122"/>
+                <a:cs typeface="Aptos" pitchFamily="34" charset="-120"/>
+              </a:rPr>
+              <a:t>15</a:t>
+            </a:r>
+            <a:endParaRPr lang="en-US" sz="900" dirty="0"/>
+          </a:p>
+        </p:txBody>
+      </p:sp>
+      <p:sp>
+        <p:nvSpPr>
+          <p:cNvPr id="8" name="Shape 6"/>
           <p:cNvSpPr/>
           <p:nvPr/>
         </p:nvSpPr>
@@ -6074,7 +6291,7 @@
       </p:sp>
       <p:sp>
         <p:nvSpPr>
-          <p:cNvPr id="8" name="Text 6"/>
+          <p:cNvPr id="9" name="Text 7"/>
           <p:cNvSpPr/>
           <p:nvPr/>
         </p:nvSpPr>
@@ -6113,14 +6330,14 @@
       </p:sp>
       <p:sp>
         <p:nvSpPr>
-          <p:cNvPr id="9" name="Text 7"/>
+          <p:cNvPr id="10" name="Text 8"/>
           <p:cNvSpPr/>
           <p:nvPr/>
         </p:nvSpPr>
         <p:spPr>
           <a:xfrm>
             <a:off x="640080" y="621792"/>
-            <a:ext cx="10881360" cy="566928"/>
+            <a:ext cx="10881360" cy="713232"/>
           </a:xfrm>
           <a:prstGeom prst="rect">
             <a:avLst/>
@@ -6138,7 +6355,7 @@
               <a:buNone/>
             </a:pPr>
             <a:r>
-              <a:rPr lang="en-US" sz="2700" b="1" dirty="0">
+              <a:rPr lang="en-US" sz="3400" b="1" dirty="0">
                 <a:solidFill>
                   <a:srgbClr val="003A63"/>
                 </a:solidFill>
@@ -6148,20 +6365,20 @@
               </a:rPr>
               <a:t>Reflection Questions</a:t>
             </a:r>
-            <a:endParaRPr lang="en-US" sz="2700" dirty="0"/>
-          </a:p>
-        </p:txBody>
-      </p:sp>
-      <p:sp>
-        <p:nvSpPr>
-          <p:cNvPr id="10" name="Text 8"/>
-          <p:cNvSpPr/>
-          <p:nvPr/>
-        </p:nvSpPr>
-        <p:spPr>
-          <a:xfrm>
-            <a:off x="868680" y="1417320"/>
-            <a:ext cx="6675120" cy="4434840"/>
+            <a:endParaRPr lang="en-US" sz="3400" dirty="0"/>
+          </a:p>
+        </p:txBody>
+      </p:sp>
+      <p:sp>
+        <p:nvSpPr>
+          <p:cNvPr id="11" name="Text 9"/>
+          <p:cNvSpPr/>
+          <p:nvPr/>
+        </p:nvSpPr>
+        <p:spPr>
+          <a:xfrm>
+            <a:off x="868680" y="1508760"/>
+            <a:ext cx="6537960" cy="4160520"/>
           </a:xfrm>
           <a:prstGeom prst="rect">
             <a:avLst/>
@@ -6176,7 +6393,7 @@
           <a:lstStyle/>
           <a:p>
             <a:r>
-              <a:rPr lang="en-US" sz="1700" dirty="0">
+              <a:rPr lang="en-US" sz="2100" dirty="0">
                 <a:solidFill>
                   <a:srgbClr val="17364A"/>
                 </a:solidFill>
@@ -6186,11 +6403,11 @@
               </a:rPr>
               <a:t>What public health problem would this AI use address?</a:t>
             </a:r>
-            <a:endParaRPr lang="en-US" sz="1700" dirty="0"/>
-          </a:p>
-          <a:p>
-            <a:r>
-              <a:rPr lang="en-US" sz="1700" dirty="0">
+            <a:endParaRPr lang="en-US" sz="2100" dirty="0"/>
+          </a:p>
+          <a:p>
+            <a:r>
+              <a:rPr lang="en-US" sz="2100" dirty="0">
                 <a:solidFill>
                   <a:srgbClr val="17364A"/>
                 </a:solidFill>
@@ -6200,11 +6417,11 @@
               </a:rPr>
               <a:t>Who would benefit, and who could be excluded or harmed?</a:t>
             </a:r>
-            <a:endParaRPr lang="en-US" sz="1700" dirty="0"/>
-          </a:p>
-          <a:p>
-            <a:r>
-              <a:rPr lang="en-US" sz="1700" dirty="0">
+            <a:endParaRPr lang="en-US" sz="2100" dirty="0"/>
+          </a:p>
+          <a:p>
+            <a:r>
+              <a:rPr lang="en-US" sz="2100" dirty="0">
                 <a:solidFill>
                   <a:srgbClr val="17364A"/>
                 </a:solidFill>
@@ -6214,13 +6431,13 @@
               </a:rPr>
               <a:t>How were affected communities involved in defining the need and safeguards?</a:t>
             </a:r>
-            <a:endParaRPr lang="en-US" sz="1700" dirty="0"/>
-          </a:p>
-        </p:txBody>
-      </p:sp>
-      <p:sp>
-        <p:nvSpPr>
-          <p:cNvPr id="11" name="Shape 9"/>
+            <a:endParaRPr lang="en-US" sz="2100" dirty="0"/>
+          </a:p>
+        </p:txBody>
+      </p:sp>
+      <p:sp>
+        <p:nvSpPr>
+          <p:cNvPr id="12" name="Shape 10"/>
           <p:cNvSpPr/>
           <p:nvPr/>
         </p:nvSpPr>
@@ -6247,14 +6464,14 @@
       </p:sp>
       <p:sp>
         <p:nvSpPr>
-          <p:cNvPr id="12" name="Text 10"/>
+          <p:cNvPr id="13" name="Text 11"/>
           <p:cNvSpPr/>
           <p:nvPr/>
         </p:nvSpPr>
         <p:spPr>
           <a:xfrm>
             <a:off x="8074152" y="1563624"/>
-            <a:ext cx="2825496" cy="201168"/>
+            <a:ext cx="2825496" cy="256032"/>
           </a:xfrm>
           <a:prstGeom prst="rect">
             <a:avLst/>
@@ -6270,7 +6487,7 @@
               <a:buNone/>
             </a:pPr>
             <a:r>
-              <a:rPr lang="en-US" sz="950" b="1" dirty="0">
+              <a:rPr lang="en-US" sz="1300" b="1" dirty="0">
                 <a:solidFill>
                   <a:srgbClr val="0068B7"/>
                 </a:solidFill>
@@ -6280,20 +6497,20 @@
               </a:rPr>
               <a:t>Key idea</a:t>
             </a:r>
-            <a:endParaRPr lang="en-US" sz="950" dirty="0"/>
-          </a:p>
-        </p:txBody>
-      </p:sp>
-      <p:sp>
-        <p:nvSpPr>
-          <p:cNvPr id="13" name="Text 11"/>
-          <p:cNvSpPr/>
-          <p:nvPr/>
-        </p:nvSpPr>
-        <p:spPr>
-          <a:xfrm>
-            <a:off x="8074152" y="1856232"/>
-            <a:ext cx="2825496" cy="1261872"/>
+            <a:endParaRPr lang="en-US" sz="1300" dirty="0"/>
+          </a:p>
+        </p:txBody>
+      </p:sp>
+      <p:sp>
+        <p:nvSpPr>
+          <p:cNvPr id="14" name="Text 12"/>
+          <p:cNvSpPr/>
+          <p:nvPr/>
+        </p:nvSpPr>
+        <p:spPr>
+          <a:xfrm>
+            <a:off x="8074152" y="1920240"/>
+            <a:ext cx="2825496" cy="1188720"/>
           </a:xfrm>
           <a:prstGeom prst="rect">
             <a:avLst/>
@@ -6311,7 +6528,7 @@
               <a:buNone/>
             </a:pPr>
             <a:r>
-              <a:rPr lang="en-US" sz="1250" dirty="0">
+              <a:rPr lang="en-US" sz="1550" dirty="0">
                 <a:solidFill>
                   <a:srgbClr val="17364A"/>
                 </a:solidFill>
@@ -6321,13 +6538,13 @@
               </a:rPr>
               <a:t>What public health problem would this AI use address?</a:t>
             </a:r>
-            <a:endParaRPr lang="en-US" sz="1250" dirty="0"/>
-          </a:p>
-        </p:txBody>
-      </p:sp>
-      <p:sp>
-        <p:nvSpPr>
-          <p:cNvPr id="14" name="Shape 12"/>
+            <a:endParaRPr lang="en-US" sz="1550" dirty="0"/>
+          </a:p>
+        </p:txBody>
+      </p:sp>
+      <p:sp>
+        <p:nvSpPr>
+          <p:cNvPr id="15" name="Shape 13"/>
           <p:cNvSpPr/>
           <p:nvPr/>
         </p:nvSpPr>
@@ -6354,14 +6571,14 @@
       </p:sp>
       <p:sp>
         <p:nvSpPr>
-          <p:cNvPr id="15" name="Text 13"/>
+          <p:cNvPr id="16" name="Text 14"/>
           <p:cNvSpPr/>
           <p:nvPr/>
         </p:nvSpPr>
         <p:spPr>
           <a:xfrm>
             <a:off x="8074152" y="3666744"/>
-            <a:ext cx="2825496" cy="201168"/>
+            <a:ext cx="2825496" cy="256032"/>
           </a:xfrm>
           <a:prstGeom prst="rect">
             <a:avLst/>
@@ -6377,7 +6594,7 @@
               <a:buNone/>
             </a:pPr>
             <a:r>
-              <a:rPr lang="en-US" sz="950" b="1" dirty="0">
+              <a:rPr lang="en-US" sz="1300" b="1" dirty="0">
                 <a:solidFill>
                   <a:srgbClr val="0068B7"/>
                 </a:solidFill>
@@ -6387,20 +6604,20 @@
               </a:rPr>
               <a:t>Use this for</a:t>
             </a:r>
-            <a:endParaRPr lang="en-US" sz="950" dirty="0"/>
-          </a:p>
-        </p:txBody>
-      </p:sp>
-      <p:sp>
-        <p:nvSpPr>
-          <p:cNvPr id="16" name="Text 14"/>
-          <p:cNvSpPr/>
-          <p:nvPr/>
-        </p:nvSpPr>
-        <p:spPr>
-          <a:xfrm>
-            <a:off x="8074152" y="3959352"/>
-            <a:ext cx="2825496" cy="1170432"/>
+            <a:endParaRPr lang="en-US" sz="1300" dirty="0"/>
+          </a:p>
+        </p:txBody>
+      </p:sp>
+      <p:sp>
+        <p:nvSpPr>
+          <p:cNvPr id="17" name="Text 15"/>
+          <p:cNvSpPr/>
+          <p:nvPr/>
+        </p:nvSpPr>
+        <p:spPr>
+          <a:xfrm>
+            <a:off x="8074152" y="4023360"/>
+            <a:ext cx="2825496" cy="1097280"/>
           </a:xfrm>
           <a:prstGeom prst="rect">
             <a:avLst/>
@@ -6418,7 +6635,7 @@
               <a:buNone/>
             </a:pPr>
             <a:r>
-              <a:rPr lang="en-US" sz="1250" dirty="0">
+              <a:rPr lang="en-US" sz="1550" dirty="0">
                 <a:solidFill>
                   <a:srgbClr val="17364A"/>
                 </a:solidFill>
@@ -6428,7 +6645,7 @@
               </a:rPr>
               <a:t>Connect the concept to public health decisions, safeguards, documentation, or implementation work.</a:t>
             </a:r>
-            <a:endParaRPr lang="en-US" sz="1250" dirty="0"/>
+            <a:endParaRPr lang="en-US" sz="1550" dirty="0"/>
           </a:p>
         </p:txBody>
       </p:sp>
@@ -6625,7 +6842,7 @@
                 <a:ea typeface="Aptos" pitchFamily="34" charset="-122"/>
                 <a:cs typeface="Aptos" pitchFamily="34" charset="-120"/>
               </a:rPr>
-              <a:t>© Paula Soper</a:t>
+              <a:t>Â© Paula Soper</a:t>
             </a:r>
             <a:endParaRPr lang="en-US" sz="800" dirty="0"/>
           </a:p>
@@ -6639,8 +6856,47 @@
         </p:nvSpPr>
         <p:spPr>
           <a:xfrm>
+            <a:off x="11137392" y="6510528"/>
+            <a:ext cx="411480" cy="201168"/>
+          </a:xfrm>
+          <a:prstGeom prst="rect">
+            <a:avLst/>
+          </a:prstGeom>
+          <a:noFill/>
+          <a:ln/>
+        </p:spPr>
+        <p:txBody>
+          <a:bodyPr wrap="square" lIns="0" tIns="0" rIns="0" bIns="0" rtlCol="0" anchor="ctr"/>
+          <a:lstStyle/>
+          <a:p>
+            <a:pPr algn="r" indent="0" marL="0">
+              <a:buNone/>
+            </a:pPr>
+            <a:r>
+              <a:rPr lang="en-US" sz="900" dirty="0">
+                <a:solidFill>
+                  <a:srgbClr val="5F7181"/>
+                </a:solidFill>
+                <a:latin typeface="Aptos" pitchFamily="34" charset="0"/>
+                <a:ea typeface="Aptos" pitchFamily="34" charset="-122"/>
+                <a:cs typeface="Aptos" pitchFamily="34" charset="-120"/>
+              </a:rPr>
+              <a:t>16</a:t>
+            </a:r>
+            <a:endParaRPr lang="en-US" sz="900" dirty="0"/>
+          </a:p>
+        </p:txBody>
+      </p:sp>
+      <p:sp>
+        <p:nvSpPr>
+          <p:cNvPr id="8" name="Text 6"/>
+          <p:cNvSpPr/>
+          <p:nvPr/>
+        </p:nvSpPr>
+        <p:spPr>
+          <a:xfrm>
             <a:off x="640080" y="658368"/>
-            <a:ext cx="10881360" cy="566928"/>
+            <a:ext cx="10881360" cy="713232"/>
           </a:xfrm>
           <a:prstGeom prst="rect">
             <a:avLst/>
@@ -6658,7 +6914,7 @@
               <a:buNone/>
             </a:pPr>
             <a:r>
-              <a:rPr lang="en-US" sz="2700" b="1" dirty="0">
+              <a:rPr lang="en-US" sz="3400" b="1" dirty="0">
                 <a:solidFill>
                   <a:srgbClr val="003A63"/>
                 </a:solidFill>
@@ -6668,20 +6924,20 @@
               </a:rPr>
               <a:t>Reflection Questions Continued</a:t>
             </a:r>
-            <a:endParaRPr lang="en-US" sz="2700" dirty="0"/>
-          </a:p>
-        </p:txBody>
-      </p:sp>
-      <p:sp>
-        <p:nvSpPr>
-          <p:cNvPr id="8" name="Text 6"/>
-          <p:cNvSpPr/>
-          <p:nvPr/>
-        </p:nvSpPr>
-        <p:spPr>
-          <a:xfrm>
-            <a:off x="868680" y="1417320"/>
-            <a:ext cx="6675120" cy="4434840"/>
+            <a:endParaRPr lang="en-US" sz="3400" dirty="0"/>
+          </a:p>
+        </p:txBody>
+      </p:sp>
+      <p:sp>
+        <p:nvSpPr>
+          <p:cNvPr id="9" name="Text 7"/>
+          <p:cNvSpPr/>
+          <p:nvPr/>
+        </p:nvSpPr>
+        <p:spPr>
+          <a:xfrm>
+            <a:off x="868680" y="1508760"/>
+            <a:ext cx="6537960" cy="4160520"/>
           </a:xfrm>
           <a:prstGeom prst="rect">
             <a:avLst/>
@@ -6696,7 +6952,7 @@
           <a:lstStyle/>
           <a:p>
             <a:r>
-              <a:rPr lang="en-US" sz="1700" dirty="0">
+              <a:rPr lang="en-US" sz="2100" dirty="0">
                 <a:solidFill>
                   <a:srgbClr val="17364A"/>
                 </a:solidFill>
@@ -6706,11 +6962,11 @@
               </a:rPr>
               <a:t>What non-AI alternatives should be considered?</a:t>
             </a:r>
-            <a:endParaRPr lang="en-US" sz="1700" dirty="0"/>
-          </a:p>
-          <a:p>
-            <a:r>
-              <a:rPr lang="en-US" sz="1700" dirty="0">
+            <a:endParaRPr lang="en-US" sz="2100" dirty="0"/>
+          </a:p>
+          <a:p>
+            <a:r>
+              <a:rPr lang="en-US" sz="2100" dirty="0">
                 <a:solidFill>
                   <a:srgbClr val="17364A"/>
                 </a:solidFill>
@@ -6720,13 +6976,13 @@
               </a:rPr>
               <a:t>How will the agency measure public value, equity, trust, and unintended consequences?</a:t>
             </a:r>
-            <a:endParaRPr lang="en-US" sz="1700" dirty="0"/>
-          </a:p>
-        </p:txBody>
-      </p:sp>
-      <p:sp>
-        <p:nvSpPr>
-          <p:cNvPr id="9" name="Shape 7"/>
+            <a:endParaRPr lang="en-US" sz="2100" dirty="0"/>
+          </a:p>
+        </p:txBody>
+      </p:sp>
+      <p:sp>
+        <p:nvSpPr>
+          <p:cNvPr id="10" name="Shape 8"/>
           <p:cNvSpPr/>
           <p:nvPr/>
         </p:nvSpPr>
@@ -6753,14 +7009,14 @@
       </p:sp>
       <p:sp>
         <p:nvSpPr>
-          <p:cNvPr id="10" name="Text 8"/>
+          <p:cNvPr id="11" name="Text 9"/>
           <p:cNvSpPr/>
           <p:nvPr/>
         </p:nvSpPr>
         <p:spPr>
           <a:xfrm>
             <a:off x="8074152" y="1563624"/>
-            <a:ext cx="2825496" cy="201168"/>
+            <a:ext cx="2825496" cy="256032"/>
           </a:xfrm>
           <a:prstGeom prst="rect">
             <a:avLst/>
@@ -6776,7 +7032,7 @@
               <a:buNone/>
             </a:pPr>
             <a:r>
-              <a:rPr lang="en-US" sz="950" b="1" dirty="0">
+              <a:rPr lang="en-US" sz="1300" b="1" dirty="0">
                 <a:solidFill>
                   <a:srgbClr val="0068B7"/>
                 </a:solidFill>
@@ -6786,20 +7042,20 @@
               </a:rPr>
               <a:t>Key idea</a:t>
             </a:r>
-            <a:endParaRPr lang="en-US" sz="950" dirty="0"/>
-          </a:p>
-        </p:txBody>
-      </p:sp>
-      <p:sp>
-        <p:nvSpPr>
-          <p:cNvPr id="11" name="Text 9"/>
-          <p:cNvSpPr/>
-          <p:nvPr/>
-        </p:nvSpPr>
-        <p:spPr>
-          <a:xfrm>
-            <a:off x="8074152" y="1856232"/>
-            <a:ext cx="2825496" cy="1261872"/>
+            <a:endParaRPr lang="en-US" sz="1300" dirty="0"/>
+          </a:p>
+        </p:txBody>
+      </p:sp>
+      <p:sp>
+        <p:nvSpPr>
+          <p:cNvPr id="12" name="Text 10"/>
+          <p:cNvSpPr/>
+          <p:nvPr/>
+        </p:nvSpPr>
+        <p:spPr>
+          <a:xfrm>
+            <a:off x="8074152" y="1920240"/>
+            <a:ext cx="2825496" cy="1188720"/>
           </a:xfrm>
           <a:prstGeom prst="rect">
             <a:avLst/>
@@ -6817,7 +7073,7 @@
               <a:buNone/>
             </a:pPr>
             <a:r>
-              <a:rPr lang="en-US" sz="1250" dirty="0">
+              <a:rPr lang="en-US" sz="1550" dirty="0">
                 <a:solidFill>
                   <a:srgbClr val="17364A"/>
                 </a:solidFill>
@@ -6827,13 +7083,13 @@
               </a:rPr>
               <a:t>What non-AI alternatives should be considered?</a:t>
             </a:r>
-            <a:endParaRPr lang="en-US" sz="1250" dirty="0"/>
-          </a:p>
-        </p:txBody>
-      </p:sp>
-      <p:sp>
-        <p:nvSpPr>
-          <p:cNvPr id="12" name="Shape 10"/>
+            <a:endParaRPr lang="en-US" sz="1550" dirty="0"/>
+          </a:p>
+        </p:txBody>
+      </p:sp>
+      <p:sp>
+        <p:nvSpPr>
+          <p:cNvPr id="13" name="Shape 11"/>
           <p:cNvSpPr/>
           <p:nvPr/>
         </p:nvSpPr>
@@ -6860,14 +7116,14 @@
       </p:sp>
       <p:sp>
         <p:nvSpPr>
-          <p:cNvPr id="13" name="Text 11"/>
+          <p:cNvPr id="14" name="Text 12"/>
           <p:cNvSpPr/>
           <p:nvPr/>
         </p:nvSpPr>
         <p:spPr>
           <a:xfrm>
             <a:off x="8074152" y="3666744"/>
-            <a:ext cx="2825496" cy="201168"/>
+            <a:ext cx="2825496" cy="256032"/>
           </a:xfrm>
           <a:prstGeom prst="rect">
             <a:avLst/>
@@ -6883,7 +7139,7 @@
               <a:buNone/>
             </a:pPr>
             <a:r>
-              <a:rPr lang="en-US" sz="950" b="1" dirty="0">
+              <a:rPr lang="en-US" sz="1300" b="1" dirty="0">
                 <a:solidFill>
                   <a:srgbClr val="0068B7"/>
                 </a:solidFill>
@@ -6893,20 +7149,20 @@
               </a:rPr>
               <a:t>Use this for</a:t>
             </a:r>
-            <a:endParaRPr lang="en-US" sz="950" dirty="0"/>
-          </a:p>
-        </p:txBody>
-      </p:sp>
-      <p:sp>
-        <p:nvSpPr>
-          <p:cNvPr id="14" name="Text 12"/>
-          <p:cNvSpPr/>
-          <p:nvPr/>
-        </p:nvSpPr>
-        <p:spPr>
-          <a:xfrm>
-            <a:off x="8074152" y="3959352"/>
-            <a:ext cx="2825496" cy="1170432"/>
+            <a:endParaRPr lang="en-US" sz="1300" dirty="0"/>
+          </a:p>
+        </p:txBody>
+      </p:sp>
+      <p:sp>
+        <p:nvSpPr>
+          <p:cNvPr id="15" name="Text 13"/>
+          <p:cNvSpPr/>
+          <p:nvPr/>
+        </p:nvSpPr>
+        <p:spPr>
+          <a:xfrm>
+            <a:off x="8074152" y="4023360"/>
+            <a:ext cx="2825496" cy="1097280"/>
           </a:xfrm>
           <a:prstGeom prst="rect">
             <a:avLst/>
@@ -6924,7 +7180,7 @@
               <a:buNone/>
             </a:pPr>
             <a:r>
-              <a:rPr lang="en-US" sz="1250" dirty="0">
+              <a:rPr lang="en-US" sz="1550" dirty="0">
                 <a:solidFill>
                   <a:srgbClr val="17364A"/>
                 </a:solidFill>
@@ -6934,7 +7190,7 @@
               </a:rPr>
               <a:t>Connect the concept to public health decisions, safeguards, documentation, or implementation work.</a:t>
             </a:r>
-            <a:endParaRPr lang="en-US" sz="1250" dirty="0"/>
+            <a:endParaRPr lang="en-US" sz="1550" dirty="0"/>
           </a:p>
         </p:txBody>
       </p:sp>
@@ -7131,7 +7387,7 @@
                 <a:ea typeface="Aptos" pitchFamily="34" charset="-122"/>
                 <a:cs typeface="Aptos" pitchFamily="34" charset="-120"/>
               </a:rPr>
-              <a:t>© Paula Soper</a:t>
+              <a:t>Â© Paula Soper</a:t>
             </a:r>
             <a:endParaRPr lang="en-US" sz="800" dirty="0"/>
           </a:p>
@@ -7139,7 +7395,46 @@
       </p:sp>
       <p:sp>
         <p:nvSpPr>
-          <p:cNvPr id="7" name="Shape 5"/>
+          <p:cNvPr id="7" name="Text 5"/>
+          <p:cNvSpPr/>
+          <p:nvPr/>
+        </p:nvSpPr>
+        <p:spPr>
+          <a:xfrm>
+            <a:off x="11137392" y="6510528"/>
+            <a:ext cx="411480" cy="201168"/>
+          </a:xfrm>
+          <a:prstGeom prst="rect">
+            <a:avLst/>
+          </a:prstGeom>
+          <a:noFill/>
+          <a:ln/>
+        </p:spPr>
+        <p:txBody>
+          <a:bodyPr wrap="square" lIns="0" tIns="0" rIns="0" bIns="0" rtlCol="0" anchor="ctr"/>
+          <a:lstStyle/>
+          <a:p>
+            <a:pPr algn="r" indent="0" marL="0">
+              <a:buNone/>
+            </a:pPr>
+            <a:r>
+              <a:rPr lang="en-US" sz="900" dirty="0">
+                <a:solidFill>
+                  <a:srgbClr val="5F7181"/>
+                </a:solidFill>
+                <a:latin typeface="Aptos" pitchFamily="34" charset="0"/>
+                <a:ea typeface="Aptos" pitchFamily="34" charset="-122"/>
+                <a:cs typeface="Aptos" pitchFamily="34" charset="-120"/>
+              </a:rPr>
+              <a:t>17</a:t>
+            </a:r>
+            <a:endParaRPr lang="en-US" sz="900" dirty="0"/>
+          </a:p>
+        </p:txBody>
+      </p:sp>
+      <p:sp>
+        <p:nvSpPr>
+          <p:cNvPr id="8" name="Shape 6"/>
           <p:cNvSpPr/>
           <p:nvPr/>
         </p:nvSpPr>
@@ -7164,7 +7459,7 @@
       </p:sp>
       <p:sp>
         <p:nvSpPr>
-          <p:cNvPr id="8" name="Text 6"/>
+          <p:cNvPr id="9" name="Text 7"/>
           <p:cNvSpPr/>
           <p:nvPr/>
         </p:nvSpPr>
@@ -7203,14 +7498,14 @@
       </p:sp>
       <p:sp>
         <p:nvSpPr>
-          <p:cNvPr id="9" name="Text 7"/>
+          <p:cNvPr id="10" name="Text 8"/>
           <p:cNvSpPr/>
           <p:nvPr/>
         </p:nvSpPr>
         <p:spPr>
           <a:xfrm>
             <a:off x="640080" y="621792"/>
-            <a:ext cx="10881360" cy="566928"/>
+            <a:ext cx="10881360" cy="713232"/>
           </a:xfrm>
           <a:prstGeom prst="rect">
             <a:avLst/>
@@ -7228,7 +7523,7 @@
               <a:buNone/>
             </a:pPr>
             <a:r>
-              <a:rPr lang="en-US" sz="2700" b="1" dirty="0">
+              <a:rPr lang="en-US" sz="3400" b="1" dirty="0">
                 <a:solidFill>
                   <a:srgbClr val="003A63"/>
                 </a:solidFill>
@@ -7238,20 +7533,20 @@
               </a:rPr>
               <a:t>Practical Exercise</a:t>
             </a:r>
-            <a:endParaRPr lang="en-US" sz="2700" dirty="0"/>
-          </a:p>
-        </p:txBody>
-      </p:sp>
-      <p:sp>
-        <p:nvSpPr>
-          <p:cNvPr id="10" name="Text 8"/>
-          <p:cNvSpPr/>
-          <p:nvPr/>
-        </p:nvSpPr>
-        <p:spPr>
-          <a:xfrm>
-            <a:off x="868680" y="1417320"/>
-            <a:ext cx="6675120" cy="4434840"/>
+            <a:endParaRPr lang="en-US" sz="3400" dirty="0"/>
+          </a:p>
+        </p:txBody>
+      </p:sp>
+      <p:sp>
+        <p:nvSpPr>
+          <p:cNvPr id="11" name="Text 9"/>
+          <p:cNvSpPr/>
+          <p:nvPr/>
+        </p:nvSpPr>
+        <p:spPr>
+          <a:xfrm>
+            <a:off x="868680" y="1508760"/>
+            <a:ext cx="6537960" cy="4160520"/>
           </a:xfrm>
           <a:prstGeom prst="rect">
             <a:avLst/>
@@ -7266,7 +7561,7 @@
           <a:lstStyle/>
           <a:p>
             <a:r>
-              <a:rPr lang="en-US" sz="1700" dirty="0">
+              <a:rPr lang="en-US" sz="2100" dirty="0">
                 <a:solidFill>
                   <a:srgbClr val="17364A"/>
                 </a:solidFill>
@@ -7276,11 +7571,11 @@
               </a:rPr>
               <a:t>Create an AI for Social Good review brief for one public health use case.</a:t>
             </a:r>
-            <a:endParaRPr lang="en-US" sz="1700" dirty="0"/>
-          </a:p>
-          <a:p>
-            <a:r>
-              <a:rPr lang="en-US" sz="1700" dirty="0">
+            <a:endParaRPr lang="en-US" sz="2100" dirty="0"/>
+          </a:p>
+          <a:p>
+            <a:r>
+              <a:rPr lang="en-US" sz="2100" dirty="0">
                 <a:solidFill>
                   <a:srgbClr val="17364A"/>
                 </a:solidFill>
@@ -7288,13 +7583,13 @@
                 <a:ea typeface="Aptos" pitchFamily="34" charset="-122"/>
                 <a:cs typeface="Aptos" pitchFamily="34" charset="-120"/>
               </a:rPr>
-              <a:t>The brief should define the public health problem, intended public benefit, affected communities, equity considerations,.</a:t>
-            </a:r>
-            <a:endParaRPr lang="en-US" sz="1700" dirty="0"/>
-          </a:p>
-          <a:p>
-            <a:r>
-              <a:rPr lang="en-US" sz="1700" dirty="0">
+              <a:t>The brief should define the public health problem, intended public benefit, affected communities,.</a:t>
+            </a:r>
+            <a:endParaRPr lang="en-US" sz="2100" dirty="0"/>
+          </a:p>
+          <a:p>
+            <a:r>
+              <a:rPr lang="en-US" sz="2100" dirty="0">
                 <a:solidFill>
                   <a:srgbClr val="17364A"/>
                 </a:solidFill>
@@ -7302,15 +7597,15 @@
                 <a:ea typeface="Aptos" pitchFamily="34" charset="-122"/>
                 <a:cs typeface="Aptos" pitchFamily="34" charset="-120"/>
               </a:rPr>
-              <a:t>The exercise should result in a decision-support document that helps leaders and governance reviewers determine whether the.</a:t>
-            </a:r>
-            <a:endParaRPr lang="en-US" sz="1700" dirty="0"/>
-          </a:p>
-        </p:txBody>
-      </p:sp>
-      <p:sp>
-        <p:nvSpPr>
-          <p:cNvPr id="11" name="Shape 9"/>
+              <a:t>The exercise should result in a decision-support document that helps leaders and governance reviewers.</a:t>
+            </a:r>
+            <a:endParaRPr lang="en-US" sz="2100" dirty="0"/>
+          </a:p>
+        </p:txBody>
+      </p:sp>
+      <p:sp>
+        <p:nvSpPr>
+          <p:cNvPr id="12" name="Shape 10"/>
           <p:cNvSpPr/>
           <p:nvPr/>
         </p:nvSpPr>
@@ -7337,14 +7632,14 @@
       </p:sp>
       <p:sp>
         <p:nvSpPr>
-          <p:cNvPr id="12" name="Text 10"/>
+          <p:cNvPr id="13" name="Text 11"/>
           <p:cNvSpPr/>
           <p:nvPr/>
         </p:nvSpPr>
         <p:spPr>
           <a:xfrm>
             <a:off x="8074152" y="1563624"/>
-            <a:ext cx="2825496" cy="201168"/>
+            <a:ext cx="2825496" cy="256032"/>
           </a:xfrm>
           <a:prstGeom prst="rect">
             <a:avLst/>
@@ -7360,7 +7655,7 @@
               <a:buNone/>
             </a:pPr>
             <a:r>
-              <a:rPr lang="en-US" sz="950" b="1" dirty="0">
+              <a:rPr lang="en-US" sz="1300" b="1" dirty="0">
                 <a:solidFill>
                   <a:srgbClr val="0068B7"/>
                 </a:solidFill>
@@ -7370,20 +7665,20 @@
               </a:rPr>
               <a:t>Key idea</a:t>
             </a:r>
-            <a:endParaRPr lang="en-US" sz="950" dirty="0"/>
-          </a:p>
-        </p:txBody>
-      </p:sp>
-      <p:sp>
-        <p:nvSpPr>
-          <p:cNvPr id="13" name="Text 11"/>
-          <p:cNvSpPr/>
-          <p:nvPr/>
-        </p:nvSpPr>
-        <p:spPr>
-          <a:xfrm>
-            <a:off x="8074152" y="1856232"/>
-            <a:ext cx="2825496" cy="1261872"/>
+            <a:endParaRPr lang="en-US" sz="1300" dirty="0"/>
+          </a:p>
+        </p:txBody>
+      </p:sp>
+      <p:sp>
+        <p:nvSpPr>
+          <p:cNvPr id="14" name="Text 12"/>
+          <p:cNvSpPr/>
+          <p:nvPr/>
+        </p:nvSpPr>
+        <p:spPr>
+          <a:xfrm>
+            <a:off x="8074152" y="1920240"/>
+            <a:ext cx="2825496" cy="1188720"/>
           </a:xfrm>
           <a:prstGeom prst="rect">
             <a:avLst/>
@@ -7401,7 +7696,7 @@
               <a:buNone/>
             </a:pPr>
             <a:r>
-              <a:rPr lang="en-US" sz="1250" dirty="0">
+              <a:rPr lang="en-US" sz="1550" dirty="0">
                 <a:solidFill>
                   <a:srgbClr val="17364A"/>
                 </a:solidFill>
@@ -7411,13 +7706,13 @@
               </a:rPr>
               <a:t>Create an AI for Social Good review brief for one public health use case.</a:t>
             </a:r>
-            <a:endParaRPr lang="en-US" sz="1250" dirty="0"/>
-          </a:p>
-        </p:txBody>
-      </p:sp>
-      <p:sp>
-        <p:nvSpPr>
-          <p:cNvPr id="14" name="Shape 12"/>
+            <a:endParaRPr lang="en-US" sz="1550" dirty="0"/>
+          </a:p>
+        </p:txBody>
+      </p:sp>
+      <p:sp>
+        <p:nvSpPr>
+          <p:cNvPr id="15" name="Shape 13"/>
           <p:cNvSpPr/>
           <p:nvPr/>
         </p:nvSpPr>
@@ -7444,14 +7739,14 @@
       </p:sp>
       <p:sp>
         <p:nvSpPr>
-          <p:cNvPr id="15" name="Text 13"/>
+          <p:cNvPr id="16" name="Text 14"/>
           <p:cNvSpPr/>
           <p:nvPr/>
         </p:nvSpPr>
         <p:spPr>
           <a:xfrm>
             <a:off x="8074152" y="3666744"/>
-            <a:ext cx="2825496" cy="201168"/>
+            <a:ext cx="2825496" cy="256032"/>
           </a:xfrm>
           <a:prstGeom prst="rect">
             <a:avLst/>
@@ -7467,7 +7762,7 @@
               <a:buNone/>
             </a:pPr>
             <a:r>
-              <a:rPr lang="en-US" sz="950" b="1" dirty="0">
+              <a:rPr lang="en-US" sz="1300" b="1" dirty="0">
                 <a:solidFill>
                   <a:srgbClr val="0068B7"/>
                 </a:solidFill>
@@ -7477,20 +7772,20 @@
               </a:rPr>
               <a:t>Use this for</a:t>
             </a:r>
-            <a:endParaRPr lang="en-US" sz="950" dirty="0"/>
-          </a:p>
-        </p:txBody>
-      </p:sp>
-      <p:sp>
-        <p:nvSpPr>
-          <p:cNvPr id="16" name="Text 14"/>
-          <p:cNvSpPr/>
-          <p:nvPr/>
-        </p:nvSpPr>
-        <p:spPr>
-          <a:xfrm>
-            <a:off x="8074152" y="3959352"/>
-            <a:ext cx="2825496" cy="1170432"/>
+            <a:endParaRPr lang="en-US" sz="1300" dirty="0"/>
+          </a:p>
+        </p:txBody>
+      </p:sp>
+      <p:sp>
+        <p:nvSpPr>
+          <p:cNvPr id="17" name="Text 15"/>
+          <p:cNvSpPr/>
+          <p:nvPr/>
+        </p:nvSpPr>
+        <p:spPr>
+          <a:xfrm>
+            <a:off x="8074152" y="4023360"/>
+            <a:ext cx="2825496" cy="1097280"/>
           </a:xfrm>
           <a:prstGeom prst="rect">
             <a:avLst/>
@@ -7508,7 +7803,7 @@
               <a:buNone/>
             </a:pPr>
             <a:r>
-              <a:rPr lang="en-US" sz="1250" dirty="0">
+              <a:rPr lang="en-US" sz="1550" dirty="0">
                 <a:solidFill>
                   <a:srgbClr val="17364A"/>
                 </a:solidFill>
@@ -7518,7 +7813,7 @@
               </a:rPr>
               <a:t>Connect the concept to public health decisions, safeguards, documentation, or implementation work.</a:t>
             </a:r>
-            <a:endParaRPr lang="en-US" sz="1250" dirty="0"/>
+            <a:endParaRPr lang="en-US" sz="1550" dirty="0"/>
           </a:p>
         </p:txBody>
       </p:sp>
@@ -7715,7 +8010,7 @@
                 <a:ea typeface="Aptos" pitchFamily="34" charset="-122"/>
                 <a:cs typeface="Aptos" pitchFamily="34" charset="-120"/>
               </a:rPr>
-              <a:t>© Paula Soper</a:t>
+              <a:t>Â© Paula Soper</a:t>
             </a:r>
             <a:endParaRPr lang="en-US" sz="800" dirty="0"/>
           </a:p>
@@ -7723,7 +8018,46 @@
       </p:sp>
       <p:sp>
         <p:nvSpPr>
-          <p:cNvPr id="7" name="Shape 5"/>
+          <p:cNvPr id="7" name="Text 5"/>
+          <p:cNvSpPr/>
+          <p:nvPr/>
+        </p:nvSpPr>
+        <p:spPr>
+          <a:xfrm>
+            <a:off x="11137392" y="6510528"/>
+            <a:ext cx="411480" cy="201168"/>
+          </a:xfrm>
+          <a:prstGeom prst="rect">
+            <a:avLst/>
+          </a:prstGeom>
+          <a:noFill/>
+          <a:ln/>
+        </p:spPr>
+        <p:txBody>
+          <a:bodyPr wrap="square" lIns="0" tIns="0" rIns="0" bIns="0" rtlCol="0" anchor="ctr"/>
+          <a:lstStyle/>
+          <a:p>
+            <a:pPr algn="r" indent="0" marL="0">
+              <a:buNone/>
+            </a:pPr>
+            <a:r>
+              <a:rPr lang="en-US" sz="900" dirty="0">
+                <a:solidFill>
+                  <a:srgbClr val="5F7181"/>
+                </a:solidFill>
+                <a:latin typeface="Aptos" pitchFamily="34" charset="0"/>
+                <a:ea typeface="Aptos" pitchFamily="34" charset="-122"/>
+                <a:cs typeface="Aptos" pitchFamily="34" charset="-120"/>
+              </a:rPr>
+              <a:t>18</a:t>
+            </a:r>
+            <a:endParaRPr lang="en-US" sz="900" dirty="0"/>
+          </a:p>
+        </p:txBody>
+      </p:sp>
+      <p:sp>
+        <p:nvSpPr>
+          <p:cNvPr id="8" name="Shape 6"/>
           <p:cNvSpPr/>
           <p:nvPr/>
         </p:nvSpPr>
@@ -7748,7 +8082,7 @@
       </p:sp>
       <p:sp>
         <p:nvSpPr>
-          <p:cNvPr id="8" name="Text 6"/>
+          <p:cNvPr id="9" name="Text 7"/>
           <p:cNvSpPr/>
           <p:nvPr/>
         </p:nvSpPr>
@@ -7787,14 +8121,14 @@
       </p:sp>
       <p:sp>
         <p:nvSpPr>
-          <p:cNvPr id="9" name="Text 7"/>
+          <p:cNvPr id="10" name="Text 8"/>
           <p:cNvSpPr/>
           <p:nvPr/>
         </p:nvSpPr>
         <p:spPr>
           <a:xfrm>
             <a:off x="640080" y="621792"/>
-            <a:ext cx="10881360" cy="566928"/>
+            <a:ext cx="10881360" cy="713232"/>
           </a:xfrm>
           <a:prstGeom prst="rect">
             <a:avLst/>
@@ -7812,7 +8146,7 @@
               <a:buNone/>
             </a:pPr>
             <a:r>
-              <a:rPr lang="en-US" sz="2700" b="1" dirty="0">
+              <a:rPr lang="en-US" sz="3400" b="1" dirty="0">
                 <a:solidFill>
                   <a:srgbClr val="003A63"/>
                 </a:solidFill>
@@ -7822,20 +8156,20 @@
               </a:rPr>
               <a:t>Expected Artifact or Evidence</a:t>
             </a:r>
-            <a:endParaRPr lang="en-US" sz="2700" dirty="0"/>
-          </a:p>
-        </p:txBody>
-      </p:sp>
-      <p:sp>
-        <p:nvSpPr>
-          <p:cNvPr id="10" name="Text 8"/>
-          <p:cNvSpPr/>
-          <p:nvPr/>
-        </p:nvSpPr>
-        <p:spPr>
-          <a:xfrm>
-            <a:off x="868680" y="1417320"/>
-            <a:ext cx="6675120" cy="4434840"/>
+            <a:endParaRPr lang="en-US" sz="3400" dirty="0"/>
+          </a:p>
+        </p:txBody>
+      </p:sp>
+      <p:sp>
+        <p:nvSpPr>
+          <p:cNvPr id="11" name="Text 9"/>
+          <p:cNvSpPr/>
+          <p:nvPr/>
+        </p:nvSpPr>
+        <p:spPr>
+          <a:xfrm>
+            <a:off x="868680" y="1508760"/>
+            <a:ext cx="6537960" cy="4160520"/>
           </a:xfrm>
           <a:prstGeom prst="rect">
             <a:avLst/>
@@ -7850,7 +8184,7 @@
           <a:lstStyle/>
           <a:p>
             <a:r>
-              <a:rPr lang="en-US" sz="1700" dirty="0">
+              <a:rPr lang="en-US" sz="2100" dirty="0">
                 <a:solidFill>
                   <a:srgbClr val="17364A"/>
                 </a:solidFill>
@@ -7860,11 +8194,11 @@
               </a:rPr>
               <a:t>AI for Social Good review brief</a:t>
             </a:r>
-            <a:endParaRPr lang="en-US" sz="1700" dirty="0"/>
-          </a:p>
-          <a:p>
-            <a:r>
-              <a:rPr lang="en-US" sz="1700" dirty="0">
+            <a:endParaRPr lang="en-US" sz="2100" dirty="0"/>
+          </a:p>
+          <a:p>
+            <a:r>
+              <a:rPr lang="en-US" sz="2100" dirty="0">
                 <a:solidFill>
                   <a:srgbClr val="17364A"/>
                 </a:solidFill>
@@ -7874,11 +8208,11 @@
               </a:rPr>
               <a:t>Public value and equity assessment</a:t>
             </a:r>
-            <a:endParaRPr lang="en-US" sz="1700" dirty="0"/>
-          </a:p>
-          <a:p>
-            <a:r>
-              <a:rPr lang="en-US" sz="1700" dirty="0">
+            <a:endParaRPr lang="en-US" sz="2100" dirty="0"/>
+          </a:p>
+          <a:p>
+            <a:r>
+              <a:rPr lang="en-US" sz="2100" dirty="0">
                 <a:solidFill>
                   <a:srgbClr val="17364A"/>
                 </a:solidFill>
@@ -7888,13 +8222,13 @@
               </a:rPr>
               <a:t>Community engagement and accessibility plan</a:t>
             </a:r>
-            <a:endParaRPr lang="en-US" sz="1700" dirty="0"/>
-          </a:p>
-        </p:txBody>
-      </p:sp>
-      <p:sp>
-        <p:nvSpPr>
-          <p:cNvPr id="11" name="Shape 9"/>
+            <a:endParaRPr lang="en-US" sz="2100" dirty="0"/>
+          </a:p>
+        </p:txBody>
+      </p:sp>
+      <p:sp>
+        <p:nvSpPr>
+          <p:cNvPr id="12" name="Shape 10"/>
           <p:cNvSpPr/>
           <p:nvPr/>
         </p:nvSpPr>
@@ -7921,14 +8255,14 @@
       </p:sp>
       <p:sp>
         <p:nvSpPr>
-          <p:cNvPr id="12" name="Text 10"/>
+          <p:cNvPr id="13" name="Text 11"/>
           <p:cNvSpPr/>
           <p:nvPr/>
         </p:nvSpPr>
         <p:spPr>
           <a:xfrm>
             <a:off x="8074152" y="1563624"/>
-            <a:ext cx="2825496" cy="201168"/>
+            <a:ext cx="2825496" cy="256032"/>
           </a:xfrm>
           <a:prstGeom prst="rect">
             <a:avLst/>
@@ -7944,7 +8278,7 @@
               <a:buNone/>
             </a:pPr>
             <a:r>
-              <a:rPr lang="en-US" sz="950" b="1" dirty="0">
+              <a:rPr lang="en-US" sz="1300" b="1" dirty="0">
                 <a:solidFill>
                   <a:srgbClr val="0068B7"/>
                 </a:solidFill>
@@ -7954,20 +8288,20 @@
               </a:rPr>
               <a:t>Key idea</a:t>
             </a:r>
-            <a:endParaRPr lang="en-US" sz="950" dirty="0"/>
-          </a:p>
-        </p:txBody>
-      </p:sp>
-      <p:sp>
-        <p:nvSpPr>
-          <p:cNvPr id="13" name="Text 11"/>
-          <p:cNvSpPr/>
-          <p:nvPr/>
-        </p:nvSpPr>
-        <p:spPr>
-          <a:xfrm>
-            <a:off x="8074152" y="1856232"/>
-            <a:ext cx="2825496" cy="1261872"/>
+            <a:endParaRPr lang="en-US" sz="1300" dirty="0"/>
+          </a:p>
+        </p:txBody>
+      </p:sp>
+      <p:sp>
+        <p:nvSpPr>
+          <p:cNvPr id="14" name="Text 12"/>
+          <p:cNvSpPr/>
+          <p:nvPr/>
+        </p:nvSpPr>
+        <p:spPr>
+          <a:xfrm>
+            <a:off x="8074152" y="1920240"/>
+            <a:ext cx="2825496" cy="1188720"/>
           </a:xfrm>
           <a:prstGeom prst="rect">
             <a:avLst/>
@@ -7985,7 +8319,7 @@
               <a:buNone/>
             </a:pPr>
             <a:r>
-              <a:rPr lang="en-US" sz="1250" dirty="0">
+              <a:rPr lang="en-US" sz="1550" dirty="0">
                 <a:solidFill>
                   <a:srgbClr val="17364A"/>
                 </a:solidFill>
@@ -7995,13 +8329,13 @@
               </a:rPr>
               <a:t>AI for Social Good review brief</a:t>
             </a:r>
-            <a:endParaRPr lang="en-US" sz="1250" dirty="0"/>
-          </a:p>
-        </p:txBody>
-      </p:sp>
-      <p:sp>
-        <p:nvSpPr>
-          <p:cNvPr id="14" name="Shape 12"/>
+            <a:endParaRPr lang="en-US" sz="1550" dirty="0"/>
+          </a:p>
+        </p:txBody>
+      </p:sp>
+      <p:sp>
+        <p:nvSpPr>
+          <p:cNvPr id="15" name="Shape 13"/>
           <p:cNvSpPr/>
           <p:nvPr/>
         </p:nvSpPr>
@@ -8028,14 +8362,14 @@
       </p:sp>
       <p:sp>
         <p:nvSpPr>
-          <p:cNvPr id="15" name="Text 13"/>
+          <p:cNvPr id="16" name="Text 14"/>
           <p:cNvSpPr/>
           <p:nvPr/>
         </p:nvSpPr>
         <p:spPr>
           <a:xfrm>
             <a:off x="8074152" y="3666744"/>
-            <a:ext cx="2825496" cy="201168"/>
+            <a:ext cx="2825496" cy="256032"/>
           </a:xfrm>
           <a:prstGeom prst="rect">
             <a:avLst/>
@@ -8051,7 +8385,7 @@
               <a:buNone/>
             </a:pPr>
             <a:r>
-              <a:rPr lang="en-US" sz="950" b="1" dirty="0">
+              <a:rPr lang="en-US" sz="1300" b="1" dirty="0">
                 <a:solidFill>
                   <a:srgbClr val="0068B7"/>
                 </a:solidFill>
@@ -8061,20 +8395,20 @@
               </a:rPr>
               <a:t>Use this for</a:t>
             </a:r>
-            <a:endParaRPr lang="en-US" sz="950" dirty="0"/>
-          </a:p>
-        </p:txBody>
-      </p:sp>
-      <p:sp>
-        <p:nvSpPr>
-          <p:cNvPr id="16" name="Text 14"/>
-          <p:cNvSpPr/>
-          <p:nvPr/>
-        </p:nvSpPr>
-        <p:spPr>
-          <a:xfrm>
-            <a:off x="8074152" y="3959352"/>
-            <a:ext cx="2825496" cy="1170432"/>
+            <a:endParaRPr lang="en-US" sz="1300" dirty="0"/>
+          </a:p>
+        </p:txBody>
+      </p:sp>
+      <p:sp>
+        <p:nvSpPr>
+          <p:cNvPr id="17" name="Text 15"/>
+          <p:cNvSpPr/>
+          <p:nvPr/>
+        </p:nvSpPr>
+        <p:spPr>
+          <a:xfrm>
+            <a:off x="8074152" y="4023360"/>
+            <a:ext cx="2825496" cy="1097280"/>
           </a:xfrm>
           <a:prstGeom prst="rect">
             <a:avLst/>
@@ -8092,7 +8426,7 @@
               <a:buNone/>
             </a:pPr>
             <a:r>
-              <a:rPr lang="en-US" sz="1250" dirty="0">
+              <a:rPr lang="en-US" sz="1550" dirty="0">
                 <a:solidFill>
                   <a:srgbClr val="17364A"/>
                 </a:solidFill>
@@ -8102,7 +8436,7 @@
               </a:rPr>
               <a:t>Connect the concept to public health decisions, safeguards, documentation, or implementation work.</a:t>
             </a:r>
-            <a:endParaRPr lang="en-US" sz="1250" dirty="0"/>
+            <a:endParaRPr lang="en-US" sz="1550" dirty="0"/>
           </a:p>
         </p:txBody>
       </p:sp>
@@ -8299,7 +8633,7 @@
                 <a:ea typeface="Aptos" pitchFamily="34" charset="-122"/>
                 <a:cs typeface="Aptos" pitchFamily="34" charset="-120"/>
               </a:rPr>
-              <a:t>© Paula Soper</a:t>
+              <a:t>Â© Paula Soper</a:t>
             </a:r>
             <a:endParaRPr lang="en-US" sz="800" dirty="0"/>
           </a:p>
@@ -8313,8 +8647,47 @@
         </p:nvSpPr>
         <p:spPr>
           <a:xfrm>
+            <a:off x="11137392" y="6510528"/>
+            <a:ext cx="411480" cy="201168"/>
+          </a:xfrm>
+          <a:prstGeom prst="rect">
+            <a:avLst/>
+          </a:prstGeom>
+          <a:noFill/>
+          <a:ln/>
+        </p:spPr>
+        <p:txBody>
+          <a:bodyPr wrap="square" lIns="0" tIns="0" rIns="0" bIns="0" rtlCol="0" anchor="ctr"/>
+          <a:lstStyle/>
+          <a:p>
+            <a:pPr algn="r" indent="0" marL="0">
+              <a:buNone/>
+            </a:pPr>
+            <a:r>
+              <a:rPr lang="en-US" sz="900" dirty="0">
+                <a:solidFill>
+                  <a:srgbClr val="5F7181"/>
+                </a:solidFill>
+                <a:latin typeface="Aptos" pitchFamily="34" charset="0"/>
+                <a:ea typeface="Aptos" pitchFamily="34" charset="-122"/>
+                <a:cs typeface="Aptos" pitchFamily="34" charset="-120"/>
+              </a:rPr>
+              <a:t>19</a:t>
+            </a:r>
+            <a:endParaRPr lang="en-US" sz="900" dirty="0"/>
+          </a:p>
+        </p:txBody>
+      </p:sp>
+      <p:sp>
+        <p:nvSpPr>
+          <p:cNvPr id="8" name="Text 6"/>
+          <p:cNvSpPr/>
+          <p:nvPr/>
+        </p:nvSpPr>
+        <p:spPr>
+          <a:xfrm>
             <a:off x="640080" y="658368"/>
-            <a:ext cx="10881360" cy="566928"/>
+            <a:ext cx="10881360" cy="713232"/>
           </a:xfrm>
           <a:prstGeom prst="rect">
             <a:avLst/>
@@ -8332,7 +8705,7 @@
               <a:buNone/>
             </a:pPr>
             <a:r>
-              <a:rPr lang="en-US" sz="2700" b="1" dirty="0">
+              <a:rPr lang="en-US" sz="3400" b="1" dirty="0">
                 <a:solidFill>
                   <a:srgbClr val="003A63"/>
                 </a:solidFill>
@@ -8342,20 +8715,20 @@
               </a:rPr>
               <a:t>Expected Artifact or Evidence Continued</a:t>
             </a:r>
-            <a:endParaRPr lang="en-US" sz="2700" dirty="0"/>
-          </a:p>
-        </p:txBody>
-      </p:sp>
-      <p:sp>
-        <p:nvSpPr>
-          <p:cNvPr id="8" name="Text 6"/>
-          <p:cNvSpPr/>
-          <p:nvPr/>
-        </p:nvSpPr>
-        <p:spPr>
-          <a:xfrm>
-            <a:off x="868680" y="1417320"/>
-            <a:ext cx="6675120" cy="4434840"/>
+            <a:endParaRPr lang="en-US" sz="3400" dirty="0"/>
+          </a:p>
+        </p:txBody>
+      </p:sp>
+      <p:sp>
+        <p:nvSpPr>
+          <p:cNvPr id="9" name="Text 7"/>
+          <p:cNvSpPr/>
+          <p:nvPr/>
+        </p:nvSpPr>
+        <p:spPr>
+          <a:xfrm>
+            <a:off x="868680" y="1508760"/>
+            <a:ext cx="6537960" cy="4160520"/>
           </a:xfrm>
           <a:prstGeom prst="rect">
             <a:avLst/>
@@ -8370,7 +8743,7 @@
           <a:lstStyle/>
           <a:p>
             <a:r>
-              <a:rPr lang="en-US" sz="1700" dirty="0">
+              <a:rPr lang="en-US" sz="2100" dirty="0">
                 <a:solidFill>
                   <a:srgbClr val="17364A"/>
                 </a:solidFill>
@@ -8380,13 +8753,13 @@
               </a:rPr>
               <a:t>Impact and unintended-consequence measurement plan</a:t>
             </a:r>
-            <a:endParaRPr lang="en-US" sz="1700" dirty="0"/>
-          </a:p>
-        </p:txBody>
-      </p:sp>
-      <p:sp>
-        <p:nvSpPr>
-          <p:cNvPr id="9" name="Shape 7"/>
+            <a:endParaRPr lang="en-US" sz="2100" dirty="0"/>
+          </a:p>
+        </p:txBody>
+      </p:sp>
+      <p:sp>
+        <p:nvSpPr>
+          <p:cNvPr id="10" name="Shape 8"/>
           <p:cNvSpPr/>
           <p:nvPr/>
         </p:nvSpPr>
@@ -8413,14 +8786,14 @@
       </p:sp>
       <p:sp>
         <p:nvSpPr>
-          <p:cNvPr id="10" name="Text 8"/>
+          <p:cNvPr id="11" name="Text 9"/>
           <p:cNvSpPr/>
           <p:nvPr/>
         </p:nvSpPr>
         <p:spPr>
           <a:xfrm>
             <a:off x="8074152" y="1563624"/>
-            <a:ext cx="2825496" cy="201168"/>
+            <a:ext cx="2825496" cy="256032"/>
           </a:xfrm>
           <a:prstGeom prst="rect">
             <a:avLst/>
@@ -8436,7 +8809,7 @@
               <a:buNone/>
             </a:pPr>
             <a:r>
-              <a:rPr lang="en-US" sz="950" b="1" dirty="0">
+              <a:rPr lang="en-US" sz="1300" b="1" dirty="0">
                 <a:solidFill>
                   <a:srgbClr val="0068B7"/>
                 </a:solidFill>
@@ -8446,20 +8819,20 @@
               </a:rPr>
               <a:t>Key idea</a:t>
             </a:r>
-            <a:endParaRPr lang="en-US" sz="950" dirty="0"/>
-          </a:p>
-        </p:txBody>
-      </p:sp>
-      <p:sp>
-        <p:nvSpPr>
-          <p:cNvPr id="11" name="Text 9"/>
-          <p:cNvSpPr/>
-          <p:nvPr/>
-        </p:nvSpPr>
-        <p:spPr>
-          <a:xfrm>
-            <a:off x="8074152" y="1856232"/>
-            <a:ext cx="2825496" cy="1261872"/>
+            <a:endParaRPr lang="en-US" sz="1300" dirty="0"/>
+          </a:p>
+        </p:txBody>
+      </p:sp>
+      <p:sp>
+        <p:nvSpPr>
+          <p:cNvPr id="12" name="Text 10"/>
+          <p:cNvSpPr/>
+          <p:nvPr/>
+        </p:nvSpPr>
+        <p:spPr>
+          <a:xfrm>
+            <a:off x="8074152" y="1920240"/>
+            <a:ext cx="2825496" cy="1188720"/>
           </a:xfrm>
           <a:prstGeom prst="rect">
             <a:avLst/>
@@ -8477,7 +8850,7 @@
               <a:buNone/>
             </a:pPr>
             <a:r>
-              <a:rPr lang="en-US" sz="1250" dirty="0">
+              <a:rPr lang="en-US" sz="1550" dirty="0">
                 <a:solidFill>
                   <a:srgbClr val="17364A"/>
                 </a:solidFill>
@@ -8487,13 +8860,13 @@
               </a:rPr>
               <a:t>Impact and unintended-consequence measurement plan</a:t>
             </a:r>
-            <a:endParaRPr lang="en-US" sz="1250" dirty="0"/>
-          </a:p>
-        </p:txBody>
-      </p:sp>
-      <p:sp>
-        <p:nvSpPr>
-          <p:cNvPr id="12" name="Shape 10"/>
+            <a:endParaRPr lang="en-US" sz="1550" dirty="0"/>
+          </a:p>
+        </p:txBody>
+      </p:sp>
+      <p:sp>
+        <p:nvSpPr>
+          <p:cNvPr id="13" name="Shape 11"/>
           <p:cNvSpPr/>
           <p:nvPr/>
         </p:nvSpPr>
@@ -8520,14 +8893,14 @@
       </p:sp>
       <p:sp>
         <p:nvSpPr>
-          <p:cNvPr id="13" name="Text 11"/>
+          <p:cNvPr id="14" name="Text 12"/>
           <p:cNvSpPr/>
           <p:nvPr/>
         </p:nvSpPr>
         <p:spPr>
           <a:xfrm>
             <a:off x="8074152" y="3666744"/>
-            <a:ext cx="2825496" cy="201168"/>
+            <a:ext cx="2825496" cy="256032"/>
           </a:xfrm>
           <a:prstGeom prst="rect">
             <a:avLst/>
@@ -8543,7 +8916,7 @@
               <a:buNone/>
             </a:pPr>
             <a:r>
-              <a:rPr lang="en-US" sz="950" b="1" dirty="0">
+              <a:rPr lang="en-US" sz="1300" b="1" dirty="0">
                 <a:solidFill>
                   <a:srgbClr val="0068B7"/>
                 </a:solidFill>
@@ -8553,20 +8926,20 @@
               </a:rPr>
               <a:t>Use this for</a:t>
             </a:r>
-            <a:endParaRPr lang="en-US" sz="950" dirty="0"/>
-          </a:p>
-        </p:txBody>
-      </p:sp>
-      <p:sp>
-        <p:nvSpPr>
-          <p:cNvPr id="14" name="Text 12"/>
-          <p:cNvSpPr/>
-          <p:nvPr/>
-        </p:nvSpPr>
-        <p:spPr>
-          <a:xfrm>
-            <a:off x="8074152" y="3959352"/>
-            <a:ext cx="2825496" cy="1170432"/>
+            <a:endParaRPr lang="en-US" sz="1300" dirty="0"/>
+          </a:p>
+        </p:txBody>
+      </p:sp>
+      <p:sp>
+        <p:nvSpPr>
+          <p:cNvPr id="15" name="Text 13"/>
+          <p:cNvSpPr/>
+          <p:nvPr/>
+        </p:nvSpPr>
+        <p:spPr>
+          <a:xfrm>
+            <a:off x="8074152" y="4023360"/>
+            <a:ext cx="2825496" cy="1097280"/>
           </a:xfrm>
           <a:prstGeom prst="rect">
             <a:avLst/>
@@ -8584,7 +8957,7 @@
               <a:buNone/>
             </a:pPr>
             <a:r>
-              <a:rPr lang="en-US" sz="1250" dirty="0">
+              <a:rPr lang="en-US" sz="1550" dirty="0">
                 <a:solidFill>
                   <a:srgbClr val="17364A"/>
                 </a:solidFill>
@@ -8594,7 +8967,7 @@
               </a:rPr>
               <a:t>Connect the concept to public health decisions, safeguards, documentation, or implementation work.</a:t>
             </a:r>
-            <a:endParaRPr lang="en-US" sz="1250" dirty="0"/>
+            <a:endParaRPr lang="en-US" sz="1550" dirty="0"/>
           </a:p>
         </p:txBody>
       </p:sp>
@@ -8791,7 +9164,7 @@
                 <a:ea typeface="Aptos" pitchFamily="34" charset="-122"/>
                 <a:cs typeface="Aptos" pitchFamily="34" charset="-120"/>
               </a:rPr>
-              <a:t>© Paula Soper</a:t>
+              <a:t>Â© Paula Soper</a:t>
             </a:r>
             <a:endParaRPr lang="en-US" sz="800" dirty="0"/>
           </a:p>
@@ -8805,8 +9178,47 @@
         </p:nvSpPr>
         <p:spPr>
           <a:xfrm>
+            <a:off x="11137392" y="6510528"/>
+            <a:ext cx="411480" cy="201168"/>
+          </a:xfrm>
+          <a:prstGeom prst="rect">
+            <a:avLst/>
+          </a:prstGeom>
+          <a:noFill/>
+          <a:ln/>
+        </p:spPr>
+        <p:txBody>
+          <a:bodyPr wrap="square" lIns="0" tIns="0" rIns="0" bIns="0" rtlCol="0" anchor="ctr"/>
+          <a:lstStyle/>
+          <a:p>
+            <a:pPr algn="r" indent="0" marL="0">
+              <a:buNone/>
+            </a:pPr>
+            <a:r>
+              <a:rPr lang="en-US" sz="900" dirty="0">
+                <a:solidFill>
+                  <a:srgbClr val="5F7181"/>
+                </a:solidFill>
+                <a:latin typeface="Aptos" pitchFamily="34" charset="0"/>
+                <a:ea typeface="Aptos" pitchFamily="34" charset="-122"/>
+                <a:cs typeface="Aptos" pitchFamily="34" charset="-120"/>
+              </a:rPr>
+              <a:t>2</a:t>
+            </a:r>
+            <a:endParaRPr lang="en-US" sz="900" dirty="0"/>
+          </a:p>
+        </p:txBody>
+      </p:sp>
+      <p:sp>
+        <p:nvSpPr>
+          <p:cNvPr id="8" name="Text 6"/>
+          <p:cNvSpPr/>
+          <p:nvPr/>
+        </p:nvSpPr>
+        <p:spPr>
+          <a:xfrm>
             <a:off x="640080" y="658368"/>
-            <a:ext cx="10881360" cy="566928"/>
+            <a:ext cx="10881360" cy="713232"/>
           </a:xfrm>
           <a:prstGeom prst="rect">
             <a:avLst/>
@@ -8824,7 +9236,7 @@
               <a:buNone/>
             </a:pPr>
             <a:r>
-              <a:rPr lang="en-US" sz="2700" b="1" dirty="0">
+              <a:rPr lang="en-US" sz="3400" b="1" dirty="0">
                 <a:solidFill>
                   <a:srgbClr val="003A63"/>
                 </a:solidFill>
@@ -8834,20 +9246,20 @@
               </a:rPr>
               <a:t>What this module helps you do</a:t>
             </a:r>
-            <a:endParaRPr lang="en-US" sz="2700" dirty="0"/>
-          </a:p>
-        </p:txBody>
-      </p:sp>
-      <p:sp>
-        <p:nvSpPr>
-          <p:cNvPr id="8" name="Text 6"/>
-          <p:cNvSpPr/>
-          <p:nvPr/>
-        </p:nvSpPr>
-        <p:spPr>
-          <a:xfrm>
-            <a:off x="868680" y="1417320"/>
-            <a:ext cx="6675120" cy="3291840"/>
+            <a:endParaRPr lang="en-US" sz="3400" dirty="0"/>
+          </a:p>
+        </p:txBody>
+      </p:sp>
+      <p:sp>
+        <p:nvSpPr>
+          <p:cNvPr id="9" name="Text 7"/>
+          <p:cNvSpPr/>
+          <p:nvPr/>
+        </p:nvSpPr>
+        <p:spPr>
+          <a:xfrm>
+            <a:off x="868680" y="1508760"/>
+            <a:ext cx="6446520" cy="2926080"/>
           </a:xfrm>
           <a:prstGeom prst="rect">
             <a:avLst/>
@@ -8862,7 +9274,7 @@
           <a:lstStyle/>
           <a:p>
             <a:r>
-              <a:rPr lang="en-US" sz="1700" dirty="0">
+              <a:rPr lang="en-US" sz="2100" dirty="0">
                 <a:solidFill>
                   <a:srgbClr val="17364A"/>
                 </a:solidFill>
@@ -8870,13 +9282,13 @@
                 <a:ea typeface="Aptos" pitchFamily="34" charset="-122"/>
                 <a:cs typeface="Aptos" pitchFamily="34" charset="-120"/>
               </a:rPr>
-              <a:t>AI for Social Good refers to the intentional use of artificial intelligence to improve public well-being, reduce inequities, strengthen.</a:t>
-            </a:r>
-            <a:endParaRPr lang="en-US" sz="1700" dirty="0"/>
-          </a:p>
-          <a:p>
-            <a:r>
-              <a:rPr lang="en-US" sz="1700" dirty="0">
+              <a:t>AI for Social Good refers to the intentional use of artificial intelligence to improve public well-being, reduce.</a:t>
+            </a:r>
+            <a:endParaRPr lang="en-US" sz="2100" dirty="0"/>
+          </a:p>
+          <a:p>
+            <a:r>
+              <a:rPr lang="en-US" sz="2100" dirty="0">
                 <a:solidFill>
                   <a:srgbClr val="17364A"/>
                 </a:solidFill>
@@ -8886,11 +9298,11 @@
               </a:rPr>
               <a:t>For public health, this concept is not abstract.</a:t>
             </a:r>
-            <a:endParaRPr lang="en-US" sz="1700" dirty="0"/>
-          </a:p>
-          <a:p>
-            <a:r>
-              <a:rPr lang="en-US" sz="1700" dirty="0">
+            <a:endParaRPr lang="en-US" sz="2100" dirty="0"/>
+          </a:p>
+          <a:p>
+            <a:r>
+              <a:rPr lang="en-US" sz="2100" dirty="0">
                 <a:solidFill>
                   <a:srgbClr val="17364A"/>
                 </a:solidFill>
@@ -8900,27 +9312,13 @@
               </a:rPr>
               <a:t>Public health agencies already work to prevent disease, protect communities, improve access, and reduce inequities.</a:t>
             </a:r>
-            <a:endParaRPr lang="en-US" sz="1700" dirty="0"/>
-          </a:p>
-          <a:p>
-            <a:r>
-              <a:rPr lang="en-US" sz="1700" dirty="0">
-                <a:solidFill>
-                  <a:srgbClr val="17364A"/>
-                </a:solidFill>
-                <a:latin typeface="Aptos" pitchFamily="34" charset="0"/>
-                <a:ea typeface="Aptos" pitchFamily="34" charset="-122"/>
-                <a:cs typeface="Aptos" pitchFamily="34" charset="-120"/>
-              </a:rPr>
-              <a:t>AI for Social Good should therefore be judged by whether it advances public health values in measurable, accountable, and community-centered ways.</a:t>
-            </a:r>
-            <a:endParaRPr lang="en-US" sz="1700" dirty="0"/>
-          </a:p>
-        </p:txBody>
-      </p:sp>
-      <p:sp>
-        <p:nvSpPr>
-          <p:cNvPr id="9" name="Shape 7"/>
+            <a:endParaRPr lang="en-US" sz="2100" dirty="0"/>
+          </a:p>
+        </p:txBody>
+      </p:sp>
+      <p:sp>
+        <p:nvSpPr>
+          <p:cNvPr id="10" name="Shape 8"/>
           <p:cNvSpPr/>
           <p:nvPr/>
         </p:nvSpPr>
@@ -8947,14 +9345,14 @@
       </p:sp>
       <p:sp>
         <p:nvSpPr>
-          <p:cNvPr id="10" name="Text 8"/>
+          <p:cNvPr id="11" name="Text 9"/>
           <p:cNvSpPr/>
           <p:nvPr/>
         </p:nvSpPr>
         <p:spPr>
           <a:xfrm>
             <a:off x="8074152" y="1563624"/>
-            <a:ext cx="2825496" cy="201168"/>
+            <a:ext cx="2825496" cy="256032"/>
           </a:xfrm>
           <a:prstGeom prst="rect">
             <a:avLst/>
@@ -8970,7 +9368,7 @@
               <a:buNone/>
             </a:pPr>
             <a:r>
-              <a:rPr lang="en-US" sz="950" b="1" dirty="0">
+              <a:rPr lang="en-US" sz="1300" b="1" dirty="0">
                 <a:solidFill>
                   <a:srgbClr val="0068B7"/>
                 </a:solidFill>
@@ -8980,20 +9378,20 @@
               </a:rPr>
               <a:t>Module details</a:t>
             </a:r>
-            <a:endParaRPr lang="en-US" sz="950" dirty="0"/>
-          </a:p>
-        </p:txBody>
-      </p:sp>
-      <p:sp>
-        <p:nvSpPr>
-          <p:cNvPr id="11" name="Text 9"/>
-          <p:cNvSpPr/>
-          <p:nvPr/>
-        </p:nvSpPr>
-        <p:spPr>
-          <a:xfrm>
-            <a:off x="8074152" y="1856232"/>
-            <a:ext cx="2825496" cy="1353312"/>
+            <a:endParaRPr lang="en-US" sz="1300" dirty="0"/>
+          </a:p>
+        </p:txBody>
+      </p:sp>
+      <p:sp>
+        <p:nvSpPr>
+          <p:cNvPr id="12" name="Text 10"/>
+          <p:cNvSpPr/>
+          <p:nvPr/>
+        </p:nvSpPr>
+        <p:spPr>
+          <a:xfrm>
+            <a:off x="8074152" y="1920240"/>
+            <a:ext cx="2825496" cy="1280160"/>
           </a:xfrm>
           <a:prstGeom prst="rect">
             <a:avLst/>
@@ -9011,7 +9409,7 @@
               <a:buNone/>
             </a:pPr>
             <a:r>
-              <a:rPr lang="en-US" sz="1250" dirty="0">
+              <a:rPr lang="en-US" sz="1550" dirty="0">
                 <a:solidFill>
                   <a:srgbClr val="17364A"/>
                 </a:solidFill>
@@ -9021,14 +9419,14 @@
               </a:rPr>
               <a:t>Level: introductory</a:t>
             </a:r>
-            <a:endParaRPr lang="en-US" sz="1250" dirty="0"/>
+            <a:endParaRPr lang="en-US" sz="1550" dirty="0"/>
           </a:p>
           <a:p>
             <a:pPr indent="0" marL="0">
               <a:buNone/>
             </a:pPr>
             <a:r>
-              <a:rPr lang="en-US" sz="1250" dirty="0">
+              <a:rPr lang="en-US" sz="1550" dirty="0">
                 <a:solidFill>
                   <a:srgbClr val="17364A"/>
                 </a:solidFill>
@@ -9038,14 +9436,14 @@
               </a:rPr>
               <a:t>Primary track: Shared Foundational / Introductory Course</a:t>
             </a:r>
-            <a:endParaRPr lang="en-US" sz="1250" dirty="0"/>
+            <a:endParaRPr lang="en-US" sz="1550" dirty="0"/>
           </a:p>
           <a:p>
             <a:pPr indent="0" marL="0">
               <a:buNone/>
             </a:pPr>
             <a:r>
-              <a:rPr lang="en-US" sz="1250" dirty="0">
+              <a:rPr lang="en-US" sz="1550" dirty="0">
                 <a:solidFill>
                   <a:srgbClr val="17364A"/>
                 </a:solidFill>
@@ -9055,32 +9453,32 @@
               </a:rPr>
               <a:t>Appears in tracks: shared-foundational, policy, communications</a:t>
             </a:r>
-            <a:endParaRPr lang="en-US" sz="1250" dirty="0"/>
-          </a:p>
-        </p:txBody>
-      </p:sp>
-      <p:sp>
-        <p:nvSpPr>
-          <p:cNvPr id="12" name="Shape 10"/>
-          <p:cNvSpPr/>
-          <p:nvPr/>
-        </p:nvSpPr>
-        <p:spPr>
-          <a:xfrm>
-            <a:off x="7909560" y="3611880"/>
-            <a:ext cx="3154680" cy="1783080"/>
+            <a:endParaRPr lang="en-US" sz="1550" dirty="0"/>
+          </a:p>
+        </p:txBody>
+      </p:sp>
+      <p:sp>
+        <p:nvSpPr>
+          <p:cNvPr id="13" name="Shape 11"/>
+          <p:cNvSpPr/>
+          <p:nvPr/>
+        </p:nvSpPr>
+        <p:spPr>
+          <a:xfrm>
+            <a:off x="7635240" y="3730752"/>
+            <a:ext cx="1033272" cy="749808"/>
           </a:xfrm>
           <a:prstGeom prst="roundRect">
             <a:avLst>
-              <a:gd name="adj" fmla="val 6154"/>
+              <a:gd name="adj" fmla="val 14634"/>
             </a:avLst>
           </a:prstGeom>
           <a:solidFill>
-            <a:srgbClr val="EEF8ED"/>
+            <a:srgbClr val="0068B7"/>
           </a:solidFill>
           <a:ln w="12700">
             <a:solidFill>
-              <a:srgbClr val="B9D7E6"/>
+              <a:srgbClr val="0068B7"/>
             </a:solidFill>
             <a:prstDash val="solid"/>
           </a:ln>
@@ -9088,81 +9486,256 @@
       </p:sp>
       <p:sp>
         <p:nvSpPr>
-          <p:cNvPr id="13" name="Text 11"/>
-          <p:cNvSpPr/>
-          <p:nvPr/>
-        </p:nvSpPr>
-        <p:spPr>
-          <a:xfrm>
-            <a:off x="8074152" y="3758184"/>
-            <a:ext cx="2825496" cy="201168"/>
-          </a:xfrm>
-          <a:prstGeom prst="rect">
-            <a:avLst/>
-          </a:prstGeom>
-          <a:noFill/>
-          <a:ln/>
-        </p:spPr>
-        <p:txBody>
-          <a:bodyPr wrap="square" lIns="0" tIns="0" rIns="0" bIns="0" rtlCol="0" anchor="ctr"/>
-          <a:lstStyle/>
-          <a:p>
-            <a:pPr indent="0" marL="0">
-              <a:buNone/>
-            </a:pPr>
-            <a:r>
-              <a:rPr lang="en-US" sz="950" b="1" dirty="0">
-                <a:solidFill>
-                  <a:srgbClr val="0068B7"/>
-                </a:solidFill>
-                <a:latin typeface="Aptos" pitchFamily="34" charset="0"/>
-                <a:ea typeface="Aptos" pitchFamily="34" charset="-122"/>
-                <a:cs typeface="Aptos" pitchFamily="34" charset="-120"/>
-              </a:rPr>
-              <a:t>Learning approach</a:t>
-            </a:r>
-            <a:endParaRPr lang="en-US" sz="950" dirty="0"/>
-          </a:p>
-        </p:txBody>
-      </p:sp>
-      <p:sp>
-        <p:nvSpPr>
           <p:cNvPr id="14" name="Text 12"/>
           <p:cNvSpPr/>
           <p:nvPr/>
         </p:nvSpPr>
         <p:spPr>
           <a:xfrm>
-            <a:off x="8074152" y="4050792"/>
-            <a:ext cx="2825496" cy="1216152"/>
-          </a:xfrm>
-          <a:prstGeom prst="rect">
-            <a:avLst/>
-          </a:prstGeom>
-          <a:noFill/>
-          <a:ln/>
-        </p:spPr>
-        <p:txBody>
-          <a:bodyPr wrap="square" lIns="0" tIns="0" rIns="0" bIns="0" rtlCol="0" anchor="t">
+            <a:off x="7708392" y="3922776"/>
+            <a:ext cx="886968" cy="310896"/>
+          </a:xfrm>
+          <a:prstGeom prst="rect">
+            <a:avLst/>
+          </a:prstGeom>
+          <a:noFill/>
+          <a:ln/>
+        </p:spPr>
+        <p:txBody>
+          <a:bodyPr wrap="square" lIns="0" tIns="0" rIns="0" bIns="0" rtlCol="0" anchor="ctr">
             <a:normAutofit/>
           </a:bodyPr>
           <a:lstStyle/>
           <a:p>
-            <a:pPr indent="0" marL="0">
-              <a:buNone/>
-            </a:pPr>
-            <a:r>
-              <a:rPr lang="en-US" sz="1250" dirty="0">
-                <a:solidFill>
-                  <a:srgbClr val="17364A"/>
-                </a:solidFill>
-                <a:latin typeface="Aptos" pitchFamily="34" charset="0"/>
-                <a:ea typeface="Aptos" pitchFamily="34" charset="-122"/>
-                <a:cs typeface="Aptos" pitchFamily="34" charset="-120"/>
-              </a:rPr>
-              <a:t>Review the core ideas, complete the practical exercise, check your understanding, and use the related plays and tools to apply the lesson.</a:t>
-            </a:r>
-            <a:endParaRPr lang="en-US" sz="1250" dirty="0"/>
+            <a:pPr algn="ctr" indent="0" marL="0">
+              <a:buNone/>
+            </a:pPr>
+            <a:r>
+              <a:rPr lang="en-US" sz="1500" b="1" dirty="0">
+                <a:solidFill>
+                  <a:srgbClr val="FFFFFF"/>
+                </a:solidFill>
+                <a:latin typeface="Aptos" pitchFamily="34" charset="0"/>
+                <a:ea typeface="Aptos" pitchFamily="34" charset="-122"/>
+                <a:cs typeface="Aptos" pitchFamily="34" charset="-120"/>
+              </a:rPr>
+              <a:t>Learn</a:t>
+            </a:r>
+            <a:endParaRPr lang="en-US" sz="1500" dirty="0"/>
+          </a:p>
+        </p:txBody>
+      </p:sp>
+      <p:sp>
+        <p:nvSpPr>
+          <p:cNvPr id="15" name="Text 13"/>
+          <p:cNvSpPr/>
+          <p:nvPr/>
+        </p:nvSpPr>
+        <p:spPr>
+          <a:xfrm>
+            <a:off x="8695944" y="3941064"/>
+            <a:ext cx="201168" cy="256032"/>
+          </a:xfrm>
+          <a:prstGeom prst="rect">
+            <a:avLst/>
+          </a:prstGeom>
+          <a:noFill/>
+          <a:ln/>
+        </p:spPr>
+        <p:txBody>
+          <a:bodyPr wrap="square" lIns="0" tIns="0" rIns="0" bIns="0" rtlCol="0" anchor="ctr"/>
+          <a:lstStyle/>
+          <a:p>
+            <a:pPr algn="ctr" indent="0" marL="0">
+              <a:buNone/>
+            </a:pPr>
+            <a:r>
+              <a:rPr lang="en-US" sz="1800" b="1" dirty="0">
+                <a:solidFill>
+                  <a:srgbClr val="0068B7"/>
+                </a:solidFill>
+                <a:latin typeface="Aptos" pitchFamily="34" charset="0"/>
+                <a:ea typeface="Aptos" pitchFamily="34" charset="-122"/>
+                <a:cs typeface="Aptos" pitchFamily="34" charset="-120"/>
+              </a:rPr>
+              <a:t>â†’</a:t>
+            </a:r>
+            <a:endParaRPr lang="en-US" sz="1800" dirty="0"/>
+          </a:p>
+        </p:txBody>
+      </p:sp>
+      <p:sp>
+        <p:nvSpPr>
+          <p:cNvPr id="16" name="Shape 14"/>
+          <p:cNvSpPr/>
+          <p:nvPr/>
+        </p:nvSpPr>
+        <p:spPr>
+          <a:xfrm>
+            <a:off x="8924544" y="3730752"/>
+            <a:ext cx="1033272" cy="749808"/>
+          </a:xfrm>
+          <a:prstGeom prst="roundRect">
+            <a:avLst>
+              <a:gd name="adj" fmla="val 14634"/>
+            </a:avLst>
+          </a:prstGeom>
+          <a:solidFill>
+            <a:srgbClr val="2F8A28"/>
+          </a:solidFill>
+          <a:ln w="12700">
+            <a:solidFill>
+              <a:srgbClr val="2F8A28"/>
+            </a:solidFill>
+            <a:prstDash val="solid"/>
+          </a:ln>
+        </p:spPr>
+      </p:sp>
+      <p:sp>
+        <p:nvSpPr>
+          <p:cNvPr id="17" name="Text 15"/>
+          <p:cNvSpPr/>
+          <p:nvPr/>
+        </p:nvSpPr>
+        <p:spPr>
+          <a:xfrm>
+            <a:off x="8997696" y="3922776"/>
+            <a:ext cx="886968" cy="310896"/>
+          </a:xfrm>
+          <a:prstGeom prst="rect">
+            <a:avLst/>
+          </a:prstGeom>
+          <a:noFill/>
+          <a:ln/>
+        </p:spPr>
+        <p:txBody>
+          <a:bodyPr wrap="square" lIns="0" tIns="0" rIns="0" bIns="0" rtlCol="0" anchor="ctr">
+            <a:normAutofit/>
+          </a:bodyPr>
+          <a:lstStyle/>
+          <a:p>
+            <a:pPr algn="ctr" indent="0" marL="0">
+              <a:buNone/>
+            </a:pPr>
+            <a:r>
+              <a:rPr lang="en-US" sz="1500" b="1" dirty="0">
+                <a:solidFill>
+                  <a:srgbClr val="FFFFFF"/>
+                </a:solidFill>
+                <a:latin typeface="Aptos" pitchFamily="34" charset="0"/>
+                <a:ea typeface="Aptos" pitchFamily="34" charset="-122"/>
+                <a:cs typeface="Aptos" pitchFamily="34" charset="-120"/>
+              </a:rPr>
+              <a:t>Apply</a:t>
+            </a:r>
+            <a:endParaRPr lang="en-US" sz="1500" dirty="0"/>
+          </a:p>
+        </p:txBody>
+      </p:sp>
+      <p:sp>
+        <p:nvSpPr>
+          <p:cNvPr id="18" name="Text 16"/>
+          <p:cNvSpPr/>
+          <p:nvPr/>
+        </p:nvSpPr>
+        <p:spPr>
+          <a:xfrm>
+            <a:off x="9985248" y="3941064"/>
+            <a:ext cx="201168" cy="256032"/>
+          </a:xfrm>
+          <a:prstGeom prst="rect">
+            <a:avLst/>
+          </a:prstGeom>
+          <a:noFill/>
+          <a:ln/>
+        </p:spPr>
+        <p:txBody>
+          <a:bodyPr wrap="square" lIns="0" tIns="0" rIns="0" bIns="0" rtlCol="0" anchor="ctr"/>
+          <a:lstStyle/>
+          <a:p>
+            <a:pPr algn="ctr" indent="0" marL="0">
+              <a:buNone/>
+            </a:pPr>
+            <a:r>
+              <a:rPr lang="en-US" sz="1800" b="1" dirty="0">
+                <a:solidFill>
+                  <a:srgbClr val="0068B7"/>
+                </a:solidFill>
+                <a:latin typeface="Aptos" pitchFamily="34" charset="0"/>
+                <a:ea typeface="Aptos" pitchFamily="34" charset="-122"/>
+                <a:cs typeface="Aptos" pitchFamily="34" charset="-120"/>
+              </a:rPr>
+              <a:t>â†’</a:t>
+            </a:r>
+            <a:endParaRPr lang="en-US" sz="1800" dirty="0"/>
+          </a:p>
+        </p:txBody>
+      </p:sp>
+      <p:sp>
+        <p:nvSpPr>
+          <p:cNvPr id="19" name="Shape 17"/>
+          <p:cNvSpPr/>
+          <p:nvPr/>
+        </p:nvSpPr>
+        <p:spPr>
+          <a:xfrm>
+            <a:off x="10213848" y="3730752"/>
+            <a:ext cx="1033272" cy="749808"/>
+          </a:xfrm>
+          <a:prstGeom prst="roundRect">
+            <a:avLst>
+              <a:gd name="adj" fmla="val 14634"/>
+            </a:avLst>
+          </a:prstGeom>
+          <a:solidFill>
+            <a:srgbClr val="6A4CA3"/>
+          </a:solidFill>
+          <a:ln w="12700">
+            <a:solidFill>
+              <a:srgbClr val="6A4CA3"/>
+            </a:solidFill>
+            <a:prstDash val="solid"/>
+          </a:ln>
+        </p:spPr>
+      </p:sp>
+      <p:sp>
+        <p:nvSpPr>
+          <p:cNvPr id="20" name="Text 18"/>
+          <p:cNvSpPr/>
+          <p:nvPr/>
+        </p:nvSpPr>
+        <p:spPr>
+          <a:xfrm>
+            <a:off x="10287000" y="3922776"/>
+            <a:ext cx="886968" cy="310896"/>
+          </a:xfrm>
+          <a:prstGeom prst="rect">
+            <a:avLst/>
+          </a:prstGeom>
+          <a:noFill/>
+          <a:ln/>
+        </p:spPr>
+        <p:txBody>
+          <a:bodyPr wrap="square" lIns="0" tIns="0" rIns="0" bIns="0" rtlCol="0" anchor="ctr">
+            <a:normAutofit/>
+          </a:bodyPr>
+          <a:lstStyle/>
+          <a:p>
+            <a:pPr algn="ctr" indent="0" marL="0">
+              <a:buNone/>
+            </a:pPr>
+            <a:r>
+              <a:rPr lang="en-US" sz="1500" b="1" dirty="0">
+                <a:solidFill>
+                  <a:srgbClr val="FFFFFF"/>
+                </a:solidFill>
+                <a:latin typeface="Aptos" pitchFamily="34" charset="0"/>
+                <a:ea typeface="Aptos" pitchFamily="34" charset="-122"/>
+                <a:cs typeface="Aptos" pitchFamily="34" charset="-120"/>
+              </a:rPr>
+              <a:t>Document</a:t>
+            </a:r>
+            <a:endParaRPr lang="en-US" sz="1500" dirty="0"/>
           </a:p>
         </p:txBody>
       </p:sp>
@@ -9359,7 +9932,7 @@
                 <a:ea typeface="Aptos" pitchFamily="34" charset="-122"/>
                 <a:cs typeface="Aptos" pitchFamily="34" charset="-120"/>
               </a:rPr>
-              <a:t>© Paula Soper</a:t>
+              <a:t>Â© Paula Soper</a:t>
             </a:r>
             <a:endParaRPr lang="en-US" sz="800" dirty="0"/>
           </a:p>
@@ -9367,7 +9940,46 @@
       </p:sp>
       <p:sp>
         <p:nvSpPr>
-          <p:cNvPr id="7" name="Shape 5"/>
+          <p:cNvPr id="7" name="Text 5"/>
+          <p:cNvSpPr/>
+          <p:nvPr/>
+        </p:nvSpPr>
+        <p:spPr>
+          <a:xfrm>
+            <a:off x="11137392" y="6510528"/>
+            <a:ext cx="411480" cy="201168"/>
+          </a:xfrm>
+          <a:prstGeom prst="rect">
+            <a:avLst/>
+          </a:prstGeom>
+          <a:noFill/>
+          <a:ln/>
+        </p:spPr>
+        <p:txBody>
+          <a:bodyPr wrap="square" lIns="0" tIns="0" rIns="0" bIns="0" rtlCol="0" anchor="ctr"/>
+          <a:lstStyle/>
+          <a:p>
+            <a:pPr algn="r" indent="0" marL="0">
+              <a:buNone/>
+            </a:pPr>
+            <a:r>
+              <a:rPr lang="en-US" sz="900" dirty="0">
+                <a:solidFill>
+                  <a:srgbClr val="5F7181"/>
+                </a:solidFill>
+                <a:latin typeface="Aptos" pitchFamily="34" charset="0"/>
+                <a:ea typeface="Aptos" pitchFamily="34" charset="-122"/>
+                <a:cs typeface="Aptos" pitchFamily="34" charset="-120"/>
+              </a:rPr>
+              <a:t>20</a:t>
+            </a:r>
+            <a:endParaRPr lang="en-US" sz="900" dirty="0"/>
+          </a:p>
+        </p:txBody>
+      </p:sp>
+      <p:sp>
+        <p:nvSpPr>
+          <p:cNvPr id="8" name="Shape 6"/>
           <p:cNvSpPr/>
           <p:nvPr/>
         </p:nvSpPr>
@@ -9392,7 +10004,7 @@
       </p:sp>
       <p:sp>
         <p:nvSpPr>
-          <p:cNvPr id="8" name="Text 6"/>
+          <p:cNvPr id="9" name="Text 7"/>
           <p:cNvSpPr/>
           <p:nvPr/>
         </p:nvSpPr>
@@ -9431,14 +10043,14 @@
       </p:sp>
       <p:sp>
         <p:nvSpPr>
-          <p:cNvPr id="9" name="Text 7"/>
+          <p:cNvPr id="10" name="Text 8"/>
           <p:cNvSpPr/>
           <p:nvPr/>
         </p:nvSpPr>
         <p:spPr>
           <a:xfrm>
             <a:off x="640080" y="621792"/>
-            <a:ext cx="10881360" cy="566928"/>
+            <a:ext cx="10881360" cy="713232"/>
           </a:xfrm>
           <a:prstGeom prst="rect">
             <a:avLst/>
@@ -9456,7 +10068,7 @@
               <a:buNone/>
             </a:pPr>
             <a:r>
-              <a:rPr lang="en-US" sz="2700" b="1" dirty="0">
+              <a:rPr lang="en-US" sz="3400" b="1" dirty="0">
                 <a:solidFill>
                   <a:srgbClr val="003A63"/>
                 </a:solidFill>
@@ -9466,20 +10078,20 @@
               </a:rPr>
               <a:t>Expected Assignment</a:t>
             </a:r>
-            <a:endParaRPr lang="en-US" sz="2700" dirty="0"/>
-          </a:p>
-        </p:txBody>
-      </p:sp>
-      <p:sp>
-        <p:nvSpPr>
-          <p:cNvPr id="10" name="Text 8"/>
-          <p:cNvSpPr/>
-          <p:nvPr/>
-        </p:nvSpPr>
-        <p:spPr>
-          <a:xfrm>
-            <a:off x="868680" y="1417320"/>
-            <a:ext cx="6675120" cy="4434840"/>
+            <a:endParaRPr lang="en-US" sz="3400" dirty="0"/>
+          </a:p>
+        </p:txBody>
+      </p:sp>
+      <p:sp>
+        <p:nvSpPr>
+          <p:cNvPr id="11" name="Text 9"/>
+          <p:cNvSpPr/>
+          <p:nvPr/>
+        </p:nvSpPr>
+        <p:spPr>
+          <a:xfrm>
+            <a:off x="868680" y="1508760"/>
+            <a:ext cx="6537960" cy="4160520"/>
           </a:xfrm>
           <a:prstGeom prst="rect">
             <a:avLst/>
@@ -9494,7 +10106,7 @@
           <a:lstStyle/>
           <a:p>
             <a:r>
-              <a:rPr lang="en-US" sz="1700" dirty="0">
+              <a:rPr lang="en-US" sz="2100" dirty="0">
                 <a:solidFill>
                   <a:srgbClr val="17364A"/>
                 </a:solidFill>
@@ -9504,11 +10116,11 @@
               </a:rPr>
               <a:t>AI for Social Good review brief</a:t>
             </a:r>
-            <a:endParaRPr lang="en-US" sz="1700" dirty="0"/>
-          </a:p>
-          <a:p>
-            <a:r>
-              <a:rPr lang="en-US" sz="1700" dirty="0">
+            <a:endParaRPr lang="en-US" sz="2100" dirty="0"/>
+          </a:p>
+          <a:p>
+            <a:r>
+              <a:rPr lang="en-US" sz="2100" dirty="0">
                 <a:solidFill>
                   <a:srgbClr val="17364A"/>
                 </a:solidFill>
@@ -9518,11 +10130,11 @@
               </a:rPr>
               <a:t>Public value and equity assessment</a:t>
             </a:r>
-            <a:endParaRPr lang="en-US" sz="1700" dirty="0"/>
-          </a:p>
-          <a:p>
-            <a:r>
-              <a:rPr lang="en-US" sz="1700" dirty="0">
+            <a:endParaRPr lang="en-US" sz="2100" dirty="0"/>
+          </a:p>
+          <a:p>
+            <a:r>
+              <a:rPr lang="en-US" sz="2100" dirty="0">
                 <a:solidFill>
                   <a:srgbClr val="17364A"/>
                 </a:solidFill>
@@ -9532,27 +10144,13 @@
               </a:rPr>
               <a:t>Community engagement and accessibility plan</a:t>
             </a:r>
-            <a:endParaRPr lang="en-US" sz="1700" dirty="0"/>
-          </a:p>
-          <a:p>
-            <a:r>
-              <a:rPr lang="en-US" sz="1700" dirty="0">
-                <a:solidFill>
-                  <a:srgbClr val="17364A"/>
-                </a:solidFill>
-                <a:latin typeface="Aptos" pitchFamily="34" charset="0"/>
-                <a:ea typeface="Aptos" pitchFamily="34" charset="-122"/>
-                <a:cs typeface="Aptos" pitchFamily="34" charset="-120"/>
-              </a:rPr>
-              <a:t>Impact and unintended-consequence measurement plan</a:t>
-            </a:r>
-            <a:endParaRPr lang="en-US" sz="1700" dirty="0"/>
-          </a:p>
-        </p:txBody>
-      </p:sp>
-      <p:sp>
-        <p:nvSpPr>
-          <p:cNvPr id="11" name="Shape 9"/>
+            <a:endParaRPr lang="en-US" sz="2100" dirty="0"/>
+          </a:p>
+        </p:txBody>
+      </p:sp>
+      <p:sp>
+        <p:nvSpPr>
+          <p:cNvPr id="12" name="Shape 10"/>
           <p:cNvSpPr/>
           <p:nvPr/>
         </p:nvSpPr>
@@ -9579,14 +10177,14 @@
       </p:sp>
       <p:sp>
         <p:nvSpPr>
-          <p:cNvPr id="12" name="Text 10"/>
+          <p:cNvPr id="13" name="Text 11"/>
           <p:cNvSpPr/>
           <p:nvPr/>
         </p:nvSpPr>
         <p:spPr>
           <a:xfrm>
             <a:off x="8074152" y="1563624"/>
-            <a:ext cx="2825496" cy="201168"/>
+            <a:ext cx="2825496" cy="256032"/>
           </a:xfrm>
           <a:prstGeom prst="rect">
             <a:avLst/>
@@ -9602,7 +10200,7 @@
               <a:buNone/>
             </a:pPr>
             <a:r>
-              <a:rPr lang="en-US" sz="950" b="1" dirty="0">
+              <a:rPr lang="en-US" sz="1300" b="1" dirty="0">
                 <a:solidFill>
                   <a:srgbClr val="0068B7"/>
                 </a:solidFill>
@@ -9612,20 +10210,20 @@
               </a:rPr>
               <a:t>Key idea</a:t>
             </a:r>
-            <a:endParaRPr lang="en-US" sz="950" dirty="0"/>
-          </a:p>
-        </p:txBody>
-      </p:sp>
-      <p:sp>
-        <p:nvSpPr>
-          <p:cNvPr id="13" name="Text 11"/>
-          <p:cNvSpPr/>
-          <p:nvPr/>
-        </p:nvSpPr>
-        <p:spPr>
-          <a:xfrm>
-            <a:off x="8074152" y="1856232"/>
-            <a:ext cx="2825496" cy="1261872"/>
+            <a:endParaRPr lang="en-US" sz="1300" dirty="0"/>
+          </a:p>
+        </p:txBody>
+      </p:sp>
+      <p:sp>
+        <p:nvSpPr>
+          <p:cNvPr id="14" name="Text 12"/>
+          <p:cNvSpPr/>
+          <p:nvPr/>
+        </p:nvSpPr>
+        <p:spPr>
+          <a:xfrm>
+            <a:off x="8074152" y="1920240"/>
+            <a:ext cx="2825496" cy="1188720"/>
           </a:xfrm>
           <a:prstGeom prst="rect">
             <a:avLst/>
@@ -9643,7 +10241,7 @@
               <a:buNone/>
             </a:pPr>
             <a:r>
-              <a:rPr lang="en-US" sz="1250" dirty="0">
+              <a:rPr lang="en-US" sz="1550" dirty="0">
                 <a:solidFill>
                   <a:srgbClr val="17364A"/>
                 </a:solidFill>
@@ -9653,13 +10251,13 @@
               </a:rPr>
               <a:t>AI for Social Good review brief</a:t>
             </a:r>
-            <a:endParaRPr lang="en-US" sz="1250" dirty="0"/>
-          </a:p>
-        </p:txBody>
-      </p:sp>
-      <p:sp>
-        <p:nvSpPr>
-          <p:cNvPr id="14" name="Shape 12"/>
+            <a:endParaRPr lang="en-US" sz="1550" dirty="0"/>
+          </a:p>
+        </p:txBody>
+      </p:sp>
+      <p:sp>
+        <p:nvSpPr>
+          <p:cNvPr id="15" name="Shape 13"/>
           <p:cNvSpPr/>
           <p:nvPr/>
         </p:nvSpPr>
@@ -9686,14 +10284,14 @@
       </p:sp>
       <p:sp>
         <p:nvSpPr>
-          <p:cNvPr id="15" name="Text 13"/>
+          <p:cNvPr id="16" name="Text 14"/>
           <p:cNvSpPr/>
           <p:nvPr/>
         </p:nvSpPr>
         <p:spPr>
           <a:xfrm>
             <a:off x="8074152" y="3666744"/>
-            <a:ext cx="2825496" cy="201168"/>
+            <a:ext cx="2825496" cy="256032"/>
           </a:xfrm>
           <a:prstGeom prst="rect">
             <a:avLst/>
@@ -9709,7 +10307,7 @@
               <a:buNone/>
             </a:pPr>
             <a:r>
-              <a:rPr lang="en-US" sz="950" b="1" dirty="0">
+              <a:rPr lang="en-US" sz="1300" b="1" dirty="0">
                 <a:solidFill>
                   <a:srgbClr val="0068B7"/>
                 </a:solidFill>
@@ -9719,20 +10317,20 @@
               </a:rPr>
               <a:t>Use this for</a:t>
             </a:r>
-            <a:endParaRPr lang="en-US" sz="950" dirty="0"/>
-          </a:p>
-        </p:txBody>
-      </p:sp>
-      <p:sp>
-        <p:nvSpPr>
-          <p:cNvPr id="16" name="Text 14"/>
-          <p:cNvSpPr/>
-          <p:nvPr/>
-        </p:nvSpPr>
-        <p:spPr>
-          <a:xfrm>
-            <a:off x="8074152" y="3959352"/>
-            <a:ext cx="2825496" cy="1170432"/>
+            <a:endParaRPr lang="en-US" sz="1300" dirty="0"/>
+          </a:p>
+        </p:txBody>
+      </p:sp>
+      <p:sp>
+        <p:nvSpPr>
+          <p:cNvPr id="17" name="Text 15"/>
+          <p:cNvSpPr/>
+          <p:nvPr/>
+        </p:nvSpPr>
+        <p:spPr>
+          <a:xfrm>
+            <a:off x="8074152" y="4023360"/>
+            <a:ext cx="2825496" cy="1097280"/>
           </a:xfrm>
           <a:prstGeom prst="rect">
             <a:avLst/>
@@ -9750,7 +10348,7 @@
               <a:buNone/>
             </a:pPr>
             <a:r>
-              <a:rPr lang="en-US" sz="1250" dirty="0">
+              <a:rPr lang="en-US" sz="1550" dirty="0">
                 <a:solidFill>
                   <a:srgbClr val="17364A"/>
                 </a:solidFill>
@@ -9760,7 +10358,7 @@
               </a:rPr>
               <a:t>Connect the concept to public health decisions, safeguards, documentation, or implementation work.</a:t>
             </a:r>
-            <a:endParaRPr lang="en-US" sz="1250" dirty="0"/>
+            <a:endParaRPr lang="en-US" sz="1550" dirty="0"/>
           </a:p>
         </p:txBody>
       </p:sp>
@@ -9957,7 +10555,7 @@
                 <a:ea typeface="Aptos" pitchFamily="34" charset="-122"/>
                 <a:cs typeface="Aptos" pitchFamily="34" charset="-120"/>
               </a:rPr>
-              <a:t>© Paula Soper</a:t>
+              <a:t>Â© Paula Soper</a:t>
             </a:r>
             <a:endParaRPr lang="en-US" sz="800" dirty="0"/>
           </a:p>
@@ -9965,7 +10563,46 @@
       </p:sp>
       <p:sp>
         <p:nvSpPr>
-          <p:cNvPr id="7" name="Shape 5"/>
+          <p:cNvPr id="7" name="Text 5"/>
+          <p:cNvSpPr/>
+          <p:nvPr/>
+        </p:nvSpPr>
+        <p:spPr>
+          <a:xfrm>
+            <a:off x="11137392" y="6510528"/>
+            <a:ext cx="411480" cy="201168"/>
+          </a:xfrm>
+          <a:prstGeom prst="rect">
+            <a:avLst/>
+          </a:prstGeom>
+          <a:noFill/>
+          <a:ln/>
+        </p:spPr>
+        <p:txBody>
+          <a:bodyPr wrap="square" lIns="0" tIns="0" rIns="0" bIns="0" rtlCol="0" anchor="ctr"/>
+          <a:lstStyle/>
+          <a:p>
+            <a:pPr algn="r" indent="0" marL="0">
+              <a:buNone/>
+            </a:pPr>
+            <a:r>
+              <a:rPr lang="en-US" sz="900" dirty="0">
+                <a:solidFill>
+                  <a:srgbClr val="5F7181"/>
+                </a:solidFill>
+                <a:latin typeface="Aptos" pitchFamily="34" charset="0"/>
+                <a:ea typeface="Aptos" pitchFamily="34" charset="-122"/>
+                <a:cs typeface="Aptos" pitchFamily="34" charset="-120"/>
+              </a:rPr>
+              <a:t>21</a:t>
+            </a:r>
+            <a:endParaRPr lang="en-US" sz="900" dirty="0"/>
+          </a:p>
+        </p:txBody>
+      </p:sp>
+      <p:sp>
+        <p:nvSpPr>
+          <p:cNvPr id="8" name="Shape 6"/>
           <p:cNvSpPr/>
           <p:nvPr/>
         </p:nvSpPr>
@@ -9990,7 +10627,7 @@
       </p:sp>
       <p:sp>
         <p:nvSpPr>
-          <p:cNvPr id="8" name="Text 6"/>
+          <p:cNvPr id="9" name="Text 7"/>
           <p:cNvSpPr/>
           <p:nvPr/>
         </p:nvSpPr>
@@ -10029,14 +10666,14 @@
       </p:sp>
       <p:sp>
         <p:nvSpPr>
-          <p:cNvPr id="9" name="Text 7"/>
+          <p:cNvPr id="10" name="Text 8"/>
           <p:cNvSpPr/>
           <p:nvPr/>
         </p:nvSpPr>
         <p:spPr>
           <a:xfrm>
             <a:off x="640080" y="621792"/>
-            <a:ext cx="10881360" cy="566928"/>
+            <a:ext cx="10881360" cy="713232"/>
           </a:xfrm>
           <a:prstGeom prst="rect">
             <a:avLst/>
@@ -10054,7 +10691,7 @@
               <a:buNone/>
             </a:pPr>
             <a:r>
-              <a:rPr lang="en-US" sz="2700" b="1" dirty="0">
+              <a:rPr lang="en-US" sz="3400" b="1" dirty="0">
                 <a:solidFill>
                   <a:srgbClr val="003A63"/>
                 </a:solidFill>
@@ -10064,20 +10701,20 @@
               </a:rPr>
               <a:t>Knowledge Check</a:t>
             </a:r>
-            <a:endParaRPr lang="en-US" sz="2700" dirty="0"/>
-          </a:p>
-        </p:txBody>
-      </p:sp>
-      <p:sp>
-        <p:nvSpPr>
-          <p:cNvPr id="10" name="Text 8"/>
-          <p:cNvSpPr/>
-          <p:nvPr/>
-        </p:nvSpPr>
-        <p:spPr>
-          <a:xfrm>
-            <a:off x="868680" y="1417320"/>
-            <a:ext cx="6675120" cy="4434840"/>
+            <a:endParaRPr lang="en-US" sz="3400" dirty="0"/>
+          </a:p>
+        </p:txBody>
+      </p:sp>
+      <p:sp>
+        <p:nvSpPr>
+          <p:cNvPr id="11" name="Text 9"/>
+          <p:cNvSpPr/>
+          <p:nvPr/>
+        </p:nvSpPr>
+        <p:spPr>
+          <a:xfrm>
+            <a:off x="868680" y="1508760"/>
+            <a:ext cx="6537960" cy="4160520"/>
           </a:xfrm>
           <a:prstGeom prst="rect">
             <a:avLst/>
@@ -10092,7 +10729,7 @@
           <a:lstStyle/>
           <a:p>
             <a:r>
-              <a:rPr lang="en-US" sz="1700" dirty="0">
+              <a:rPr lang="en-US" sz="2100" dirty="0">
                 <a:solidFill>
                   <a:srgbClr val="17364A"/>
                 </a:solidFill>
@@ -10102,11 +10739,11 @@
               </a:rPr>
               <a:t>1. What is the best definition of AI for Social Good in public health?</a:t>
             </a:r>
-            <a:endParaRPr lang="en-US" sz="1700" dirty="0"/>
-          </a:p>
-          <a:p>
-            <a:r>
-              <a:rPr lang="en-US" sz="1700" dirty="0">
+            <a:endParaRPr lang="en-US" sz="2100" dirty="0"/>
+          </a:p>
+          <a:p>
+            <a:r>
+              <a:rPr lang="en-US" sz="2100" dirty="0">
                 <a:solidFill>
                   <a:srgbClr val="17364A"/>
                 </a:solidFill>
@@ -10116,11 +10753,11 @@
               </a:rPr>
               <a:t>2. Why is efficiency alone not enough to show social good?</a:t>
             </a:r>
-            <a:endParaRPr lang="en-US" sz="1700" dirty="0"/>
-          </a:p>
-          <a:p>
-            <a:r>
-              <a:rPr lang="en-US" sz="1700" dirty="0">
+            <a:endParaRPr lang="en-US" sz="2100" dirty="0"/>
+          </a:p>
+          <a:p>
+            <a:r>
+              <a:rPr lang="en-US" sz="2100" dirty="0">
                 <a:solidFill>
                   <a:srgbClr val="17364A"/>
                 </a:solidFill>
@@ -10130,27 +10767,13 @@
               </a:rPr>
               <a:t>3. What does equity by design require?</a:t>
             </a:r>
-            <a:endParaRPr lang="en-US" sz="1700" dirty="0"/>
-          </a:p>
-          <a:p>
-            <a:r>
-              <a:rPr lang="en-US" sz="1700" dirty="0">
-                <a:solidFill>
-                  <a:srgbClr val="17364A"/>
-                </a:solidFill>
-                <a:latin typeface="Aptos" pitchFamily="34" charset="0"/>
-                <a:ea typeface="Aptos" pitchFamily="34" charset="-122"/>
-                <a:cs typeface="Aptos" pitchFamily="34" charset="-120"/>
-              </a:rPr>
-              <a:t>4. Which use best reflects AI for Social Good?</a:t>
-            </a:r>
-            <a:endParaRPr lang="en-US" sz="1700" dirty="0"/>
-          </a:p>
-        </p:txBody>
-      </p:sp>
-      <p:sp>
-        <p:nvSpPr>
-          <p:cNvPr id="11" name="Shape 9"/>
+            <a:endParaRPr lang="en-US" sz="2100" dirty="0"/>
+          </a:p>
+        </p:txBody>
+      </p:sp>
+      <p:sp>
+        <p:nvSpPr>
+          <p:cNvPr id="12" name="Shape 10"/>
           <p:cNvSpPr/>
           <p:nvPr/>
         </p:nvSpPr>
@@ -10177,14 +10800,14 @@
       </p:sp>
       <p:sp>
         <p:nvSpPr>
-          <p:cNvPr id="12" name="Text 10"/>
+          <p:cNvPr id="13" name="Text 11"/>
           <p:cNvSpPr/>
           <p:nvPr/>
         </p:nvSpPr>
         <p:spPr>
           <a:xfrm>
             <a:off x="8074152" y="1563624"/>
-            <a:ext cx="2825496" cy="201168"/>
+            <a:ext cx="2825496" cy="256032"/>
           </a:xfrm>
           <a:prstGeom prst="rect">
             <a:avLst/>
@@ -10200,7 +10823,7 @@
               <a:buNone/>
             </a:pPr>
             <a:r>
-              <a:rPr lang="en-US" sz="950" b="1" dirty="0">
+              <a:rPr lang="en-US" sz="1300" b="1" dirty="0">
                 <a:solidFill>
                   <a:srgbClr val="0068B7"/>
                 </a:solidFill>
@@ -10210,20 +10833,20 @@
               </a:rPr>
               <a:t>Key idea</a:t>
             </a:r>
-            <a:endParaRPr lang="en-US" sz="950" dirty="0"/>
-          </a:p>
-        </p:txBody>
-      </p:sp>
-      <p:sp>
-        <p:nvSpPr>
-          <p:cNvPr id="13" name="Text 11"/>
-          <p:cNvSpPr/>
-          <p:nvPr/>
-        </p:nvSpPr>
-        <p:spPr>
-          <a:xfrm>
-            <a:off x="8074152" y="1856232"/>
-            <a:ext cx="2825496" cy="1261872"/>
+            <a:endParaRPr lang="en-US" sz="1300" dirty="0"/>
+          </a:p>
+        </p:txBody>
+      </p:sp>
+      <p:sp>
+        <p:nvSpPr>
+          <p:cNvPr id="14" name="Text 12"/>
+          <p:cNvSpPr/>
+          <p:nvPr/>
+        </p:nvSpPr>
+        <p:spPr>
+          <a:xfrm>
+            <a:off x="8074152" y="1920240"/>
+            <a:ext cx="2825496" cy="1188720"/>
           </a:xfrm>
           <a:prstGeom prst="rect">
             <a:avLst/>
@@ -10241,7 +10864,7 @@
               <a:buNone/>
             </a:pPr>
             <a:r>
-              <a:rPr lang="en-US" sz="1250" dirty="0">
+              <a:rPr lang="en-US" sz="1550" dirty="0">
                 <a:solidFill>
                   <a:srgbClr val="17364A"/>
                 </a:solidFill>
@@ -10251,13 +10874,13 @@
               </a:rPr>
               <a:t>1. What is the best definition of AI for Social Good in public health?</a:t>
             </a:r>
-            <a:endParaRPr lang="en-US" sz="1250" dirty="0"/>
-          </a:p>
-        </p:txBody>
-      </p:sp>
-      <p:sp>
-        <p:nvSpPr>
-          <p:cNvPr id="14" name="Shape 12"/>
+            <a:endParaRPr lang="en-US" sz="1550" dirty="0"/>
+          </a:p>
+        </p:txBody>
+      </p:sp>
+      <p:sp>
+        <p:nvSpPr>
+          <p:cNvPr id="15" name="Shape 13"/>
           <p:cNvSpPr/>
           <p:nvPr/>
         </p:nvSpPr>
@@ -10284,14 +10907,14 @@
       </p:sp>
       <p:sp>
         <p:nvSpPr>
-          <p:cNvPr id="15" name="Text 13"/>
+          <p:cNvPr id="16" name="Text 14"/>
           <p:cNvSpPr/>
           <p:nvPr/>
         </p:nvSpPr>
         <p:spPr>
           <a:xfrm>
             <a:off x="8074152" y="3666744"/>
-            <a:ext cx="2825496" cy="201168"/>
+            <a:ext cx="2825496" cy="256032"/>
           </a:xfrm>
           <a:prstGeom prst="rect">
             <a:avLst/>
@@ -10307,7 +10930,7 @@
               <a:buNone/>
             </a:pPr>
             <a:r>
-              <a:rPr lang="en-US" sz="950" b="1" dirty="0">
+              <a:rPr lang="en-US" sz="1300" b="1" dirty="0">
                 <a:solidFill>
                   <a:srgbClr val="0068B7"/>
                 </a:solidFill>
@@ -10317,20 +10940,20 @@
               </a:rPr>
               <a:t>Use this for</a:t>
             </a:r>
-            <a:endParaRPr lang="en-US" sz="950" dirty="0"/>
-          </a:p>
-        </p:txBody>
-      </p:sp>
-      <p:sp>
-        <p:nvSpPr>
-          <p:cNvPr id="16" name="Text 14"/>
-          <p:cNvSpPr/>
-          <p:nvPr/>
-        </p:nvSpPr>
-        <p:spPr>
-          <a:xfrm>
-            <a:off x="8074152" y="3959352"/>
-            <a:ext cx="2825496" cy="1170432"/>
+            <a:endParaRPr lang="en-US" sz="1300" dirty="0"/>
+          </a:p>
+        </p:txBody>
+      </p:sp>
+      <p:sp>
+        <p:nvSpPr>
+          <p:cNvPr id="17" name="Text 15"/>
+          <p:cNvSpPr/>
+          <p:nvPr/>
+        </p:nvSpPr>
+        <p:spPr>
+          <a:xfrm>
+            <a:off x="8074152" y="4023360"/>
+            <a:ext cx="2825496" cy="1097280"/>
           </a:xfrm>
           <a:prstGeom prst="rect">
             <a:avLst/>
@@ -10348,7 +10971,7 @@
               <a:buNone/>
             </a:pPr>
             <a:r>
-              <a:rPr lang="en-US" sz="1250" dirty="0">
+              <a:rPr lang="en-US" sz="1550" dirty="0">
                 <a:solidFill>
                   <a:srgbClr val="17364A"/>
                 </a:solidFill>
@@ -10358,7 +10981,7 @@
               </a:rPr>
               <a:t>Connect the concept to public health decisions, safeguards, documentation, or implementation work.</a:t>
             </a:r>
-            <a:endParaRPr lang="en-US" sz="1250" dirty="0"/>
+            <a:endParaRPr lang="en-US" sz="1550" dirty="0"/>
           </a:p>
         </p:txBody>
       </p:sp>
@@ -10555,7 +11178,7 @@
                 <a:ea typeface="Aptos" pitchFamily="34" charset="-122"/>
                 <a:cs typeface="Aptos" pitchFamily="34" charset="-120"/>
               </a:rPr>
-              <a:t>© Paula Soper</a:t>
+              <a:t>Â© Paula Soper</a:t>
             </a:r>
             <a:endParaRPr lang="en-US" sz="800" dirty="0"/>
           </a:p>
@@ -10563,7 +11186,46 @@
       </p:sp>
       <p:sp>
         <p:nvSpPr>
-          <p:cNvPr id="7" name="Shape 5"/>
+          <p:cNvPr id="7" name="Text 5"/>
+          <p:cNvSpPr/>
+          <p:nvPr/>
+        </p:nvSpPr>
+        <p:spPr>
+          <a:xfrm>
+            <a:off x="11137392" y="6510528"/>
+            <a:ext cx="411480" cy="201168"/>
+          </a:xfrm>
+          <a:prstGeom prst="rect">
+            <a:avLst/>
+          </a:prstGeom>
+          <a:noFill/>
+          <a:ln/>
+        </p:spPr>
+        <p:txBody>
+          <a:bodyPr wrap="square" lIns="0" tIns="0" rIns="0" bIns="0" rtlCol="0" anchor="ctr"/>
+          <a:lstStyle/>
+          <a:p>
+            <a:pPr algn="r" indent="0" marL="0">
+              <a:buNone/>
+            </a:pPr>
+            <a:r>
+              <a:rPr lang="en-US" sz="900" dirty="0">
+                <a:solidFill>
+                  <a:srgbClr val="5F7181"/>
+                </a:solidFill>
+                <a:latin typeface="Aptos" pitchFamily="34" charset="0"/>
+                <a:ea typeface="Aptos" pitchFamily="34" charset="-122"/>
+                <a:cs typeface="Aptos" pitchFamily="34" charset="-120"/>
+              </a:rPr>
+              <a:t>22</a:t>
+            </a:r>
+            <a:endParaRPr lang="en-US" sz="900" dirty="0"/>
+          </a:p>
+        </p:txBody>
+      </p:sp>
+      <p:sp>
+        <p:nvSpPr>
+          <p:cNvPr id="8" name="Shape 6"/>
           <p:cNvSpPr/>
           <p:nvPr/>
         </p:nvSpPr>
@@ -10588,7 +11250,7 @@
       </p:sp>
       <p:sp>
         <p:nvSpPr>
-          <p:cNvPr id="8" name="Text 6"/>
+          <p:cNvPr id="9" name="Text 7"/>
           <p:cNvSpPr/>
           <p:nvPr/>
         </p:nvSpPr>
@@ -10627,14 +11289,14 @@
       </p:sp>
       <p:sp>
         <p:nvSpPr>
-          <p:cNvPr id="9" name="Text 7"/>
+          <p:cNvPr id="10" name="Text 8"/>
           <p:cNvSpPr/>
           <p:nvPr/>
         </p:nvSpPr>
         <p:spPr>
           <a:xfrm>
             <a:off x="640080" y="621792"/>
-            <a:ext cx="10881360" cy="566928"/>
+            <a:ext cx="10881360" cy="713232"/>
           </a:xfrm>
           <a:prstGeom prst="rect">
             <a:avLst/>
@@ -10652,7 +11314,7 @@
               <a:buNone/>
             </a:pPr>
             <a:r>
-              <a:rPr lang="en-US" sz="2700" b="1" dirty="0">
+              <a:rPr lang="en-US" sz="3400" b="1" dirty="0">
                 <a:solidFill>
                   <a:srgbClr val="003A63"/>
                 </a:solidFill>
@@ -10662,20 +11324,20 @@
               </a:rPr>
               <a:t>References and Resources</a:t>
             </a:r>
-            <a:endParaRPr lang="en-US" sz="2700" dirty="0"/>
-          </a:p>
-        </p:txBody>
-      </p:sp>
-      <p:sp>
-        <p:nvSpPr>
-          <p:cNvPr id="10" name="Text 8"/>
-          <p:cNvSpPr/>
-          <p:nvPr/>
-        </p:nvSpPr>
-        <p:spPr>
-          <a:xfrm>
-            <a:off x="868680" y="1417320"/>
-            <a:ext cx="6675120" cy="4434840"/>
+            <a:endParaRPr lang="en-US" sz="3400" dirty="0"/>
+          </a:p>
+        </p:txBody>
+      </p:sp>
+      <p:sp>
+        <p:nvSpPr>
+          <p:cNvPr id="11" name="Text 9"/>
+          <p:cNvSpPr/>
+          <p:nvPr/>
+        </p:nvSpPr>
+        <p:spPr>
+          <a:xfrm>
+            <a:off x="868680" y="1508760"/>
+            <a:ext cx="6537960" cy="4160520"/>
           </a:xfrm>
           <a:prstGeom prst="rect">
             <a:avLst/>
@@ -10690,7 +11352,7 @@
           <a:lstStyle/>
           <a:p>
             <a:r>
-              <a:rPr lang="en-US" sz="1700" dirty="0">
+              <a:rPr lang="en-US" sz="2100" dirty="0">
                 <a:solidFill>
                   <a:srgbClr val="17364A"/>
                 </a:solidFill>
@@ -10698,13 +11360,13 @@
                 <a:ea typeface="Aptos" pitchFamily="34" charset="-122"/>
                 <a:cs typeface="Aptos" pitchFamily="34" charset="-120"/>
               </a:rPr>
-              <a:t>WHO Ethics and Governance of Artificial Intelligence for Health: https://www.who.int/publications/i/item/9789240029200</a:t>
-            </a:r>
-            <a:endParaRPr lang="en-US" sz="1700" dirty="0"/>
-          </a:p>
-          <a:p>
-            <a:r>
-              <a:rPr lang="en-US" sz="1700" dirty="0">
+              <a:t>WHO Ethics and Governance of Artificial Intelligence for Health:.</a:t>
+            </a:r>
+            <a:endParaRPr lang="en-US" sz="2100" dirty="0"/>
+          </a:p>
+          <a:p>
+            <a:r>
+              <a:rPr lang="en-US" sz="2100" dirty="0">
                 <a:solidFill>
                   <a:srgbClr val="17364A"/>
                 </a:solidFill>
@@ -10714,11 +11376,11 @@
               </a:rPr>
               <a:t>WHO Guidance on Large Multi-Modal Models: https://www.who.int/publications/i/item/9789240084759</a:t>
             </a:r>
-            <a:endParaRPr lang="en-US" sz="1700" dirty="0"/>
-          </a:p>
-          <a:p>
-            <a:r>
-              <a:rPr lang="en-US" sz="1700" dirty="0">
+            <a:endParaRPr lang="en-US" sz="2100" dirty="0"/>
+          </a:p>
+          <a:p>
+            <a:r>
+              <a:rPr lang="en-US" sz="2100" dirty="0">
                 <a:solidFill>
                   <a:srgbClr val="17364A"/>
                 </a:solidFill>
@@ -10726,29 +11388,15 @@
                 <a:ea typeface="Aptos" pitchFamily="34" charset="-122"/>
                 <a:cs typeface="Aptos" pitchFamily="34" charset="-120"/>
               </a:rPr>
-              <a:t>NIST Artificial Intelligence Risk Management Framework: https://www.nist.gov/itl/ai-risk-management-framework</a:t>
-            </a:r>
-            <a:endParaRPr lang="en-US" sz="1700" dirty="0"/>
-          </a:p>
-          <a:p>
-            <a:r>
-              <a:rPr lang="en-US" sz="1700" dirty="0">
-                <a:solidFill>
-                  <a:srgbClr val="17364A"/>
-                </a:solidFill>
-                <a:latin typeface="Aptos" pitchFamily="34" charset="0"/>
-                <a:ea typeface="Aptos" pitchFamily="34" charset="-122"/>
-                <a:cs typeface="Aptos" pitchFamily="34" charset="-120"/>
-              </a:rPr>
-              <a:t>CDC Public Health Data Strategy: https://www.cdc.gov/public-health-data-strategy/php/about/index.html</a:t>
-            </a:r>
-            <a:endParaRPr lang="en-US" sz="1700" dirty="0"/>
-          </a:p>
-        </p:txBody>
-      </p:sp>
-      <p:sp>
-        <p:nvSpPr>
-          <p:cNvPr id="11" name="Shape 9"/>
+              <a:t>NIST Artificial Intelligence Risk Management Framework:.</a:t>
+            </a:r>
+            <a:endParaRPr lang="en-US" sz="2100" dirty="0"/>
+          </a:p>
+        </p:txBody>
+      </p:sp>
+      <p:sp>
+        <p:nvSpPr>
+          <p:cNvPr id="12" name="Shape 10"/>
           <p:cNvSpPr/>
           <p:nvPr/>
         </p:nvSpPr>
@@ -10775,14 +11423,14 @@
       </p:sp>
       <p:sp>
         <p:nvSpPr>
-          <p:cNvPr id="12" name="Text 10"/>
+          <p:cNvPr id="13" name="Text 11"/>
           <p:cNvSpPr/>
           <p:nvPr/>
         </p:nvSpPr>
         <p:spPr>
           <a:xfrm>
             <a:off x="8074152" y="1563624"/>
-            <a:ext cx="2825496" cy="201168"/>
+            <a:ext cx="2825496" cy="256032"/>
           </a:xfrm>
           <a:prstGeom prst="rect">
             <a:avLst/>
@@ -10798,7 +11446,7 @@
               <a:buNone/>
             </a:pPr>
             <a:r>
-              <a:rPr lang="en-US" sz="950" b="1" dirty="0">
+              <a:rPr lang="en-US" sz="1300" b="1" dirty="0">
                 <a:solidFill>
                   <a:srgbClr val="0068B7"/>
                 </a:solidFill>
@@ -10808,20 +11456,20 @@
               </a:rPr>
               <a:t>Key idea</a:t>
             </a:r>
-            <a:endParaRPr lang="en-US" sz="950" dirty="0"/>
-          </a:p>
-        </p:txBody>
-      </p:sp>
-      <p:sp>
-        <p:nvSpPr>
-          <p:cNvPr id="13" name="Text 11"/>
-          <p:cNvSpPr/>
-          <p:nvPr/>
-        </p:nvSpPr>
-        <p:spPr>
-          <a:xfrm>
-            <a:off x="8074152" y="1856232"/>
-            <a:ext cx="2825496" cy="1261872"/>
+            <a:endParaRPr lang="en-US" sz="1300" dirty="0"/>
+          </a:p>
+        </p:txBody>
+      </p:sp>
+      <p:sp>
+        <p:nvSpPr>
+          <p:cNvPr id="14" name="Text 12"/>
+          <p:cNvSpPr/>
+          <p:nvPr/>
+        </p:nvSpPr>
+        <p:spPr>
+          <a:xfrm>
+            <a:off x="8074152" y="1920240"/>
+            <a:ext cx="2825496" cy="1188720"/>
           </a:xfrm>
           <a:prstGeom prst="rect">
             <a:avLst/>
@@ -10839,7 +11487,7 @@
               <a:buNone/>
             </a:pPr>
             <a:r>
-              <a:rPr lang="en-US" sz="1250" dirty="0">
+              <a:rPr lang="en-US" sz="1550" dirty="0">
                 <a:solidFill>
                   <a:srgbClr val="17364A"/>
                 </a:solidFill>
@@ -10847,15 +11495,15 @@
                 <a:ea typeface="Aptos" pitchFamily="34" charset="-122"/>
                 <a:cs typeface="Aptos" pitchFamily="34" charset="-120"/>
               </a:rPr>
-              <a:t>WHO Ethics and Governance of Artificial Intelligence for Health: https://www.who.int/publications/i/item/9789240029200</a:t>
-            </a:r>
-            <a:endParaRPr lang="en-US" sz="1250" dirty="0"/>
-          </a:p>
-        </p:txBody>
-      </p:sp>
-      <p:sp>
-        <p:nvSpPr>
-          <p:cNvPr id="14" name="Shape 12"/>
+              <a:t>WHO Ethics and Governance of Artificial Intelligence for Health:.</a:t>
+            </a:r>
+            <a:endParaRPr lang="en-US" sz="1550" dirty="0"/>
+          </a:p>
+        </p:txBody>
+      </p:sp>
+      <p:sp>
+        <p:nvSpPr>
+          <p:cNvPr id="15" name="Shape 13"/>
           <p:cNvSpPr/>
           <p:nvPr/>
         </p:nvSpPr>
@@ -10882,14 +11530,14 @@
       </p:sp>
       <p:sp>
         <p:nvSpPr>
-          <p:cNvPr id="15" name="Text 13"/>
+          <p:cNvPr id="16" name="Text 14"/>
           <p:cNvSpPr/>
           <p:nvPr/>
         </p:nvSpPr>
         <p:spPr>
           <a:xfrm>
             <a:off x="8074152" y="3666744"/>
-            <a:ext cx="2825496" cy="201168"/>
+            <a:ext cx="2825496" cy="256032"/>
           </a:xfrm>
           <a:prstGeom prst="rect">
             <a:avLst/>
@@ -10905,7 +11553,7 @@
               <a:buNone/>
             </a:pPr>
             <a:r>
-              <a:rPr lang="en-US" sz="950" b="1" dirty="0">
+              <a:rPr lang="en-US" sz="1300" b="1" dirty="0">
                 <a:solidFill>
                   <a:srgbClr val="0068B7"/>
                 </a:solidFill>
@@ -10915,20 +11563,20 @@
               </a:rPr>
               <a:t>Use this for</a:t>
             </a:r>
-            <a:endParaRPr lang="en-US" sz="950" dirty="0"/>
-          </a:p>
-        </p:txBody>
-      </p:sp>
-      <p:sp>
-        <p:nvSpPr>
-          <p:cNvPr id="16" name="Text 14"/>
-          <p:cNvSpPr/>
-          <p:nvPr/>
-        </p:nvSpPr>
-        <p:spPr>
-          <a:xfrm>
-            <a:off x="8074152" y="3959352"/>
-            <a:ext cx="2825496" cy="1170432"/>
+            <a:endParaRPr lang="en-US" sz="1300" dirty="0"/>
+          </a:p>
+        </p:txBody>
+      </p:sp>
+      <p:sp>
+        <p:nvSpPr>
+          <p:cNvPr id="17" name="Text 15"/>
+          <p:cNvSpPr/>
+          <p:nvPr/>
+        </p:nvSpPr>
+        <p:spPr>
+          <a:xfrm>
+            <a:off x="8074152" y="4023360"/>
+            <a:ext cx="2825496" cy="1097280"/>
           </a:xfrm>
           <a:prstGeom prst="rect">
             <a:avLst/>
@@ -10946,7 +11594,7 @@
               <a:buNone/>
             </a:pPr>
             <a:r>
-              <a:rPr lang="en-US" sz="1250" dirty="0">
+              <a:rPr lang="en-US" sz="1550" dirty="0">
                 <a:solidFill>
                   <a:srgbClr val="17364A"/>
                 </a:solidFill>
@@ -10956,7 +11604,7 @@
               </a:rPr>
               <a:t>Connect the concept to public health decisions, safeguards, documentation, or implementation work.</a:t>
             </a:r>
-            <a:endParaRPr lang="en-US" sz="1250" dirty="0"/>
+            <a:endParaRPr lang="en-US" sz="1550" dirty="0"/>
           </a:p>
         </p:txBody>
       </p:sp>
@@ -11153,7 +11801,7 @@
                 <a:ea typeface="Aptos" pitchFamily="34" charset="-122"/>
                 <a:cs typeface="Aptos" pitchFamily="34" charset="-120"/>
               </a:rPr>
-              <a:t>© Paula Soper</a:t>
+              <a:t>Â© Paula Soper</a:t>
             </a:r>
             <a:endParaRPr lang="en-US" sz="800" dirty="0"/>
           </a:p>
@@ -11167,8 +11815,47 @@
         </p:nvSpPr>
         <p:spPr>
           <a:xfrm>
+            <a:off x="11137392" y="6510528"/>
+            <a:ext cx="411480" cy="201168"/>
+          </a:xfrm>
+          <a:prstGeom prst="rect">
+            <a:avLst/>
+          </a:prstGeom>
+          <a:noFill/>
+          <a:ln/>
+        </p:spPr>
+        <p:txBody>
+          <a:bodyPr wrap="square" lIns="0" tIns="0" rIns="0" bIns="0" rtlCol="0" anchor="ctr"/>
+          <a:lstStyle/>
+          <a:p>
+            <a:pPr algn="r" indent="0" marL="0">
+              <a:buNone/>
+            </a:pPr>
+            <a:r>
+              <a:rPr lang="en-US" sz="900" dirty="0">
+                <a:solidFill>
+                  <a:srgbClr val="5F7181"/>
+                </a:solidFill>
+                <a:latin typeface="Aptos" pitchFamily="34" charset="0"/>
+                <a:ea typeface="Aptos" pitchFamily="34" charset="-122"/>
+                <a:cs typeface="Aptos" pitchFamily="34" charset="-120"/>
+              </a:rPr>
+              <a:t>3</a:t>
+            </a:r>
+            <a:endParaRPr lang="en-US" sz="900" dirty="0"/>
+          </a:p>
+        </p:txBody>
+      </p:sp>
+      <p:sp>
+        <p:nvSpPr>
+          <p:cNvPr id="8" name="Text 6"/>
+          <p:cNvSpPr/>
+          <p:nvPr/>
+        </p:nvSpPr>
+        <p:spPr>
+          <a:xfrm>
             <a:off x="640080" y="658368"/>
-            <a:ext cx="10881360" cy="566928"/>
+            <a:ext cx="10881360" cy="713232"/>
           </a:xfrm>
           <a:prstGeom prst="rect">
             <a:avLst/>
@@ -11186,7 +11873,7 @@
               <a:buNone/>
             </a:pPr>
             <a:r>
-              <a:rPr lang="en-US" sz="2700" b="1" dirty="0">
+              <a:rPr lang="en-US" sz="3400" b="1" dirty="0">
                 <a:solidFill>
                   <a:srgbClr val="003A63"/>
                 </a:solidFill>
@@ -11196,20 +11883,20 @@
               </a:rPr>
               <a:t>How this module connects to the playbook</a:t>
             </a:r>
-            <a:endParaRPr lang="en-US" sz="2700" dirty="0"/>
-          </a:p>
-        </p:txBody>
-      </p:sp>
-      <p:sp>
-        <p:nvSpPr>
-          <p:cNvPr id="8" name="Text 6"/>
-          <p:cNvSpPr/>
-          <p:nvPr/>
-        </p:nvSpPr>
-        <p:spPr>
-          <a:xfrm>
-            <a:off x="868680" y="1417320"/>
-            <a:ext cx="6903720" cy="4480560"/>
+            <a:endParaRPr lang="en-US" sz="3400" dirty="0"/>
+          </a:p>
+        </p:txBody>
+      </p:sp>
+      <p:sp>
+        <p:nvSpPr>
+          <p:cNvPr id="9" name="Text 7"/>
+          <p:cNvSpPr/>
+          <p:nvPr/>
+        </p:nvSpPr>
+        <p:spPr>
+          <a:xfrm>
+            <a:off x="868680" y="1508760"/>
+            <a:ext cx="6812280" cy="3977640"/>
           </a:xfrm>
           <a:prstGeom prst="rect">
             <a:avLst/>
@@ -11224,7 +11911,7 @@
           <a:lstStyle/>
           <a:p>
             <a:r>
-              <a:rPr lang="en-US" sz="1540" dirty="0">
+              <a:rPr lang="en-US" sz="1900" dirty="0">
                 <a:solidFill>
                   <a:srgbClr val="17364A"/>
                 </a:solidFill>
@@ -11232,13 +11919,13 @@
                 <a:ea typeface="Aptos" pitchFamily="34" charset="-122"/>
                 <a:cs typeface="Aptos" pitchFamily="34" charset="-120"/>
               </a:rPr>
-              <a:t>Play 4: Engage Stakeholders - This lesson informs Play 4 by helping learners connect the lesson topic to engage stakeholders work in.</a:t>
-            </a:r>
-            <a:endParaRPr lang="en-US" sz="1540" dirty="0"/>
-          </a:p>
-          <a:p>
-            <a:r>
-              <a:rPr lang="en-US" sz="1540" dirty="0">
+              <a:t>Play 4: Engage Stakeholders - This lesson informs Play 4 by helping learners connect the lesson topic to.</a:t>
+            </a:r>
+            <a:endParaRPr lang="en-US" sz="1900" dirty="0"/>
+          </a:p>
+          <a:p>
+            <a:r>
+              <a:rPr lang="en-US" sz="1900" dirty="0">
                 <a:solidFill>
                   <a:srgbClr val="17364A"/>
                 </a:solidFill>
@@ -11246,13 +11933,13 @@
                 <a:ea typeface="Aptos" pitchFamily="34" charset="-122"/>
                 <a:cs typeface="Aptos" pitchFamily="34" charset="-120"/>
               </a:rPr>
-              <a:t>Play 7: Prioritize Use Cases - This lesson informs Play 7 by helping learners connect the lesson topic to prioritize use cases work.</a:t>
-            </a:r>
-            <a:endParaRPr lang="en-US" sz="1540" dirty="0"/>
-          </a:p>
-          <a:p>
-            <a:r>
-              <a:rPr lang="en-US" sz="1540" dirty="0">
+              <a:t>Play 7: Prioritize Use Cases - This lesson informs Play 7 by helping learners connect the lesson topic to.</a:t>
+            </a:r>
+            <a:endParaRPr lang="en-US" sz="1900" dirty="0"/>
+          </a:p>
+          <a:p>
+            <a:r>
+              <a:rPr lang="en-US" sz="1900" dirty="0">
                 <a:solidFill>
                   <a:srgbClr val="17364A"/>
                 </a:solidFill>
@@ -11260,13 +11947,13 @@
                 <a:ea typeface="Aptos" pitchFamily="34" charset="-122"/>
                 <a:cs typeface="Aptos" pitchFamily="34" charset="-120"/>
               </a:rPr>
-              <a:t>Play 1: Vision &amp; Guardrails - This lesson informs Play 1 by helping learners connect the lesson topic to vision &amp; guardrails work in.</a:t>
-            </a:r>
-            <a:endParaRPr lang="en-US" sz="1540" dirty="0"/>
-          </a:p>
-          <a:p>
-            <a:r>
-              <a:rPr lang="en-US" sz="1540" dirty="0">
+              <a:t>Play 1: Vision &amp; Guardrails - This lesson informs Play 1 by helping learners connect the lesson topic to.</a:t>
+            </a:r>
+            <a:endParaRPr lang="en-US" sz="1900" dirty="0"/>
+          </a:p>
+          <a:p>
+            <a:r>
+              <a:rPr lang="en-US" sz="1900" dirty="0">
                 <a:solidFill>
                   <a:srgbClr val="17364A"/>
                 </a:solidFill>
@@ -11274,15 +11961,15 @@
                 <a:ea typeface="Aptos" pitchFamily="34" charset="-122"/>
                 <a:cs typeface="Aptos" pitchFamily="34" charset="-120"/>
               </a:rPr>
-              <a:t>Play 13: Monitor and Evaluate AI Systems - This lesson informs Play 13 by helping learners connect the lesson topic to monitor and.</a:t>
-            </a:r>
-            <a:endParaRPr lang="en-US" sz="1540" dirty="0"/>
-          </a:p>
-        </p:txBody>
-      </p:sp>
-      <p:sp>
-        <p:nvSpPr>
-          <p:cNvPr id="9" name="Shape 7"/>
+              <a:t>Play 13: Monitor and Evaluate AI Systems - This lesson informs Play 13 by helping learners connect the.</a:t>
+            </a:r>
+            <a:endParaRPr lang="en-US" sz="1900" dirty="0"/>
+          </a:p>
+        </p:txBody>
+      </p:sp>
+      <p:sp>
+        <p:nvSpPr>
+          <p:cNvPr id="10" name="Shape 8"/>
           <p:cNvSpPr/>
           <p:nvPr/>
         </p:nvSpPr>
@@ -11309,14 +11996,14 @@
       </p:sp>
       <p:sp>
         <p:nvSpPr>
-          <p:cNvPr id="10" name="Text 8"/>
+          <p:cNvPr id="11" name="Text 9"/>
           <p:cNvSpPr/>
           <p:nvPr/>
         </p:nvSpPr>
         <p:spPr>
           <a:xfrm>
             <a:off x="8211312" y="1563624"/>
-            <a:ext cx="2734056" cy="201168"/>
+            <a:ext cx="2734056" cy="256032"/>
           </a:xfrm>
           <a:prstGeom prst="rect">
             <a:avLst/>
@@ -11332,7 +12019,7 @@
               <a:buNone/>
             </a:pPr>
             <a:r>
-              <a:rPr lang="en-US" sz="950" b="1" dirty="0">
+              <a:rPr lang="en-US" sz="1300" b="1" dirty="0">
                 <a:solidFill>
                   <a:srgbClr val="0068B7"/>
                 </a:solidFill>
@@ -11342,20 +12029,20 @@
               </a:rPr>
               <a:t>Apply the lesson</a:t>
             </a:r>
-            <a:endParaRPr lang="en-US" sz="950" dirty="0"/>
-          </a:p>
-        </p:txBody>
-      </p:sp>
-      <p:sp>
-        <p:nvSpPr>
-          <p:cNvPr id="11" name="Text 9"/>
-          <p:cNvSpPr/>
-          <p:nvPr/>
-        </p:nvSpPr>
-        <p:spPr>
-          <a:xfrm>
-            <a:off x="8211312" y="1856232"/>
-            <a:ext cx="2734056" cy="1536192"/>
+            <a:endParaRPr lang="en-US" sz="1300" dirty="0"/>
+          </a:p>
+        </p:txBody>
+      </p:sp>
+      <p:sp>
+        <p:nvSpPr>
+          <p:cNvPr id="12" name="Text 10"/>
+          <p:cNvSpPr/>
+          <p:nvPr/>
+        </p:nvSpPr>
+        <p:spPr>
+          <a:xfrm>
+            <a:off x="8211312" y="1920240"/>
+            <a:ext cx="2734056" cy="1463040"/>
           </a:xfrm>
           <a:prstGeom prst="rect">
             <a:avLst/>
@@ -11373,7 +12060,7 @@
               <a:buNone/>
             </a:pPr>
             <a:r>
-              <a:rPr lang="en-US" sz="1250" dirty="0">
+              <a:rPr lang="en-US" sz="1550" dirty="0">
                 <a:solidFill>
                   <a:srgbClr val="17364A"/>
                 </a:solidFill>
@@ -11383,32 +12070,32 @@
               </a:rPr>
               <a:t>Use the related plays to identify decisions, participants, timing, approvals, and documentation needed for responsible implementation.</a:t>
             </a:r>
-            <a:endParaRPr lang="en-US" sz="1250" dirty="0"/>
-          </a:p>
-        </p:txBody>
-      </p:sp>
-      <p:sp>
-        <p:nvSpPr>
-          <p:cNvPr id="12" name="Shape 10"/>
-          <p:cNvSpPr/>
-          <p:nvPr/>
-        </p:nvSpPr>
-        <p:spPr>
-          <a:xfrm>
-            <a:off x="8046720" y="3794760"/>
-            <a:ext cx="3063240" cy="1508760"/>
+            <a:endParaRPr lang="en-US" sz="1550" dirty="0"/>
+          </a:p>
+        </p:txBody>
+      </p:sp>
+      <p:sp>
+        <p:nvSpPr>
+          <p:cNvPr id="13" name="Shape 11"/>
+          <p:cNvSpPr/>
+          <p:nvPr/>
+        </p:nvSpPr>
+        <p:spPr>
+          <a:xfrm>
+            <a:off x="7818120" y="3977640"/>
+            <a:ext cx="972312" cy="749808"/>
           </a:xfrm>
           <a:prstGeom prst="roundRect">
             <a:avLst>
-              <a:gd name="adj" fmla="val 7273"/>
+              <a:gd name="adj" fmla="val 14634"/>
             </a:avLst>
           </a:prstGeom>
           <a:solidFill>
-            <a:srgbClr val="FFF4D9"/>
+            <a:srgbClr val="0068B7"/>
           </a:solidFill>
           <a:ln w="12700">
             <a:solidFill>
-              <a:srgbClr val="B9D7E6"/>
+              <a:srgbClr val="0068B7"/>
             </a:solidFill>
             <a:prstDash val="solid"/>
           </a:ln>
@@ -11416,81 +12103,256 @@
       </p:sp>
       <p:sp>
         <p:nvSpPr>
-          <p:cNvPr id="13" name="Text 11"/>
-          <p:cNvSpPr/>
-          <p:nvPr/>
-        </p:nvSpPr>
-        <p:spPr>
-          <a:xfrm>
-            <a:off x="8211312" y="3941064"/>
-            <a:ext cx="2734056" cy="201168"/>
-          </a:xfrm>
-          <a:prstGeom prst="rect">
-            <a:avLst/>
-          </a:prstGeom>
-          <a:noFill/>
-          <a:ln/>
-        </p:spPr>
-        <p:txBody>
-          <a:bodyPr wrap="square" lIns="0" tIns="0" rIns="0" bIns="0" rtlCol="0" anchor="ctr"/>
-          <a:lstStyle/>
-          <a:p>
-            <a:pPr indent="0" marL="0">
-              <a:buNone/>
-            </a:pPr>
-            <a:r>
-              <a:rPr lang="en-US" sz="950" b="1" dirty="0">
-                <a:solidFill>
-                  <a:srgbClr val="0068B7"/>
-                </a:solidFill>
-                <a:latin typeface="Aptos" pitchFamily="34" charset="0"/>
-                <a:ea typeface="Aptos" pitchFamily="34" charset="-122"/>
-                <a:cs typeface="Aptos" pitchFamily="34" charset="-120"/>
-              </a:rPr>
-              <a:t>Keep in mind</a:t>
-            </a:r>
-            <a:endParaRPr lang="en-US" sz="950" dirty="0"/>
-          </a:p>
-        </p:txBody>
-      </p:sp>
-      <p:sp>
-        <p:nvSpPr>
           <p:cNvPr id="14" name="Text 12"/>
           <p:cNvSpPr/>
           <p:nvPr/>
         </p:nvSpPr>
         <p:spPr>
           <a:xfrm>
-            <a:off x="8211312" y="4233672"/>
-            <a:ext cx="2734056" cy="941832"/>
-          </a:xfrm>
-          <a:prstGeom prst="rect">
-            <a:avLst/>
-          </a:prstGeom>
-          <a:noFill/>
-          <a:ln/>
-        </p:spPr>
-        <p:txBody>
-          <a:bodyPr wrap="square" lIns="0" tIns="0" rIns="0" bIns="0" rtlCol="0" anchor="t">
+            <a:off x="7891272" y="4169664"/>
+            <a:ext cx="826008" cy="310896"/>
+          </a:xfrm>
+          <a:prstGeom prst="rect">
+            <a:avLst/>
+          </a:prstGeom>
+          <a:noFill/>
+          <a:ln/>
+        </p:spPr>
+        <p:txBody>
+          <a:bodyPr wrap="square" lIns="0" tIns="0" rIns="0" bIns="0" rtlCol="0" anchor="ctr">
             <a:normAutofit/>
           </a:bodyPr>
           <a:lstStyle/>
           <a:p>
-            <a:pPr indent="0" marL="0">
-              <a:buNone/>
-            </a:pPr>
-            <a:r>
-              <a:rPr lang="en-US" sz="1250" dirty="0">
-                <a:solidFill>
-                  <a:srgbClr val="17364A"/>
-                </a:solidFill>
-                <a:latin typeface="Aptos" pitchFamily="34" charset="0"/>
-                <a:ea typeface="Aptos" pitchFamily="34" charset="-122"/>
-                <a:cs typeface="Aptos" pitchFamily="34" charset="-120"/>
-              </a:rPr>
-              <a:t>The playbook connection helps turn training into agency work, not just individual knowledge.</a:t>
-            </a:r>
-            <a:endParaRPr lang="en-US" sz="1250" dirty="0"/>
+            <a:pPr algn="ctr" indent="0" marL="0">
+              <a:buNone/>
+            </a:pPr>
+            <a:r>
+              <a:rPr lang="en-US" sz="1500" b="1" dirty="0">
+                <a:solidFill>
+                  <a:srgbClr val="FFFFFF"/>
+                </a:solidFill>
+                <a:latin typeface="Aptos" pitchFamily="34" charset="0"/>
+                <a:ea typeface="Aptos" pitchFamily="34" charset="-122"/>
+                <a:cs typeface="Aptos" pitchFamily="34" charset="-120"/>
+              </a:rPr>
+              <a:t>Lesson</a:t>
+            </a:r>
+            <a:endParaRPr lang="en-US" sz="1500" dirty="0"/>
+          </a:p>
+        </p:txBody>
+      </p:sp>
+      <p:sp>
+        <p:nvSpPr>
+          <p:cNvPr id="15" name="Text 13"/>
+          <p:cNvSpPr/>
+          <p:nvPr/>
+        </p:nvSpPr>
+        <p:spPr>
+          <a:xfrm>
+            <a:off x="8817864" y="4187952"/>
+            <a:ext cx="201168" cy="256032"/>
+          </a:xfrm>
+          <a:prstGeom prst="rect">
+            <a:avLst/>
+          </a:prstGeom>
+          <a:noFill/>
+          <a:ln/>
+        </p:spPr>
+        <p:txBody>
+          <a:bodyPr wrap="square" lIns="0" tIns="0" rIns="0" bIns="0" rtlCol="0" anchor="ctr"/>
+          <a:lstStyle/>
+          <a:p>
+            <a:pPr algn="ctr" indent="0" marL="0">
+              <a:buNone/>
+            </a:pPr>
+            <a:r>
+              <a:rPr lang="en-US" sz="1800" b="1" dirty="0">
+                <a:solidFill>
+                  <a:srgbClr val="0068B7"/>
+                </a:solidFill>
+                <a:latin typeface="Aptos" pitchFamily="34" charset="0"/>
+                <a:ea typeface="Aptos" pitchFamily="34" charset="-122"/>
+                <a:cs typeface="Aptos" pitchFamily="34" charset="-120"/>
+              </a:rPr>
+              <a:t>â†’</a:t>
+            </a:r>
+            <a:endParaRPr lang="en-US" sz="1800" dirty="0"/>
+          </a:p>
+        </p:txBody>
+      </p:sp>
+      <p:sp>
+        <p:nvSpPr>
+          <p:cNvPr id="16" name="Shape 14"/>
+          <p:cNvSpPr/>
+          <p:nvPr/>
+        </p:nvSpPr>
+        <p:spPr>
+          <a:xfrm>
+            <a:off x="9046464" y="3977640"/>
+            <a:ext cx="972312" cy="749808"/>
+          </a:xfrm>
+          <a:prstGeom prst="roundRect">
+            <a:avLst>
+              <a:gd name="adj" fmla="val 14634"/>
+            </a:avLst>
+          </a:prstGeom>
+          <a:solidFill>
+            <a:srgbClr val="2F8A28"/>
+          </a:solidFill>
+          <a:ln w="12700">
+            <a:solidFill>
+              <a:srgbClr val="2F8A28"/>
+            </a:solidFill>
+            <a:prstDash val="solid"/>
+          </a:ln>
+        </p:spPr>
+      </p:sp>
+      <p:sp>
+        <p:nvSpPr>
+          <p:cNvPr id="17" name="Text 15"/>
+          <p:cNvSpPr/>
+          <p:nvPr/>
+        </p:nvSpPr>
+        <p:spPr>
+          <a:xfrm>
+            <a:off x="9119616" y="4169664"/>
+            <a:ext cx="826008" cy="310896"/>
+          </a:xfrm>
+          <a:prstGeom prst="rect">
+            <a:avLst/>
+          </a:prstGeom>
+          <a:noFill/>
+          <a:ln/>
+        </p:spPr>
+        <p:txBody>
+          <a:bodyPr wrap="square" lIns="0" tIns="0" rIns="0" bIns="0" rtlCol="0" anchor="ctr">
+            <a:normAutofit/>
+          </a:bodyPr>
+          <a:lstStyle/>
+          <a:p>
+            <a:pPr algn="ctr" indent="0" marL="0">
+              <a:buNone/>
+            </a:pPr>
+            <a:r>
+              <a:rPr lang="en-US" sz="1500" b="1" dirty="0">
+                <a:solidFill>
+                  <a:srgbClr val="FFFFFF"/>
+                </a:solidFill>
+                <a:latin typeface="Aptos" pitchFamily="34" charset="0"/>
+                <a:ea typeface="Aptos" pitchFamily="34" charset="-122"/>
+                <a:cs typeface="Aptos" pitchFamily="34" charset="-120"/>
+              </a:rPr>
+              <a:t>Plays</a:t>
+            </a:r>
+            <a:endParaRPr lang="en-US" sz="1500" dirty="0"/>
+          </a:p>
+        </p:txBody>
+      </p:sp>
+      <p:sp>
+        <p:nvSpPr>
+          <p:cNvPr id="18" name="Text 16"/>
+          <p:cNvSpPr/>
+          <p:nvPr/>
+        </p:nvSpPr>
+        <p:spPr>
+          <a:xfrm>
+            <a:off x="10046208" y="4187952"/>
+            <a:ext cx="201168" cy="256032"/>
+          </a:xfrm>
+          <a:prstGeom prst="rect">
+            <a:avLst/>
+          </a:prstGeom>
+          <a:noFill/>
+          <a:ln/>
+        </p:spPr>
+        <p:txBody>
+          <a:bodyPr wrap="square" lIns="0" tIns="0" rIns="0" bIns="0" rtlCol="0" anchor="ctr"/>
+          <a:lstStyle/>
+          <a:p>
+            <a:pPr algn="ctr" indent="0" marL="0">
+              <a:buNone/>
+            </a:pPr>
+            <a:r>
+              <a:rPr lang="en-US" sz="1800" b="1" dirty="0">
+                <a:solidFill>
+                  <a:srgbClr val="0068B7"/>
+                </a:solidFill>
+                <a:latin typeface="Aptos" pitchFamily="34" charset="0"/>
+                <a:ea typeface="Aptos" pitchFamily="34" charset="-122"/>
+                <a:cs typeface="Aptos" pitchFamily="34" charset="-120"/>
+              </a:rPr>
+              <a:t>â†’</a:t>
+            </a:r>
+            <a:endParaRPr lang="en-US" sz="1800" dirty="0"/>
+          </a:p>
+        </p:txBody>
+      </p:sp>
+      <p:sp>
+        <p:nvSpPr>
+          <p:cNvPr id="19" name="Shape 17"/>
+          <p:cNvSpPr/>
+          <p:nvPr/>
+        </p:nvSpPr>
+        <p:spPr>
+          <a:xfrm>
+            <a:off x="10274808" y="3977640"/>
+            <a:ext cx="972312" cy="749808"/>
+          </a:xfrm>
+          <a:prstGeom prst="roundRect">
+            <a:avLst>
+              <a:gd name="adj" fmla="val 14634"/>
+            </a:avLst>
+          </a:prstGeom>
+          <a:solidFill>
+            <a:srgbClr val="6A4CA3"/>
+          </a:solidFill>
+          <a:ln w="12700">
+            <a:solidFill>
+              <a:srgbClr val="6A4CA3"/>
+            </a:solidFill>
+            <a:prstDash val="solid"/>
+          </a:ln>
+        </p:spPr>
+      </p:sp>
+      <p:sp>
+        <p:nvSpPr>
+          <p:cNvPr id="20" name="Text 18"/>
+          <p:cNvSpPr/>
+          <p:nvPr/>
+        </p:nvSpPr>
+        <p:spPr>
+          <a:xfrm>
+            <a:off x="10347960" y="4169664"/>
+            <a:ext cx="826008" cy="310896"/>
+          </a:xfrm>
+          <a:prstGeom prst="rect">
+            <a:avLst/>
+          </a:prstGeom>
+          <a:noFill/>
+          <a:ln/>
+        </p:spPr>
+        <p:txBody>
+          <a:bodyPr wrap="square" lIns="0" tIns="0" rIns="0" bIns="0" rtlCol="0" anchor="ctr">
+            <a:normAutofit/>
+          </a:bodyPr>
+          <a:lstStyle/>
+          <a:p>
+            <a:pPr algn="ctr" indent="0" marL="0">
+              <a:buNone/>
+            </a:pPr>
+            <a:r>
+              <a:rPr lang="en-US" sz="1500" b="1" dirty="0">
+                <a:solidFill>
+                  <a:srgbClr val="FFFFFF"/>
+                </a:solidFill>
+                <a:latin typeface="Aptos" pitchFamily="34" charset="0"/>
+                <a:ea typeface="Aptos" pitchFamily="34" charset="-122"/>
+                <a:cs typeface="Aptos" pitchFamily="34" charset="-120"/>
+              </a:rPr>
+              <a:t>Action</a:t>
+            </a:r>
+            <a:endParaRPr lang="en-US" sz="1500" dirty="0"/>
           </a:p>
         </p:txBody>
       </p:sp>
@@ -11687,7 +12549,7 @@
                 <a:ea typeface="Aptos" pitchFamily="34" charset="-122"/>
                 <a:cs typeface="Aptos" pitchFamily="34" charset="-120"/>
               </a:rPr>
-              <a:t>© Paula Soper</a:t>
+              <a:t>Â© Paula Soper</a:t>
             </a:r>
             <a:endParaRPr lang="en-US" sz="800" dirty="0"/>
           </a:p>
@@ -11701,8 +12563,47 @@
         </p:nvSpPr>
         <p:spPr>
           <a:xfrm>
+            <a:off x="11137392" y="6510528"/>
+            <a:ext cx="411480" cy="201168"/>
+          </a:xfrm>
+          <a:prstGeom prst="rect">
+            <a:avLst/>
+          </a:prstGeom>
+          <a:noFill/>
+          <a:ln/>
+        </p:spPr>
+        <p:txBody>
+          <a:bodyPr wrap="square" lIns="0" tIns="0" rIns="0" bIns="0" rtlCol="0" anchor="ctr"/>
+          <a:lstStyle/>
+          <a:p>
+            <a:pPr algn="r" indent="0" marL="0">
+              <a:buNone/>
+            </a:pPr>
+            <a:r>
+              <a:rPr lang="en-US" sz="900" dirty="0">
+                <a:solidFill>
+                  <a:srgbClr val="5F7181"/>
+                </a:solidFill>
+                <a:latin typeface="Aptos" pitchFamily="34" charset="0"/>
+                <a:ea typeface="Aptos" pitchFamily="34" charset="-122"/>
+                <a:cs typeface="Aptos" pitchFamily="34" charset="-120"/>
+              </a:rPr>
+              <a:t>4</a:t>
+            </a:r>
+            <a:endParaRPr lang="en-US" sz="900" dirty="0"/>
+          </a:p>
+        </p:txBody>
+      </p:sp>
+      <p:sp>
+        <p:nvSpPr>
+          <p:cNvPr id="8" name="Text 6"/>
+          <p:cNvSpPr/>
+          <p:nvPr/>
+        </p:nvSpPr>
+        <p:spPr>
+          <a:xfrm>
             <a:off x="640080" y="658368"/>
-            <a:ext cx="10881360" cy="566928"/>
+            <a:ext cx="10881360" cy="713232"/>
           </a:xfrm>
           <a:prstGeom prst="rect">
             <a:avLst/>
@@ -11720,7 +12621,7 @@
               <a:buNone/>
             </a:pPr>
             <a:r>
-              <a:rPr lang="en-US" sz="2700" b="1" dirty="0">
+              <a:rPr lang="en-US" sz="3400" b="1" dirty="0">
                 <a:solidFill>
                   <a:srgbClr val="003A63"/>
                 </a:solidFill>
@@ -11730,20 +12631,20 @@
               </a:rPr>
               <a:t>Related toolkit resources</a:t>
             </a:r>
-            <a:endParaRPr lang="en-US" sz="2700" dirty="0"/>
-          </a:p>
-        </p:txBody>
-      </p:sp>
-      <p:sp>
-        <p:nvSpPr>
-          <p:cNvPr id="8" name="Text 6"/>
-          <p:cNvSpPr/>
-          <p:nvPr/>
-        </p:nvSpPr>
-        <p:spPr>
-          <a:xfrm>
-            <a:off x="868680" y="1417320"/>
-            <a:ext cx="6903720" cy="4480560"/>
+            <a:endParaRPr lang="en-US" sz="3400" dirty="0"/>
+          </a:p>
+        </p:txBody>
+      </p:sp>
+      <p:sp>
+        <p:nvSpPr>
+          <p:cNvPr id="9" name="Text 7"/>
+          <p:cNvSpPr/>
+          <p:nvPr/>
+        </p:nvSpPr>
+        <p:spPr>
+          <a:xfrm>
+            <a:off x="868680" y="1508760"/>
+            <a:ext cx="6812280" cy="3977640"/>
           </a:xfrm>
           <a:prstGeom prst="rect">
             <a:avLst/>
@@ -11758,7 +12659,7 @@
           <a:lstStyle/>
           <a:p>
             <a:r>
-              <a:rPr lang="en-US" sz="1460" dirty="0">
+              <a:rPr lang="en-US" sz="1850" dirty="0">
                 <a:solidFill>
                   <a:srgbClr val="17364A"/>
                 </a:solidFill>
@@ -11766,13 +12667,13 @@
                 <a:ea typeface="Aptos" pitchFamily="34" charset="-122"/>
                 <a:cs typeface="Aptos" pitchFamily="34" charset="-120"/>
               </a:rPr>
-              <a:t>Tool 20: Community Engagement Planning (Planning) - Use this tool to complete or strengthen the practical exercise for the module.</a:t>
-            </a:r>
-            <a:endParaRPr lang="en-US" sz="1460" dirty="0"/>
-          </a:p>
-          <a:p>
-            <a:r>
-              <a:rPr lang="en-US" sz="1460" dirty="0">
+              <a:t>Tool 20: Community Engagement Planning (Planning) - Use this tool to complete or strengthen the practical.</a:t>
+            </a:r>
+            <a:endParaRPr lang="en-US" sz="1850" dirty="0"/>
+          </a:p>
+          <a:p>
+            <a:r>
+              <a:rPr lang="en-US" sz="1850" dirty="0">
                 <a:solidFill>
                   <a:srgbClr val="17364A"/>
                 </a:solidFill>
@@ -11780,13 +12681,13 @@
                 <a:ea typeface="Aptos" pitchFamily="34" charset="-122"/>
                 <a:cs typeface="Aptos" pitchFamily="34" charset="-120"/>
               </a:rPr>
-              <a:t>Tool 21: Stakeholder Mapping &amp; RACI (Template) - Use this tool to complete or strengthen the practical exercise for the module using.</a:t>
-            </a:r>
-            <a:endParaRPr lang="en-US" sz="1460" dirty="0"/>
-          </a:p>
-          <a:p>
-            <a:r>
-              <a:rPr lang="en-US" sz="1460" dirty="0">
+              <a:t>Tool 21: Stakeholder Mapping &amp; RACI (Template) - Use this tool to complete or strengthen the practical.</a:t>
+            </a:r>
+            <a:endParaRPr lang="en-US" sz="1850" dirty="0"/>
+          </a:p>
+          <a:p>
+            <a:r>
+              <a:rPr lang="en-US" sz="1850" dirty="0">
                 <a:solidFill>
                   <a:srgbClr val="17364A"/>
                 </a:solidFill>
@@ -11794,13 +12695,13 @@
                 <a:ea typeface="Aptos" pitchFamily="34" charset="-122"/>
                 <a:cs typeface="Aptos" pitchFamily="34" charset="-120"/>
               </a:rPr>
-              <a:t>Tool 22: Missing Voices Analysis (Checklist) - Use this tool to complete or strengthen the practical exercise for the module using.</a:t>
-            </a:r>
-            <a:endParaRPr lang="en-US" sz="1460" dirty="0"/>
-          </a:p>
-          <a:p>
-            <a:r>
-              <a:rPr lang="en-US" sz="1460" dirty="0">
+              <a:t>Tool 22: Missing Voices Analysis (Checklist) - Use this tool to complete or strengthen the practical.</a:t>
+            </a:r>
+            <a:endParaRPr lang="en-US" sz="1850" dirty="0"/>
+          </a:p>
+          <a:p>
+            <a:r>
+              <a:rPr lang="en-US" sz="1850" dirty="0">
                 <a:solidFill>
                   <a:srgbClr val="17364A"/>
                 </a:solidFill>
@@ -11808,29 +12709,15 @@
                 <a:ea typeface="Aptos" pitchFamily="34" charset="-122"/>
                 <a:cs typeface="Aptos" pitchFamily="34" charset="-120"/>
               </a:rPr>
-              <a:t>Tool 4: AI Policy Landscape Scan (Worksheet) - Use AI Policy Landscape Scan to translate this lesson into a documented public health.</a:t>
-            </a:r>
-            <a:endParaRPr lang="en-US" sz="1460" dirty="0"/>
-          </a:p>
-          <a:p>
-            <a:r>
-              <a:rPr lang="en-US" sz="1460" dirty="0">
-                <a:solidFill>
-                  <a:srgbClr val="17364A"/>
-                </a:solidFill>
-                <a:latin typeface="Aptos" pitchFamily="34" charset="0"/>
-                <a:ea typeface="Aptos" pitchFamily="34" charset="-122"/>
-                <a:cs typeface="Aptos" pitchFamily="34" charset="-120"/>
-              </a:rPr>
-              <a:t>Tool 5: AI Environmental and Resource Impact Review (Checklist) - Use AI Environmental and Resource Impact Review to translate this.</a:t>
-            </a:r>
-            <a:endParaRPr lang="en-US" sz="1460" dirty="0"/>
-          </a:p>
-        </p:txBody>
-      </p:sp>
-      <p:sp>
-        <p:nvSpPr>
-          <p:cNvPr id="9" name="Shape 7"/>
+              <a:t>Tool 4: AI Policy Landscape Scan (Worksheet) - Use AI Policy Landscape Scan to translate this lesson into a.</a:t>
+            </a:r>
+            <a:endParaRPr lang="en-US" sz="1850" dirty="0"/>
+          </a:p>
+        </p:txBody>
+      </p:sp>
+      <p:sp>
+        <p:nvSpPr>
+          <p:cNvPr id="10" name="Shape 8"/>
           <p:cNvSpPr/>
           <p:nvPr/>
         </p:nvSpPr>
@@ -11857,14 +12744,14 @@
       </p:sp>
       <p:sp>
         <p:nvSpPr>
-          <p:cNvPr id="10" name="Text 8"/>
+          <p:cNvPr id="11" name="Text 9"/>
           <p:cNvSpPr/>
           <p:nvPr/>
         </p:nvSpPr>
         <p:spPr>
           <a:xfrm>
             <a:off x="8211312" y="1563624"/>
-            <a:ext cx="2734056" cy="201168"/>
+            <a:ext cx="2734056" cy="256032"/>
           </a:xfrm>
           <a:prstGeom prst="rect">
             <a:avLst/>
@@ -11880,7 +12767,7 @@
               <a:buNone/>
             </a:pPr>
             <a:r>
-              <a:rPr lang="en-US" sz="950" b="1" dirty="0">
+              <a:rPr lang="en-US" sz="1300" b="1" dirty="0">
                 <a:solidFill>
                   <a:srgbClr val="0068B7"/>
                 </a:solidFill>
@@ -11890,20 +12777,20 @@
               </a:rPr>
               <a:t>Use the tools</a:t>
             </a:r>
-            <a:endParaRPr lang="en-US" sz="950" dirty="0"/>
-          </a:p>
-        </p:txBody>
-      </p:sp>
-      <p:sp>
-        <p:nvSpPr>
-          <p:cNvPr id="11" name="Text 9"/>
-          <p:cNvSpPr/>
-          <p:nvPr/>
-        </p:nvSpPr>
-        <p:spPr>
-          <a:xfrm>
-            <a:off x="8211312" y="1856232"/>
-            <a:ext cx="2734056" cy="1536192"/>
+            <a:endParaRPr lang="en-US" sz="1300" dirty="0"/>
+          </a:p>
+        </p:txBody>
+      </p:sp>
+      <p:sp>
+        <p:nvSpPr>
+          <p:cNvPr id="12" name="Text 10"/>
+          <p:cNvSpPr/>
+          <p:nvPr/>
+        </p:nvSpPr>
+        <p:spPr>
+          <a:xfrm>
+            <a:off x="8211312" y="1920240"/>
+            <a:ext cx="2734056" cy="1463040"/>
           </a:xfrm>
           <a:prstGeom prst="rect">
             <a:avLst/>
@@ -11921,7 +12808,7 @@
               <a:buNone/>
             </a:pPr>
             <a:r>
-              <a:rPr lang="en-US" sz="1250" dirty="0">
+              <a:rPr lang="en-US" sz="1550" dirty="0">
                 <a:solidFill>
                   <a:srgbClr val="17364A"/>
                 </a:solidFill>
@@ -11931,32 +12818,32 @@
               </a:rPr>
               <a:t>Use linked tools when your department needs a structured worksheet, template, checklist, review process, or documentation artifact.</a:t>
             </a:r>
-            <a:endParaRPr lang="en-US" sz="1250" dirty="0"/>
-          </a:p>
-        </p:txBody>
-      </p:sp>
-      <p:sp>
-        <p:nvSpPr>
-          <p:cNvPr id="12" name="Shape 10"/>
-          <p:cNvSpPr/>
-          <p:nvPr/>
-        </p:nvSpPr>
-        <p:spPr>
-          <a:xfrm>
-            <a:off x="8046720" y="3794760"/>
-            <a:ext cx="3063240" cy="1508760"/>
+            <a:endParaRPr lang="en-US" sz="1550" dirty="0"/>
+          </a:p>
+        </p:txBody>
+      </p:sp>
+      <p:sp>
+        <p:nvSpPr>
+          <p:cNvPr id="13" name="Shape 11"/>
+          <p:cNvSpPr/>
+          <p:nvPr/>
+        </p:nvSpPr>
+        <p:spPr>
+          <a:xfrm>
+            <a:off x="7818120" y="3977640"/>
+            <a:ext cx="972312" cy="749808"/>
           </a:xfrm>
           <a:prstGeom prst="roundRect">
             <a:avLst>
-              <a:gd name="adj" fmla="val 7273"/>
+              <a:gd name="adj" fmla="val 14634"/>
             </a:avLst>
           </a:prstGeom>
           <a:solidFill>
-            <a:srgbClr val="EEF8ED"/>
+            <a:srgbClr val="0068B7"/>
           </a:solidFill>
           <a:ln w="12700">
             <a:solidFill>
-              <a:srgbClr val="B9D7E6"/>
+              <a:srgbClr val="0068B7"/>
             </a:solidFill>
             <a:prstDash val="solid"/>
           </a:ln>
@@ -11964,81 +12851,256 @@
       </p:sp>
       <p:sp>
         <p:nvSpPr>
-          <p:cNvPr id="13" name="Text 11"/>
-          <p:cNvSpPr/>
-          <p:nvPr/>
-        </p:nvSpPr>
-        <p:spPr>
-          <a:xfrm>
-            <a:off x="8211312" y="3941064"/>
-            <a:ext cx="2734056" cy="201168"/>
-          </a:xfrm>
-          <a:prstGeom prst="rect">
-            <a:avLst/>
-          </a:prstGeom>
-          <a:noFill/>
-          <a:ln/>
-        </p:spPr>
-        <p:txBody>
-          <a:bodyPr wrap="square" lIns="0" tIns="0" rIns="0" bIns="0" rtlCol="0" anchor="ctr"/>
-          <a:lstStyle/>
-          <a:p>
-            <a:pPr indent="0" marL="0">
-              <a:buNone/>
-            </a:pPr>
-            <a:r>
-              <a:rPr lang="en-US" sz="950" b="1" dirty="0">
-                <a:solidFill>
-                  <a:srgbClr val="0068B7"/>
-                </a:solidFill>
-                <a:latin typeface="Aptos" pitchFamily="34" charset="0"/>
-                <a:ea typeface="Aptos" pitchFamily="34" charset="-122"/>
-                <a:cs typeface="Aptos" pitchFamily="34" charset="-120"/>
-              </a:rPr>
-              <a:t>Avoid duplication</a:t>
-            </a:r>
-            <a:endParaRPr lang="en-US" sz="950" dirty="0"/>
-          </a:p>
-        </p:txBody>
-      </p:sp>
-      <p:sp>
-        <p:nvSpPr>
           <p:cNvPr id="14" name="Text 12"/>
           <p:cNvSpPr/>
           <p:nvPr/>
         </p:nvSpPr>
         <p:spPr>
           <a:xfrm>
-            <a:off x="8211312" y="4233672"/>
-            <a:ext cx="2734056" cy="941832"/>
-          </a:xfrm>
-          <a:prstGeom prst="rect">
-            <a:avLst/>
-          </a:prstGeom>
-          <a:noFill/>
-          <a:ln/>
-        </p:spPr>
-        <p:txBody>
-          <a:bodyPr wrap="square" lIns="0" tIns="0" rIns="0" bIns="0" rtlCol="0" anchor="t">
+            <a:off x="7891272" y="4169664"/>
+            <a:ext cx="826008" cy="310896"/>
+          </a:xfrm>
+          <a:prstGeom prst="rect">
+            <a:avLst/>
+          </a:prstGeom>
+          <a:noFill/>
+          <a:ln/>
+        </p:spPr>
+        <p:txBody>
+          <a:bodyPr wrap="square" lIns="0" tIns="0" rIns="0" bIns="0" rtlCol="0" anchor="ctr">
             <a:normAutofit/>
           </a:bodyPr>
           <a:lstStyle/>
           <a:p>
-            <a:pPr indent="0" marL="0">
-              <a:buNone/>
-            </a:pPr>
-            <a:r>
-              <a:rPr lang="en-US" sz="1250" dirty="0">
-                <a:solidFill>
-                  <a:srgbClr val="17364A"/>
-                </a:solidFill>
-                <a:latin typeface="Aptos" pitchFamily="34" charset="0"/>
-                <a:ea typeface="Aptos" pitchFamily="34" charset="-122"/>
-                <a:cs typeface="Aptos" pitchFamily="34" charset="-120"/>
-              </a:rPr>
-              <a:t>If your department already has a strong equivalent tool, adapt or use the existing process instead of recreating it.</a:t>
-            </a:r>
-            <a:endParaRPr lang="en-US" sz="1250" dirty="0"/>
+            <a:pPr algn="ctr" indent="0" marL="0">
+              <a:buNone/>
+            </a:pPr>
+            <a:r>
+              <a:rPr lang="en-US" sz="1500" b="1" dirty="0">
+                <a:solidFill>
+                  <a:srgbClr val="FFFFFF"/>
+                </a:solidFill>
+                <a:latin typeface="Aptos" pitchFamily="34" charset="0"/>
+                <a:ea typeface="Aptos" pitchFamily="34" charset="-122"/>
+                <a:cs typeface="Aptos" pitchFamily="34" charset="-120"/>
+              </a:rPr>
+              <a:t>Concept</a:t>
+            </a:r>
+            <a:endParaRPr lang="en-US" sz="1500" dirty="0"/>
+          </a:p>
+        </p:txBody>
+      </p:sp>
+      <p:sp>
+        <p:nvSpPr>
+          <p:cNvPr id="15" name="Text 13"/>
+          <p:cNvSpPr/>
+          <p:nvPr/>
+        </p:nvSpPr>
+        <p:spPr>
+          <a:xfrm>
+            <a:off x="8817864" y="4187952"/>
+            <a:ext cx="201168" cy="256032"/>
+          </a:xfrm>
+          <a:prstGeom prst="rect">
+            <a:avLst/>
+          </a:prstGeom>
+          <a:noFill/>
+          <a:ln/>
+        </p:spPr>
+        <p:txBody>
+          <a:bodyPr wrap="square" lIns="0" tIns="0" rIns="0" bIns="0" rtlCol="0" anchor="ctr"/>
+          <a:lstStyle/>
+          <a:p>
+            <a:pPr algn="ctr" indent="0" marL="0">
+              <a:buNone/>
+            </a:pPr>
+            <a:r>
+              <a:rPr lang="en-US" sz="1800" b="1" dirty="0">
+                <a:solidFill>
+                  <a:srgbClr val="0068B7"/>
+                </a:solidFill>
+                <a:latin typeface="Aptos" pitchFamily="34" charset="0"/>
+                <a:ea typeface="Aptos" pitchFamily="34" charset="-122"/>
+                <a:cs typeface="Aptos" pitchFamily="34" charset="-120"/>
+              </a:rPr>
+              <a:t>â†’</a:t>
+            </a:r>
+            <a:endParaRPr lang="en-US" sz="1800" dirty="0"/>
+          </a:p>
+        </p:txBody>
+      </p:sp>
+      <p:sp>
+        <p:nvSpPr>
+          <p:cNvPr id="16" name="Shape 14"/>
+          <p:cNvSpPr/>
+          <p:nvPr/>
+        </p:nvSpPr>
+        <p:spPr>
+          <a:xfrm>
+            <a:off x="9046464" y="3977640"/>
+            <a:ext cx="972312" cy="749808"/>
+          </a:xfrm>
+          <a:prstGeom prst="roundRect">
+            <a:avLst>
+              <a:gd name="adj" fmla="val 14634"/>
+            </a:avLst>
+          </a:prstGeom>
+          <a:solidFill>
+            <a:srgbClr val="2F8A28"/>
+          </a:solidFill>
+          <a:ln w="12700">
+            <a:solidFill>
+              <a:srgbClr val="2F8A28"/>
+            </a:solidFill>
+            <a:prstDash val="solid"/>
+          </a:ln>
+        </p:spPr>
+      </p:sp>
+      <p:sp>
+        <p:nvSpPr>
+          <p:cNvPr id="17" name="Text 15"/>
+          <p:cNvSpPr/>
+          <p:nvPr/>
+        </p:nvSpPr>
+        <p:spPr>
+          <a:xfrm>
+            <a:off x="9119616" y="4169664"/>
+            <a:ext cx="826008" cy="310896"/>
+          </a:xfrm>
+          <a:prstGeom prst="rect">
+            <a:avLst/>
+          </a:prstGeom>
+          <a:noFill/>
+          <a:ln/>
+        </p:spPr>
+        <p:txBody>
+          <a:bodyPr wrap="square" lIns="0" tIns="0" rIns="0" bIns="0" rtlCol="0" anchor="ctr">
+            <a:normAutofit/>
+          </a:bodyPr>
+          <a:lstStyle/>
+          <a:p>
+            <a:pPr algn="ctr" indent="0" marL="0">
+              <a:buNone/>
+            </a:pPr>
+            <a:r>
+              <a:rPr lang="en-US" sz="1500" b="1" dirty="0">
+                <a:solidFill>
+                  <a:srgbClr val="FFFFFF"/>
+                </a:solidFill>
+                <a:latin typeface="Aptos" pitchFamily="34" charset="0"/>
+                <a:ea typeface="Aptos" pitchFamily="34" charset="-122"/>
+                <a:cs typeface="Aptos" pitchFamily="34" charset="-120"/>
+              </a:rPr>
+              <a:t>Tool</a:t>
+            </a:r>
+            <a:endParaRPr lang="en-US" sz="1500" dirty="0"/>
+          </a:p>
+        </p:txBody>
+      </p:sp>
+      <p:sp>
+        <p:nvSpPr>
+          <p:cNvPr id="18" name="Text 16"/>
+          <p:cNvSpPr/>
+          <p:nvPr/>
+        </p:nvSpPr>
+        <p:spPr>
+          <a:xfrm>
+            <a:off x="10046208" y="4187952"/>
+            <a:ext cx="201168" cy="256032"/>
+          </a:xfrm>
+          <a:prstGeom prst="rect">
+            <a:avLst/>
+          </a:prstGeom>
+          <a:noFill/>
+          <a:ln/>
+        </p:spPr>
+        <p:txBody>
+          <a:bodyPr wrap="square" lIns="0" tIns="0" rIns="0" bIns="0" rtlCol="0" anchor="ctr"/>
+          <a:lstStyle/>
+          <a:p>
+            <a:pPr algn="ctr" indent="0" marL="0">
+              <a:buNone/>
+            </a:pPr>
+            <a:r>
+              <a:rPr lang="en-US" sz="1800" b="1" dirty="0">
+                <a:solidFill>
+                  <a:srgbClr val="0068B7"/>
+                </a:solidFill>
+                <a:latin typeface="Aptos" pitchFamily="34" charset="0"/>
+                <a:ea typeface="Aptos" pitchFamily="34" charset="-122"/>
+                <a:cs typeface="Aptos" pitchFamily="34" charset="-120"/>
+              </a:rPr>
+              <a:t>â†’</a:t>
+            </a:r>
+            <a:endParaRPr lang="en-US" sz="1800" dirty="0"/>
+          </a:p>
+        </p:txBody>
+      </p:sp>
+      <p:sp>
+        <p:nvSpPr>
+          <p:cNvPr id="19" name="Shape 17"/>
+          <p:cNvSpPr/>
+          <p:nvPr/>
+        </p:nvSpPr>
+        <p:spPr>
+          <a:xfrm>
+            <a:off x="10274808" y="3977640"/>
+            <a:ext cx="972312" cy="749808"/>
+          </a:xfrm>
+          <a:prstGeom prst="roundRect">
+            <a:avLst>
+              <a:gd name="adj" fmla="val 14634"/>
+            </a:avLst>
+          </a:prstGeom>
+          <a:solidFill>
+            <a:srgbClr val="D69A2D"/>
+          </a:solidFill>
+          <a:ln w="12700">
+            <a:solidFill>
+              <a:srgbClr val="D69A2D"/>
+            </a:solidFill>
+            <a:prstDash val="solid"/>
+          </a:ln>
+        </p:spPr>
+      </p:sp>
+      <p:sp>
+        <p:nvSpPr>
+          <p:cNvPr id="20" name="Text 18"/>
+          <p:cNvSpPr/>
+          <p:nvPr/>
+        </p:nvSpPr>
+        <p:spPr>
+          <a:xfrm>
+            <a:off x="10347960" y="4169664"/>
+            <a:ext cx="826008" cy="310896"/>
+          </a:xfrm>
+          <a:prstGeom prst="rect">
+            <a:avLst/>
+          </a:prstGeom>
+          <a:noFill/>
+          <a:ln/>
+        </p:spPr>
+        <p:txBody>
+          <a:bodyPr wrap="square" lIns="0" tIns="0" rIns="0" bIns="0" rtlCol="0" anchor="ctr">
+            <a:normAutofit/>
+          </a:bodyPr>
+          <a:lstStyle/>
+          <a:p>
+            <a:pPr algn="ctr" indent="0" marL="0">
+              <a:buNone/>
+            </a:pPr>
+            <a:r>
+              <a:rPr lang="en-US" sz="1500" b="1" dirty="0">
+                <a:solidFill>
+                  <a:srgbClr val="FFFFFF"/>
+                </a:solidFill>
+                <a:latin typeface="Aptos" pitchFamily="34" charset="0"/>
+                <a:ea typeface="Aptos" pitchFamily="34" charset="-122"/>
+                <a:cs typeface="Aptos" pitchFamily="34" charset="-120"/>
+              </a:rPr>
+              <a:t>Artifact</a:t>
+            </a:r>
+            <a:endParaRPr lang="en-US" sz="1500" dirty="0"/>
           </a:p>
         </p:txBody>
       </p:sp>
@@ -12235,7 +13297,7 @@
                 <a:ea typeface="Aptos" pitchFamily="34" charset="-122"/>
                 <a:cs typeface="Aptos" pitchFamily="34" charset="-120"/>
               </a:rPr>
-              <a:t>© Paula Soper</a:t>
+              <a:t>Â© Paula Soper</a:t>
             </a:r>
             <a:endParaRPr lang="en-US" sz="800" dirty="0"/>
           </a:p>
@@ -12243,7 +13305,46 @@
       </p:sp>
       <p:sp>
         <p:nvSpPr>
-          <p:cNvPr id="7" name="Shape 5"/>
+          <p:cNvPr id="7" name="Text 5"/>
+          <p:cNvSpPr/>
+          <p:nvPr/>
+        </p:nvSpPr>
+        <p:spPr>
+          <a:xfrm>
+            <a:off x="11137392" y="6510528"/>
+            <a:ext cx="411480" cy="201168"/>
+          </a:xfrm>
+          <a:prstGeom prst="rect">
+            <a:avLst/>
+          </a:prstGeom>
+          <a:noFill/>
+          <a:ln/>
+        </p:spPr>
+        <p:txBody>
+          <a:bodyPr wrap="square" lIns="0" tIns="0" rIns="0" bIns="0" rtlCol="0" anchor="ctr"/>
+          <a:lstStyle/>
+          <a:p>
+            <a:pPr algn="r" indent="0" marL="0">
+              <a:buNone/>
+            </a:pPr>
+            <a:r>
+              <a:rPr lang="en-US" sz="900" dirty="0">
+                <a:solidFill>
+                  <a:srgbClr val="5F7181"/>
+                </a:solidFill>
+                <a:latin typeface="Aptos" pitchFamily="34" charset="0"/>
+                <a:ea typeface="Aptos" pitchFamily="34" charset="-122"/>
+                <a:cs typeface="Aptos" pitchFamily="34" charset="-120"/>
+              </a:rPr>
+              <a:t>5</a:t>
+            </a:r>
+            <a:endParaRPr lang="en-US" sz="900" dirty="0"/>
+          </a:p>
+        </p:txBody>
+      </p:sp>
+      <p:sp>
+        <p:nvSpPr>
+          <p:cNvPr id="8" name="Shape 6"/>
           <p:cNvSpPr/>
           <p:nvPr/>
         </p:nvSpPr>
@@ -12268,7 +13369,7 @@
       </p:sp>
       <p:sp>
         <p:nvSpPr>
-          <p:cNvPr id="8" name="Text 6"/>
+          <p:cNvPr id="9" name="Text 7"/>
           <p:cNvSpPr/>
           <p:nvPr/>
         </p:nvSpPr>
@@ -12307,14 +13408,14 @@
       </p:sp>
       <p:sp>
         <p:nvSpPr>
-          <p:cNvPr id="9" name="Text 7"/>
+          <p:cNvPr id="10" name="Text 8"/>
           <p:cNvSpPr/>
           <p:nvPr/>
         </p:nvSpPr>
         <p:spPr>
           <a:xfrm>
             <a:off x="640080" y="621792"/>
-            <a:ext cx="10881360" cy="566928"/>
+            <a:ext cx="10881360" cy="713232"/>
           </a:xfrm>
           <a:prstGeom prst="rect">
             <a:avLst/>
@@ -12332,7 +13433,7 @@
               <a:buNone/>
             </a:pPr>
             <a:r>
-              <a:rPr lang="en-US" sz="2700" b="1" dirty="0">
+              <a:rPr lang="en-US" sz="3400" b="1" dirty="0">
                 <a:solidFill>
                   <a:srgbClr val="003A63"/>
                 </a:solidFill>
@@ -12342,20 +13443,20 @@
               </a:rPr>
               <a:t>Learning Objectives</a:t>
             </a:r>
-            <a:endParaRPr lang="en-US" sz="2700" dirty="0"/>
-          </a:p>
-        </p:txBody>
-      </p:sp>
-      <p:sp>
-        <p:nvSpPr>
-          <p:cNvPr id="10" name="Text 8"/>
-          <p:cNvSpPr/>
-          <p:nvPr/>
-        </p:nvSpPr>
-        <p:spPr>
-          <a:xfrm>
-            <a:off x="868680" y="1417320"/>
-            <a:ext cx="6675120" cy="4434840"/>
+            <a:endParaRPr lang="en-US" sz="3400" dirty="0"/>
+          </a:p>
+        </p:txBody>
+      </p:sp>
+      <p:sp>
+        <p:nvSpPr>
+          <p:cNvPr id="11" name="Text 9"/>
+          <p:cNvSpPr/>
+          <p:nvPr/>
+        </p:nvSpPr>
+        <p:spPr>
+          <a:xfrm>
+            <a:off x="868680" y="1508760"/>
+            <a:ext cx="6537960" cy="4160520"/>
           </a:xfrm>
           <a:prstGeom prst="rect">
             <a:avLst/>
@@ -12370,7 +13471,7 @@
           <a:lstStyle/>
           <a:p>
             <a:r>
-              <a:rPr lang="en-US" sz="1700" dirty="0">
+              <a:rPr lang="en-US" sz="2100" dirty="0">
                 <a:solidFill>
                   <a:srgbClr val="17364A"/>
                 </a:solidFill>
@@ -12380,11 +13481,11 @@
               </a:rPr>
               <a:t>Define AI for Social Good in public health terms.</a:t>
             </a:r>
-            <a:endParaRPr lang="en-US" sz="1700" dirty="0"/>
-          </a:p>
-          <a:p>
-            <a:r>
-              <a:rPr lang="en-US" sz="1700" dirty="0">
+            <a:endParaRPr lang="en-US" sz="2100" dirty="0"/>
+          </a:p>
+          <a:p>
+            <a:r>
+              <a:rPr lang="en-US" sz="2100" dirty="0">
                 <a:solidFill>
                   <a:srgbClr val="17364A"/>
                 </a:solidFill>
@@ -12394,11 +13495,11 @@
               </a:rPr>
               <a:t>Distinguish public benefit from novelty, efficiency, or automation alone.</a:t>
             </a:r>
-            <a:endParaRPr lang="en-US" sz="1700" dirty="0"/>
-          </a:p>
-          <a:p>
-            <a:r>
-              <a:rPr lang="en-US" sz="1700" dirty="0">
+            <a:endParaRPr lang="en-US" sz="2100" dirty="0"/>
+          </a:p>
+          <a:p>
+            <a:r>
+              <a:rPr lang="en-US" sz="2100" dirty="0">
                 <a:solidFill>
                   <a:srgbClr val="17364A"/>
                 </a:solidFill>
@@ -12406,29 +13507,15 @@
                 <a:ea typeface="Aptos" pitchFamily="34" charset="-122"/>
                 <a:cs typeface="Aptos" pitchFamily="34" charset="-120"/>
               </a:rPr>
-              <a:t>Identify how AI can support public health values, including equity, transparency, accessibility, accountability, and community.</a:t>
-            </a:r>
-            <a:endParaRPr lang="en-US" sz="1700" dirty="0"/>
-          </a:p>
-          <a:p>
-            <a:r>
-              <a:rPr lang="en-US" sz="1700" dirty="0">
-                <a:solidFill>
-                  <a:srgbClr val="17364A"/>
-                </a:solidFill>
-                <a:latin typeface="Aptos" pitchFamily="34" charset="0"/>
-                <a:ea typeface="Aptos" pitchFamily="34" charset="-122"/>
-                <a:cs typeface="Aptos" pitchFamily="34" charset="-120"/>
-              </a:rPr>
-              <a:t>Assess potential harms, including exclusion, surveillance burden, stigma, resource diversion, and unequal benefit.</a:t>
-            </a:r>
-            <a:endParaRPr lang="en-US" sz="1700" dirty="0"/>
-          </a:p>
-        </p:txBody>
-      </p:sp>
-      <p:sp>
-        <p:nvSpPr>
-          <p:cNvPr id="11" name="Shape 9"/>
+              <a:t>Identify how AI can support public health values, including equity, transparency, accessibility,.</a:t>
+            </a:r>
+            <a:endParaRPr lang="en-US" sz="2100" dirty="0"/>
+          </a:p>
+        </p:txBody>
+      </p:sp>
+      <p:sp>
+        <p:nvSpPr>
+          <p:cNvPr id="12" name="Shape 10"/>
           <p:cNvSpPr/>
           <p:nvPr/>
         </p:nvSpPr>
@@ -12455,14 +13542,14 @@
       </p:sp>
       <p:sp>
         <p:nvSpPr>
-          <p:cNvPr id="12" name="Text 10"/>
+          <p:cNvPr id="13" name="Text 11"/>
           <p:cNvSpPr/>
           <p:nvPr/>
         </p:nvSpPr>
         <p:spPr>
           <a:xfrm>
             <a:off x="8074152" y="1563624"/>
-            <a:ext cx="2825496" cy="201168"/>
+            <a:ext cx="2825496" cy="256032"/>
           </a:xfrm>
           <a:prstGeom prst="rect">
             <a:avLst/>
@@ -12478,7 +13565,7 @@
               <a:buNone/>
             </a:pPr>
             <a:r>
-              <a:rPr lang="en-US" sz="950" b="1" dirty="0">
+              <a:rPr lang="en-US" sz="1300" b="1" dirty="0">
                 <a:solidFill>
                   <a:srgbClr val="0068B7"/>
                 </a:solidFill>
@@ -12488,20 +13575,20 @@
               </a:rPr>
               <a:t>Key idea</a:t>
             </a:r>
-            <a:endParaRPr lang="en-US" sz="950" dirty="0"/>
-          </a:p>
-        </p:txBody>
-      </p:sp>
-      <p:sp>
-        <p:nvSpPr>
-          <p:cNvPr id="13" name="Text 11"/>
-          <p:cNvSpPr/>
-          <p:nvPr/>
-        </p:nvSpPr>
-        <p:spPr>
-          <a:xfrm>
-            <a:off x="8074152" y="1856232"/>
-            <a:ext cx="2825496" cy="1261872"/>
+            <a:endParaRPr lang="en-US" sz="1300" dirty="0"/>
+          </a:p>
+        </p:txBody>
+      </p:sp>
+      <p:sp>
+        <p:nvSpPr>
+          <p:cNvPr id="14" name="Text 12"/>
+          <p:cNvSpPr/>
+          <p:nvPr/>
+        </p:nvSpPr>
+        <p:spPr>
+          <a:xfrm>
+            <a:off x="8074152" y="1920240"/>
+            <a:ext cx="2825496" cy="1188720"/>
           </a:xfrm>
           <a:prstGeom prst="rect">
             <a:avLst/>
@@ -12519,7 +13606,7 @@
               <a:buNone/>
             </a:pPr>
             <a:r>
-              <a:rPr lang="en-US" sz="1250" dirty="0">
+              <a:rPr lang="en-US" sz="1550" dirty="0">
                 <a:solidFill>
                   <a:srgbClr val="17364A"/>
                 </a:solidFill>
@@ -12529,13 +13616,13 @@
               </a:rPr>
               <a:t>Define AI for Social Good in public health terms.</a:t>
             </a:r>
-            <a:endParaRPr lang="en-US" sz="1250" dirty="0"/>
-          </a:p>
-        </p:txBody>
-      </p:sp>
-      <p:sp>
-        <p:nvSpPr>
-          <p:cNvPr id="14" name="Shape 12"/>
+            <a:endParaRPr lang="en-US" sz="1550" dirty="0"/>
+          </a:p>
+        </p:txBody>
+      </p:sp>
+      <p:sp>
+        <p:nvSpPr>
+          <p:cNvPr id="15" name="Shape 13"/>
           <p:cNvSpPr/>
           <p:nvPr/>
         </p:nvSpPr>
@@ -12562,14 +13649,14 @@
       </p:sp>
       <p:sp>
         <p:nvSpPr>
-          <p:cNvPr id="15" name="Text 13"/>
+          <p:cNvPr id="16" name="Text 14"/>
           <p:cNvSpPr/>
           <p:nvPr/>
         </p:nvSpPr>
         <p:spPr>
           <a:xfrm>
             <a:off x="8074152" y="3666744"/>
-            <a:ext cx="2825496" cy="201168"/>
+            <a:ext cx="2825496" cy="256032"/>
           </a:xfrm>
           <a:prstGeom prst="rect">
             <a:avLst/>
@@ -12585,7 +13672,7 @@
               <a:buNone/>
             </a:pPr>
             <a:r>
-              <a:rPr lang="en-US" sz="950" b="1" dirty="0">
+              <a:rPr lang="en-US" sz="1300" b="1" dirty="0">
                 <a:solidFill>
                   <a:srgbClr val="0068B7"/>
                 </a:solidFill>
@@ -12595,20 +13682,20 @@
               </a:rPr>
               <a:t>Use this for</a:t>
             </a:r>
-            <a:endParaRPr lang="en-US" sz="950" dirty="0"/>
-          </a:p>
-        </p:txBody>
-      </p:sp>
-      <p:sp>
-        <p:nvSpPr>
-          <p:cNvPr id="16" name="Text 14"/>
-          <p:cNvSpPr/>
-          <p:nvPr/>
-        </p:nvSpPr>
-        <p:spPr>
-          <a:xfrm>
-            <a:off x="8074152" y="3959352"/>
-            <a:ext cx="2825496" cy="1170432"/>
+            <a:endParaRPr lang="en-US" sz="1300" dirty="0"/>
+          </a:p>
+        </p:txBody>
+      </p:sp>
+      <p:sp>
+        <p:nvSpPr>
+          <p:cNvPr id="17" name="Text 15"/>
+          <p:cNvSpPr/>
+          <p:nvPr/>
+        </p:nvSpPr>
+        <p:spPr>
+          <a:xfrm>
+            <a:off x="8074152" y="4023360"/>
+            <a:ext cx="2825496" cy="1097280"/>
           </a:xfrm>
           <a:prstGeom prst="rect">
             <a:avLst/>
@@ -12626,7 +13713,7 @@
               <a:buNone/>
             </a:pPr>
             <a:r>
-              <a:rPr lang="en-US" sz="1250" dirty="0">
+              <a:rPr lang="en-US" sz="1550" dirty="0">
                 <a:solidFill>
                   <a:srgbClr val="17364A"/>
                 </a:solidFill>
@@ -12636,7 +13723,7 @@
               </a:rPr>
               <a:t>Connect the concept to public health decisions, safeguards, documentation, or implementation work.</a:t>
             </a:r>
-            <a:endParaRPr lang="en-US" sz="1250" dirty="0"/>
+            <a:endParaRPr lang="en-US" sz="1550" dirty="0"/>
           </a:p>
         </p:txBody>
       </p:sp>
@@ -12833,7 +13920,7 @@
                 <a:ea typeface="Aptos" pitchFamily="34" charset="-122"/>
                 <a:cs typeface="Aptos" pitchFamily="34" charset="-120"/>
               </a:rPr>
-              <a:t>© Paula Soper</a:t>
+              <a:t>Â© Paula Soper</a:t>
             </a:r>
             <a:endParaRPr lang="en-US" sz="800" dirty="0"/>
           </a:p>
@@ -12847,8 +13934,47 @@
         </p:nvSpPr>
         <p:spPr>
           <a:xfrm>
+            <a:off x="11137392" y="6510528"/>
+            <a:ext cx="411480" cy="201168"/>
+          </a:xfrm>
+          <a:prstGeom prst="rect">
+            <a:avLst/>
+          </a:prstGeom>
+          <a:noFill/>
+          <a:ln/>
+        </p:spPr>
+        <p:txBody>
+          <a:bodyPr wrap="square" lIns="0" tIns="0" rIns="0" bIns="0" rtlCol="0" anchor="ctr"/>
+          <a:lstStyle/>
+          <a:p>
+            <a:pPr algn="r" indent="0" marL="0">
+              <a:buNone/>
+            </a:pPr>
+            <a:r>
+              <a:rPr lang="en-US" sz="900" dirty="0">
+                <a:solidFill>
+                  <a:srgbClr val="5F7181"/>
+                </a:solidFill>
+                <a:latin typeface="Aptos" pitchFamily="34" charset="0"/>
+                <a:ea typeface="Aptos" pitchFamily="34" charset="-122"/>
+                <a:cs typeface="Aptos" pitchFamily="34" charset="-120"/>
+              </a:rPr>
+              <a:t>6</a:t>
+            </a:r>
+            <a:endParaRPr lang="en-US" sz="900" dirty="0"/>
+          </a:p>
+        </p:txBody>
+      </p:sp>
+      <p:sp>
+        <p:nvSpPr>
+          <p:cNvPr id="8" name="Text 6"/>
+          <p:cNvSpPr/>
+          <p:nvPr/>
+        </p:nvSpPr>
+        <p:spPr>
+          <a:xfrm>
             <a:off x="640080" y="658368"/>
-            <a:ext cx="10881360" cy="566928"/>
+            <a:ext cx="10881360" cy="713232"/>
           </a:xfrm>
           <a:prstGeom prst="rect">
             <a:avLst/>
@@ -12866,7 +13992,7 @@
               <a:buNone/>
             </a:pPr>
             <a:r>
-              <a:rPr lang="en-US" sz="2700" b="1" dirty="0">
+              <a:rPr lang="en-US" sz="3400" b="1" dirty="0">
                 <a:solidFill>
                   <a:srgbClr val="003A63"/>
                 </a:solidFill>
@@ -12876,20 +14002,20 @@
               </a:rPr>
               <a:t>Learning Objectives Continued</a:t>
             </a:r>
-            <a:endParaRPr lang="en-US" sz="2700" dirty="0"/>
-          </a:p>
-        </p:txBody>
-      </p:sp>
-      <p:sp>
-        <p:nvSpPr>
-          <p:cNvPr id="8" name="Text 6"/>
-          <p:cNvSpPr/>
-          <p:nvPr/>
-        </p:nvSpPr>
-        <p:spPr>
-          <a:xfrm>
-            <a:off x="868680" y="1417320"/>
-            <a:ext cx="6675120" cy="4434840"/>
+            <a:endParaRPr lang="en-US" sz="3400" dirty="0"/>
+          </a:p>
+        </p:txBody>
+      </p:sp>
+      <p:sp>
+        <p:nvSpPr>
+          <p:cNvPr id="9" name="Text 7"/>
+          <p:cNvSpPr/>
+          <p:nvPr/>
+        </p:nvSpPr>
+        <p:spPr>
+          <a:xfrm>
+            <a:off x="868680" y="1508760"/>
+            <a:ext cx="6537960" cy="4160520"/>
           </a:xfrm>
           <a:prstGeom prst="rect">
             <a:avLst/>
@@ -12904,7 +14030,7 @@
           <a:lstStyle/>
           <a:p>
             <a:r>
-              <a:rPr lang="en-US" sz="1700" dirty="0">
+              <a:rPr lang="en-US" sz="2100" dirty="0">
                 <a:solidFill>
                   <a:srgbClr val="17364A"/>
                 </a:solidFill>
@@ -12914,13 +14040,13 @@
               </a:rPr>
               <a:t>Produce an AI for Social Good review brief for a public health use case.</a:t>
             </a:r>
-            <a:endParaRPr lang="en-US" sz="1700" dirty="0"/>
-          </a:p>
-        </p:txBody>
-      </p:sp>
-      <p:sp>
-        <p:nvSpPr>
-          <p:cNvPr id="9" name="Shape 7"/>
+            <a:endParaRPr lang="en-US" sz="2100" dirty="0"/>
+          </a:p>
+        </p:txBody>
+      </p:sp>
+      <p:sp>
+        <p:nvSpPr>
+          <p:cNvPr id="10" name="Shape 8"/>
           <p:cNvSpPr/>
           <p:nvPr/>
         </p:nvSpPr>
@@ -12947,14 +14073,14 @@
       </p:sp>
       <p:sp>
         <p:nvSpPr>
-          <p:cNvPr id="10" name="Text 8"/>
+          <p:cNvPr id="11" name="Text 9"/>
           <p:cNvSpPr/>
           <p:nvPr/>
         </p:nvSpPr>
         <p:spPr>
           <a:xfrm>
             <a:off x="8074152" y="1563624"/>
-            <a:ext cx="2825496" cy="201168"/>
+            <a:ext cx="2825496" cy="256032"/>
           </a:xfrm>
           <a:prstGeom prst="rect">
             <a:avLst/>
@@ -12970,7 +14096,7 @@
               <a:buNone/>
             </a:pPr>
             <a:r>
-              <a:rPr lang="en-US" sz="950" b="1" dirty="0">
+              <a:rPr lang="en-US" sz="1300" b="1" dirty="0">
                 <a:solidFill>
                   <a:srgbClr val="0068B7"/>
                 </a:solidFill>
@@ -12980,20 +14106,20 @@
               </a:rPr>
               <a:t>Key idea</a:t>
             </a:r>
-            <a:endParaRPr lang="en-US" sz="950" dirty="0"/>
-          </a:p>
-        </p:txBody>
-      </p:sp>
-      <p:sp>
-        <p:nvSpPr>
-          <p:cNvPr id="11" name="Text 9"/>
-          <p:cNvSpPr/>
-          <p:nvPr/>
-        </p:nvSpPr>
-        <p:spPr>
-          <a:xfrm>
-            <a:off x="8074152" y="1856232"/>
-            <a:ext cx="2825496" cy="1261872"/>
+            <a:endParaRPr lang="en-US" sz="1300" dirty="0"/>
+          </a:p>
+        </p:txBody>
+      </p:sp>
+      <p:sp>
+        <p:nvSpPr>
+          <p:cNvPr id="12" name="Text 10"/>
+          <p:cNvSpPr/>
+          <p:nvPr/>
+        </p:nvSpPr>
+        <p:spPr>
+          <a:xfrm>
+            <a:off x="8074152" y="1920240"/>
+            <a:ext cx="2825496" cy="1188720"/>
           </a:xfrm>
           <a:prstGeom prst="rect">
             <a:avLst/>
@@ -13011,7 +14137,7 @@
               <a:buNone/>
             </a:pPr>
             <a:r>
-              <a:rPr lang="en-US" sz="1250" dirty="0">
+              <a:rPr lang="en-US" sz="1550" dirty="0">
                 <a:solidFill>
                   <a:srgbClr val="17364A"/>
                 </a:solidFill>
@@ -13021,13 +14147,13 @@
               </a:rPr>
               <a:t>Produce an AI for Social Good review brief for a public health use case.</a:t>
             </a:r>
-            <a:endParaRPr lang="en-US" sz="1250" dirty="0"/>
-          </a:p>
-        </p:txBody>
-      </p:sp>
-      <p:sp>
-        <p:nvSpPr>
-          <p:cNvPr id="12" name="Shape 10"/>
+            <a:endParaRPr lang="en-US" sz="1550" dirty="0"/>
+          </a:p>
+        </p:txBody>
+      </p:sp>
+      <p:sp>
+        <p:nvSpPr>
+          <p:cNvPr id="13" name="Shape 11"/>
           <p:cNvSpPr/>
           <p:nvPr/>
         </p:nvSpPr>
@@ -13054,14 +14180,14 @@
       </p:sp>
       <p:sp>
         <p:nvSpPr>
-          <p:cNvPr id="13" name="Text 11"/>
+          <p:cNvPr id="14" name="Text 12"/>
           <p:cNvSpPr/>
           <p:nvPr/>
         </p:nvSpPr>
         <p:spPr>
           <a:xfrm>
             <a:off x="8074152" y="3666744"/>
-            <a:ext cx="2825496" cy="201168"/>
+            <a:ext cx="2825496" cy="256032"/>
           </a:xfrm>
           <a:prstGeom prst="rect">
             <a:avLst/>
@@ -13077,7 +14203,7 @@
               <a:buNone/>
             </a:pPr>
             <a:r>
-              <a:rPr lang="en-US" sz="950" b="1" dirty="0">
+              <a:rPr lang="en-US" sz="1300" b="1" dirty="0">
                 <a:solidFill>
                   <a:srgbClr val="0068B7"/>
                 </a:solidFill>
@@ -13087,20 +14213,20 @@
               </a:rPr>
               <a:t>Use this for</a:t>
             </a:r>
-            <a:endParaRPr lang="en-US" sz="950" dirty="0"/>
-          </a:p>
-        </p:txBody>
-      </p:sp>
-      <p:sp>
-        <p:nvSpPr>
-          <p:cNvPr id="14" name="Text 12"/>
-          <p:cNvSpPr/>
-          <p:nvPr/>
-        </p:nvSpPr>
-        <p:spPr>
-          <a:xfrm>
-            <a:off x="8074152" y="3959352"/>
-            <a:ext cx="2825496" cy="1170432"/>
+            <a:endParaRPr lang="en-US" sz="1300" dirty="0"/>
+          </a:p>
+        </p:txBody>
+      </p:sp>
+      <p:sp>
+        <p:nvSpPr>
+          <p:cNvPr id="15" name="Text 13"/>
+          <p:cNvSpPr/>
+          <p:nvPr/>
+        </p:nvSpPr>
+        <p:spPr>
+          <a:xfrm>
+            <a:off x="8074152" y="4023360"/>
+            <a:ext cx="2825496" cy="1097280"/>
           </a:xfrm>
           <a:prstGeom prst="rect">
             <a:avLst/>
@@ -13118,7 +14244,7 @@
               <a:buNone/>
             </a:pPr>
             <a:r>
-              <a:rPr lang="en-US" sz="1250" dirty="0">
+              <a:rPr lang="en-US" sz="1550" dirty="0">
                 <a:solidFill>
                   <a:srgbClr val="17364A"/>
                 </a:solidFill>
@@ -13128,7 +14254,7 @@
               </a:rPr>
               <a:t>Connect the concept to public health decisions, safeguards, documentation, or implementation work.</a:t>
             </a:r>
-            <a:endParaRPr lang="en-US" sz="1250" dirty="0"/>
+            <a:endParaRPr lang="en-US" sz="1550" dirty="0"/>
           </a:p>
         </p:txBody>
       </p:sp>
@@ -13325,7 +14451,7 @@
                 <a:ea typeface="Aptos" pitchFamily="34" charset="-122"/>
                 <a:cs typeface="Aptos" pitchFamily="34" charset="-120"/>
               </a:rPr>
-              <a:t>© Paula Soper</a:t>
+              <a:t>Â© Paula Soper</a:t>
             </a:r>
             <a:endParaRPr lang="en-US" sz="800" dirty="0"/>
           </a:p>
@@ -13333,7 +14459,46 @@
       </p:sp>
       <p:sp>
         <p:nvSpPr>
-          <p:cNvPr id="7" name="Shape 5"/>
+          <p:cNvPr id="7" name="Text 5"/>
+          <p:cNvSpPr/>
+          <p:nvPr/>
+        </p:nvSpPr>
+        <p:spPr>
+          <a:xfrm>
+            <a:off x="11137392" y="6510528"/>
+            <a:ext cx="411480" cy="201168"/>
+          </a:xfrm>
+          <a:prstGeom prst="rect">
+            <a:avLst/>
+          </a:prstGeom>
+          <a:noFill/>
+          <a:ln/>
+        </p:spPr>
+        <p:txBody>
+          <a:bodyPr wrap="square" lIns="0" tIns="0" rIns="0" bIns="0" rtlCol="0" anchor="ctr"/>
+          <a:lstStyle/>
+          <a:p>
+            <a:pPr algn="r" indent="0" marL="0">
+              <a:buNone/>
+            </a:pPr>
+            <a:r>
+              <a:rPr lang="en-US" sz="900" dirty="0">
+                <a:solidFill>
+                  <a:srgbClr val="5F7181"/>
+                </a:solidFill>
+                <a:latin typeface="Aptos" pitchFamily="34" charset="0"/>
+                <a:ea typeface="Aptos" pitchFamily="34" charset="-122"/>
+                <a:cs typeface="Aptos" pitchFamily="34" charset="-120"/>
+              </a:rPr>
+              <a:t>7</a:t>
+            </a:r>
+            <a:endParaRPr lang="en-US" sz="900" dirty="0"/>
+          </a:p>
+        </p:txBody>
+      </p:sp>
+      <p:sp>
+        <p:nvSpPr>
+          <p:cNvPr id="8" name="Shape 6"/>
           <p:cNvSpPr/>
           <p:nvPr/>
         </p:nvSpPr>
@@ -13358,7 +14523,7 @@
       </p:sp>
       <p:sp>
         <p:nvSpPr>
-          <p:cNvPr id="8" name="Text 6"/>
+          <p:cNvPr id="9" name="Text 7"/>
           <p:cNvSpPr/>
           <p:nvPr/>
         </p:nvSpPr>
@@ -13397,14 +14562,14 @@
       </p:sp>
       <p:sp>
         <p:nvSpPr>
-          <p:cNvPr id="9" name="Text 7"/>
+          <p:cNvPr id="10" name="Text 8"/>
           <p:cNvSpPr/>
           <p:nvPr/>
         </p:nvSpPr>
         <p:spPr>
           <a:xfrm>
             <a:off x="640080" y="621792"/>
-            <a:ext cx="10881360" cy="566928"/>
+            <a:ext cx="10881360" cy="713232"/>
           </a:xfrm>
           <a:prstGeom prst="rect">
             <a:avLst/>
@@ -13422,7 +14587,7 @@
               <a:buNone/>
             </a:pPr>
             <a:r>
-              <a:rPr lang="en-US" sz="2700" b="1" dirty="0">
+              <a:rPr lang="en-US" sz="3400" b="1" dirty="0">
                 <a:solidFill>
                   <a:srgbClr val="003A63"/>
                 </a:solidFill>
@@ -13432,20 +14597,20 @@
               </a:rPr>
               <a:t>Module Overview</a:t>
             </a:r>
-            <a:endParaRPr lang="en-US" sz="2700" dirty="0"/>
-          </a:p>
-        </p:txBody>
-      </p:sp>
-      <p:sp>
-        <p:nvSpPr>
-          <p:cNvPr id="10" name="Text 8"/>
-          <p:cNvSpPr/>
-          <p:nvPr/>
-        </p:nvSpPr>
-        <p:spPr>
-          <a:xfrm>
-            <a:off x="868680" y="1417320"/>
-            <a:ext cx="6675120" cy="4434840"/>
+            <a:endParaRPr lang="en-US" sz="3400" dirty="0"/>
+          </a:p>
+        </p:txBody>
+      </p:sp>
+      <p:sp>
+        <p:nvSpPr>
+          <p:cNvPr id="11" name="Text 9"/>
+          <p:cNvSpPr/>
+          <p:nvPr/>
+        </p:nvSpPr>
+        <p:spPr>
+          <a:xfrm>
+            <a:off x="868680" y="1508760"/>
+            <a:ext cx="6537960" cy="4160520"/>
           </a:xfrm>
           <a:prstGeom prst="rect">
             <a:avLst/>
@@ -13460,7 +14625,7 @@
           <a:lstStyle/>
           <a:p>
             <a:r>
-              <a:rPr lang="en-US" sz="1700" dirty="0">
+              <a:rPr lang="en-US" sz="2100" dirty="0">
                 <a:solidFill>
                   <a:srgbClr val="17364A"/>
                 </a:solidFill>
@@ -13468,13 +14633,13 @@
                 <a:ea typeface="Aptos" pitchFamily="34" charset="-122"/>
                 <a:cs typeface="Aptos" pitchFamily="34" charset="-120"/>
               </a:rPr>
-              <a:t>AI for Social Good refers to the intentional use of artificial intelligence to improve public well-being, reduce.</a:t>
-            </a:r>
-            <a:endParaRPr lang="en-US" sz="1700" dirty="0"/>
-          </a:p>
-          <a:p>
-            <a:r>
-              <a:rPr lang="en-US" sz="1700" dirty="0">
+              <a:t>AI for Social Good refers to the intentional use of artificial intelligence to improve public.</a:t>
+            </a:r>
+            <a:endParaRPr lang="en-US" sz="2100" dirty="0"/>
+          </a:p>
+          <a:p>
+            <a:r>
+              <a:rPr lang="en-US" sz="2100" dirty="0">
                 <a:solidFill>
                   <a:srgbClr val="17364A"/>
                 </a:solidFill>
@@ -13484,11 +14649,11 @@
               </a:rPr>
               <a:t>For public health, this concept is not abstract.</a:t>
             </a:r>
-            <a:endParaRPr lang="en-US" sz="1700" dirty="0"/>
-          </a:p>
-          <a:p>
-            <a:r>
-              <a:rPr lang="en-US" sz="1700" dirty="0">
+            <a:endParaRPr lang="en-US" sz="2100" dirty="0"/>
+          </a:p>
+          <a:p>
+            <a:r>
+              <a:rPr lang="en-US" sz="2100" dirty="0">
                 <a:solidFill>
                   <a:srgbClr val="17364A"/>
                 </a:solidFill>
@@ -13496,29 +14661,15 @@
                 <a:ea typeface="Aptos" pitchFamily="34" charset="-122"/>
                 <a:cs typeface="Aptos" pitchFamily="34" charset="-120"/>
               </a:rPr>
-              <a:t>Public health agencies already work to prevent disease, protect communities, improve access, and reduce inequities.</a:t>
-            </a:r>
-            <a:endParaRPr lang="en-US" sz="1700" dirty="0"/>
-          </a:p>
-          <a:p>
-            <a:r>
-              <a:rPr lang="en-US" sz="1700" dirty="0">
-                <a:solidFill>
-                  <a:srgbClr val="17364A"/>
-                </a:solidFill>
-                <a:latin typeface="Aptos" pitchFamily="34" charset="0"/>
-                <a:ea typeface="Aptos" pitchFamily="34" charset="-122"/>
-                <a:cs typeface="Aptos" pitchFamily="34" charset="-120"/>
-              </a:rPr>
-              <a:t>AI for Social Good should therefore be judged by whether it advances public health values in measurable, accountable, and.</a:t>
-            </a:r>
-            <a:endParaRPr lang="en-US" sz="1700" dirty="0"/>
-          </a:p>
-        </p:txBody>
-      </p:sp>
-      <p:sp>
-        <p:nvSpPr>
-          <p:cNvPr id="11" name="Shape 9"/>
+              <a:t>Public health agencies already work to prevent disease, protect communities, improve access, and reduce.</a:t>
+            </a:r>
+            <a:endParaRPr lang="en-US" sz="2100" dirty="0"/>
+          </a:p>
+        </p:txBody>
+      </p:sp>
+      <p:sp>
+        <p:nvSpPr>
+          <p:cNvPr id="12" name="Shape 10"/>
           <p:cNvSpPr/>
           <p:nvPr/>
         </p:nvSpPr>
@@ -13545,14 +14696,14 @@
       </p:sp>
       <p:sp>
         <p:nvSpPr>
-          <p:cNvPr id="12" name="Text 10"/>
+          <p:cNvPr id="13" name="Text 11"/>
           <p:cNvSpPr/>
           <p:nvPr/>
         </p:nvSpPr>
         <p:spPr>
           <a:xfrm>
             <a:off x="8074152" y="1563624"/>
-            <a:ext cx="2825496" cy="201168"/>
+            <a:ext cx="2825496" cy="256032"/>
           </a:xfrm>
           <a:prstGeom prst="rect">
             <a:avLst/>
@@ -13568,7 +14719,7 @@
               <a:buNone/>
             </a:pPr>
             <a:r>
-              <a:rPr lang="en-US" sz="950" b="1" dirty="0">
+              <a:rPr lang="en-US" sz="1300" b="1" dirty="0">
                 <a:solidFill>
                   <a:srgbClr val="0068B7"/>
                 </a:solidFill>
@@ -13578,20 +14729,20 @@
               </a:rPr>
               <a:t>Key idea</a:t>
             </a:r>
-            <a:endParaRPr lang="en-US" sz="950" dirty="0"/>
-          </a:p>
-        </p:txBody>
-      </p:sp>
-      <p:sp>
-        <p:nvSpPr>
-          <p:cNvPr id="13" name="Text 11"/>
-          <p:cNvSpPr/>
-          <p:nvPr/>
-        </p:nvSpPr>
-        <p:spPr>
-          <a:xfrm>
-            <a:off x="8074152" y="1856232"/>
-            <a:ext cx="2825496" cy="1261872"/>
+            <a:endParaRPr lang="en-US" sz="1300" dirty="0"/>
+          </a:p>
+        </p:txBody>
+      </p:sp>
+      <p:sp>
+        <p:nvSpPr>
+          <p:cNvPr id="14" name="Text 12"/>
+          <p:cNvSpPr/>
+          <p:nvPr/>
+        </p:nvSpPr>
+        <p:spPr>
+          <a:xfrm>
+            <a:off x="8074152" y="1920240"/>
+            <a:ext cx="2825496" cy="1188720"/>
           </a:xfrm>
           <a:prstGeom prst="rect">
             <a:avLst/>
@@ -13609,7 +14760,7 @@
               <a:buNone/>
             </a:pPr>
             <a:r>
-              <a:rPr lang="en-US" sz="1250" dirty="0">
+              <a:rPr lang="en-US" sz="1550" dirty="0">
                 <a:solidFill>
                   <a:srgbClr val="17364A"/>
                 </a:solidFill>
@@ -13617,15 +14768,15 @@
                 <a:ea typeface="Aptos" pitchFamily="34" charset="-122"/>
                 <a:cs typeface="Aptos" pitchFamily="34" charset="-120"/>
               </a:rPr>
-              <a:t>AI for Social Good refers to the intentional use of artificial intelligence to improve public well-being, reduce.</a:t>
-            </a:r>
-            <a:endParaRPr lang="en-US" sz="1250" dirty="0"/>
-          </a:p>
-        </p:txBody>
-      </p:sp>
-      <p:sp>
-        <p:nvSpPr>
-          <p:cNvPr id="14" name="Shape 12"/>
+              <a:t>AI for Social Good refers to the intentional use of artificial intelligence to improve public.</a:t>
+            </a:r>
+            <a:endParaRPr lang="en-US" sz="1550" dirty="0"/>
+          </a:p>
+        </p:txBody>
+      </p:sp>
+      <p:sp>
+        <p:nvSpPr>
+          <p:cNvPr id="15" name="Shape 13"/>
           <p:cNvSpPr/>
           <p:nvPr/>
         </p:nvSpPr>
@@ -13652,14 +14803,14 @@
       </p:sp>
       <p:sp>
         <p:nvSpPr>
-          <p:cNvPr id="15" name="Text 13"/>
+          <p:cNvPr id="16" name="Text 14"/>
           <p:cNvSpPr/>
           <p:nvPr/>
         </p:nvSpPr>
         <p:spPr>
           <a:xfrm>
             <a:off x="8074152" y="3666744"/>
-            <a:ext cx="2825496" cy="201168"/>
+            <a:ext cx="2825496" cy="256032"/>
           </a:xfrm>
           <a:prstGeom prst="rect">
             <a:avLst/>
@@ -13675,7 +14826,7 @@
               <a:buNone/>
             </a:pPr>
             <a:r>
-              <a:rPr lang="en-US" sz="950" b="1" dirty="0">
+              <a:rPr lang="en-US" sz="1300" b="1" dirty="0">
                 <a:solidFill>
                   <a:srgbClr val="0068B7"/>
                 </a:solidFill>
@@ -13685,20 +14836,20 @@
               </a:rPr>
               <a:t>Use this for</a:t>
             </a:r>
-            <a:endParaRPr lang="en-US" sz="950" dirty="0"/>
-          </a:p>
-        </p:txBody>
-      </p:sp>
-      <p:sp>
-        <p:nvSpPr>
-          <p:cNvPr id="16" name="Text 14"/>
-          <p:cNvSpPr/>
-          <p:nvPr/>
-        </p:nvSpPr>
-        <p:spPr>
-          <a:xfrm>
-            <a:off x="8074152" y="3959352"/>
-            <a:ext cx="2825496" cy="1170432"/>
+            <a:endParaRPr lang="en-US" sz="1300" dirty="0"/>
+          </a:p>
+        </p:txBody>
+      </p:sp>
+      <p:sp>
+        <p:nvSpPr>
+          <p:cNvPr id="17" name="Text 15"/>
+          <p:cNvSpPr/>
+          <p:nvPr/>
+        </p:nvSpPr>
+        <p:spPr>
+          <a:xfrm>
+            <a:off x="8074152" y="4023360"/>
+            <a:ext cx="2825496" cy="1097280"/>
           </a:xfrm>
           <a:prstGeom prst="rect">
             <a:avLst/>
@@ -13716,7 +14867,7 @@
               <a:buNone/>
             </a:pPr>
             <a:r>
-              <a:rPr lang="en-US" sz="1250" dirty="0">
+              <a:rPr lang="en-US" sz="1550" dirty="0">
                 <a:solidFill>
                   <a:srgbClr val="17364A"/>
                 </a:solidFill>
@@ -13726,7 +14877,7 @@
               </a:rPr>
               <a:t>Connect the concept to public health decisions, safeguards, documentation, or implementation work.</a:t>
             </a:r>
-            <a:endParaRPr lang="en-US" sz="1250" dirty="0"/>
+            <a:endParaRPr lang="en-US" sz="1550" dirty="0"/>
           </a:p>
         </p:txBody>
       </p:sp>
@@ -13923,7 +15074,7 @@
                 <a:ea typeface="Aptos" pitchFamily="34" charset="-122"/>
                 <a:cs typeface="Aptos" pitchFamily="34" charset="-120"/>
               </a:rPr>
-              <a:t>© Paula Soper</a:t>
+              <a:t>Â© Paula Soper</a:t>
             </a:r>
             <a:endParaRPr lang="en-US" sz="800" dirty="0"/>
           </a:p>
@@ -13931,7 +15082,46 @@
       </p:sp>
       <p:sp>
         <p:nvSpPr>
-          <p:cNvPr id="7" name="Shape 5"/>
+          <p:cNvPr id="7" name="Text 5"/>
+          <p:cNvSpPr/>
+          <p:nvPr/>
+        </p:nvSpPr>
+        <p:spPr>
+          <a:xfrm>
+            <a:off x="11137392" y="6510528"/>
+            <a:ext cx="411480" cy="201168"/>
+          </a:xfrm>
+          <a:prstGeom prst="rect">
+            <a:avLst/>
+          </a:prstGeom>
+          <a:noFill/>
+          <a:ln/>
+        </p:spPr>
+        <p:txBody>
+          <a:bodyPr wrap="square" lIns="0" tIns="0" rIns="0" bIns="0" rtlCol="0" anchor="ctr"/>
+          <a:lstStyle/>
+          <a:p>
+            <a:pPr algn="r" indent="0" marL="0">
+              <a:buNone/>
+            </a:pPr>
+            <a:r>
+              <a:rPr lang="en-US" sz="900" dirty="0">
+                <a:solidFill>
+                  <a:srgbClr val="5F7181"/>
+                </a:solidFill>
+                <a:latin typeface="Aptos" pitchFamily="34" charset="0"/>
+                <a:ea typeface="Aptos" pitchFamily="34" charset="-122"/>
+                <a:cs typeface="Aptos" pitchFamily="34" charset="-120"/>
+              </a:rPr>
+              <a:t>8</a:t>
+            </a:r>
+            <a:endParaRPr lang="en-US" sz="900" dirty="0"/>
+          </a:p>
+        </p:txBody>
+      </p:sp>
+      <p:sp>
+        <p:nvSpPr>
+          <p:cNvPr id="8" name="Shape 6"/>
           <p:cNvSpPr/>
           <p:nvPr/>
         </p:nvSpPr>
@@ -13956,7 +15146,7 @@
       </p:sp>
       <p:sp>
         <p:nvSpPr>
-          <p:cNvPr id="8" name="Text 6"/>
+          <p:cNvPr id="9" name="Text 7"/>
           <p:cNvSpPr/>
           <p:nvPr/>
         </p:nvSpPr>
@@ -13995,14 +15185,14 @@
       </p:sp>
       <p:sp>
         <p:nvSpPr>
-          <p:cNvPr id="9" name="Text 7"/>
+          <p:cNvPr id="10" name="Text 8"/>
           <p:cNvSpPr/>
           <p:nvPr/>
         </p:nvSpPr>
         <p:spPr>
           <a:xfrm>
             <a:off x="640080" y="621792"/>
-            <a:ext cx="10881360" cy="566928"/>
+            <a:ext cx="10881360" cy="713232"/>
           </a:xfrm>
           <a:prstGeom prst="rect">
             <a:avLst/>
@@ -14020,7 +15210,7 @@
               <a:buNone/>
             </a:pPr>
             <a:r>
-              <a:rPr lang="en-US" sz="2700" b="1" dirty="0">
+              <a:rPr lang="en-US" sz="3400" b="1" dirty="0">
                 <a:solidFill>
                   <a:srgbClr val="003A63"/>
                 </a:solidFill>
@@ -14030,20 +15220,20 @@
               </a:rPr>
               <a:t>Why This Topic Matters for Public Health AI</a:t>
             </a:r>
-            <a:endParaRPr lang="en-US" sz="2700" dirty="0"/>
-          </a:p>
-        </p:txBody>
-      </p:sp>
-      <p:sp>
-        <p:nvSpPr>
-          <p:cNvPr id="10" name="Text 8"/>
-          <p:cNvSpPr/>
-          <p:nvPr/>
-        </p:nvSpPr>
-        <p:spPr>
-          <a:xfrm>
-            <a:off x="868680" y="1417320"/>
-            <a:ext cx="6675120" cy="4434840"/>
+            <a:endParaRPr lang="en-US" sz="3400" dirty="0"/>
+          </a:p>
+        </p:txBody>
+      </p:sp>
+      <p:sp>
+        <p:nvSpPr>
+          <p:cNvPr id="11" name="Text 9"/>
+          <p:cNvSpPr/>
+          <p:nvPr/>
+        </p:nvSpPr>
+        <p:spPr>
+          <a:xfrm>
+            <a:off x="868680" y="1508760"/>
+            <a:ext cx="6537960" cy="4160520"/>
           </a:xfrm>
           <a:prstGeom prst="rect">
             <a:avLst/>
@@ -14058,7 +15248,7 @@
           <a:lstStyle/>
           <a:p>
             <a:r>
-              <a:rPr lang="en-US" sz="1700" dirty="0">
+              <a:rPr lang="en-US" sz="2100" dirty="0">
                 <a:solidFill>
                   <a:srgbClr val="17364A"/>
                 </a:solidFill>
@@ -14066,13 +15256,13 @@
                 <a:ea typeface="Aptos" pitchFamily="34" charset="-122"/>
                 <a:cs typeface="Aptos" pitchFamily="34" charset="-120"/>
               </a:rPr>
-              <a:t>Public health is uniquely positioned to use AI for social good because its mission is population well-being rather than.</a:t>
-            </a:r>
-            <a:endParaRPr lang="en-US" sz="1700" dirty="0"/>
-          </a:p>
-          <a:p>
-            <a:r>
-              <a:rPr lang="en-US" sz="1700" dirty="0">
+              <a:t>Public health is uniquely positioned to use AI for social good because its mission is population.</a:t>
+            </a:r>
+            <a:endParaRPr lang="en-US" sz="2100" dirty="0"/>
+          </a:p>
+          <a:p>
+            <a:r>
+              <a:rPr lang="en-US" sz="2100" dirty="0">
                 <a:solidFill>
                   <a:srgbClr val="17364A"/>
                 </a:solidFill>
@@ -14080,13 +15270,13 @@
                 <a:ea typeface="Aptos" pitchFamily="34" charset="-122"/>
                 <a:cs typeface="Aptos" pitchFamily="34" charset="-120"/>
               </a:rPr>
-              <a:t>AI can help agencies identify emerging needs, improve access to information, reduce administrative burden, support.</a:t>
-            </a:r>
-            <a:endParaRPr lang="en-US" sz="1700" dirty="0"/>
-          </a:p>
-          <a:p>
-            <a:r>
-              <a:rPr lang="en-US" sz="1700" dirty="0">
+              <a:t>AI can help agencies identify emerging needs, improve access to information, reduce administrative.</a:t>
+            </a:r>
+            <a:endParaRPr lang="en-US" sz="2100" dirty="0"/>
+          </a:p>
+          <a:p>
+            <a:r>
+              <a:rPr lang="en-US" sz="2100" dirty="0">
                 <a:solidFill>
                   <a:srgbClr val="17364A"/>
                 </a:solidFill>
@@ -14094,29 +15284,15 @@
                 <a:ea typeface="Aptos" pitchFamily="34" charset="-122"/>
                 <a:cs typeface="Aptos" pitchFamily="34" charset="-120"/>
               </a:rPr>
-              <a:t>These benefits are especially important when agencies face workforce shortages, fragmented systems, and increasing demands.</a:t>
-            </a:r>
-            <a:endParaRPr lang="en-US" sz="1700" dirty="0"/>
-          </a:p>
-          <a:p>
-            <a:r>
-              <a:rPr lang="en-US" sz="1700" dirty="0">
-                <a:solidFill>
-                  <a:srgbClr val="17364A"/>
-                </a:solidFill>
-                <a:latin typeface="Aptos" pitchFamily="34" charset="0"/>
-                <a:ea typeface="Aptos" pitchFamily="34" charset="-122"/>
-                <a:cs typeface="Aptos" pitchFamily="34" charset="-120"/>
-              </a:rPr>
-              <a:t>However, AI for Social Good is not guaranteed by good intentions.</a:t>
-            </a:r>
-            <a:endParaRPr lang="en-US" sz="1700" dirty="0"/>
-          </a:p>
-        </p:txBody>
-      </p:sp>
-      <p:sp>
-        <p:nvSpPr>
-          <p:cNvPr id="11" name="Shape 9"/>
+              <a:t>These benefits are especially important when agencies face workforce shortages, fragmented systems, and.</a:t>
+            </a:r>
+            <a:endParaRPr lang="en-US" sz="2100" dirty="0"/>
+          </a:p>
+        </p:txBody>
+      </p:sp>
+      <p:sp>
+        <p:nvSpPr>
+          <p:cNvPr id="12" name="Shape 10"/>
           <p:cNvSpPr/>
           <p:nvPr/>
         </p:nvSpPr>
@@ -14143,14 +15319,14 @@
       </p:sp>
       <p:sp>
         <p:nvSpPr>
-          <p:cNvPr id="12" name="Text 10"/>
+          <p:cNvPr id="13" name="Text 11"/>
           <p:cNvSpPr/>
           <p:nvPr/>
         </p:nvSpPr>
         <p:spPr>
           <a:xfrm>
             <a:off x="8074152" y="1563624"/>
-            <a:ext cx="2825496" cy="201168"/>
+            <a:ext cx="2825496" cy="256032"/>
           </a:xfrm>
           <a:prstGeom prst="rect">
             <a:avLst/>
@@ -14166,7 +15342,7 @@
               <a:buNone/>
             </a:pPr>
             <a:r>
-              <a:rPr lang="en-US" sz="950" b="1" dirty="0">
+              <a:rPr lang="en-US" sz="1300" b="1" dirty="0">
                 <a:solidFill>
                   <a:srgbClr val="0068B7"/>
                 </a:solidFill>
@@ -14176,20 +15352,20 @@
               </a:rPr>
               <a:t>Key idea</a:t>
             </a:r>
-            <a:endParaRPr lang="en-US" sz="950" dirty="0"/>
-          </a:p>
-        </p:txBody>
-      </p:sp>
-      <p:sp>
-        <p:nvSpPr>
-          <p:cNvPr id="13" name="Text 11"/>
-          <p:cNvSpPr/>
-          <p:nvPr/>
-        </p:nvSpPr>
-        <p:spPr>
-          <a:xfrm>
-            <a:off x="8074152" y="1856232"/>
-            <a:ext cx="2825496" cy="1261872"/>
+            <a:endParaRPr lang="en-US" sz="1300" dirty="0"/>
+          </a:p>
+        </p:txBody>
+      </p:sp>
+      <p:sp>
+        <p:nvSpPr>
+          <p:cNvPr id="14" name="Text 12"/>
+          <p:cNvSpPr/>
+          <p:nvPr/>
+        </p:nvSpPr>
+        <p:spPr>
+          <a:xfrm>
+            <a:off x="8074152" y="1920240"/>
+            <a:ext cx="2825496" cy="1188720"/>
           </a:xfrm>
           <a:prstGeom prst="rect">
             <a:avLst/>
@@ -14207,7 +15383,7 @@
               <a:buNone/>
             </a:pPr>
             <a:r>
-              <a:rPr lang="en-US" sz="1250" dirty="0">
+              <a:rPr lang="en-US" sz="1550" dirty="0">
                 <a:solidFill>
                   <a:srgbClr val="17364A"/>
                 </a:solidFill>
@@ -14215,15 +15391,15 @@
                 <a:ea typeface="Aptos" pitchFamily="34" charset="-122"/>
                 <a:cs typeface="Aptos" pitchFamily="34" charset="-120"/>
               </a:rPr>
-              <a:t>Public health is uniquely positioned to use AI for social good because its mission is population well-being rather than.</a:t>
-            </a:r>
-            <a:endParaRPr lang="en-US" sz="1250" dirty="0"/>
-          </a:p>
-        </p:txBody>
-      </p:sp>
-      <p:sp>
-        <p:nvSpPr>
-          <p:cNvPr id="14" name="Shape 12"/>
+              <a:t>Public health is uniquely positioned to use AI for social good because its mission is population.</a:t>
+            </a:r>
+            <a:endParaRPr lang="en-US" sz="1550" dirty="0"/>
+          </a:p>
+        </p:txBody>
+      </p:sp>
+      <p:sp>
+        <p:nvSpPr>
+          <p:cNvPr id="15" name="Shape 13"/>
           <p:cNvSpPr/>
           <p:nvPr/>
         </p:nvSpPr>
@@ -14250,14 +15426,14 @@
       </p:sp>
       <p:sp>
         <p:nvSpPr>
-          <p:cNvPr id="15" name="Text 13"/>
+          <p:cNvPr id="16" name="Text 14"/>
           <p:cNvSpPr/>
           <p:nvPr/>
         </p:nvSpPr>
         <p:spPr>
           <a:xfrm>
             <a:off x="8074152" y="3666744"/>
-            <a:ext cx="2825496" cy="201168"/>
+            <a:ext cx="2825496" cy="256032"/>
           </a:xfrm>
           <a:prstGeom prst="rect">
             <a:avLst/>
@@ -14273,7 +15449,7 @@
               <a:buNone/>
             </a:pPr>
             <a:r>
-              <a:rPr lang="en-US" sz="950" b="1" dirty="0">
+              <a:rPr lang="en-US" sz="1300" b="1" dirty="0">
                 <a:solidFill>
                   <a:srgbClr val="0068B7"/>
                 </a:solidFill>
@@ -14283,20 +15459,20 @@
               </a:rPr>
               <a:t>Use this for</a:t>
             </a:r>
-            <a:endParaRPr lang="en-US" sz="950" dirty="0"/>
-          </a:p>
-        </p:txBody>
-      </p:sp>
-      <p:sp>
-        <p:nvSpPr>
-          <p:cNvPr id="16" name="Text 14"/>
-          <p:cNvSpPr/>
-          <p:nvPr/>
-        </p:nvSpPr>
-        <p:spPr>
-          <a:xfrm>
-            <a:off x="8074152" y="3959352"/>
-            <a:ext cx="2825496" cy="1170432"/>
+            <a:endParaRPr lang="en-US" sz="1300" dirty="0"/>
+          </a:p>
+        </p:txBody>
+      </p:sp>
+      <p:sp>
+        <p:nvSpPr>
+          <p:cNvPr id="17" name="Text 15"/>
+          <p:cNvSpPr/>
+          <p:nvPr/>
+        </p:nvSpPr>
+        <p:spPr>
+          <a:xfrm>
+            <a:off x="8074152" y="4023360"/>
+            <a:ext cx="2825496" cy="1097280"/>
           </a:xfrm>
           <a:prstGeom prst="rect">
             <a:avLst/>
@@ -14314,7 +15490,7 @@
               <a:buNone/>
             </a:pPr>
             <a:r>
-              <a:rPr lang="en-US" sz="1250" dirty="0">
+              <a:rPr lang="en-US" sz="1550" dirty="0">
                 <a:solidFill>
                   <a:srgbClr val="17364A"/>
                 </a:solidFill>
@@ -14324,7 +15500,7 @@
               </a:rPr>
               <a:t>Connect the concept to public health decisions, safeguards, documentation, or implementation work.</a:t>
             </a:r>
-            <a:endParaRPr lang="en-US" sz="1250" dirty="0"/>
+            <a:endParaRPr lang="en-US" sz="1550" dirty="0"/>
           </a:p>
         </p:txBody>
       </p:sp>
@@ -14521,7 +15697,7 @@
                 <a:ea typeface="Aptos" pitchFamily="34" charset="-122"/>
                 <a:cs typeface="Aptos" pitchFamily="34" charset="-120"/>
               </a:rPr>
-              <a:t>© Paula Soper</a:t>
+              <a:t>Â© Paula Soper</a:t>
             </a:r>
             <a:endParaRPr lang="en-US" sz="800" dirty="0"/>
           </a:p>
@@ -14529,7 +15705,46 @@
       </p:sp>
       <p:sp>
         <p:nvSpPr>
-          <p:cNvPr id="7" name="Shape 5"/>
+          <p:cNvPr id="7" name="Text 5"/>
+          <p:cNvSpPr/>
+          <p:nvPr/>
+        </p:nvSpPr>
+        <p:spPr>
+          <a:xfrm>
+            <a:off x="11137392" y="6510528"/>
+            <a:ext cx="411480" cy="201168"/>
+          </a:xfrm>
+          <a:prstGeom prst="rect">
+            <a:avLst/>
+          </a:prstGeom>
+          <a:noFill/>
+          <a:ln/>
+        </p:spPr>
+        <p:txBody>
+          <a:bodyPr wrap="square" lIns="0" tIns="0" rIns="0" bIns="0" rtlCol="0" anchor="ctr"/>
+          <a:lstStyle/>
+          <a:p>
+            <a:pPr algn="r" indent="0" marL="0">
+              <a:buNone/>
+            </a:pPr>
+            <a:r>
+              <a:rPr lang="en-US" sz="900" dirty="0">
+                <a:solidFill>
+                  <a:srgbClr val="5F7181"/>
+                </a:solidFill>
+                <a:latin typeface="Aptos" pitchFamily="34" charset="0"/>
+                <a:ea typeface="Aptos" pitchFamily="34" charset="-122"/>
+                <a:cs typeface="Aptos" pitchFamily="34" charset="-120"/>
+              </a:rPr>
+              <a:t>9</a:t>
+            </a:r>
+            <a:endParaRPr lang="en-US" sz="900" dirty="0"/>
+          </a:p>
+        </p:txBody>
+      </p:sp>
+      <p:sp>
+        <p:nvSpPr>
+          <p:cNvPr id="8" name="Shape 6"/>
           <p:cNvSpPr/>
           <p:nvPr/>
         </p:nvSpPr>
@@ -14554,7 +15769,7 @@
       </p:sp>
       <p:sp>
         <p:nvSpPr>
-          <p:cNvPr id="8" name="Text 6"/>
+          <p:cNvPr id="9" name="Text 7"/>
           <p:cNvSpPr/>
           <p:nvPr/>
         </p:nvSpPr>
@@ -14593,14 +15808,14 @@
       </p:sp>
       <p:sp>
         <p:nvSpPr>
-          <p:cNvPr id="9" name="Text 7"/>
+          <p:cNvPr id="10" name="Text 8"/>
           <p:cNvSpPr/>
           <p:nvPr/>
         </p:nvSpPr>
         <p:spPr>
           <a:xfrm>
             <a:off x="640080" y="621792"/>
-            <a:ext cx="10881360" cy="566928"/>
+            <a:ext cx="10881360" cy="713232"/>
           </a:xfrm>
           <a:prstGeom prst="rect">
             <a:avLst/>
@@ -14618,7 +15833,7 @@
               <a:buNone/>
             </a:pPr>
             <a:r>
-              <a:rPr lang="en-US" sz="2700" b="1" dirty="0">
+              <a:rPr lang="en-US" sz="3400" b="1" dirty="0">
                 <a:solidFill>
                   <a:srgbClr val="003A63"/>
                 </a:solidFill>
@@ -14628,20 +15843,20 @@
               </a:rPr>
               <a:t>Public Health Example</a:t>
             </a:r>
-            <a:endParaRPr lang="en-US" sz="2700" dirty="0"/>
-          </a:p>
-        </p:txBody>
-      </p:sp>
-      <p:sp>
-        <p:nvSpPr>
-          <p:cNvPr id="10" name="Text 8"/>
-          <p:cNvSpPr/>
-          <p:nvPr/>
-        </p:nvSpPr>
-        <p:spPr>
-          <a:xfrm>
-            <a:off x="868680" y="1417320"/>
-            <a:ext cx="6675120" cy="4434840"/>
+            <a:endParaRPr lang="en-US" sz="3400" dirty="0"/>
+          </a:p>
+        </p:txBody>
+      </p:sp>
+      <p:sp>
+        <p:nvSpPr>
+          <p:cNvPr id="11" name="Text 9"/>
+          <p:cNvSpPr/>
+          <p:nvPr/>
+        </p:nvSpPr>
+        <p:spPr>
+          <a:xfrm>
+            <a:off x="868680" y="1508760"/>
+            <a:ext cx="6537960" cy="4160520"/>
           </a:xfrm>
           <a:prstGeom prst="rect">
             <a:avLst/>
@@ -14656,7 +15871,7 @@
           <a:lstStyle/>
           <a:p>
             <a:r>
-              <a:rPr lang="en-US" sz="1700" dirty="0">
+              <a:rPr lang="en-US" sz="2100" dirty="0">
                 <a:solidFill>
                   <a:srgbClr val="17364A"/>
                 </a:solidFill>
@@ -14666,11 +15881,11 @@
               </a:rPr>
               <a:t>A health department may use AI to improve access to maternal and child health resources.</a:t>
             </a:r>
-            <a:endParaRPr lang="en-US" sz="1700" dirty="0"/>
-          </a:p>
-          <a:p>
-            <a:r>
-              <a:rPr lang="en-US" sz="1700" dirty="0">
+            <a:endParaRPr lang="en-US" sz="2100" dirty="0"/>
+          </a:p>
+          <a:p>
+            <a:r>
+              <a:rPr lang="en-US" sz="2100" dirty="0">
                 <a:solidFill>
                   <a:srgbClr val="17364A"/>
                 </a:solidFill>
@@ -14678,13 +15893,13 @@
                 <a:ea typeface="Aptos" pitchFamily="34" charset="-122"/>
                 <a:cs typeface="Aptos" pitchFamily="34" charset="-120"/>
               </a:rPr>
-              <a:t>A tool could help staff identify service gaps, summarize eligibility rules, translate plain-language information, and route.</a:t>
-            </a:r>
-            <a:endParaRPr lang="en-US" sz="1700" dirty="0"/>
-          </a:p>
-          <a:p>
-            <a:r>
-              <a:rPr lang="en-US" sz="1700" dirty="0">
+              <a:t>A tool could help staff identify service gaps, summarize eligibility rules, translate plain-language.</a:t>
+            </a:r>
+            <a:endParaRPr lang="en-US" sz="2100" dirty="0"/>
+          </a:p>
+          <a:p>
+            <a:r>
+              <a:rPr lang="en-US" sz="2100" dirty="0">
                 <a:solidFill>
                   <a:srgbClr val="17364A"/>
                 </a:solidFill>
@@ -14694,27 +15909,13 @@
               </a:rPr>
               <a:t>If designed well, the tool could reduce administrative burden and improve timely access to services.</a:t>
             </a:r>
-            <a:endParaRPr lang="en-US" sz="1700" dirty="0"/>
-          </a:p>
-          <a:p>
-            <a:r>
-              <a:rPr lang="en-US" sz="1700" dirty="0">
-                <a:solidFill>
-                  <a:srgbClr val="17364A"/>
-                </a:solidFill>
-                <a:latin typeface="Aptos" pitchFamily="34" charset="0"/>
-                <a:ea typeface="Aptos" pitchFamily="34" charset="-122"/>
-                <a:cs typeface="Aptos" pitchFamily="34" charset="-120"/>
-              </a:rPr>
-              <a:t>The same tool could fail if it assumes internet access, uses only English content, provides outdated referral information,.</a:t>
-            </a:r>
-            <a:endParaRPr lang="en-US" sz="1700" dirty="0"/>
-          </a:p>
-        </p:txBody>
-      </p:sp>
-      <p:sp>
-        <p:nvSpPr>
-          <p:cNvPr id="11" name="Shape 9"/>
+            <a:endParaRPr lang="en-US" sz="2100" dirty="0"/>
+          </a:p>
+        </p:txBody>
+      </p:sp>
+      <p:sp>
+        <p:nvSpPr>
+          <p:cNvPr id="12" name="Shape 10"/>
           <p:cNvSpPr/>
           <p:nvPr/>
         </p:nvSpPr>
@@ -14741,14 +15942,14 @@
       </p:sp>
       <p:sp>
         <p:nvSpPr>
-          <p:cNvPr id="12" name="Text 10"/>
+          <p:cNvPr id="13" name="Text 11"/>
           <p:cNvSpPr/>
           <p:nvPr/>
         </p:nvSpPr>
         <p:spPr>
           <a:xfrm>
             <a:off x="8074152" y="1563624"/>
-            <a:ext cx="2825496" cy="201168"/>
+            <a:ext cx="2825496" cy="256032"/>
           </a:xfrm>
           <a:prstGeom prst="rect">
             <a:avLst/>
@@ -14764,7 +15965,7 @@
               <a:buNone/>
             </a:pPr>
             <a:r>
-              <a:rPr lang="en-US" sz="950" b="1" dirty="0">
+              <a:rPr lang="en-US" sz="1300" b="1" dirty="0">
                 <a:solidFill>
                   <a:srgbClr val="0068B7"/>
                 </a:solidFill>
@@ -14774,20 +15975,20 @@
               </a:rPr>
               <a:t>Key idea</a:t>
             </a:r>
-            <a:endParaRPr lang="en-US" sz="950" dirty="0"/>
-          </a:p>
-        </p:txBody>
-      </p:sp>
-      <p:sp>
-        <p:nvSpPr>
-          <p:cNvPr id="13" name="Text 11"/>
-          <p:cNvSpPr/>
-          <p:nvPr/>
-        </p:nvSpPr>
-        <p:spPr>
-          <a:xfrm>
-            <a:off x="8074152" y="1856232"/>
-            <a:ext cx="2825496" cy="1261872"/>
+            <a:endParaRPr lang="en-US" sz="1300" dirty="0"/>
+          </a:p>
+        </p:txBody>
+      </p:sp>
+      <p:sp>
+        <p:nvSpPr>
+          <p:cNvPr id="14" name="Text 12"/>
+          <p:cNvSpPr/>
+          <p:nvPr/>
+        </p:nvSpPr>
+        <p:spPr>
+          <a:xfrm>
+            <a:off x="8074152" y="1920240"/>
+            <a:ext cx="2825496" cy="1188720"/>
           </a:xfrm>
           <a:prstGeom prst="rect">
             <a:avLst/>
@@ -14805,7 +16006,7 @@
               <a:buNone/>
             </a:pPr>
             <a:r>
-              <a:rPr lang="en-US" sz="1250" dirty="0">
+              <a:rPr lang="en-US" sz="1550" dirty="0">
                 <a:solidFill>
                   <a:srgbClr val="17364A"/>
                 </a:solidFill>
@@ -14815,13 +16016,13 @@
               </a:rPr>
               <a:t>A health department may use AI to improve access to maternal and child health resources.</a:t>
             </a:r>
-            <a:endParaRPr lang="en-US" sz="1250" dirty="0"/>
-          </a:p>
-        </p:txBody>
-      </p:sp>
-      <p:sp>
-        <p:nvSpPr>
-          <p:cNvPr id="14" name="Shape 12"/>
+            <a:endParaRPr lang="en-US" sz="1550" dirty="0"/>
+          </a:p>
+        </p:txBody>
+      </p:sp>
+      <p:sp>
+        <p:nvSpPr>
+          <p:cNvPr id="15" name="Shape 13"/>
           <p:cNvSpPr/>
           <p:nvPr/>
         </p:nvSpPr>
@@ -14848,14 +16049,14 @@
       </p:sp>
       <p:sp>
         <p:nvSpPr>
-          <p:cNvPr id="15" name="Text 13"/>
+          <p:cNvPr id="16" name="Text 14"/>
           <p:cNvSpPr/>
           <p:nvPr/>
         </p:nvSpPr>
         <p:spPr>
           <a:xfrm>
             <a:off x="8074152" y="3666744"/>
-            <a:ext cx="2825496" cy="201168"/>
+            <a:ext cx="2825496" cy="256032"/>
           </a:xfrm>
           <a:prstGeom prst="rect">
             <a:avLst/>
@@ -14871,7 +16072,7 @@
               <a:buNone/>
             </a:pPr>
             <a:r>
-              <a:rPr lang="en-US" sz="950" b="1" dirty="0">
+              <a:rPr lang="en-US" sz="1300" b="1" dirty="0">
                 <a:solidFill>
                   <a:srgbClr val="0068B7"/>
                 </a:solidFill>
@@ -14881,20 +16082,20 @@
               </a:rPr>
               <a:t>Use this for</a:t>
             </a:r>
-            <a:endParaRPr lang="en-US" sz="950" dirty="0"/>
-          </a:p>
-        </p:txBody>
-      </p:sp>
-      <p:sp>
-        <p:nvSpPr>
-          <p:cNvPr id="16" name="Text 14"/>
-          <p:cNvSpPr/>
-          <p:nvPr/>
-        </p:nvSpPr>
-        <p:spPr>
-          <a:xfrm>
-            <a:off x="8074152" y="3959352"/>
-            <a:ext cx="2825496" cy="1170432"/>
+            <a:endParaRPr lang="en-US" sz="1300" dirty="0"/>
+          </a:p>
+        </p:txBody>
+      </p:sp>
+      <p:sp>
+        <p:nvSpPr>
+          <p:cNvPr id="17" name="Text 15"/>
+          <p:cNvSpPr/>
+          <p:nvPr/>
+        </p:nvSpPr>
+        <p:spPr>
+          <a:xfrm>
+            <a:off x="8074152" y="4023360"/>
+            <a:ext cx="2825496" cy="1097280"/>
           </a:xfrm>
           <a:prstGeom prst="rect">
             <a:avLst/>
@@ -14912,7 +16113,7 @@
               <a:buNone/>
             </a:pPr>
             <a:r>
-              <a:rPr lang="en-US" sz="1250" dirty="0">
+              <a:rPr lang="en-US" sz="1550" dirty="0">
                 <a:solidFill>
                   <a:srgbClr val="17364A"/>
                 </a:solidFill>
@@ -14922,7 +16123,7 @@
               </a:rPr>
               <a:t>Connect the concept to public health decisions, safeguards, documentation, or implementation work.</a:t>
             </a:r>
-            <a:endParaRPr lang="en-US" sz="1250" dirty="0"/>
+            <a:endParaRPr lang="en-US" sz="1550" dirty="0"/>
           </a:p>
         </p:txBody>
       </p:sp>
